--- a/docs/pptx/whole/jx-linsubhr-ratio-anyhosp.pptx
+++ b/docs/pptx/whole/jx-linsubhr-ratio-anyhosp.pptx
@@ -2271,7 +2271,7 @@
           </p:nvSpPr>
           <p:spPr>
             <a:xfrm>
-              <a:off x="817517" y="5114368"/>
+              <a:off x="817517" y="5142518"/>
               <a:ext cx="7799693" cy="0"/>
             </a:xfrm>
             <a:custGeom>
@@ -2314,7 +2314,7 @@
           </p:nvSpPr>
           <p:spPr>
             <a:xfrm>
-              <a:off x="817517" y="4244691"/>
+              <a:off x="817517" y="4313054"/>
               <a:ext cx="7799693" cy="0"/>
             </a:xfrm>
             <a:custGeom>
@@ -2357,7 +2357,7 @@
           </p:nvSpPr>
           <p:spPr>
             <a:xfrm>
-              <a:off x="817517" y="3375014"/>
+              <a:off x="817517" y="3483591"/>
               <a:ext cx="7799693" cy="0"/>
             </a:xfrm>
             <a:custGeom>
@@ -2400,7 +2400,7 @@
           </p:nvSpPr>
           <p:spPr>
             <a:xfrm>
-              <a:off x="817517" y="2505337"/>
+              <a:off x="817517" y="2654127"/>
               <a:ext cx="7799693" cy="0"/>
             </a:xfrm>
             <a:custGeom>
@@ -2443,15 +2443,15 @@
           </p:nvSpPr>
           <p:spPr>
             <a:xfrm>
-              <a:off x="1615213" y="1896563"/>
-              <a:ext cx="0" cy="3826579"/>
+              <a:off x="1615213" y="2073503"/>
+              <a:ext cx="0" cy="3649639"/>
             </a:xfrm>
             <a:custGeom>
               <a:avLst/>
               <a:pathLst>
-                <a:path w="0" h="3826579">
+                <a:path w="0" h="3649639">
                   <a:moveTo>
-                    <a:pt x="0" y="3826579"/>
+                    <a:pt x="0" y="3649639"/>
                   </a:moveTo>
                   <a:lnTo>
                     <a:pt x="0" y="0"/>
@@ -2486,15 +2486,15 @@
           </p:nvSpPr>
           <p:spPr>
             <a:xfrm>
-              <a:off x="3387871" y="1896563"/>
-              <a:ext cx="0" cy="3826579"/>
+              <a:off x="3387871" y="2073503"/>
+              <a:ext cx="0" cy="3649639"/>
             </a:xfrm>
             <a:custGeom>
               <a:avLst/>
               <a:pathLst>
-                <a:path w="0" h="3826579">
+                <a:path w="0" h="3649639">
                   <a:moveTo>
-                    <a:pt x="0" y="3826579"/>
+                    <a:pt x="0" y="3649639"/>
                   </a:moveTo>
                   <a:lnTo>
                     <a:pt x="0" y="0"/>
@@ -2529,15 +2529,15 @@
           </p:nvSpPr>
           <p:spPr>
             <a:xfrm>
-              <a:off x="5160528" y="1896563"/>
-              <a:ext cx="0" cy="3826579"/>
+              <a:off x="5160528" y="2073503"/>
+              <a:ext cx="0" cy="3649639"/>
             </a:xfrm>
             <a:custGeom>
               <a:avLst/>
               <a:pathLst>
-                <a:path w="0" h="3826579">
+                <a:path w="0" h="3649639">
                   <a:moveTo>
-                    <a:pt x="0" y="3826579"/>
+                    <a:pt x="0" y="3649639"/>
                   </a:moveTo>
                   <a:lnTo>
                     <a:pt x="0" y="0"/>
@@ -2572,15 +2572,15 @@
           </p:nvSpPr>
           <p:spPr>
             <a:xfrm>
-              <a:off x="6933186" y="1896563"/>
-              <a:ext cx="0" cy="3826579"/>
+              <a:off x="6933186" y="2073503"/>
+              <a:ext cx="0" cy="3649639"/>
             </a:xfrm>
             <a:custGeom>
               <a:avLst/>
               <a:pathLst>
-                <a:path w="0" h="3826579">
+                <a:path w="0" h="3649639">
                   <a:moveTo>
-                    <a:pt x="0" y="3826579"/>
+                    <a:pt x="0" y="3649639"/>
                   </a:moveTo>
                   <a:lnTo>
                     <a:pt x="0" y="0"/>
@@ -2615,7 +2615,7 @@
           </p:nvSpPr>
           <p:spPr>
             <a:xfrm>
-              <a:off x="817517" y="5549207"/>
+              <a:off x="817517" y="5557249"/>
               <a:ext cx="7799693" cy="0"/>
             </a:xfrm>
             <a:custGeom>
@@ -2658,7 +2658,7 @@
           </p:nvSpPr>
           <p:spPr>
             <a:xfrm>
-              <a:off x="817517" y="4679530"/>
+              <a:off x="817517" y="4727786"/>
               <a:ext cx="7799693" cy="0"/>
             </a:xfrm>
             <a:custGeom>
@@ -2701,7 +2701,7 @@
           </p:nvSpPr>
           <p:spPr>
             <a:xfrm>
-              <a:off x="817517" y="3809853"/>
+              <a:off x="817517" y="3898322"/>
               <a:ext cx="7799693" cy="0"/>
             </a:xfrm>
             <a:custGeom>
@@ -2744,7 +2744,7 @@
           </p:nvSpPr>
           <p:spPr>
             <a:xfrm>
-              <a:off x="817517" y="2940175"/>
+              <a:off x="817517" y="3068859"/>
               <a:ext cx="7799693" cy="0"/>
             </a:xfrm>
             <a:custGeom>
@@ -2787,7 +2787,7 @@
           </p:nvSpPr>
           <p:spPr>
             <a:xfrm>
-              <a:off x="817517" y="2070498"/>
+              <a:off x="817517" y="2239395"/>
               <a:ext cx="7799693" cy="0"/>
             </a:xfrm>
             <a:custGeom>
@@ -2830,15 +2830,15 @@
           </p:nvSpPr>
           <p:spPr>
             <a:xfrm>
-              <a:off x="2501542" y="1896563"/>
-              <a:ext cx="0" cy="3826579"/>
+              <a:off x="2501542" y="2073503"/>
+              <a:ext cx="0" cy="3649639"/>
             </a:xfrm>
             <a:custGeom>
               <a:avLst/>
               <a:pathLst>
-                <a:path w="0" h="3826579">
+                <a:path w="0" h="3649639">
                   <a:moveTo>
-                    <a:pt x="0" y="3826579"/>
+                    <a:pt x="0" y="3649639"/>
                   </a:moveTo>
                   <a:lnTo>
                     <a:pt x="0" y="0"/>
@@ -2873,15 +2873,15 @@
           </p:nvSpPr>
           <p:spPr>
             <a:xfrm>
-              <a:off x="4274200" y="1896563"/>
-              <a:ext cx="0" cy="3826579"/>
+              <a:off x="4274200" y="2073503"/>
+              <a:ext cx="0" cy="3649639"/>
             </a:xfrm>
             <a:custGeom>
               <a:avLst/>
               <a:pathLst>
-                <a:path w="0" h="3826579">
+                <a:path w="0" h="3649639">
                   <a:moveTo>
-                    <a:pt x="0" y="3826579"/>
+                    <a:pt x="0" y="3649639"/>
                   </a:moveTo>
                   <a:lnTo>
                     <a:pt x="0" y="0"/>
@@ -2916,15 +2916,15 @@
           </p:nvSpPr>
           <p:spPr>
             <a:xfrm>
-              <a:off x="6046857" y="1896563"/>
-              <a:ext cx="0" cy="3826579"/>
+              <a:off x="6046857" y="2073503"/>
+              <a:ext cx="0" cy="3649639"/>
             </a:xfrm>
             <a:custGeom>
               <a:avLst/>
               <a:pathLst>
-                <a:path w="0" h="3826579">
+                <a:path w="0" h="3649639">
                   <a:moveTo>
-                    <a:pt x="0" y="3826579"/>
+                    <a:pt x="0" y="3649639"/>
                   </a:moveTo>
                   <a:lnTo>
                     <a:pt x="0" y="0"/>
@@ -2959,15 +2959,15 @@
           </p:nvSpPr>
           <p:spPr>
             <a:xfrm>
-              <a:off x="7819515" y="1896563"/>
-              <a:ext cx="0" cy="3826579"/>
+              <a:off x="7819515" y="2073503"/>
+              <a:ext cx="0" cy="3649639"/>
             </a:xfrm>
             <a:custGeom>
               <a:avLst/>
               <a:pathLst>
-                <a:path w="0" h="3826579">
+                <a:path w="0" h="3649639">
                   <a:moveTo>
-                    <a:pt x="0" y="3826579"/>
+                    <a:pt x="0" y="3649639"/>
                   </a:moveTo>
                   <a:lnTo>
                     <a:pt x="0" y="0"/>
@@ -3002,612 +3002,612 @@
           </p:nvSpPr>
           <p:spPr>
             <a:xfrm>
-              <a:off x="817517" y="2912363"/>
-              <a:ext cx="7235830" cy="2379073"/>
+              <a:off x="817517" y="3042333"/>
+              <a:ext cx="7235830" cy="2269066"/>
             </a:xfrm>
             <a:custGeom>
               <a:avLst/>
               <a:pathLst>
-                <a:path w="7235830" h="2379073">
+                <a:path w="7235830" h="2269066">
                   <a:moveTo>
                     <a:pt x="0" y="0"/>
                   </a:moveTo>
                   <a:lnTo>
-                    <a:pt x="7347" y="6285"/>
-                  </a:lnTo>
-                  <a:lnTo>
-                    <a:pt x="81107" y="67904"/>
-                  </a:lnTo>
-                  <a:lnTo>
-                    <a:pt x="154867" y="128079"/>
-                  </a:lnTo>
-                  <a:lnTo>
-                    <a:pt x="228627" y="186845"/>
-                  </a:lnTo>
-                  <a:lnTo>
-                    <a:pt x="302387" y="244234"/>
-                  </a:lnTo>
-                  <a:lnTo>
-                    <a:pt x="376147" y="300279"/>
-                  </a:lnTo>
-                  <a:lnTo>
-                    <a:pt x="449907" y="355011"/>
-                  </a:lnTo>
-                  <a:lnTo>
-                    <a:pt x="523667" y="408461"/>
-                  </a:lnTo>
-                  <a:lnTo>
-                    <a:pt x="597427" y="460659"/>
-                  </a:lnTo>
-                  <a:lnTo>
-                    <a:pt x="671187" y="511635"/>
-                  </a:lnTo>
-                  <a:lnTo>
-                    <a:pt x="744947" y="561416"/>
-                  </a:lnTo>
-                  <a:lnTo>
-                    <a:pt x="818707" y="610031"/>
-                  </a:lnTo>
-                  <a:lnTo>
-                    <a:pt x="892467" y="657508"/>
-                  </a:lnTo>
-                  <a:lnTo>
-                    <a:pt x="966227" y="703872"/>
-                  </a:lnTo>
-                  <a:lnTo>
-                    <a:pt x="1039987" y="749150"/>
-                  </a:lnTo>
-                  <a:lnTo>
-                    <a:pt x="1113747" y="793368"/>
-                  </a:lnTo>
-                  <a:lnTo>
-                    <a:pt x="1187508" y="836550"/>
-                  </a:lnTo>
-                  <a:lnTo>
-                    <a:pt x="1261268" y="878720"/>
-                  </a:lnTo>
-                  <a:lnTo>
-                    <a:pt x="1335028" y="919903"/>
-                  </a:lnTo>
-                  <a:lnTo>
-                    <a:pt x="1408788" y="960121"/>
-                  </a:lnTo>
-                  <a:lnTo>
-                    <a:pt x="1482548" y="999397"/>
-                  </a:lnTo>
-                  <a:lnTo>
-                    <a:pt x="1556308" y="1037753"/>
-                  </a:lnTo>
-                  <a:lnTo>
-                    <a:pt x="1630068" y="1075210"/>
-                  </a:lnTo>
-                  <a:lnTo>
-                    <a:pt x="1703828" y="1111790"/>
-                  </a:lnTo>
-                  <a:lnTo>
-                    <a:pt x="1777588" y="1147513"/>
-                  </a:lnTo>
-                  <a:lnTo>
-                    <a:pt x="1851348" y="1182400"/>
-                  </a:lnTo>
-                  <a:lnTo>
-                    <a:pt x="1925108" y="1216469"/>
-                  </a:lnTo>
-                  <a:lnTo>
-                    <a:pt x="1998868" y="1249740"/>
-                  </a:lnTo>
-                  <a:lnTo>
-                    <a:pt x="2072628" y="1282232"/>
-                  </a:lnTo>
-                  <a:lnTo>
-                    <a:pt x="2146388" y="1313962"/>
-                  </a:lnTo>
-                  <a:lnTo>
-                    <a:pt x="2220148" y="1344950"/>
-                  </a:lnTo>
-                  <a:lnTo>
-                    <a:pt x="2293908" y="1375211"/>
-                  </a:lnTo>
-                  <a:lnTo>
-                    <a:pt x="2367668" y="1404764"/>
-                  </a:lnTo>
-                  <a:lnTo>
-                    <a:pt x="2441428" y="1433625"/>
-                  </a:lnTo>
-                  <a:lnTo>
-                    <a:pt x="2515188" y="1461809"/>
-                  </a:lnTo>
-                  <a:lnTo>
-                    <a:pt x="2588948" y="1489333"/>
-                  </a:lnTo>
-                  <a:lnTo>
-                    <a:pt x="2662708" y="1516213"/>
-                  </a:lnTo>
-                  <a:lnTo>
-                    <a:pt x="2736468" y="1542463"/>
-                  </a:lnTo>
-                  <a:lnTo>
-                    <a:pt x="2810228" y="1568098"/>
-                  </a:lnTo>
-                  <a:lnTo>
-                    <a:pt x="2883988" y="1593132"/>
-                  </a:lnTo>
-                  <a:lnTo>
-                    <a:pt x="2957748" y="1617580"/>
-                  </a:lnTo>
-                  <a:lnTo>
-                    <a:pt x="3031508" y="1641456"/>
-                  </a:lnTo>
-                  <a:lnTo>
-                    <a:pt x="3105268" y="1664772"/>
-                  </a:lnTo>
-                  <a:lnTo>
-                    <a:pt x="3179028" y="1687542"/>
-                  </a:lnTo>
-                  <a:lnTo>
-                    <a:pt x="3252788" y="1709778"/>
-                  </a:lnTo>
-                  <a:lnTo>
-                    <a:pt x="3326548" y="1731494"/>
-                  </a:lnTo>
-                  <a:lnTo>
-                    <a:pt x="3400308" y="1752701"/>
-                  </a:lnTo>
-                  <a:lnTo>
-                    <a:pt x="3474068" y="1769485"/>
-                  </a:lnTo>
-                  <a:lnTo>
-                    <a:pt x="3547828" y="1777067"/>
-                  </a:lnTo>
-                  <a:lnTo>
-                    <a:pt x="3621588" y="1784583"/>
-                  </a:lnTo>
-                  <a:lnTo>
-                    <a:pt x="3695348" y="1792033"/>
-                  </a:lnTo>
-                  <a:lnTo>
-                    <a:pt x="3769108" y="1799418"/>
-                  </a:lnTo>
-                  <a:lnTo>
-                    <a:pt x="3842868" y="1806738"/>
-                  </a:lnTo>
-                  <a:lnTo>
-                    <a:pt x="3916628" y="1813995"/>
-                  </a:lnTo>
-                  <a:lnTo>
-                    <a:pt x="3990388" y="1821188"/>
-                  </a:lnTo>
-                  <a:lnTo>
-                    <a:pt x="4064149" y="1828318"/>
-                  </a:lnTo>
-                  <a:lnTo>
-                    <a:pt x="4137909" y="1835386"/>
-                  </a:lnTo>
-                  <a:lnTo>
-                    <a:pt x="4211669" y="1842392"/>
-                  </a:lnTo>
-                  <a:lnTo>
-                    <a:pt x="4285429" y="1849337"/>
-                  </a:lnTo>
-                  <a:lnTo>
-                    <a:pt x="4359189" y="1856221"/>
-                  </a:lnTo>
-                  <a:lnTo>
-                    <a:pt x="4432949" y="1863045"/>
-                  </a:lnTo>
-                  <a:lnTo>
-                    <a:pt x="4506709" y="1869809"/>
-                  </a:lnTo>
-                  <a:lnTo>
-                    <a:pt x="4580469" y="1876514"/>
-                  </a:lnTo>
-                  <a:lnTo>
-                    <a:pt x="4654229" y="1883161"/>
-                  </a:lnTo>
-                  <a:lnTo>
-                    <a:pt x="4727989" y="1889749"/>
-                  </a:lnTo>
-                  <a:lnTo>
-                    <a:pt x="4801749" y="1896280"/>
-                  </a:lnTo>
-                  <a:lnTo>
-                    <a:pt x="4875509" y="1902754"/>
-                  </a:lnTo>
-                  <a:lnTo>
-                    <a:pt x="4949269" y="1909171"/>
-                  </a:lnTo>
-                  <a:lnTo>
-                    <a:pt x="5023029" y="1915532"/>
-                  </a:lnTo>
-                  <a:lnTo>
-                    <a:pt x="5096789" y="1921838"/>
-                  </a:lnTo>
-                  <a:lnTo>
-                    <a:pt x="5170549" y="1928088"/>
-                  </a:lnTo>
-                  <a:lnTo>
-                    <a:pt x="5244309" y="1934284"/>
-                  </a:lnTo>
-                  <a:lnTo>
-                    <a:pt x="5318069" y="1940425"/>
-                  </a:lnTo>
-                  <a:lnTo>
-                    <a:pt x="5391829" y="1946513"/>
-                  </a:lnTo>
-                  <a:lnTo>
-                    <a:pt x="5465589" y="1952548"/>
-                  </a:lnTo>
-                  <a:lnTo>
-                    <a:pt x="5539349" y="1958530"/>
-                  </a:lnTo>
-                  <a:lnTo>
-                    <a:pt x="5613109" y="1964459"/>
-                  </a:lnTo>
-                  <a:lnTo>
-                    <a:pt x="5686869" y="1970337"/>
-                  </a:lnTo>
-                  <a:lnTo>
-                    <a:pt x="5760629" y="1976163"/>
-                  </a:lnTo>
-                  <a:lnTo>
-                    <a:pt x="5834389" y="1981939"/>
-                  </a:lnTo>
-                  <a:lnTo>
-                    <a:pt x="5908149" y="1987664"/>
-                  </a:lnTo>
-                  <a:lnTo>
-                    <a:pt x="5981909" y="1993339"/>
-                  </a:lnTo>
-                  <a:lnTo>
-                    <a:pt x="6055669" y="1998964"/>
-                  </a:lnTo>
-                  <a:lnTo>
-                    <a:pt x="6129429" y="2004540"/>
-                  </a:lnTo>
-                  <a:lnTo>
-                    <a:pt x="6203189" y="2010068"/>
-                  </a:lnTo>
-                  <a:lnTo>
-                    <a:pt x="6276949" y="2015547"/>
-                  </a:lnTo>
-                  <a:lnTo>
-                    <a:pt x="6350709" y="2020978"/>
-                  </a:lnTo>
-                  <a:lnTo>
-                    <a:pt x="6424469" y="2026361"/>
-                  </a:lnTo>
-                  <a:lnTo>
-                    <a:pt x="6498229" y="2031698"/>
-                  </a:lnTo>
-                  <a:lnTo>
-                    <a:pt x="6571989" y="2036988"/>
-                  </a:lnTo>
-                  <a:lnTo>
-                    <a:pt x="6645749" y="2042232"/>
-                  </a:lnTo>
-                  <a:lnTo>
-                    <a:pt x="6719509" y="2047430"/>
-                  </a:lnTo>
-                  <a:lnTo>
-                    <a:pt x="6793269" y="2052582"/>
-                  </a:lnTo>
-                  <a:lnTo>
-                    <a:pt x="6867029" y="2057690"/>
-                  </a:lnTo>
-                  <a:lnTo>
-                    <a:pt x="6940789" y="2062752"/>
-                  </a:lnTo>
-                  <a:lnTo>
-                    <a:pt x="7014550" y="2067771"/>
-                  </a:lnTo>
-                  <a:lnTo>
-                    <a:pt x="7088310" y="2072745"/>
-                  </a:lnTo>
-                  <a:lnTo>
-                    <a:pt x="7162070" y="2077677"/>
-                  </a:lnTo>
-                  <a:lnTo>
-                    <a:pt x="7235830" y="2082565"/>
-                  </a:lnTo>
-                  <a:lnTo>
-                    <a:pt x="7235830" y="2379073"/>
-                  </a:lnTo>
-                  <a:lnTo>
-                    <a:pt x="7162070" y="2372891"/>
-                  </a:lnTo>
-                  <a:lnTo>
-                    <a:pt x="7088310" y="2366559"/>
-                  </a:lnTo>
-                  <a:lnTo>
-                    <a:pt x="7014550" y="2360076"/>
-                  </a:lnTo>
-                  <a:lnTo>
-                    <a:pt x="6940789" y="2353438"/>
-                  </a:lnTo>
-                  <a:lnTo>
-                    <a:pt x="6867029" y="2346640"/>
-                  </a:lnTo>
-                  <a:lnTo>
-                    <a:pt x="6793269" y="2339679"/>
-                  </a:lnTo>
-                  <a:lnTo>
-                    <a:pt x="6719509" y="2332551"/>
-                  </a:lnTo>
-                  <a:lnTo>
-                    <a:pt x="6645749" y="2325253"/>
-                  </a:lnTo>
-                  <a:lnTo>
-                    <a:pt x="6571989" y="2317779"/>
-                  </a:lnTo>
-                  <a:lnTo>
-                    <a:pt x="6498229" y="2310126"/>
-                  </a:lnTo>
-                  <a:lnTo>
-                    <a:pt x="6424469" y="2302289"/>
-                  </a:lnTo>
-                  <a:lnTo>
-                    <a:pt x="6350709" y="2294264"/>
-                  </a:lnTo>
-                  <a:lnTo>
-                    <a:pt x="6276949" y="2286047"/>
-                  </a:lnTo>
-                  <a:lnTo>
-                    <a:pt x="6203189" y="2277633"/>
-                  </a:lnTo>
-                  <a:lnTo>
-                    <a:pt x="6129429" y="2269017"/>
-                  </a:lnTo>
-                  <a:lnTo>
-                    <a:pt x="6055669" y="2260194"/>
-                  </a:lnTo>
-                  <a:lnTo>
-                    <a:pt x="5981909" y="2251160"/>
-                  </a:lnTo>
-                  <a:lnTo>
-                    <a:pt x="5908149" y="2241909"/>
-                  </a:lnTo>
-                  <a:lnTo>
-                    <a:pt x="5834389" y="2232436"/>
-                  </a:lnTo>
-                  <a:lnTo>
-                    <a:pt x="5760629" y="2222736"/>
-                  </a:lnTo>
-                  <a:lnTo>
-                    <a:pt x="5686869" y="2212803"/>
-                  </a:lnTo>
-                  <a:lnTo>
-                    <a:pt x="5613109" y="2202632"/>
-                  </a:lnTo>
-                  <a:lnTo>
-                    <a:pt x="5539349" y="2192217"/>
-                  </a:lnTo>
-                  <a:lnTo>
-                    <a:pt x="5465589" y="2181552"/>
-                  </a:lnTo>
-                  <a:lnTo>
-                    <a:pt x="5391829" y="2170632"/>
-                  </a:lnTo>
-                  <a:lnTo>
-                    <a:pt x="5318069" y="2159449"/>
-                  </a:lnTo>
-                  <a:lnTo>
-                    <a:pt x="5244309" y="2147998"/>
-                  </a:lnTo>
-                  <a:lnTo>
-                    <a:pt x="5170549" y="2136273"/>
-                  </a:lnTo>
-                  <a:lnTo>
-                    <a:pt x="5096789" y="2124266"/>
-                  </a:lnTo>
-                  <a:lnTo>
-                    <a:pt x="5023029" y="2111972"/>
-                  </a:lnTo>
-                  <a:lnTo>
-                    <a:pt x="4949269" y="2099382"/>
-                  </a:lnTo>
-                  <a:lnTo>
-                    <a:pt x="4875509" y="2086490"/>
-                  </a:lnTo>
-                  <a:lnTo>
-                    <a:pt x="4801749" y="2073290"/>
-                  </a:lnTo>
-                  <a:lnTo>
-                    <a:pt x="4727989" y="2059772"/>
-                  </a:lnTo>
-                  <a:lnTo>
-                    <a:pt x="4654229" y="2045931"/>
-                  </a:lnTo>
-                  <a:lnTo>
-                    <a:pt x="4580469" y="2031757"/>
-                  </a:lnTo>
-                  <a:lnTo>
-                    <a:pt x="4506709" y="2017243"/>
-                  </a:lnTo>
-                  <a:lnTo>
-                    <a:pt x="4432949" y="2002382"/>
-                  </a:lnTo>
-                  <a:lnTo>
-                    <a:pt x="4359189" y="1987163"/>
-                  </a:lnTo>
-                  <a:lnTo>
-                    <a:pt x="4285429" y="1971580"/>
-                  </a:lnTo>
-                  <a:lnTo>
-                    <a:pt x="4211669" y="1955623"/>
-                  </a:lnTo>
-                  <a:lnTo>
-                    <a:pt x="4137909" y="1939283"/>
-                  </a:lnTo>
-                  <a:lnTo>
-                    <a:pt x="4064149" y="1922552"/>
-                  </a:lnTo>
-                  <a:lnTo>
-                    <a:pt x="3990388" y="1905418"/>
-                  </a:lnTo>
-                  <a:lnTo>
-                    <a:pt x="3916628" y="1887874"/>
-                  </a:lnTo>
-                  <a:lnTo>
-                    <a:pt x="3842868" y="1869910"/>
-                  </a:lnTo>
-                  <a:lnTo>
-                    <a:pt x="3769108" y="1851514"/>
-                  </a:lnTo>
-                  <a:lnTo>
-                    <a:pt x="3695348" y="1832677"/>
-                  </a:lnTo>
-                  <a:lnTo>
-                    <a:pt x="3621588" y="1813388"/>
-                  </a:lnTo>
-                  <a:lnTo>
-                    <a:pt x="3547828" y="1793637"/>
-                  </a:lnTo>
-                  <a:lnTo>
-                    <a:pt x="3474068" y="1773412"/>
-                  </a:lnTo>
-                  <a:lnTo>
-                    <a:pt x="3400308" y="1761836"/>
-                  </a:lnTo>
-                  <a:lnTo>
-                    <a:pt x="3326548" y="1754119"/>
-                  </a:lnTo>
-                  <a:lnTo>
-                    <a:pt x="3252788" y="1746335"/>
-                  </a:lnTo>
-                  <a:lnTo>
-                    <a:pt x="3179028" y="1738481"/>
-                  </a:lnTo>
-                  <a:lnTo>
-                    <a:pt x="3105268" y="1730559"/>
-                  </a:lnTo>
-                  <a:lnTo>
-                    <a:pt x="3031508" y="1722567"/>
-                  </a:lnTo>
-                  <a:lnTo>
-                    <a:pt x="2957748" y="1714504"/>
-                  </a:lnTo>
-                  <a:lnTo>
-                    <a:pt x="2883988" y="1706370"/>
-                  </a:lnTo>
-                  <a:lnTo>
-                    <a:pt x="2810228" y="1698164"/>
-                  </a:lnTo>
-                  <a:lnTo>
-                    <a:pt x="2736468" y="1689886"/>
-                  </a:lnTo>
-                  <a:lnTo>
-                    <a:pt x="2662708" y="1681535"/>
-                  </a:lnTo>
-                  <a:lnTo>
-                    <a:pt x="2588948" y="1673111"/>
-                  </a:lnTo>
-                  <a:lnTo>
-                    <a:pt x="2515188" y="1664612"/>
-                  </a:lnTo>
-                  <a:lnTo>
-                    <a:pt x="2441428" y="1656038"/>
-                  </a:lnTo>
-                  <a:lnTo>
-                    <a:pt x="2367668" y="1647389"/>
-                  </a:lnTo>
-                  <a:lnTo>
-                    <a:pt x="2293908" y="1638663"/>
-                  </a:lnTo>
-                  <a:lnTo>
-                    <a:pt x="2220148" y="1629860"/>
-                  </a:lnTo>
-                  <a:lnTo>
-                    <a:pt x="2146388" y="1620980"/>
-                  </a:lnTo>
-                  <a:lnTo>
-                    <a:pt x="2072628" y="1612021"/>
-                  </a:lnTo>
-                  <a:lnTo>
-                    <a:pt x="1998868" y="1602983"/>
-                  </a:lnTo>
-                  <a:lnTo>
-                    <a:pt x="1925108" y="1593866"/>
-                  </a:lnTo>
-                  <a:lnTo>
-                    <a:pt x="1851348" y="1584668"/>
-                  </a:lnTo>
-                  <a:lnTo>
-                    <a:pt x="1777588" y="1575389"/>
-                  </a:lnTo>
-                  <a:lnTo>
-                    <a:pt x="1703828" y="1566029"/>
-                  </a:lnTo>
-                  <a:lnTo>
-                    <a:pt x="1630068" y="1556586"/>
-                  </a:lnTo>
-                  <a:lnTo>
-                    <a:pt x="1556308" y="1547059"/>
-                  </a:lnTo>
-                  <a:lnTo>
-                    <a:pt x="1482548" y="1537448"/>
-                  </a:lnTo>
-                  <a:lnTo>
-                    <a:pt x="1408788" y="1527753"/>
-                  </a:lnTo>
-                  <a:lnTo>
-                    <a:pt x="1335028" y="1517972"/>
-                  </a:lnTo>
-                  <a:lnTo>
-                    <a:pt x="1261268" y="1508105"/>
-                  </a:lnTo>
-                  <a:lnTo>
-                    <a:pt x="1187508" y="1498151"/>
-                  </a:lnTo>
-                  <a:lnTo>
-                    <a:pt x="1113747" y="1488109"/>
-                  </a:lnTo>
-                  <a:lnTo>
-                    <a:pt x="1039987" y="1477979"/>
-                  </a:lnTo>
-                  <a:lnTo>
-                    <a:pt x="966227" y="1467759"/>
-                  </a:lnTo>
-                  <a:lnTo>
-                    <a:pt x="892467" y="1457449"/>
-                  </a:lnTo>
-                  <a:lnTo>
-                    <a:pt x="818707" y="1447049"/>
-                  </a:lnTo>
-                  <a:lnTo>
-                    <a:pt x="744947" y="1436556"/>
-                  </a:lnTo>
-                  <a:lnTo>
-                    <a:pt x="671187" y="1425971"/>
-                  </a:lnTo>
-                  <a:lnTo>
-                    <a:pt x="597427" y="1415293"/>
-                  </a:lnTo>
-                  <a:lnTo>
-                    <a:pt x="523667" y="1404520"/>
-                  </a:lnTo>
-                  <a:lnTo>
-                    <a:pt x="449907" y="1393652"/>
-                  </a:lnTo>
-                  <a:lnTo>
-                    <a:pt x="376147" y="1382689"/>
-                  </a:lnTo>
-                  <a:lnTo>
-                    <a:pt x="302387" y="1371629"/>
-                  </a:lnTo>
-                  <a:lnTo>
-                    <a:pt x="228627" y="1360471"/>
-                  </a:lnTo>
-                  <a:lnTo>
-                    <a:pt x="154867" y="1349215"/>
-                  </a:lnTo>
-                  <a:lnTo>
-                    <a:pt x="81107" y="1337860"/>
-                  </a:lnTo>
-                  <a:lnTo>
-                    <a:pt x="7347" y="1326405"/>
-                  </a:lnTo>
-                  <a:lnTo>
-                    <a:pt x="0" y="1325253"/>
+                    <a:pt x="7347" y="5994"/>
+                  </a:lnTo>
+                  <a:lnTo>
+                    <a:pt x="81107" y="64764"/>
+                  </a:lnTo>
+                  <a:lnTo>
+                    <a:pt x="154867" y="122157"/>
+                  </a:lnTo>
+                  <a:lnTo>
+                    <a:pt x="228627" y="178205"/>
+                  </a:lnTo>
+                  <a:lnTo>
+                    <a:pt x="302387" y="232941"/>
+                  </a:lnTo>
+                  <a:lnTo>
+                    <a:pt x="376147" y="286394"/>
+                  </a:lnTo>
+                  <a:lnTo>
+                    <a:pt x="449907" y="338596"/>
+                  </a:lnTo>
+                  <a:lnTo>
+                    <a:pt x="523667" y="389574"/>
+                  </a:lnTo>
+                  <a:lnTo>
+                    <a:pt x="597427" y="439359"/>
+                  </a:lnTo>
+                  <a:lnTo>
+                    <a:pt x="671187" y="487977"/>
+                  </a:lnTo>
+                  <a:lnTo>
+                    <a:pt x="744947" y="535456"/>
+                  </a:lnTo>
+                  <a:lnTo>
+                    <a:pt x="818707" y="581824"/>
+                  </a:lnTo>
+                  <a:lnTo>
+                    <a:pt x="892467" y="627105"/>
+                  </a:lnTo>
+                  <a:lnTo>
+                    <a:pt x="966227" y="671325"/>
+                  </a:lnTo>
+                  <a:lnTo>
+                    <a:pt x="1039987" y="714510"/>
+                  </a:lnTo>
+                  <a:lnTo>
+                    <a:pt x="1113747" y="756683"/>
+                  </a:lnTo>
+                  <a:lnTo>
+                    <a:pt x="1187508" y="797868"/>
+                  </a:lnTo>
+                  <a:lnTo>
+                    <a:pt x="1261268" y="838089"/>
+                  </a:lnTo>
+                  <a:lnTo>
+                    <a:pt x="1335028" y="877367"/>
+                  </a:lnTo>
+                  <a:lnTo>
+                    <a:pt x="1408788" y="915725"/>
+                  </a:lnTo>
+                  <a:lnTo>
+                    <a:pt x="1482548" y="953185"/>
+                  </a:lnTo>
+                  <a:lnTo>
+                    <a:pt x="1556308" y="989767"/>
+                  </a:lnTo>
+                  <a:lnTo>
+                    <a:pt x="1630068" y="1025493"/>
+                  </a:lnTo>
+                  <a:lnTo>
+                    <a:pt x="1703828" y="1060381"/>
+                  </a:lnTo>
+                  <a:lnTo>
+                    <a:pt x="1777588" y="1094453"/>
+                  </a:lnTo>
+                  <a:lnTo>
+                    <a:pt x="1851348" y="1127726"/>
+                  </a:lnTo>
+                  <a:lnTo>
+                    <a:pt x="1925108" y="1160220"/>
+                  </a:lnTo>
+                  <a:lnTo>
+                    <a:pt x="1998868" y="1191952"/>
+                  </a:lnTo>
+                  <a:lnTo>
+                    <a:pt x="2072628" y="1222942"/>
+                  </a:lnTo>
+                  <a:lnTo>
+                    <a:pt x="2146388" y="1253205"/>
+                  </a:lnTo>
+                  <a:lnTo>
+                    <a:pt x="2220148" y="1282760"/>
+                  </a:lnTo>
+                  <a:lnTo>
+                    <a:pt x="2293908" y="1311622"/>
+                  </a:lnTo>
+                  <a:lnTo>
+                    <a:pt x="2367668" y="1339808"/>
+                  </a:lnTo>
+                  <a:lnTo>
+                    <a:pt x="2441428" y="1367334"/>
+                  </a:lnTo>
+                  <a:lnTo>
+                    <a:pt x="2515188" y="1394216"/>
+                  </a:lnTo>
+                  <a:lnTo>
+                    <a:pt x="2588948" y="1420467"/>
+                  </a:lnTo>
+                  <a:lnTo>
+                    <a:pt x="2662708" y="1446104"/>
+                  </a:lnTo>
+                  <a:lnTo>
+                    <a:pt x="2736468" y="1471140"/>
+                  </a:lnTo>
+                  <a:lnTo>
+                    <a:pt x="2810228" y="1495589"/>
+                  </a:lnTo>
+                  <a:lnTo>
+                    <a:pt x="2883988" y="1519466"/>
+                  </a:lnTo>
+                  <a:lnTo>
+                    <a:pt x="2957748" y="1542784"/>
+                  </a:lnTo>
+                  <a:lnTo>
+                    <a:pt x="3031508" y="1565555"/>
+                  </a:lnTo>
+                  <a:lnTo>
+                    <a:pt x="3105268" y="1587793"/>
+                  </a:lnTo>
+                  <a:lnTo>
+                    <a:pt x="3179028" y="1609511"/>
+                  </a:lnTo>
+                  <a:lnTo>
+                    <a:pt x="3252788" y="1630719"/>
+                  </a:lnTo>
+                  <a:lnTo>
+                    <a:pt x="3326548" y="1651431"/>
+                  </a:lnTo>
+                  <a:lnTo>
+                    <a:pt x="3400308" y="1671657"/>
+                  </a:lnTo>
+                  <a:lnTo>
+                    <a:pt x="3474068" y="1687664"/>
+                  </a:lnTo>
+                  <a:lnTo>
+                    <a:pt x="3547828" y="1694896"/>
+                  </a:lnTo>
+                  <a:lnTo>
+                    <a:pt x="3621588" y="1702064"/>
+                  </a:lnTo>
+                  <a:lnTo>
+                    <a:pt x="3695348" y="1709170"/>
+                  </a:lnTo>
+                  <a:lnTo>
+                    <a:pt x="3769108" y="1716214"/>
+                  </a:lnTo>
+                  <a:lnTo>
+                    <a:pt x="3842868" y="1723196"/>
+                  </a:lnTo>
+                  <a:lnTo>
+                    <a:pt x="3916628" y="1730116"/>
+                  </a:lnTo>
+                  <a:lnTo>
+                    <a:pt x="3990388" y="1736977"/>
+                  </a:lnTo>
+                  <a:lnTo>
+                    <a:pt x="4064149" y="1743777"/>
+                  </a:lnTo>
+                  <a:lnTo>
+                    <a:pt x="4137909" y="1750518"/>
+                  </a:lnTo>
+                  <a:lnTo>
+                    <a:pt x="4211669" y="1757201"/>
+                  </a:lnTo>
+                  <a:lnTo>
+                    <a:pt x="4285429" y="1763824"/>
+                  </a:lnTo>
+                  <a:lnTo>
+                    <a:pt x="4359189" y="1770390"/>
+                  </a:lnTo>
+                  <a:lnTo>
+                    <a:pt x="4432949" y="1776898"/>
+                  </a:lnTo>
+                  <a:lnTo>
+                    <a:pt x="4506709" y="1783350"/>
+                  </a:lnTo>
+                  <a:lnTo>
+                    <a:pt x="4580469" y="1789745"/>
+                  </a:lnTo>
+                  <a:lnTo>
+                    <a:pt x="4654229" y="1796084"/>
+                  </a:lnTo>
+                  <a:lnTo>
+                    <a:pt x="4727989" y="1802368"/>
+                  </a:lnTo>
+                  <a:lnTo>
+                    <a:pt x="4801749" y="1808597"/>
+                  </a:lnTo>
+                  <a:lnTo>
+                    <a:pt x="4875509" y="1814771"/>
+                  </a:lnTo>
+                  <a:lnTo>
+                    <a:pt x="4949269" y="1820892"/>
+                  </a:lnTo>
+                  <a:lnTo>
+                    <a:pt x="5023029" y="1826959"/>
+                  </a:lnTo>
+                  <a:lnTo>
+                    <a:pt x="5096789" y="1832973"/>
+                  </a:lnTo>
+                  <a:lnTo>
+                    <a:pt x="5170549" y="1838934"/>
+                  </a:lnTo>
+                  <a:lnTo>
+                    <a:pt x="5244309" y="1844843"/>
+                  </a:lnTo>
+                  <a:lnTo>
+                    <a:pt x="5318069" y="1850701"/>
+                  </a:lnTo>
+                  <a:lnTo>
+                    <a:pt x="5391829" y="1856507"/>
+                  </a:lnTo>
+                  <a:lnTo>
+                    <a:pt x="5465589" y="1862263"/>
+                  </a:lnTo>
+                  <a:lnTo>
+                    <a:pt x="5539349" y="1867968"/>
+                  </a:lnTo>
+                  <a:lnTo>
+                    <a:pt x="5613109" y="1873623"/>
+                  </a:lnTo>
+                  <a:lnTo>
+                    <a:pt x="5686869" y="1879229"/>
+                  </a:lnTo>
+                  <a:lnTo>
+                    <a:pt x="5760629" y="1884786"/>
+                  </a:lnTo>
+                  <a:lnTo>
+                    <a:pt x="5834389" y="1890295"/>
+                  </a:lnTo>
+                  <a:lnTo>
+                    <a:pt x="5908149" y="1895755"/>
+                  </a:lnTo>
+                  <a:lnTo>
+                    <a:pt x="5981909" y="1901167"/>
+                  </a:lnTo>
+                  <a:lnTo>
+                    <a:pt x="6055669" y="1906533"/>
+                  </a:lnTo>
+                  <a:lnTo>
+                    <a:pt x="6129429" y="1911851"/>
+                  </a:lnTo>
+                  <a:lnTo>
+                    <a:pt x="6203189" y="1917123"/>
+                  </a:lnTo>
+                  <a:lnTo>
+                    <a:pt x="6276949" y="1922348"/>
+                  </a:lnTo>
+                  <a:lnTo>
+                    <a:pt x="6350709" y="1927528"/>
+                  </a:lnTo>
+                  <a:lnTo>
+                    <a:pt x="6424469" y="1932663"/>
+                  </a:lnTo>
+                  <a:lnTo>
+                    <a:pt x="6498229" y="1937753"/>
+                  </a:lnTo>
+                  <a:lnTo>
+                    <a:pt x="6571989" y="1942798"/>
+                  </a:lnTo>
+                  <a:lnTo>
+                    <a:pt x="6645749" y="1947800"/>
+                  </a:lnTo>
+                  <a:lnTo>
+                    <a:pt x="6719509" y="1952757"/>
+                  </a:lnTo>
+                  <a:lnTo>
+                    <a:pt x="6793269" y="1957671"/>
+                  </a:lnTo>
+                  <a:lnTo>
+                    <a:pt x="6867029" y="1962543"/>
+                  </a:lnTo>
+                  <a:lnTo>
+                    <a:pt x="6940789" y="1967371"/>
+                  </a:lnTo>
+                  <a:lnTo>
+                    <a:pt x="7014550" y="1972158"/>
+                  </a:lnTo>
+                  <a:lnTo>
+                    <a:pt x="7088310" y="1976902"/>
+                  </a:lnTo>
+                  <a:lnTo>
+                    <a:pt x="7162070" y="1981606"/>
+                  </a:lnTo>
+                  <a:lnTo>
+                    <a:pt x="7235830" y="1986268"/>
+                  </a:lnTo>
+                  <a:lnTo>
+                    <a:pt x="7235830" y="2269066"/>
+                  </a:lnTo>
+                  <a:lnTo>
+                    <a:pt x="7162070" y="2263169"/>
+                  </a:lnTo>
+                  <a:lnTo>
+                    <a:pt x="7088310" y="2257131"/>
+                  </a:lnTo>
+                  <a:lnTo>
+                    <a:pt x="7014550" y="2250947"/>
+                  </a:lnTo>
+                  <a:lnTo>
+                    <a:pt x="6940789" y="2244616"/>
+                  </a:lnTo>
+                  <a:lnTo>
+                    <a:pt x="6867029" y="2238132"/>
+                  </a:lnTo>
+                  <a:lnTo>
+                    <a:pt x="6793269" y="2231493"/>
+                  </a:lnTo>
+                  <a:lnTo>
+                    <a:pt x="6719509" y="2224695"/>
+                  </a:lnTo>
+                  <a:lnTo>
+                    <a:pt x="6645749" y="2217734"/>
+                  </a:lnTo>
+                  <a:lnTo>
+                    <a:pt x="6571989" y="2210606"/>
+                  </a:lnTo>
+                  <a:lnTo>
+                    <a:pt x="6498229" y="2203306"/>
+                  </a:lnTo>
+                  <a:lnTo>
+                    <a:pt x="6424469" y="2195832"/>
+                  </a:lnTo>
+                  <a:lnTo>
+                    <a:pt x="6350709" y="2188179"/>
+                  </a:lnTo>
+                  <a:lnTo>
+                    <a:pt x="6276949" y="2180341"/>
+                  </a:lnTo>
+                  <a:lnTo>
+                    <a:pt x="6203189" y="2172316"/>
+                  </a:lnTo>
+                  <a:lnTo>
+                    <a:pt x="6129429" y="2164099"/>
+                  </a:lnTo>
+                  <a:lnTo>
+                    <a:pt x="6055669" y="2155684"/>
+                  </a:lnTo>
+                  <a:lnTo>
+                    <a:pt x="5981909" y="2147067"/>
+                  </a:lnTo>
+                  <a:lnTo>
+                    <a:pt x="5908149" y="2138244"/>
+                  </a:lnTo>
+                  <a:lnTo>
+                    <a:pt x="5834389" y="2129209"/>
+                  </a:lnTo>
+                  <a:lnTo>
+                    <a:pt x="5760629" y="2119958"/>
+                  </a:lnTo>
+                  <a:lnTo>
+                    <a:pt x="5686869" y="2110484"/>
+                  </a:lnTo>
+                  <a:lnTo>
+                    <a:pt x="5613109" y="2100783"/>
+                  </a:lnTo>
+                  <a:lnTo>
+                    <a:pt x="5539349" y="2090850"/>
+                  </a:lnTo>
+                  <a:lnTo>
+                    <a:pt x="5465589" y="2080678"/>
+                  </a:lnTo>
+                  <a:lnTo>
+                    <a:pt x="5391829" y="2070263"/>
+                  </a:lnTo>
+                  <a:lnTo>
+                    <a:pt x="5318069" y="2059597"/>
+                  </a:lnTo>
+                  <a:lnTo>
+                    <a:pt x="5244309" y="2048676"/>
+                  </a:lnTo>
+                  <a:lnTo>
+                    <a:pt x="5170549" y="2037493"/>
+                  </a:lnTo>
+                  <a:lnTo>
+                    <a:pt x="5096789" y="2026041"/>
+                  </a:lnTo>
+                  <a:lnTo>
+                    <a:pt x="5023029" y="2014315"/>
+                  </a:lnTo>
+                  <a:lnTo>
+                    <a:pt x="4949269" y="2002307"/>
+                  </a:lnTo>
+                  <a:lnTo>
+                    <a:pt x="4875509" y="1990012"/>
+                  </a:lnTo>
+                  <a:lnTo>
+                    <a:pt x="4801749" y="1977421"/>
+                  </a:lnTo>
+                  <a:lnTo>
+                    <a:pt x="4727989" y="1964529"/>
+                  </a:lnTo>
+                  <a:lnTo>
+                    <a:pt x="4654229" y="1951327"/>
+                  </a:lnTo>
+                  <a:lnTo>
+                    <a:pt x="4580469" y="1937809"/>
+                  </a:lnTo>
+                  <a:lnTo>
+                    <a:pt x="4506709" y="1923967"/>
+                  </a:lnTo>
+                  <a:lnTo>
+                    <a:pt x="4432949" y="1909792"/>
+                  </a:lnTo>
+                  <a:lnTo>
+                    <a:pt x="4359189" y="1895278"/>
+                  </a:lnTo>
+                  <a:lnTo>
+                    <a:pt x="4285429" y="1880415"/>
+                  </a:lnTo>
+                  <a:lnTo>
+                    <a:pt x="4211669" y="1865196"/>
+                  </a:lnTo>
+                  <a:lnTo>
+                    <a:pt x="4137909" y="1849611"/>
+                  </a:lnTo>
+                  <a:lnTo>
+                    <a:pt x="4064149" y="1833653"/>
+                  </a:lnTo>
+                  <a:lnTo>
+                    <a:pt x="3990388" y="1817313"/>
+                  </a:lnTo>
+                  <a:lnTo>
+                    <a:pt x="3916628" y="1800580"/>
+                  </a:lnTo>
+                  <a:lnTo>
+                    <a:pt x="3842868" y="1783446"/>
+                  </a:lnTo>
+                  <a:lnTo>
+                    <a:pt x="3769108" y="1765901"/>
+                  </a:lnTo>
+                  <a:lnTo>
+                    <a:pt x="3695348" y="1747935"/>
+                  </a:lnTo>
+                  <a:lnTo>
+                    <a:pt x="3621588" y="1729538"/>
+                  </a:lnTo>
+                  <a:lnTo>
+                    <a:pt x="3547828" y="1710700"/>
+                  </a:lnTo>
+                  <a:lnTo>
+                    <a:pt x="3474068" y="1691410"/>
+                  </a:lnTo>
+                  <a:lnTo>
+                    <a:pt x="3400308" y="1680369"/>
+                  </a:lnTo>
+                  <a:lnTo>
+                    <a:pt x="3326548" y="1673009"/>
+                  </a:lnTo>
+                  <a:lnTo>
+                    <a:pt x="3252788" y="1665585"/>
+                  </a:lnTo>
+                  <a:lnTo>
+                    <a:pt x="3179028" y="1658095"/>
+                  </a:lnTo>
+                  <a:lnTo>
+                    <a:pt x="3105268" y="1650539"/>
+                  </a:lnTo>
+                  <a:lnTo>
+                    <a:pt x="3031508" y="1642916"/>
+                  </a:lnTo>
+                  <a:lnTo>
+                    <a:pt x="2957748" y="1635226"/>
+                  </a:lnTo>
+                  <a:lnTo>
+                    <a:pt x="2883988" y="1627468"/>
+                  </a:lnTo>
+                  <a:lnTo>
+                    <a:pt x="2810228" y="1619642"/>
+                  </a:lnTo>
+                  <a:lnTo>
+                    <a:pt x="2736468" y="1611747"/>
+                  </a:lnTo>
+                  <a:lnTo>
+                    <a:pt x="2662708" y="1603782"/>
+                  </a:lnTo>
+                  <a:lnTo>
+                    <a:pt x="2588948" y="1595747"/>
+                  </a:lnTo>
+                  <a:lnTo>
+                    <a:pt x="2515188" y="1587641"/>
+                  </a:lnTo>
+                  <a:lnTo>
+                    <a:pt x="2441428" y="1579463"/>
+                  </a:lnTo>
+                  <a:lnTo>
+                    <a:pt x="2367668" y="1571214"/>
+                  </a:lnTo>
+                  <a:lnTo>
+                    <a:pt x="2293908" y="1562892"/>
+                  </a:lnTo>
+                  <a:lnTo>
+                    <a:pt x="2220148" y="1554496"/>
+                  </a:lnTo>
+                  <a:lnTo>
+                    <a:pt x="2146388" y="1546026"/>
+                  </a:lnTo>
+                  <a:lnTo>
+                    <a:pt x="2072628" y="1537482"/>
+                  </a:lnTo>
+                  <a:lnTo>
+                    <a:pt x="1998868" y="1528862"/>
+                  </a:lnTo>
+                  <a:lnTo>
+                    <a:pt x="1925108" y="1520166"/>
+                  </a:lnTo>
+                  <a:lnTo>
+                    <a:pt x="1851348" y="1511394"/>
+                  </a:lnTo>
+                  <a:lnTo>
+                    <a:pt x="1777588" y="1502544"/>
+                  </a:lnTo>
+                  <a:lnTo>
+                    <a:pt x="1703828" y="1493616"/>
+                  </a:lnTo>
+                  <a:lnTo>
+                    <a:pt x="1630068" y="1484610"/>
+                  </a:lnTo>
+                  <a:lnTo>
+                    <a:pt x="1556308" y="1475524"/>
+                  </a:lnTo>
+                  <a:lnTo>
+                    <a:pt x="1482548" y="1466357"/>
+                  </a:lnTo>
+                  <a:lnTo>
+                    <a:pt x="1408788" y="1457110"/>
+                  </a:lnTo>
+                  <a:lnTo>
+                    <a:pt x="1335028" y="1447782"/>
+                  </a:lnTo>
+                  <a:lnTo>
+                    <a:pt x="1261268" y="1438371"/>
+                  </a:lnTo>
+                  <a:lnTo>
+                    <a:pt x="1187508" y="1428877"/>
+                  </a:lnTo>
+                  <a:lnTo>
+                    <a:pt x="1113747" y="1419300"/>
+                  </a:lnTo>
+                  <a:lnTo>
+                    <a:pt x="1039987" y="1409638"/>
+                  </a:lnTo>
+                  <a:lnTo>
+                    <a:pt x="966227" y="1399891"/>
+                  </a:lnTo>
+                  <a:lnTo>
+                    <a:pt x="892467" y="1390057"/>
+                  </a:lnTo>
+                  <a:lnTo>
+                    <a:pt x="818707" y="1380138"/>
+                  </a:lnTo>
+                  <a:lnTo>
+                    <a:pt x="744947" y="1370130"/>
+                  </a:lnTo>
+                  <a:lnTo>
+                    <a:pt x="671187" y="1360035"/>
+                  </a:lnTo>
+                  <a:lnTo>
+                    <a:pt x="597427" y="1349850"/>
+                  </a:lnTo>
+                  <a:lnTo>
+                    <a:pt x="523667" y="1339576"/>
+                  </a:lnTo>
+                  <a:lnTo>
+                    <a:pt x="449907" y="1329210"/>
+                  </a:lnTo>
+                  <a:lnTo>
+                    <a:pt x="376147" y="1318754"/>
+                  </a:lnTo>
+                  <a:lnTo>
+                    <a:pt x="302387" y="1308205"/>
+                  </a:lnTo>
+                  <a:lnTo>
+                    <a:pt x="228627" y="1297564"/>
+                  </a:lnTo>
+                  <a:lnTo>
+                    <a:pt x="154867" y="1286828"/>
+                  </a:lnTo>
+                  <a:lnTo>
+                    <a:pt x="81107" y="1275998"/>
+                  </a:lnTo>
+                  <a:lnTo>
+                    <a:pt x="7347" y="1265072"/>
+                  </a:lnTo>
+                  <a:lnTo>
+                    <a:pt x="0" y="1263974"/>
                   </a:lnTo>
                   <a:close/>
                 </a:path>
@@ -3633,312 +3633,312 @@
           </p:nvSpPr>
           <p:spPr>
             <a:xfrm>
-              <a:off x="817517" y="2912363"/>
-              <a:ext cx="7235830" cy="2082565"/>
+              <a:off x="817517" y="3042333"/>
+              <a:ext cx="7235830" cy="1986268"/>
             </a:xfrm>
             <a:custGeom>
               <a:avLst/>
               <a:pathLst>
-                <a:path w="7235830" h="2082565">
+                <a:path w="7235830" h="1986268">
                   <a:moveTo>
                     <a:pt x="0" y="0"/>
                   </a:moveTo>
                   <a:lnTo>
-                    <a:pt x="7347" y="6285"/>
-                  </a:lnTo>
-                  <a:lnTo>
-                    <a:pt x="81107" y="67904"/>
-                  </a:lnTo>
-                  <a:lnTo>
-                    <a:pt x="154867" y="128079"/>
-                  </a:lnTo>
-                  <a:lnTo>
-                    <a:pt x="228627" y="186845"/>
-                  </a:lnTo>
-                  <a:lnTo>
-                    <a:pt x="302387" y="244234"/>
-                  </a:lnTo>
-                  <a:lnTo>
-                    <a:pt x="376147" y="300279"/>
-                  </a:lnTo>
-                  <a:lnTo>
-                    <a:pt x="449907" y="355011"/>
-                  </a:lnTo>
-                  <a:lnTo>
-                    <a:pt x="523667" y="408461"/>
-                  </a:lnTo>
-                  <a:lnTo>
-                    <a:pt x="597427" y="460659"/>
-                  </a:lnTo>
-                  <a:lnTo>
-                    <a:pt x="671187" y="511635"/>
-                  </a:lnTo>
-                  <a:lnTo>
-                    <a:pt x="744947" y="561416"/>
-                  </a:lnTo>
-                  <a:lnTo>
-                    <a:pt x="818707" y="610031"/>
-                  </a:lnTo>
-                  <a:lnTo>
-                    <a:pt x="892467" y="657508"/>
-                  </a:lnTo>
-                  <a:lnTo>
-                    <a:pt x="966227" y="703872"/>
-                  </a:lnTo>
-                  <a:lnTo>
-                    <a:pt x="1039987" y="749150"/>
-                  </a:lnTo>
-                  <a:lnTo>
-                    <a:pt x="1113747" y="793368"/>
-                  </a:lnTo>
-                  <a:lnTo>
-                    <a:pt x="1187508" y="836550"/>
-                  </a:lnTo>
-                  <a:lnTo>
-                    <a:pt x="1261268" y="878720"/>
-                  </a:lnTo>
-                  <a:lnTo>
-                    <a:pt x="1335028" y="919903"/>
-                  </a:lnTo>
-                  <a:lnTo>
-                    <a:pt x="1408788" y="960121"/>
-                  </a:lnTo>
-                  <a:lnTo>
-                    <a:pt x="1482548" y="999397"/>
-                  </a:lnTo>
-                  <a:lnTo>
-                    <a:pt x="1556308" y="1037753"/>
-                  </a:lnTo>
-                  <a:lnTo>
-                    <a:pt x="1630068" y="1075210"/>
-                  </a:lnTo>
-                  <a:lnTo>
-                    <a:pt x="1703828" y="1111790"/>
-                  </a:lnTo>
-                  <a:lnTo>
-                    <a:pt x="1777588" y="1147513"/>
-                  </a:lnTo>
-                  <a:lnTo>
-                    <a:pt x="1851348" y="1182400"/>
-                  </a:lnTo>
-                  <a:lnTo>
-                    <a:pt x="1925108" y="1216469"/>
-                  </a:lnTo>
-                  <a:lnTo>
-                    <a:pt x="1998868" y="1249740"/>
-                  </a:lnTo>
-                  <a:lnTo>
-                    <a:pt x="2072628" y="1282232"/>
-                  </a:lnTo>
-                  <a:lnTo>
-                    <a:pt x="2146388" y="1313962"/>
-                  </a:lnTo>
-                  <a:lnTo>
-                    <a:pt x="2220148" y="1344950"/>
-                  </a:lnTo>
-                  <a:lnTo>
-                    <a:pt x="2293908" y="1375211"/>
-                  </a:lnTo>
-                  <a:lnTo>
-                    <a:pt x="2367668" y="1404764"/>
-                  </a:lnTo>
-                  <a:lnTo>
-                    <a:pt x="2441428" y="1433625"/>
-                  </a:lnTo>
-                  <a:lnTo>
-                    <a:pt x="2515188" y="1461809"/>
-                  </a:lnTo>
-                  <a:lnTo>
-                    <a:pt x="2588948" y="1489333"/>
-                  </a:lnTo>
-                  <a:lnTo>
-                    <a:pt x="2662708" y="1516213"/>
-                  </a:lnTo>
-                  <a:lnTo>
-                    <a:pt x="2736468" y="1542463"/>
-                  </a:lnTo>
-                  <a:lnTo>
-                    <a:pt x="2810228" y="1568098"/>
-                  </a:lnTo>
-                  <a:lnTo>
-                    <a:pt x="2883988" y="1593132"/>
-                  </a:lnTo>
-                  <a:lnTo>
-                    <a:pt x="2957748" y="1617580"/>
-                  </a:lnTo>
-                  <a:lnTo>
-                    <a:pt x="3031508" y="1641456"/>
-                  </a:lnTo>
-                  <a:lnTo>
-                    <a:pt x="3105268" y="1664772"/>
-                  </a:lnTo>
-                  <a:lnTo>
-                    <a:pt x="3179028" y="1687542"/>
-                  </a:lnTo>
-                  <a:lnTo>
-                    <a:pt x="3252788" y="1709778"/>
-                  </a:lnTo>
-                  <a:lnTo>
-                    <a:pt x="3326548" y="1731494"/>
-                  </a:lnTo>
-                  <a:lnTo>
-                    <a:pt x="3400308" y="1752701"/>
-                  </a:lnTo>
-                  <a:lnTo>
-                    <a:pt x="3474068" y="1769485"/>
-                  </a:lnTo>
-                  <a:lnTo>
-                    <a:pt x="3547828" y="1777067"/>
-                  </a:lnTo>
-                  <a:lnTo>
-                    <a:pt x="3621588" y="1784583"/>
-                  </a:lnTo>
-                  <a:lnTo>
-                    <a:pt x="3695348" y="1792033"/>
-                  </a:lnTo>
-                  <a:lnTo>
-                    <a:pt x="3769108" y="1799418"/>
-                  </a:lnTo>
-                  <a:lnTo>
-                    <a:pt x="3842868" y="1806738"/>
-                  </a:lnTo>
-                  <a:lnTo>
-                    <a:pt x="3916628" y="1813995"/>
-                  </a:lnTo>
-                  <a:lnTo>
-                    <a:pt x="3990388" y="1821188"/>
-                  </a:lnTo>
-                  <a:lnTo>
-                    <a:pt x="4064149" y="1828318"/>
-                  </a:lnTo>
-                  <a:lnTo>
-                    <a:pt x="4137909" y="1835386"/>
-                  </a:lnTo>
-                  <a:lnTo>
-                    <a:pt x="4211669" y="1842392"/>
-                  </a:lnTo>
-                  <a:lnTo>
-                    <a:pt x="4285429" y="1849337"/>
-                  </a:lnTo>
-                  <a:lnTo>
-                    <a:pt x="4359189" y="1856221"/>
-                  </a:lnTo>
-                  <a:lnTo>
-                    <a:pt x="4432949" y="1863045"/>
-                  </a:lnTo>
-                  <a:lnTo>
-                    <a:pt x="4506709" y="1869809"/>
-                  </a:lnTo>
-                  <a:lnTo>
-                    <a:pt x="4580469" y="1876514"/>
-                  </a:lnTo>
-                  <a:lnTo>
-                    <a:pt x="4654229" y="1883161"/>
-                  </a:lnTo>
-                  <a:lnTo>
-                    <a:pt x="4727989" y="1889749"/>
-                  </a:lnTo>
-                  <a:lnTo>
-                    <a:pt x="4801749" y="1896280"/>
-                  </a:lnTo>
-                  <a:lnTo>
-                    <a:pt x="4875509" y="1902754"/>
-                  </a:lnTo>
-                  <a:lnTo>
-                    <a:pt x="4949269" y="1909171"/>
-                  </a:lnTo>
-                  <a:lnTo>
-                    <a:pt x="5023029" y="1915532"/>
-                  </a:lnTo>
-                  <a:lnTo>
-                    <a:pt x="5096789" y="1921838"/>
-                  </a:lnTo>
-                  <a:lnTo>
-                    <a:pt x="5170549" y="1928088"/>
-                  </a:lnTo>
-                  <a:lnTo>
-                    <a:pt x="5244309" y="1934284"/>
-                  </a:lnTo>
-                  <a:lnTo>
-                    <a:pt x="5318069" y="1940425"/>
-                  </a:lnTo>
-                  <a:lnTo>
-                    <a:pt x="5391829" y="1946513"/>
-                  </a:lnTo>
-                  <a:lnTo>
-                    <a:pt x="5465589" y="1952548"/>
-                  </a:lnTo>
-                  <a:lnTo>
-                    <a:pt x="5539349" y="1958530"/>
-                  </a:lnTo>
-                  <a:lnTo>
-                    <a:pt x="5613109" y="1964459"/>
-                  </a:lnTo>
-                  <a:lnTo>
-                    <a:pt x="5686869" y="1970337"/>
-                  </a:lnTo>
-                  <a:lnTo>
-                    <a:pt x="5760629" y="1976163"/>
-                  </a:lnTo>
-                  <a:lnTo>
-                    <a:pt x="5834389" y="1981939"/>
-                  </a:lnTo>
-                  <a:lnTo>
-                    <a:pt x="5908149" y="1987664"/>
-                  </a:lnTo>
-                  <a:lnTo>
-                    <a:pt x="5981909" y="1993339"/>
-                  </a:lnTo>
-                  <a:lnTo>
-                    <a:pt x="6055669" y="1998964"/>
-                  </a:lnTo>
-                  <a:lnTo>
-                    <a:pt x="6129429" y="2004540"/>
-                  </a:lnTo>
-                  <a:lnTo>
-                    <a:pt x="6203189" y="2010068"/>
-                  </a:lnTo>
-                  <a:lnTo>
-                    <a:pt x="6276949" y="2015547"/>
-                  </a:lnTo>
-                  <a:lnTo>
-                    <a:pt x="6350709" y="2020978"/>
-                  </a:lnTo>
-                  <a:lnTo>
-                    <a:pt x="6424469" y="2026361"/>
-                  </a:lnTo>
-                  <a:lnTo>
-                    <a:pt x="6498229" y="2031698"/>
-                  </a:lnTo>
-                  <a:lnTo>
-                    <a:pt x="6571989" y="2036988"/>
-                  </a:lnTo>
-                  <a:lnTo>
-                    <a:pt x="6645749" y="2042232"/>
-                  </a:lnTo>
-                  <a:lnTo>
-                    <a:pt x="6719509" y="2047430"/>
-                  </a:lnTo>
-                  <a:lnTo>
-                    <a:pt x="6793269" y="2052582"/>
-                  </a:lnTo>
-                  <a:lnTo>
-                    <a:pt x="6867029" y="2057690"/>
-                  </a:lnTo>
-                  <a:lnTo>
-                    <a:pt x="6940789" y="2062752"/>
-                  </a:lnTo>
-                  <a:lnTo>
-                    <a:pt x="7014550" y="2067771"/>
-                  </a:lnTo>
-                  <a:lnTo>
-                    <a:pt x="7088310" y="2072745"/>
-                  </a:lnTo>
-                  <a:lnTo>
-                    <a:pt x="7162070" y="2077677"/>
-                  </a:lnTo>
-                  <a:lnTo>
-                    <a:pt x="7235830" y="2082565"/>
+                    <a:pt x="7347" y="5994"/>
+                  </a:lnTo>
+                  <a:lnTo>
+                    <a:pt x="81107" y="64764"/>
+                  </a:lnTo>
+                  <a:lnTo>
+                    <a:pt x="154867" y="122157"/>
+                  </a:lnTo>
+                  <a:lnTo>
+                    <a:pt x="228627" y="178205"/>
+                  </a:lnTo>
+                  <a:lnTo>
+                    <a:pt x="302387" y="232941"/>
+                  </a:lnTo>
+                  <a:lnTo>
+                    <a:pt x="376147" y="286394"/>
+                  </a:lnTo>
+                  <a:lnTo>
+                    <a:pt x="449907" y="338596"/>
+                  </a:lnTo>
+                  <a:lnTo>
+                    <a:pt x="523667" y="389574"/>
+                  </a:lnTo>
+                  <a:lnTo>
+                    <a:pt x="597427" y="439359"/>
+                  </a:lnTo>
+                  <a:lnTo>
+                    <a:pt x="671187" y="487977"/>
+                  </a:lnTo>
+                  <a:lnTo>
+                    <a:pt x="744947" y="535456"/>
+                  </a:lnTo>
+                  <a:lnTo>
+                    <a:pt x="818707" y="581824"/>
+                  </a:lnTo>
+                  <a:lnTo>
+                    <a:pt x="892467" y="627105"/>
+                  </a:lnTo>
+                  <a:lnTo>
+                    <a:pt x="966227" y="671325"/>
+                  </a:lnTo>
+                  <a:lnTo>
+                    <a:pt x="1039987" y="714510"/>
+                  </a:lnTo>
+                  <a:lnTo>
+                    <a:pt x="1113747" y="756683"/>
+                  </a:lnTo>
+                  <a:lnTo>
+                    <a:pt x="1187508" y="797868"/>
+                  </a:lnTo>
+                  <a:lnTo>
+                    <a:pt x="1261268" y="838089"/>
+                  </a:lnTo>
+                  <a:lnTo>
+                    <a:pt x="1335028" y="877367"/>
+                  </a:lnTo>
+                  <a:lnTo>
+                    <a:pt x="1408788" y="915725"/>
+                  </a:lnTo>
+                  <a:lnTo>
+                    <a:pt x="1482548" y="953185"/>
+                  </a:lnTo>
+                  <a:lnTo>
+                    <a:pt x="1556308" y="989767"/>
+                  </a:lnTo>
+                  <a:lnTo>
+                    <a:pt x="1630068" y="1025493"/>
+                  </a:lnTo>
+                  <a:lnTo>
+                    <a:pt x="1703828" y="1060381"/>
+                  </a:lnTo>
+                  <a:lnTo>
+                    <a:pt x="1777588" y="1094453"/>
+                  </a:lnTo>
+                  <a:lnTo>
+                    <a:pt x="1851348" y="1127726"/>
+                  </a:lnTo>
+                  <a:lnTo>
+                    <a:pt x="1925108" y="1160220"/>
+                  </a:lnTo>
+                  <a:lnTo>
+                    <a:pt x="1998868" y="1191952"/>
+                  </a:lnTo>
+                  <a:lnTo>
+                    <a:pt x="2072628" y="1222942"/>
+                  </a:lnTo>
+                  <a:lnTo>
+                    <a:pt x="2146388" y="1253205"/>
+                  </a:lnTo>
+                  <a:lnTo>
+                    <a:pt x="2220148" y="1282760"/>
+                  </a:lnTo>
+                  <a:lnTo>
+                    <a:pt x="2293908" y="1311622"/>
+                  </a:lnTo>
+                  <a:lnTo>
+                    <a:pt x="2367668" y="1339808"/>
+                  </a:lnTo>
+                  <a:lnTo>
+                    <a:pt x="2441428" y="1367334"/>
+                  </a:lnTo>
+                  <a:lnTo>
+                    <a:pt x="2515188" y="1394216"/>
+                  </a:lnTo>
+                  <a:lnTo>
+                    <a:pt x="2588948" y="1420467"/>
+                  </a:lnTo>
+                  <a:lnTo>
+                    <a:pt x="2662708" y="1446104"/>
+                  </a:lnTo>
+                  <a:lnTo>
+                    <a:pt x="2736468" y="1471140"/>
+                  </a:lnTo>
+                  <a:lnTo>
+                    <a:pt x="2810228" y="1495589"/>
+                  </a:lnTo>
+                  <a:lnTo>
+                    <a:pt x="2883988" y="1519466"/>
+                  </a:lnTo>
+                  <a:lnTo>
+                    <a:pt x="2957748" y="1542784"/>
+                  </a:lnTo>
+                  <a:lnTo>
+                    <a:pt x="3031508" y="1565555"/>
+                  </a:lnTo>
+                  <a:lnTo>
+                    <a:pt x="3105268" y="1587793"/>
+                  </a:lnTo>
+                  <a:lnTo>
+                    <a:pt x="3179028" y="1609511"/>
+                  </a:lnTo>
+                  <a:lnTo>
+                    <a:pt x="3252788" y="1630719"/>
+                  </a:lnTo>
+                  <a:lnTo>
+                    <a:pt x="3326548" y="1651431"/>
+                  </a:lnTo>
+                  <a:lnTo>
+                    <a:pt x="3400308" y="1671657"/>
+                  </a:lnTo>
+                  <a:lnTo>
+                    <a:pt x="3474068" y="1687664"/>
+                  </a:lnTo>
+                  <a:lnTo>
+                    <a:pt x="3547828" y="1694896"/>
+                  </a:lnTo>
+                  <a:lnTo>
+                    <a:pt x="3621588" y="1702064"/>
+                  </a:lnTo>
+                  <a:lnTo>
+                    <a:pt x="3695348" y="1709170"/>
+                  </a:lnTo>
+                  <a:lnTo>
+                    <a:pt x="3769108" y="1716214"/>
+                  </a:lnTo>
+                  <a:lnTo>
+                    <a:pt x="3842868" y="1723196"/>
+                  </a:lnTo>
+                  <a:lnTo>
+                    <a:pt x="3916628" y="1730116"/>
+                  </a:lnTo>
+                  <a:lnTo>
+                    <a:pt x="3990388" y="1736977"/>
+                  </a:lnTo>
+                  <a:lnTo>
+                    <a:pt x="4064149" y="1743777"/>
+                  </a:lnTo>
+                  <a:lnTo>
+                    <a:pt x="4137909" y="1750518"/>
+                  </a:lnTo>
+                  <a:lnTo>
+                    <a:pt x="4211669" y="1757201"/>
+                  </a:lnTo>
+                  <a:lnTo>
+                    <a:pt x="4285429" y="1763824"/>
+                  </a:lnTo>
+                  <a:lnTo>
+                    <a:pt x="4359189" y="1770390"/>
+                  </a:lnTo>
+                  <a:lnTo>
+                    <a:pt x="4432949" y="1776898"/>
+                  </a:lnTo>
+                  <a:lnTo>
+                    <a:pt x="4506709" y="1783350"/>
+                  </a:lnTo>
+                  <a:lnTo>
+                    <a:pt x="4580469" y="1789745"/>
+                  </a:lnTo>
+                  <a:lnTo>
+                    <a:pt x="4654229" y="1796084"/>
+                  </a:lnTo>
+                  <a:lnTo>
+                    <a:pt x="4727989" y="1802368"/>
+                  </a:lnTo>
+                  <a:lnTo>
+                    <a:pt x="4801749" y="1808597"/>
+                  </a:lnTo>
+                  <a:lnTo>
+                    <a:pt x="4875509" y="1814771"/>
+                  </a:lnTo>
+                  <a:lnTo>
+                    <a:pt x="4949269" y="1820892"/>
+                  </a:lnTo>
+                  <a:lnTo>
+                    <a:pt x="5023029" y="1826959"/>
+                  </a:lnTo>
+                  <a:lnTo>
+                    <a:pt x="5096789" y="1832973"/>
+                  </a:lnTo>
+                  <a:lnTo>
+                    <a:pt x="5170549" y="1838934"/>
+                  </a:lnTo>
+                  <a:lnTo>
+                    <a:pt x="5244309" y="1844843"/>
+                  </a:lnTo>
+                  <a:lnTo>
+                    <a:pt x="5318069" y="1850701"/>
+                  </a:lnTo>
+                  <a:lnTo>
+                    <a:pt x="5391829" y="1856507"/>
+                  </a:lnTo>
+                  <a:lnTo>
+                    <a:pt x="5465589" y="1862263"/>
+                  </a:lnTo>
+                  <a:lnTo>
+                    <a:pt x="5539349" y="1867968"/>
+                  </a:lnTo>
+                  <a:lnTo>
+                    <a:pt x="5613109" y="1873623"/>
+                  </a:lnTo>
+                  <a:lnTo>
+                    <a:pt x="5686869" y="1879229"/>
+                  </a:lnTo>
+                  <a:lnTo>
+                    <a:pt x="5760629" y="1884786"/>
+                  </a:lnTo>
+                  <a:lnTo>
+                    <a:pt x="5834389" y="1890295"/>
+                  </a:lnTo>
+                  <a:lnTo>
+                    <a:pt x="5908149" y="1895755"/>
+                  </a:lnTo>
+                  <a:lnTo>
+                    <a:pt x="5981909" y="1901167"/>
+                  </a:lnTo>
+                  <a:lnTo>
+                    <a:pt x="6055669" y="1906533"/>
+                  </a:lnTo>
+                  <a:lnTo>
+                    <a:pt x="6129429" y="1911851"/>
+                  </a:lnTo>
+                  <a:lnTo>
+                    <a:pt x="6203189" y="1917123"/>
+                  </a:lnTo>
+                  <a:lnTo>
+                    <a:pt x="6276949" y="1922348"/>
+                  </a:lnTo>
+                  <a:lnTo>
+                    <a:pt x="6350709" y="1927528"/>
+                  </a:lnTo>
+                  <a:lnTo>
+                    <a:pt x="6424469" y="1932663"/>
+                  </a:lnTo>
+                  <a:lnTo>
+                    <a:pt x="6498229" y="1937753"/>
+                  </a:lnTo>
+                  <a:lnTo>
+                    <a:pt x="6571989" y="1942798"/>
+                  </a:lnTo>
+                  <a:lnTo>
+                    <a:pt x="6645749" y="1947800"/>
+                  </a:lnTo>
+                  <a:lnTo>
+                    <a:pt x="6719509" y="1952757"/>
+                  </a:lnTo>
+                  <a:lnTo>
+                    <a:pt x="6793269" y="1957671"/>
+                  </a:lnTo>
+                  <a:lnTo>
+                    <a:pt x="6867029" y="1962543"/>
+                  </a:lnTo>
+                  <a:lnTo>
+                    <a:pt x="6940789" y="1967371"/>
+                  </a:lnTo>
+                  <a:lnTo>
+                    <a:pt x="7014550" y="1972158"/>
+                  </a:lnTo>
+                  <a:lnTo>
+                    <a:pt x="7088310" y="1976902"/>
+                  </a:lnTo>
+                  <a:lnTo>
+                    <a:pt x="7162070" y="1981606"/>
+                  </a:lnTo>
+                  <a:lnTo>
+                    <a:pt x="7235830" y="1986268"/>
                   </a:lnTo>
                 </a:path>
               </a:pathLst>
@@ -3958,309 +3958,309 @@
           </p:nvSpPr>
           <p:spPr>
             <a:xfrm>
-              <a:off x="817517" y="4237617"/>
-              <a:ext cx="7235830" cy="1053819"/>
+              <a:off x="817517" y="4306307"/>
+              <a:ext cx="7235830" cy="1005091"/>
             </a:xfrm>
             <a:custGeom>
               <a:avLst/>
               <a:pathLst>
-                <a:path w="7235830" h="1053819">
+                <a:path w="7235830" h="1005091">
                   <a:moveTo>
-                    <a:pt x="7235830" y="1053819"/>
+                    <a:pt x="7235830" y="1005091"/>
                   </a:moveTo>
                   <a:lnTo>
-                    <a:pt x="7162070" y="1047637"/>
-                  </a:lnTo>
-                  <a:lnTo>
-                    <a:pt x="7088310" y="1041305"/>
-                  </a:lnTo>
-                  <a:lnTo>
-                    <a:pt x="7014550" y="1034822"/>
-                  </a:lnTo>
-                  <a:lnTo>
-                    <a:pt x="6940789" y="1028184"/>
-                  </a:lnTo>
-                  <a:lnTo>
-                    <a:pt x="6867029" y="1021386"/>
-                  </a:lnTo>
-                  <a:lnTo>
-                    <a:pt x="6793269" y="1014425"/>
-                  </a:lnTo>
-                  <a:lnTo>
-                    <a:pt x="6719509" y="1007297"/>
-                  </a:lnTo>
-                  <a:lnTo>
-                    <a:pt x="6645749" y="999999"/>
-                  </a:lnTo>
-                  <a:lnTo>
-                    <a:pt x="6571989" y="992525"/>
-                  </a:lnTo>
-                  <a:lnTo>
-                    <a:pt x="6498229" y="984872"/>
-                  </a:lnTo>
-                  <a:lnTo>
-                    <a:pt x="6424469" y="977035"/>
-                  </a:lnTo>
-                  <a:lnTo>
-                    <a:pt x="6350709" y="969010"/>
-                  </a:lnTo>
-                  <a:lnTo>
-                    <a:pt x="6276949" y="960793"/>
-                  </a:lnTo>
-                  <a:lnTo>
-                    <a:pt x="6203189" y="952379"/>
-                  </a:lnTo>
-                  <a:lnTo>
-                    <a:pt x="6129429" y="943763"/>
-                  </a:lnTo>
-                  <a:lnTo>
-                    <a:pt x="6055669" y="934940"/>
-                  </a:lnTo>
-                  <a:lnTo>
-                    <a:pt x="5981909" y="925906"/>
-                  </a:lnTo>
-                  <a:lnTo>
-                    <a:pt x="5908149" y="916655"/>
-                  </a:lnTo>
-                  <a:lnTo>
-                    <a:pt x="5834389" y="907182"/>
-                  </a:lnTo>
-                  <a:lnTo>
-                    <a:pt x="5760629" y="897482"/>
-                  </a:lnTo>
-                  <a:lnTo>
-                    <a:pt x="5686869" y="887549"/>
-                  </a:lnTo>
-                  <a:lnTo>
-                    <a:pt x="5613109" y="877378"/>
-                  </a:lnTo>
-                  <a:lnTo>
-                    <a:pt x="5539349" y="866963"/>
-                  </a:lnTo>
-                  <a:lnTo>
-                    <a:pt x="5465589" y="856298"/>
-                  </a:lnTo>
-                  <a:lnTo>
-                    <a:pt x="5391829" y="845378"/>
-                  </a:lnTo>
-                  <a:lnTo>
-                    <a:pt x="5318069" y="834195"/>
-                  </a:lnTo>
-                  <a:lnTo>
-                    <a:pt x="5244309" y="822744"/>
-                  </a:lnTo>
-                  <a:lnTo>
-                    <a:pt x="5170549" y="811019"/>
-                  </a:lnTo>
-                  <a:lnTo>
-                    <a:pt x="5096789" y="799012"/>
-                  </a:lnTo>
-                  <a:lnTo>
-                    <a:pt x="5023029" y="786718"/>
-                  </a:lnTo>
-                  <a:lnTo>
-                    <a:pt x="4949269" y="774128"/>
-                  </a:lnTo>
-                  <a:lnTo>
-                    <a:pt x="4875509" y="761236"/>
-                  </a:lnTo>
-                  <a:lnTo>
-                    <a:pt x="4801749" y="748036"/>
-                  </a:lnTo>
-                  <a:lnTo>
-                    <a:pt x="4727989" y="734518"/>
-                  </a:lnTo>
-                  <a:lnTo>
-                    <a:pt x="4654229" y="720677"/>
-                  </a:lnTo>
-                  <a:lnTo>
-                    <a:pt x="4580469" y="706503"/>
-                  </a:lnTo>
-                  <a:lnTo>
-                    <a:pt x="4506709" y="691989"/>
-                  </a:lnTo>
-                  <a:lnTo>
-                    <a:pt x="4432949" y="677128"/>
-                  </a:lnTo>
-                  <a:lnTo>
-                    <a:pt x="4359189" y="661909"/>
-                  </a:lnTo>
-                  <a:lnTo>
-                    <a:pt x="4285429" y="646326"/>
-                  </a:lnTo>
-                  <a:lnTo>
-                    <a:pt x="4211669" y="630369"/>
-                  </a:lnTo>
-                  <a:lnTo>
-                    <a:pt x="4137909" y="614029"/>
-                  </a:lnTo>
-                  <a:lnTo>
-                    <a:pt x="4064149" y="597298"/>
-                  </a:lnTo>
-                  <a:lnTo>
-                    <a:pt x="3990388" y="580164"/>
-                  </a:lnTo>
-                  <a:lnTo>
-                    <a:pt x="3916628" y="562620"/>
-                  </a:lnTo>
-                  <a:lnTo>
-                    <a:pt x="3842868" y="544656"/>
-                  </a:lnTo>
-                  <a:lnTo>
-                    <a:pt x="3769108" y="526260"/>
-                  </a:lnTo>
-                  <a:lnTo>
-                    <a:pt x="3695348" y="507423"/>
-                  </a:lnTo>
-                  <a:lnTo>
-                    <a:pt x="3621588" y="488134"/>
-                  </a:lnTo>
-                  <a:lnTo>
-                    <a:pt x="3547828" y="468383"/>
-                  </a:lnTo>
-                  <a:lnTo>
-                    <a:pt x="3474068" y="448158"/>
-                  </a:lnTo>
-                  <a:lnTo>
-                    <a:pt x="3400308" y="436582"/>
-                  </a:lnTo>
-                  <a:lnTo>
-                    <a:pt x="3326548" y="428865"/>
-                  </a:lnTo>
-                  <a:lnTo>
-                    <a:pt x="3252788" y="421081"/>
-                  </a:lnTo>
-                  <a:lnTo>
-                    <a:pt x="3179028" y="413227"/>
-                  </a:lnTo>
-                  <a:lnTo>
-                    <a:pt x="3105268" y="405305"/>
-                  </a:lnTo>
-                  <a:lnTo>
-                    <a:pt x="3031508" y="397313"/>
-                  </a:lnTo>
-                  <a:lnTo>
-                    <a:pt x="2957748" y="389250"/>
-                  </a:lnTo>
-                  <a:lnTo>
-                    <a:pt x="2883988" y="381116"/>
-                  </a:lnTo>
-                  <a:lnTo>
-                    <a:pt x="2810228" y="372910"/>
-                  </a:lnTo>
-                  <a:lnTo>
-                    <a:pt x="2736468" y="364632"/>
-                  </a:lnTo>
-                  <a:lnTo>
-                    <a:pt x="2662708" y="356282"/>
-                  </a:lnTo>
-                  <a:lnTo>
-                    <a:pt x="2588948" y="347857"/>
-                  </a:lnTo>
-                  <a:lnTo>
-                    <a:pt x="2515188" y="339358"/>
-                  </a:lnTo>
-                  <a:lnTo>
-                    <a:pt x="2441428" y="330784"/>
-                  </a:lnTo>
-                  <a:lnTo>
-                    <a:pt x="2367668" y="322135"/>
-                  </a:lnTo>
-                  <a:lnTo>
-                    <a:pt x="2293908" y="313409"/>
-                  </a:lnTo>
-                  <a:lnTo>
-                    <a:pt x="2220148" y="304606"/>
-                  </a:lnTo>
-                  <a:lnTo>
-                    <a:pt x="2146388" y="295726"/>
-                  </a:lnTo>
-                  <a:lnTo>
-                    <a:pt x="2072628" y="286767"/>
-                  </a:lnTo>
-                  <a:lnTo>
-                    <a:pt x="1998868" y="277729"/>
-                  </a:lnTo>
-                  <a:lnTo>
-                    <a:pt x="1925108" y="268612"/>
-                  </a:lnTo>
-                  <a:lnTo>
-                    <a:pt x="1851348" y="259414"/>
-                  </a:lnTo>
-                  <a:lnTo>
-                    <a:pt x="1777588" y="250135"/>
-                  </a:lnTo>
-                  <a:lnTo>
-                    <a:pt x="1703828" y="240775"/>
-                  </a:lnTo>
-                  <a:lnTo>
-                    <a:pt x="1630068" y="231332"/>
-                  </a:lnTo>
-                  <a:lnTo>
-                    <a:pt x="1556308" y="221805"/>
-                  </a:lnTo>
-                  <a:lnTo>
-                    <a:pt x="1482548" y="212194"/>
-                  </a:lnTo>
-                  <a:lnTo>
-                    <a:pt x="1408788" y="202499"/>
-                  </a:lnTo>
-                  <a:lnTo>
-                    <a:pt x="1335028" y="192718"/>
-                  </a:lnTo>
-                  <a:lnTo>
-                    <a:pt x="1261268" y="182851"/>
-                  </a:lnTo>
-                  <a:lnTo>
-                    <a:pt x="1187508" y="172897"/>
-                  </a:lnTo>
-                  <a:lnTo>
-                    <a:pt x="1113747" y="162855"/>
-                  </a:lnTo>
-                  <a:lnTo>
-                    <a:pt x="1039987" y="152725"/>
-                  </a:lnTo>
-                  <a:lnTo>
-                    <a:pt x="966227" y="142505"/>
-                  </a:lnTo>
-                  <a:lnTo>
-                    <a:pt x="892467" y="132195"/>
-                  </a:lnTo>
-                  <a:lnTo>
-                    <a:pt x="818707" y="121795"/>
-                  </a:lnTo>
-                  <a:lnTo>
-                    <a:pt x="744947" y="111302"/>
-                  </a:lnTo>
-                  <a:lnTo>
-                    <a:pt x="671187" y="100717"/>
-                  </a:lnTo>
-                  <a:lnTo>
-                    <a:pt x="597427" y="90039"/>
-                  </a:lnTo>
-                  <a:lnTo>
-                    <a:pt x="523667" y="79266"/>
-                  </a:lnTo>
-                  <a:lnTo>
-                    <a:pt x="449907" y="68399"/>
-                  </a:lnTo>
-                  <a:lnTo>
-                    <a:pt x="376147" y="57435"/>
-                  </a:lnTo>
-                  <a:lnTo>
-                    <a:pt x="302387" y="46375"/>
-                  </a:lnTo>
-                  <a:lnTo>
-                    <a:pt x="228627" y="35217"/>
-                  </a:lnTo>
-                  <a:lnTo>
-                    <a:pt x="154867" y="23961"/>
-                  </a:lnTo>
-                  <a:lnTo>
-                    <a:pt x="81107" y="12606"/>
-                  </a:lnTo>
-                  <a:lnTo>
-                    <a:pt x="7347" y="1151"/>
+                    <a:pt x="7162070" y="999194"/>
+                  </a:lnTo>
+                  <a:lnTo>
+                    <a:pt x="7088310" y="993156"/>
+                  </a:lnTo>
+                  <a:lnTo>
+                    <a:pt x="7014550" y="986973"/>
+                  </a:lnTo>
+                  <a:lnTo>
+                    <a:pt x="6940789" y="980641"/>
+                  </a:lnTo>
+                  <a:lnTo>
+                    <a:pt x="6867029" y="974158"/>
+                  </a:lnTo>
+                  <a:lnTo>
+                    <a:pt x="6793269" y="967519"/>
+                  </a:lnTo>
+                  <a:lnTo>
+                    <a:pt x="6719509" y="960720"/>
+                  </a:lnTo>
+                  <a:lnTo>
+                    <a:pt x="6645749" y="953759"/>
+                  </a:lnTo>
+                  <a:lnTo>
+                    <a:pt x="6571989" y="946631"/>
+                  </a:lnTo>
+                  <a:lnTo>
+                    <a:pt x="6498229" y="939332"/>
+                  </a:lnTo>
+                  <a:lnTo>
+                    <a:pt x="6424469" y="931857"/>
+                  </a:lnTo>
+                  <a:lnTo>
+                    <a:pt x="6350709" y="924204"/>
+                  </a:lnTo>
+                  <a:lnTo>
+                    <a:pt x="6276949" y="916367"/>
+                  </a:lnTo>
+                  <a:lnTo>
+                    <a:pt x="6203189" y="908341"/>
+                  </a:lnTo>
+                  <a:lnTo>
+                    <a:pt x="6129429" y="900124"/>
+                  </a:lnTo>
+                  <a:lnTo>
+                    <a:pt x="6055669" y="891709"/>
+                  </a:lnTo>
+                  <a:lnTo>
+                    <a:pt x="5981909" y="883093"/>
+                  </a:lnTo>
+                  <a:lnTo>
+                    <a:pt x="5908149" y="874269"/>
+                  </a:lnTo>
+                  <a:lnTo>
+                    <a:pt x="5834389" y="865234"/>
+                  </a:lnTo>
+                  <a:lnTo>
+                    <a:pt x="5760629" y="855983"/>
+                  </a:lnTo>
+                  <a:lnTo>
+                    <a:pt x="5686869" y="846509"/>
+                  </a:lnTo>
+                  <a:lnTo>
+                    <a:pt x="5613109" y="836809"/>
+                  </a:lnTo>
+                  <a:lnTo>
+                    <a:pt x="5539349" y="826875"/>
+                  </a:lnTo>
+                  <a:lnTo>
+                    <a:pt x="5465589" y="816704"/>
+                  </a:lnTo>
+                  <a:lnTo>
+                    <a:pt x="5391829" y="806288"/>
+                  </a:lnTo>
+                  <a:lnTo>
+                    <a:pt x="5318069" y="795622"/>
+                  </a:lnTo>
+                  <a:lnTo>
+                    <a:pt x="5244309" y="784701"/>
+                  </a:lnTo>
+                  <a:lnTo>
+                    <a:pt x="5170549" y="773518"/>
+                  </a:lnTo>
+                  <a:lnTo>
+                    <a:pt x="5096789" y="762066"/>
+                  </a:lnTo>
+                  <a:lnTo>
+                    <a:pt x="5023029" y="750340"/>
+                  </a:lnTo>
+                  <a:lnTo>
+                    <a:pt x="4949269" y="738333"/>
+                  </a:lnTo>
+                  <a:lnTo>
+                    <a:pt x="4875509" y="726037"/>
+                  </a:lnTo>
+                  <a:lnTo>
+                    <a:pt x="4801749" y="713447"/>
+                  </a:lnTo>
+                  <a:lnTo>
+                    <a:pt x="4727989" y="700554"/>
+                  </a:lnTo>
+                  <a:lnTo>
+                    <a:pt x="4654229" y="687353"/>
+                  </a:lnTo>
+                  <a:lnTo>
+                    <a:pt x="4580469" y="673834"/>
+                  </a:lnTo>
+                  <a:lnTo>
+                    <a:pt x="4506709" y="659992"/>
+                  </a:lnTo>
+                  <a:lnTo>
+                    <a:pt x="4432949" y="645817"/>
+                  </a:lnTo>
+                  <a:lnTo>
+                    <a:pt x="4359189" y="631303"/>
+                  </a:lnTo>
+                  <a:lnTo>
+                    <a:pt x="4285429" y="616440"/>
+                  </a:lnTo>
+                  <a:lnTo>
+                    <a:pt x="4211669" y="601221"/>
+                  </a:lnTo>
+                  <a:lnTo>
+                    <a:pt x="4137909" y="585637"/>
+                  </a:lnTo>
+                  <a:lnTo>
+                    <a:pt x="4064149" y="569679"/>
+                  </a:lnTo>
+                  <a:lnTo>
+                    <a:pt x="3990388" y="553338"/>
+                  </a:lnTo>
+                  <a:lnTo>
+                    <a:pt x="3916628" y="536605"/>
+                  </a:lnTo>
+                  <a:lnTo>
+                    <a:pt x="3842868" y="519471"/>
+                  </a:lnTo>
+                  <a:lnTo>
+                    <a:pt x="3769108" y="501926"/>
+                  </a:lnTo>
+                  <a:lnTo>
+                    <a:pt x="3695348" y="483960"/>
+                  </a:lnTo>
+                  <a:lnTo>
+                    <a:pt x="3621588" y="465563"/>
+                  </a:lnTo>
+                  <a:lnTo>
+                    <a:pt x="3547828" y="446725"/>
+                  </a:lnTo>
+                  <a:lnTo>
+                    <a:pt x="3474068" y="427435"/>
+                  </a:lnTo>
+                  <a:lnTo>
+                    <a:pt x="3400308" y="416394"/>
+                  </a:lnTo>
+                  <a:lnTo>
+                    <a:pt x="3326548" y="409035"/>
+                  </a:lnTo>
+                  <a:lnTo>
+                    <a:pt x="3252788" y="401610"/>
+                  </a:lnTo>
+                  <a:lnTo>
+                    <a:pt x="3179028" y="394120"/>
+                  </a:lnTo>
+                  <a:lnTo>
+                    <a:pt x="3105268" y="386564"/>
+                  </a:lnTo>
+                  <a:lnTo>
+                    <a:pt x="3031508" y="378941"/>
+                  </a:lnTo>
+                  <a:lnTo>
+                    <a:pt x="2957748" y="371251"/>
+                  </a:lnTo>
+                  <a:lnTo>
+                    <a:pt x="2883988" y="363493"/>
+                  </a:lnTo>
+                  <a:lnTo>
+                    <a:pt x="2810228" y="355667"/>
+                  </a:lnTo>
+                  <a:lnTo>
+                    <a:pt x="2736468" y="347772"/>
+                  </a:lnTo>
+                  <a:lnTo>
+                    <a:pt x="2662708" y="339807"/>
+                  </a:lnTo>
+                  <a:lnTo>
+                    <a:pt x="2588948" y="331772"/>
+                  </a:lnTo>
+                  <a:lnTo>
+                    <a:pt x="2515188" y="323666"/>
+                  </a:lnTo>
+                  <a:lnTo>
+                    <a:pt x="2441428" y="315489"/>
+                  </a:lnTo>
+                  <a:lnTo>
+                    <a:pt x="2367668" y="307239"/>
+                  </a:lnTo>
+                  <a:lnTo>
+                    <a:pt x="2293908" y="298917"/>
+                  </a:lnTo>
+                  <a:lnTo>
+                    <a:pt x="2220148" y="290521"/>
+                  </a:lnTo>
+                  <a:lnTo>
+                    <a:pt x="2146388" y="282052"/>
+                  </a:lnTo>
+                  <a:lnTo>
+                    <a:pt x="2072628" y="273507"/>
+                  </a:lnTo>
+                  <a:lnTo>
+                    <a:pt x="1998868" y="264887"/>
+                  </a:lnTo>
+                  <a:lnTo>
+                    <a:pt x="1925108" y="256192"/>
+                  </a:lnTo>
+                  <a:lnTo>
+                    <a:pt x="1851348" y="247419"/>
+                  </a:lnTo>
+                  <a:lnTo>
+                    <a:pt x="1777588" y="238569"/>
+                  </a:lnTo>
+                  <a:lnTo>
+                    <a:pt x="1703828" y="229641"/>
+                  </a:lnTo>
+                  <a:lnTo>
+                    <a:pt x="1630068" y="220635"/>
+                  </a:lnTo>
+                  <a:lnTo>
+                    <a:pt x="1556308" y="211549"/>
+                  </a:lnTo>
+                  <a:lnTo>
+                    <a:pt x="1482548" y="202383"/>
+                  </a:lnTo>
+                  <a:lnTo>
+                    <a:pt x="1408788" y="193136"/>
+                  </a:lnTo>
+                  <a:lnTo>
+                    <a:pt x="1335028" y="183807"/>
+                  </a:lnTo>
+                  <a:lnTo>
+                    <a:pt x="1261268" y="174396"/>
+                  </a:lnTo>
+                  <a:lnTo>
+                    <a:pt x="1187508" y="164903"/>
+                  </a:lnTo>
+                  <a:lnTo>
+                    <a:pt x="1113747" y="155325"/>
+                  </a:lnTo>
+                  <a:lnTo>
+                    <a:pt x="1039987" y="145663"/>
+                  </a:lnTo>
+                  <a:lnTo>
+                    <a:pt x="966227" y="135916"/>
+                  </a:lnTo>
+                  <a:lnTo>
+                    <a:pt x="892467" y="126083"/>
+                  </a:lnTo>
+                  <a:lnTo>
+                    <a:pt x="818707" y="116163"/>
+                  </a:lnTo>
+                  <a:lnTo>
+                    <a:pt x="744947" y="106155"/>
+                  </a:lnTo>
+                  <a:lnTo>
+                    <a:pt x="671187" y="96060"/>
+                  </a:lnTo>
+                  <a:lnTo>
+                    <a:pt x="597427" y="85875"/>
+                  </a:lnTo>
+                  <a:lnTo>
+                    <a:pt x="523667" y="75601"/>
+                  </a:lnTo>
+                  <a:lnTo>
+                    <a:pt x="449907" y="65236"/>
+                  </a:lnTo>
+                  <a:lnTo>
+                    <a:pt x="376147" y="54779"/>
+                  </a:lnTo>
+                  <a:lnTo>
+                    <a:pt x="302387" y="44231"/>
+                  </a:lnTo>
+                  <a:lnTo>
+                    <a:pt x="228627" y="33589"/>
+                  </a:lnTo>
+                  <a:lnTo>
+                    <a:pt x="154867" y="22853"/>
+                  </a:lnTo>
+                  <a:lnTo>
+                    <a:pt x="81107" y="12023"/>
+                  </a:lnTo>
+                  <a:lnTo>
+                    <a:pt x="7347" y="1097"/>
                   </a:lnTo>
                   <a:lnTo>
                     <a:pt x="0" y="0"/>
@@ -4283,312 +4283,312 @@
           </p:nvSpPr>
           <p:spPr>
             <a:xfrm>
-              <a:off x="817517" y="3689519"/>
-              <a:ext cx="7235830" cy="1481698"/>
+              <a:off x="817517" y="3783553"/>
+              <a:ext cx="7235830" cy="1413185"/>
             </a:xfrm>
             <a:custGeom>
               <a:avLst/>
               <a:pathLst>
-                <a:path w="7235830" h="1481698">
+                <a:path w="7235830" h="1413185">
                   <a:moveTo>
                     <a:pt x="0" y="0"/>
                   </a:moveTo>
                   <a:lnTo>
-                    <a:pt x="7347" y="3028"/>
-                  </a:lnTo>
-                  <a:lnTo>
-                    <a:pt x="81107" y="32939"/>
-                  </a:lnTo>
-                  <a:lnTo>
-                    <a:pt x="154867" y="62369"/>
-                  </a:lnTo>
-                  <a:lnTo>
-                    <a:pt x="228627" y="91324"/>
-                  </a:lnTo>
-                  <a:lnTo>
-                    <a:pt x="302387" y="119813"/>
-                  </a:lnTo>
-                  <a:lnTo>
-                    <a:pt x="376147" y="147843"/>
-                  </a:lnTo>
-                  <a:lnTo>
-                    <a:pt x="449907" y="175421"/>
-                  </a:lnTo>
-                  <a:lnTo>
-                    <a:pt x="523667" y="202555"/>
-                  </a:lnTo>
-                  <a:lnTo>
-                    <a:pt x="597427" y="229252"/>
-                  </a:lnTo>
-                  <a:lnTo>
-                    <a:pt x="671187" y="255519"/>
-                  </a:lnTo>
-                  <a:lnTo>
-                    <a:pt x="744947" y="281363"/>
-                  </a:lnTo>
-                  <a:lnTo>
-                    <a:pt x="818707" y="306790"/>
-                  </a:lnTo>
-                  <a:lnTo>
-                    <a:pt x="892467" y="331808"/>
-                  </a:lnTo>
-                  <a:lnTo>
-                    <a:pt x="966227" y="356423"/>
-                  </a:lnTo>
-                  <a:lnTo>
-                    <a:pt x="1039987" y="380641"/>
-                  </a:lnTo>
-                  <a:lnTo>
-                    <a:pt x="1113747" y="404469"/>
-                  </a:lnTo>
-                  <a:lnTo>
-                    <a:pt x="1187508" y="427913"/>
-                  </a:lnTo>
-                  <a:lnTo>
-                    <a:pt x="1261268" y="450979"/>
-                  </a:lnTo>
-                  <a:lnTo>
-                    <a:pt x="1335028" y="473674"/>
-                  </a:lnTo>
-                  <a:lnTo>
-                    <a:pt x="1408788" y="496003"/>
-                  </a:lnTo>
-                  <a:lnTo>
-                    <a:pt x="1482548" y="517972"/>
-                  </a:lnTo>
-                  <a:lnTo>
-                    <a:pt x="1556308" y="539588"/>
-                  </a:lnTo>
-                  <a:lnTo>
-                    <a:pt x="1630068" y="560855"/>
-                  </a:lnTo>
-                  <a:lnTo>
-                    <a:pt x="1703828" y="581780"/>
-                  </a:lnTo>
-                  <a:lnTo>
-                    <a:pt x="1777588" y="602367"/>
-                  </a:lnTo>
-                  <a:lnTo>
-                    <a:pt x="1851348" y="622623"/>
-                  </a:lnTo>
-                  <a:lnTo>
-                    <a:pt x="1925108" y="642552"/>
-                  </a:lnTo>
-                  <a:lnTo>
-                    <a:pt x="1998868" y="662161"/>
-                  </a:lnTo>
-                  <a:lnTo>
-                    <a:pt x="2072628" y="681453"/>
-                  </a:lnTo>
-                  <a:lnTo>
-                    <a:pt x="2146388" y="700435"/>
-                  </a:lnTo>
-                  <a:lnTo>
-                    <a:pt x="2220148" y="719111"/>
-                  </a:lnTo>
-                  <a:lnTo>
-                    <a:pt x="2293908" y="737486"/>
-                  </a:lnTo>
-                  <a:lnTo>
-                    <a:pt x="2367668" y="755565"/>
-                  </a:lnTo>
-                  <a:lnTo>
-                    <a:pt x="2441428" y="773353"/>
-                  </a:lnTo>
-                  <a:lnTo>
-                    <a:pt x="2515188" y="790854"/>
-                  </a:lnTo>
-                  <a:lnTo>
-                    <a:pt x="2588948" y="808073"/>
-                  </a:lnTo>
-                  <a:lnTo>
-                    <a:pt x="2662708" y="825015"/>
-                  </a:lnTo>
-                  <a:lnTo>
-                    <a:pt x="2736468" y="841684"/>
-                  </a:lnTo>
-                  <a:lnTo>
-                    <a:pt x="2810228" y="858084"/>
-                  </a:lnTo>
-                  <a:lnTo>
-                    <a:pt x="2883988" y="874221"/>
-                  </a:lnTo>
-                  <a:lnTo>
-                    <a:pt x="2957748" y="890097"/>
-                  </a:lnTo>
-                  <a:lnTo>
-                    <a:pt x="3031508" y="905717"/>
-                  </a:lnTo>
-                  <a:lnTo>
-                    <a:pt x="3105268" y="921086"/>
-                  </a:lnTo>
-                  <a:lnTo>
-                    <a:pt x="3179028" y="936207"/>
-                  </a:lnTo>
-                  <a:lnTo>
-                    <a:pt x="3252788" y="951085"/>
-                  </a:lnTo>
-                  <a:lnTo>
-                    <a:pt x="3326548" y="965723"/>
-                  </a:lnTo>
-                  <a:lnTo>
-                    <a:pt x="3400308" y="980125"/>
-                  </a:lnTo>
-                  <a:lnTo>
-                    <a:pt x="3474068" y="994295"/>
-                  </a:lnTo>
-                  <a:lnTo>
-                    <a:pt x="3547828" y="1008236"/>
-                  </a:lnTo>
-                  <a:lnTo>
-                    <a:pt x="3621588" y="1021954"/>
-                  </a:lnTo>
-                  <a:lnTo>
-                    <a:pt x="3695348" y="1035450"/>
-                  </a:lnTo>
-                  <a:lnTo>
-                    <a:pt x="3769108" y="1048729"/>
-                  </a:lnTo>
-                  <a:lnTo>
-                    <a:pt x="3842868" y="1061793"/>
-                  </a:lnTo>
-                  <a:lnTo>
-                    <a:pt x="3916628" y="1074648"/>
-                  </a:lnTo>
-                  <a:lnTo>
-                    <a:pt x="3990388" y="1087295"/>
-                  </a:lnTo>
-                  <a:lnTo>
-                    <a:pt x="4064149" y="1099738"/>
-                  </a:lnTo>
-                  <a:lnTo>
-                    <a:pt x="4137909" y="1111981"/>
-                  </a:lnTo>
-                  <a:lnTo>
-                    <a:pt x="4211669" y="1124027"/>
-                  </a:lnTo>
-                  <a:lnTo>
-                    <a:pt x="4285429" y="1135879"/>
-                  </a:lnTo>
-                  <a:lnTo>
-                    <a:pt x="4359189" y="1147540"/>
-                  </a:lnTo>
-                  <a:lnTo>
-                    <a:pt x="4432949" y="1159013"/>
-                  </a:lnTo>
-                  <a:lnTo>
-                    <a:pt x="4506709" y="1170301"/>
-                  </a:lnTo>
-                  <a:lnTo>
-                    <a:pt x="4580469" y="1181407"/>
-                  </a:lnTo>
-                  <a:lnTo>
-                    <a:pt x="4654229" y="1192334"/>
-                  </a:lnTo>
-                  <a:lnTo>
-                    <a:pt x="4727989" y="1203086"/>
-                  </a:lnTo>
-                  <a:lnTo>
-                    <a:pt x="4801749" y="1213664"/>
-                  </a:lnTo>
-                  <a:lnTo>
-                    <a:pt x="4875509" y="1224071"/>
-                  </a:lnTo>
-                  <a:lnTo>
-                    <a:pt x="4949269" y="1234311"/>
-                  </a:lnTo>
-                  <a:lnTo>
-                    <a:pt x="5023029" y="1244386"/>
-                  </a:lnTo>
-                  <a:lnTo>
-                    <a:pt x="5096789" y="1254299"/>
-                  </a:lnTo>
-                  <a:lnTo>
-                    <a:pt x="5170549" y="1264052"/>
-                  </a:lnTo>
-                  <a:lnTo>
-                    <a:pt x="5244309" y="1273648"/>
-                  </a:lnTo>
-                  <a:lnTo>
-                    <a:pt x="5318069" y="1283089"/>
-                  </a:lnTo>
-                  <a:lnTo>
-                    <a:pt x="5391829" y="1292378"/>
-                  </a:lnTo>
-                  <a:lnTo>
-                    <a:pt x="5465589" y="1301518"/>
-                  </a:lnTo>
-                  <a:lnTo>
-                    <a:pt x="5539349" y="1310510"/>
-                  </a:lnTo>
-                  <a:lnTo>
-                    <a:pt x="5613109" y="1319358"/>
-                  </a:lnTo>
-                  <a:lnTo>
-                    <a:pt x="5686869" y="1328062"/>
-                  </a:lnTo>
-                  <a:lnTo>
-                    <a:pt x="5760629" y="1336627"/>
-                  </a:lnTo>
-                  <a:lnTo>
-                    <a:pt x="5834389" y="1345054"/>
-                  </a:lnTo>
-                  <a:lnTo>
-                    <a:pt x="5908149" y="1353345"/>
-                  </a:lnTo>
-                  <a:lnTo>
-                    <a:pt x="5981909" y="1361502"/>
-                  </a:lnTo>
-                  <a:lnTo>
-                    <a:pt x="6055669" y="1369528"/>
-                  </a:lnTo>
-                  <a:lnTo>
-                    <a:pt x="6129429" y="1377425"/>
-                  </a:lnTo>
-                  <a:lnTo>
-                    <a:pt x="6203189" y="1385194"/>
-                  </a:lnTo>
-                  <a:lnTo>
-                    <a:pt x="6276949" y="1392838"/>
-                  </a:lnTo>
-                  <a:lnTo>
-                    <a:pt x="6350709" y="1400359"/>
-                  </a:lnTo>
-                  <a:lnTo>
-                    <a:pt x="6424469" y="1407759"/>
-                  </a:lnTo>
-                  <a:lnTo>
-                    <a:pt x="6498229" y="1415040"/>
-                  </a:lnTo>
-                  <a:lnTo>
-                    <a:pt x="6571989" y="1422203"/>
-                  </a:lnTo>
-                  <a:lnTo>
-                    <a:pt x="6645749" y="1429251"/>
-                  </a:lnTo>
-                  <a:lnTo>
-                    <a:pt x="6719509" y="1436186"/>
-                  </a:lnTo>
-                  <a:lnTo>
-                    <a:pt x="6793269" y="1443009"/>
-                  </a:lnTo>
-                  <a:lnTo>
-                    <a:pt x="6867029" y="1449721"/>
-                  </a:lnTo>
-                  <a:lnTo>
-                    <a:pt x="6940789" y="1456326"/>
-                  </a:lnTo>
-                  <a:lnTo>
-                    <a:pt x="7014550" y="1462824"/>
-                  </a:lnTo>
-                  <a:lnTo>
-                    <a:pt x="7088310" y="1469218"/>
-                  </a:lnTo>
-                  <a:lnTo>
-                    <a:pt x="7162070" y="1475509"/>
-                  </a:lnTo>
-                  <a:lnTo>
-                    <a:pt x="7235830" y="1481698"/>
+                    <a:pt x="7347" y="2888"/>
+                  </a:lnTo>
+                  <a:lnTo>
+                    <a:pt x="81107" y="31416"/>
+                  </a:lnTo>
+                  <a:lnTo>
+                    <a:pt x="154867" y="59485"/>
+                  </a:lnTo>
+                  <a:lnTo>
+                    <a:pt x="228627" y="87101"/>
+                  </a:lnTo>
+                  <a:lnTo>
+                    <a:pt x="302387" y="114273"/>
+                  </a:lnTo>
+                  <a:lnTo>
+                    <a:pt x="376147" y="141007"/>
+                  </a:lnTo>
+                  <a:lnTo>
+                    <a:pt x="449907" y="167310"/>
+                  </a:lnTo>
+                  <a:lnTo>
+                    <a:pt x="523667" y="193189"/>
+                  </a:lnTo>
+                  <a:lnTo>
+                    <a:pt x="597427" y="218652"/>
+                  </a:lnTo>
+                  <a:lnTo>
+                    <a:pt x="671187" y="243704"/>
+                  </a:lnTo>
+                  <a:lnTo>
+                    <a:pt x="744947" y="268353"/>
+                  </a:lnTo>
+                  <a:lnTo>
+                    <a:pt x="818707" y="292604"/>
+                  </a:lnTo>
+                  <a:lnTo>
+                    <a:pt x="892467" y="316465"/>
+                  </a:lnTo>
+                  <a:lnTo>
+                    <a:pt x="966227" y="339942"/>
+                  </a:lnTo>
+                  <a:lnTo>
+                    <a:pt x="1039987" y="363040"/>
+                  </a:lnTo>
+                  <a:lnTo>
+                    <a:pt x="1113747" y="385766"/>
+                  </a:lnTo>
+                  <a:lnTo>
+                    <a:pt x="1187508" y="408126"/>
+                  </a:lnTo>
+                  <a:lnTo>
+                    <a:pt x="1261268" y="430126"/>
+                  </a:lnTo>
+                  <a:lnTo>
+                    <a:pt x="1335028" y="451771"/>
+                  </a:lnTo>
+                  <a:lnTo>
+                    <a:pt x="1408788" y="473068"/>
+                  </a:lnTo>
+                  <a:lnTo>
+                    <a:pt x="1482548" y="494021"/>
+                  </a:lnTo>
+                  <a:lnTo>
+                    <a:pt x="1556308" y="514637"/>
+                  </a:lnTo>
+                  <a:lnTo>
+                    <a:pt x="1630068" y="534921"/>
+                  </a:lnTo>
+                  <a:lnTo>
+                    <a:pt x="1703828" y="554878"/>
+                  </a:lnTo>
+                  <a:lnTo>
+                    <a:pt x="1777588" y="574514"/>
+                  </a:lnTo>
+                  <a:lnTo>
+                    <a:pt x="1851348" y="593833"/>
+                  </a:lnTo>
+                  <a:lnTo>
+                    <a:pt x="1925108" y="612841"/>
+                  </a:lnTo>
+                  <a:lnTo>
+                    <a:pt x="1998868" y="631543"/>
+                  </a:lnTo>
+                  <a:lnTo>
+                    <a:pt x="2072628" y="649943"/>
+                  </a:lnTo>
+                  <a:lnTo>
+                    <a:pt x="2146388" y="668047"/>
+                  </a:lnTo>
+                  <a:lnTo>
+                    <a:pt x="2220148" y="685860"/>
+                  </a:lnTo>
+                  <a:lnTo>
+                    <a:pt x="2293908" y="703385"/>
+                  </a:lnTo>
+                  <a:lnTo>
+                    <a:pt x="2367668" y="720628"/>
+                  </a:lnTo>
+                  <a:lnTo>
+                    <a:pt x="2441428" y="737593"/>
+                  </a:lnTo>
+                  <a:lnTo>
+                    <a:pt x="2515188" y="754285"/>
+                  </a:lnTo>
+                  <a:lnTo>
+                    <a:pt x="2588948" y="770708"/>
+                  </a:lnTo>
+                  <a:lnTo>
+                    <a:pt x="2662708" y="786867"/>
+                  </a:lnTo>
+                  <a:lnTo>
+                    <a:pt x="2736468" y="802765"/>
+                  </a:lnTo>
+                  <a:lnTo>
+                    <a:pt x="2810228" y="818407"/>
+                  </a:lnTo>
+                  <a:lnTo>
+                    <a:pt x="2883988" y="833797"/>
+                  </a:lnTo>
+                  <a:lnTo>
+                    <a:pt x="2957748" y="848939"/>
+                  </a:lnTo>
+                  <a:lnTo>
+                    <a:pt x="3031508" y="863837"/>
+                  </a:lnTo>
+                  <a:lnTo>
+                    <a:pt x="3105268" y="878495"/>
+                  </a:lnTo>
+                  <a:lnTo>
+                    <a:pt x="3179028" y="892917"/>
+                  </a:lnTo>
+                  <a:lnTo>
+                    <a:pt x="3252788" y="907107"/>
+                  </a:lnTo>
+                  <a:lnTo>
+                    <a:pt x="3326548" y="921068"/>
+                  </a:lnTo>
+                  <a:lnTo>
+                    <a:pt x="3400308" y="934804"/>
+                  </a:lnTo>
+                  <a:lnTo>
+                    <a:pt x="3474068" y="948319"/>
+                  </a:lnTo>
+                  <a:lnTo>
+                    <a:pt x="3547828" y="961616"/>
+                  </a:lnTo>
+                  <a:lnTo>
+                    <a:pt x="3621588" y="974699"/>
+                  </a:lnTo>
+                  <a:lnTo>
+                    <a:pt x="3695348" y="987571"/>
+                  </a:lnTo>
+                  <a:lnTo>
+                    <a:pt x="3769108" y="1000236"/>
+                  </a:lnTo>
+                  <a:lnTo>
+                    <a:pt x="3842868" y="1012696"/>
+                  </a:lnTo>
+                  <a:lnTo>
+                    <a:pt x="3916628" y="1024956"/>
+                  </a:lnTo>
+                  <a:lnTo>
+                    <a:pt x="3990388" y="1037019"/>
+                  </a:lnTo>
+                  <a:lnTo>
+                    <a:pt x="4064149" y="1048887"/>
+                  </a:lnTo>
+                  <a:lnTo>
+                    <a:pt x="4137909" y="1060564"/>
+                  </a:lnTo>
+                  <a:lnTo>
+                    <a:pt x="4211669" y="1072053"/>
+                  </a:lnTo>
+                  <a:lnTo>
+                    <a:pt x="4285429" y="1083356"/>
+                  </a:lnTo>
+                  <a:lnTo>
+                    <a:pt x="4359189" y="1094478"/>
+                  </a:lnTo>
+                  <a:lnTo>
+                    <a:pt x="4432949" y="1105420"/>
+                  </a:lnTo>
+                  <a:lnTo>
+                    <a:pt x="4506709" y="1116186"/>
+                  </a:lnTo>
+                  <a:lnTo>
+                    <a:pt x="4580469" y="1126779"/>
+                  </a:lnTo>
+                  <a:lnTo>
+                    <a:pt x="4654229" y="1137201"/>
+                  </a:lnTo>
+                  <a:lnTo>
+                    <a:pt x="4727989" y="1147455"/>
+                  </a:lnTo>
+                  <a:lnTo>
+                    <a:pt x="4801749" y="1157544"/>
+                  </a:lnTo>
+                  <a:lnTo>
+                    <a:pt x="4875509" y="1167471"/>
+                  </a:lnTo>
+                  <a:lnTo>
+                    <a:pt x="4949269" y="1177237"/>
+                  </a:lnTo>
+                  <a:lnTo>
+                    <a:pt x="5023029" y="1186846"/>
+                  </a:lnTo>
+                  <a:lnTo>
+                    <a:pt x="5096789" y="1196301"/>
+                  </a:lnTo>
+                  <a:lnTo>
+                    <a:pt x="5170549" y="1205603"/>
+                  </a:lnTo>
+                  <a:lnTo>
+                    <a:pt x="5244309" y="1214755"/>
+                  </a:lnTo>
+                  <a:lnTo>
+                    <a:pt x="5318069" y="1223760"/>
+                  </a:lnTo>
+                  <a:lnTo>
+                    <a:pt x="5391829" y="1232619"/>
+                  </a:lnTo>
+                  <a:lnTo>
+                    <a:pt x="5465589" y="1241336"/>
+                  </a:lnTo>
+                  <a:lnTo>
+                    <a:pt x="5539349" y="1249913"/>
+                  </a:lnTo>
+                  <a:lnTo>
+                    <a:pt x="5613109" y="1258351"/>
+                  </a:lnTo>
+                  <a:lnTo>
+                    <a:pt x="5686869" y="1266653"/>
+                  </a:lnTo>
+                  <a:lnTo>
+                    <a:pt x="5760629" y="1274822"/>
+                  </a:lnTo>
+                  <a:lnTo>
+                    <a:pt x="5834389" y="1282859"/>
+                  </a:lnTo>
+                  <a:lnTo>
+                    <a:pt x="5908149" y="1290767"/>
+                  </a:lnTo>
+                  <a:lnTo>
+                    <a:pt x="5981909" y="1298547"/>
+                  </a:lnTo>
+                  <a:lnTo>
+                    <a:pt x="6055669" y="1306201"/>
+                  </a:lnTo>
+                  <a:lnTo>
+                    <a:pt x="6129429" y="1313733"/>
+                  </a:lnTo>
+                  <a:lnTo>
+                    <a:pt x="6203189" y="1321143"/>
+                  </a:lnTo>
+                  <a:lnTo>
+                    <a:pt x="6276949" y="1328434"/>
+                  </a:lnTo>
+                  <a:lnTo>
+                    <a:pt x="6350709" y="1335607"/>
+                  </a:lnTo>
+                  <a:lnTo>
+                    <a:pt x="6424469" y="1342665"/>
+                  </a:lnTo>
+                  <a:lnTo>
+                    <a:pt x="6498229" y="1349609"/>
+                  </a:lnTo>
+                  <a:lnTo>
+                    <a:pt x="6571989" y="1356441"/>
+                  </a:lnTo>
+                  <a:lnTo>
+                    <a:pt x="6645749" y="1363163"/>
+                  </a:lnTo>
+                  <a:lnTo>
+                    <a:pt x="6719509" y="1369777"/>
+                  </a:lnTo>
+                  <a:lnTo>
+                    <a:pt x="6793269" y="1376284"/>
+                  </a:lnTo>
+                  <a:lnTo>
+                    <a:pt x="6867029" y="1382687"/>
+                  </a:lnTo>
+                  <a:lnTo>
+                    <a:pt x="6940789" y="1388986"/>
+                  </a:lnTo>
+                  <a:lnTo>
+                    <a:pt x="7014550" y="1395184"/>
+                  </a:lnTo>
+                  <a:lnTo>
+                    <a:pt x="7088310" y="1401282"/>
+                  </a:lnTo>
+                  <a:lnTo>
+                    <a:pt x="7162070" y="1407282"/>
+                  </a:lnTo>
+                  <a:lnTo>
+                    <a:pt x="7235830" y="1413185"/>
                   </a:lnTo>
                 </a:path>
               </a:pathLst>
@@ -4617,7 +4617,7 @@
           </p:nvSpPr>
           <p:spPr>
             <a:xfrm>
-              <a:off x="817517" y="4679530"/>
+              <a:off x="817517" y="4727786"/>
               <a:ext cx="7799693" cy="0"/>
             </a:xfrm>
             <a:custGeom>
@@ -4660,15 +4660,15 @@
           </p:nvSpPr>
           <p:spPr>
             <a:xfrm>
-              <a:off x="4269157" y="1896563"/>
-              <a:ext cx="0" cy="3826579"/>
+              <a:off x="4269157" y="2073503"/>
+              <a:ext cx="0" cy="3649639"/>
             </a:xfrm>
             <a:custGeom>
               <a:avLst/>
               <a:pathLst>
-                <a:path w="0" h="3826579">
+                <a:path w="0" h="3649639">
                   <a:moveTo>
-                    <a:pt x="0" y="3826579"/>
+                    <a:pt x="0" y="3649639"/>
                   </a:moveTo>
                   <a:lnTo>
                     <a:pt x="0" y="0"/>
@@ -4703,7 +4703,7 @@
           </p:nvSpPr>
           <p:spPr>
             <a:xfrm>
-              <a:off x="692708" y="5509156"/>
+              <a:off x="692708" y="5517199"/>
               <a:ext cx="62179" cy="80101"/>
             </a:xfrm>
             <a:prstGeom prst="rect">
@@ -4749,7 +4749,7 @@
           </p:nvSpPr>
           <p:spPr>
             <a:xfrm>
-              <a:off x="692708" y="4639479"/>
+              <a:off x="692708" y="4687735"/>
               <a:ext cx="62179" cy="80101"/>
             </a:xfrm>
             <a:prstGeom prst="rect">
@@ -4795,7 +4795,7 @@
           </p:nvSpPr>
           <p:spPr>
             <a:xfrm>
-              <a:off x="692708" y="3769802"/>
+              <a:off x="692708" y="3858272"/>
               <a:ext cx="62179" cy="80101"/>
             </a:xfrm>
             <a:prstGeom prst="rect">
@@ -4841,7 +4841,7 @@
           </p:nvSpPr>
           <p:spPr>
             <a:xfrm>
-              <a:off x="692708" y="2900125"/>
+              <a:off x="692708" y="3028808"/>
               <a:ext cx="62179" cy="80101"/>
             </a:xfrm>
             <a:prstGeom prst="rect">
@@ -4887,7 +4887,7 @@
           </p:nvSpPr>
           <p:spPr>
             <a:xfrm>
-              <a:off x="692708" y="2030448"/>
+              <a:off x="692708" y="2199345"/>
               <a:ext cx="62179" cy="80101"/>
             </a:xfrm>
             <a:prstGeom prst="rect">
@@ -5163,7 +5163,7 @@
           </p:nvSpPr>
           <p:spPr>
             <a:xfrm rot="-5400000">
-              <a:off x="68446" y="3759743"/>
+              <a:off x="68446" y="3848213"/>
               <a:ext cx="1016904" cy="100218"/>
             </a:xfrm>
             <a:prstGeom prst="rect">
@@ -5204,6 +5204,52 @@
         <p:sp>
           <p:nvSpPr>
             <p:cNvPr id="38" name="tx38"/>
+            <p:cNvSpPr/>
+            <p:nvPr/>
+          </p:nvSpPr>
+          <p:spPr>
+            <a:xfrm>
+              <a:off x="817517" y="1896563"/>
+              <a:ext cx="5626211" cy="82021"/>
+            </a:xfrm>
+            <a:prstGeom prst="rect">
+              <a:avLst/>
+            </a:prstGeom>
+            <a:noFill/>
+          </p:spPr>
+          <p:txBody>
+            <a:bodyPr lIns="0" rIns="0" tIns="0" bIns="0" anchorCtr="1" anchor="ctr" wrap="none"/>
+            <a:lstStyle/>
+            <a:p>
+              <a:pPr algn="l" marL="0" marR="0" indent="0">
+                <a:lnSpc>
+                  <a:spcPts val="900"/>
+                </a:lnSpc>
+                <a:spcBef>
+                  <a:spcPts val="0"/>
+                </a:spcBef>
+                <a:spcAft>
+                  <a:spcPts val="0"/>
+                </a:spcAft>
+              </a:pPr>
+              <a:r>
+                <a:rPr sz="900">
+                  <a:solidFill>
+                    <a:srgbClr val="404040">
+                      <a:alpha val="100000"/>
+                    </a:srgbClr>
+                  </a:solidFill>
+                  <a:latin typeface="Helvetica"/>
+                  <a:cs typeface="Helvetica"/>
+                </a:rPr>
+                <a:t>subHR per 0.1 ratio decline: 1.22 (1.11-1.33)  |  per IQR decline (Δ = 0.29): 1.77 (1.36-2.30)  |  IQR: [0.85, 1.15]</a:t>
+              </a:r>
+            </a:p>
+          </p:txBody>
+        </p:sp>
+        <p:sp>
+          <p:nvSpPr>
+            <p:cNvPr id="39" name="tx39"/>
             <p:cNvSpPr/>
             <p:nvPr/>
           </p:nvSpPr>

--- a/docs/pptx/whole/jx-linsubhr-ratio-anyhosp.pptx
+++ b/docs/pptx/whole/jx-linsubhr-ratio-anyhosp.pptx
@@ -5210,7 +5210,7 @@
           <p:spPr>
             <a:xfrm>
               <a:off x="817517" y="1896563"/>
-              <a:ext cx="5626211" cy="82021"/>
+              <a:ext cx="6236116" cy="82021"/>
             </a:xfrm>
             <a:prstGeom prst="rect">
               <a:avLst/>
@@ -5242,7 +5242,7 @@
                   <a:latin typeface="Helvetica"/>
                   <a:cs typeface="Helvetica"/>
                 </a:rPr>
-                <a:t>subHR per 0.1 ratio decline: 1.22 (1.11-1.33)  |  per IQR decline (Δ = 0.29): 1.77 (1.36-2.30)  |  IQR: [0.85, 1.15]</a:t>
+                <a:t>subHR per 0.1 ratio decline: 1.22 (1.11-1.33), p = &lt;0.001  |  per IQR decline (Δ = 0.29): 1.77 (1.36-2.30)  |  IQR: [0.85, 1.15]</a:t>
               </a:r>
             </a:p>
           </p:txBody>

--- a/docs/pptx/whole/jx-linsubhr-ratio-anyhosp.pptx
+++ b/docs/pptx/whole/jx-linsubhr-ratio-anyhosp.pptx
@@ -5210,7 +5210,7 @@
           <p:spPr>
             <a:xfrm>
               <a:off x="817517" y="1896563"/>
-              <a:ext cx="6236116" cy="82021"/>
+              <a:ext cx="6899879" cy="82021"/>
             </a:xfrm>
             <a:prstGeom prst="rect">
               <a:avLst/>
@@ -5242,7 +5242,7 @@
                   <a:latin typeface="Helvetica"/>
                   <a:cs typeface="Helvetica"/>
                 </a:rPr>
-                <a:t>subHR per 0.1 ratio decline: 1.22 (1.11-1.33), p = &lt;0.001  |  per IQR decline (Δ = 0.29): 1.77 (1.36-2.30)  |  IQR: [0.85, 1.15]</a:t>
+                <a:t>subHR per 0.1 ratio decline: 1.22 (1.11-1.33), p_Bonf = &lt;0.001 (n = 6)  |  per IQR decline (Δ = 0.29): 1.77 (1.36-2.30)  |  IQR: [0.85, 1.15]</a:t>
               </a:r>
             </a:p>
           </p:txBody>

--- a/docs/pptx/whole/jx-linsubhr-ratio-anyhosp.pptx
+++ b/docs/pptx/whole/jx-linsubhr-ratio-anyhosp.pptx
@@ -2443,7 +2443,7 @@
           </p:nvSpPr>
           <p:spPr>
             <a:xfrm>
-              <a:off x="1615213" y="2073503"/>
+              <a:off x="1365633" y="2073503"/>
               <a:ext cx="0" cy="3649639"/>
             </a:xfrm>
             <a:custGeom>
@@ -2486,7 +2486,7 @@
           </p:nvSpPr>
           <p:spPr>
             <a:xfrm>
-              <a:off x="3387871" y="2073503"/>
+              <a:off x="3517243" y="2073503"/>
               <a:ext cx="0" cy="3649639"/>
             </a:xfrm>
             <a:custGeom>
@@ -2529,7 +2529,7 @@
           </p:nvSpPr>
           <p:spPr>
             <a:xfrm>
-              <a:off x="5160528" y="2073503"/>
+              <a:off x="5668852" y="2073503"/>
               <a:ext cx="0" cy="3649639"/>
             </a:xfrm>
             <a:custGeom>
@@ -2572,7 +2572,7 @@
           </p:nvSpPr>
           <p:spPr>
             <a:xfrm>
-              <a:off x="6933186" y="2073503"/>
+              <a:off x="7820461" y="2073503"/>
               <a:ext cx="0" cy="3649639"/>
             </a:xfrm>
             <a:custGeom>
@@ -2830,7 +2830,7 @@
           </p:nvSpPr>
           <p:spPr>
             <a:xfrm>
-              <a:off x="2501542" y="2073503"/>
+              <a:off x="2441438" y="2073503"/>
               <a:ext cx="0" cy="3649639"/>
             </a:xfrm>
             <a:custGeom>
@@ -2873,7 +2873,7 @@
           </p:nvSpPr>
           <p:spPr>
             <a:xfrm>
-              <a:off x="4274200" y="2073503"/>
+              <a:off x="4593047" y="2073503"/>
               <a:ext cx="0" cy="3649639"/>
             </a:xfrm>
             <a:custGeom>
@@ -2916,7 +2916,7 @@
           </p:nvSpPr>
           <p:spPr>
             <a:xfrm>
-              <a:off x="6046857" y="2073503"/>
+              <a:off x="6744657" y="2073503"/>
               <a:ext cx="0" cy="3649639"/>
             </a:xfrm>
             <a:custGeom>
@@ -2953,661 +2953,618 @@
         </p:sp>
         <p:sp>
           <p:nvSpPr>
-            <p:cNvPr id="20" name="pl20"/>
+            <p:cNvPr id="20" name="pg20"/>
             <p:cNvSpPr/>
             <p:nvPr/>
           </p:nvSpPr>
           <p:spPr>
             <a:xfrm>
-              <a:off x="7819515" y="2073503"/>
-              <a:ext cx="0" cy="3649639"/>
+              <a:off x="1172049" y="2988148"/>
+              <a:ext cx="7090630" cy="2323250"/>
             </a:xfrm>
             <a:custGeom>
               <a:avLst/>
               <a:pathLst>
-                <a:path w="0" h="3649639">
-                  <a:moveTo>
-                    <a:pt x="0" y="3649639"/>
-                  </a:moveTo>
-                  <a:lnTo>
-                    <a:pt x="0" y="0"/>
-                  </a:lnTo>
-                  <a:lnTo>
-                    <a:pt x="0" y="0"/>
-                  </a:lnTo>
-                </a:path>
-              </a:pathLst>
-            </a:custGeom>
-            <a:ln w="13550" cap="flat">
-              <a:solidFill>
-                <a:srgbClr val="EBEBEB">
-                  <a:alpha val="100000"/>
-                </a:srgbClr>
-              </a:solidFill>
-              <a:prstDash val="solid"/>
-              <a:round/>
-            </a:ln>
-          </p:spPr>
-          <p:txBody>
-            <a:bodyPr/>
-            <a:lstStyle/>
-            <a:p/>
-          </p:txBody>
-        </p:sp>
-        <p:sp>
-          <p:nvSpPr>
-            <p:cNvPr id="21" name="pg21"/>
-            <p:cNvSpPr/>
-            <p:nvPr/>
-          </p:nvSpPr>
-          <p:spPr>
-            <a:xfrm>
-              <a:off x="817517" y="3042333"/>
-              <a:ext cx="7235830" cy="2269066"/>
-            </a:xfrm>
-            <a:custGeom>
-              <a:avLst/>
-              <a:pathLst>
-                <a:path w="7235830" h="2269066">
+                <a:path w="7090630" h="2323250">
                   <a:moveTo>
                     <a:pt x="0" y="0"/>
                   </a:moveTo>
                   <a:lnTo>
-                    <a:pt x="7347" y="5994"/>
-                  </a:lnTo>
-                  <a:lnTo>
-                    <a:pt x="81107" y="64764"/>
-                  </a:lnTo>
-                  <a:lnTo>
-                    <a:pt x="154867" y="122157"/>
-                  </a:lnTo>
-                  <a:lnTo>
-                    <a:pt x="228627" y="178205"/>
-                  </a:lnTo>
-                  <a:lnTo>
-                    <a:pt x="302387" y="232941"/>
-                  </a:lnTo>
-                  <a:lnTo>
-                    <a:pt x="376147" y="286394"/>
-                  </a:lnTo>
-                  <a:lnTo>
-                    <a:pt x="449907" y="338596"/>
-                  </a:lnTo>
-                  <a:lnTo>
-                    <a:pt x="523667" y="389574"/>
-                  </a:lnTo>
-                  <a:lnTo>
-                    <a:pt x="597427" y="439359"/>
-                  </a:lnTo>
-                  <a:lnTo>
-                    <a:pt x="671187" y="487977"/>
-                  </a:lnTo>
-                  <a:lnTo>
-                    <a:pt x="744947" y="535456"/>
-                  </a:lnTo>
-                  <a:lnTo>
-                    <a:pt x="818707" y="581824"/>
-                  </a:lnTo>
-                  <a:lnTo>
-                    <a:pt x="892467" y="627105"/>
-                  </a:lnTo>
-                  <a:lnTo>
-                    <a:pt x="966227" y="671325"/>
-                  </a:lnTo>
-                  <a:lnTo>
-                    <a:pt x="1039987" y="714510"/>
-                  </a:lnTo>
-                  <a:lnTo>
-                    <a:pt x="1113747" y="756683"/>
-                  </a:lnTo>
-                  <a:lnTo>
-                    <a:pt x="1187508" y="797868"/>
-                  </a:lnTo>
-                  <a:lnTo>
-                    <a:pt x="1261268" y="838089"/>
-                  </a:lnTo>
-                  <a:lnTo>
-                    <a:pt x="1335028" y="877367"/>
-                  </a:lnTo>
-                  <a:lnTo>
-                    <a:pt x="1408788" y="915725"/>
-                  </a:lnTo>
-                  <a:lnTo>
-                    <a:pt x="1482548" y="953185"/>
-                  </a:lnTo>
-                  <a:lnTo>
-                    <a:pt x="1556308" y="989767"/>
-                  </a:lnTo>
-                  <a:lnTo>
-                    <a:pt x="1630068" y="1025493"/>
-                  </a:lnTo>
-                  <a:lnTo>
-                    <a:pt x="1703828" y="1060381"/>
-                  </a:lnTo>
-                  <a:lnTo>
-                    <a:pt x="1777588" y="1094453"/>
-                  </a:lnTo>
-                  <a:lnTo>
-                    <a:pt x="1851348" y="1127726"/>
-                  </a:lnTo>
-                  <a:lnTo>
-                    <a:pt x="1925108" y="1160220"/>
-                  </a:lnTo>
-                  <a:lnTo>
-                    <a:pt x="1998868" y="1191952"/>
-                  </a:lnTo>
-                  <a:lnTo>
-                    <a:pt x="2072628" y="1222942"/>
-                  </a:lnTo>
-                  <a:lnTo>
-                    <a:pt x="2146388" y="1253205"/>
-                  </a:lnTo>
-                  <a:lnTo>
-                    <a:pt x="2220148" y="1282760"/>
-                  </a:lnTo>
-                  <a:lnTo>
-                    <a:pt x="2293908" y="1311622"/>
-                  </a:lnTo>
-                  <a:lnTo>
-                    <a:pt x="2367668" y="1339808"/>
-                  </a:lnTo>
-                  <a:lnTo>
-                    <a:pt x="2441428" y="1367334"/>
-                  </a:lnTo>
-                  <a:lnTo>
-                    <a:pt x="2515188" y="1394216"/>
-                  </a:lnTo>
-                  <a:lnTo>
-                    <a:pt x="2588948" y="1420467"/>
-                  </a:lnTo>
-                  <a:lnTo>
-                    <a:pt x="2662708" y="1446104"/>
-                  </a:lnTo>
-                  <a:lnTo>
-                    <a:pt x="2736468" y="1471140"/>
-                  </a:lnTo>
-                  <a:lnTo>
-                    <a:pt x="2810228" y="1495589"/>
-                  </a:lnTo>
-                  <a:lnTo>
-                    <a:pt x="2883988" y="1519466"/>
-                  </a:lnTo>
-                  <a:lnTo>
-                    <a:pt x="2957748" y="1542784"/>
-                  </a:lnTo>
-                  <a:lnTo>
-                    <a:pt x="3031508" y="1565555"/>
-                  </a:lnTo>
-                  <a:lnTo>
-                    <a:pt x="3105268" y="1587793"/>
-                  </a:lnTo>
-                  <a:lnTo>
-                    <a:pt x="3179028" y="1609511"/>
-                  </a:lnTo>
-                  <a:lnTo>
-                    <a:pt x="3252788" y="1630719"/>
-                  </a:lnTo>
-                  <a:lnTo>
-                    <a:pt x="3326548" y="1651431"/>
-                  </a:lnTo>
-                  <a:lnTo>
-                    <a:pt x="3400308" y="1671657"/>
-                  </a:lnTo>
-                  <a:lnTo>
-                    <a:pt x="3474068" y="1687664"/>
-                  </a:lnTo>
-                  <a:lnTo>
-                    <a:pt x="3547828" y="1694896"/>
-                  </a:lnTo>
-                  <a:lnTo>
-                    <a:pt x="3621588" y="1702064"/>
-                  </a:lnTo>
-                  <a:lnTo>
-                    <a:pt x="3695348" y="1709170"/>
-                  </a:lnTo>
-                  <a:lnTo>
-                    <a:pt x="3769108" y="1716214"/>
-                  </a:lnTo>
-                  <a:lnTo>
-                    <a:pt x="3842868" y="1723196"/>
-                  </a:lnTo>
-                  <a:lnTo>
-                    <a:pt x="3916628" y="1730116"/>
-                  </a:lnTo>
-                  <a:lnTo>
-                    <a:pt x="3990388" y="1736977"/>
-                  </a:lnTo>
-                  <a:lnTo>
-                    <a:pt x="4064149" y="1743777"/>
-                  </a:lnTo>
-                  <a:lnTo>
-                    <a:pt x="4137909" y="1750518"/>
-                  </a:lnTo>
-                  <a:lnTo>
-                    <a:pt x="4211669" y="1757201"/>
-                  </a:lnTo>
-                  <a:lnTo>
-                    <a:pt x="4285429" y="1763824"/>
-                  </a:lnTo>
-                  <a:lnTo>
-                    <a:pt x="4359189" y="1770390"/>
-                  </a:lnTo>
-                  <a:lnTo>
-                    <a:pt x="4432949" y="1776898"/>
-                  </a:lnTo>
-                  <a:lnTo>
-                    <a:pt x="4506709" y="1783350"/>
-                  </a:lnTo>
-                  <a:lnTo>
-                    <a:pt x="4580469" y="1789745"/>
-                  </a:lnTo>
-                  <a:lnTo>
-                    <a:pt x="4654229" y="1796084"/>
-                  </a:lnTo>
-                  <a:lnTo>
-                    <a:pt x="4727989" y="1802368"/>
-                  </a:lnTo>
-                  <a:lnTo>
-                    <a:pt x="4801749" y="1808597"/>
-                  </a:lnTo>
-                  <a:lnTo>
-                    <a:pt x="4875509" y="1814771"/>
-                  </a:lnTo>
-                  <a:lnTo>
-                    <a:pt x="4949269" y="1820892"/>
-                  </a:lnTo>
-                  <a:lnTo>
-                    <a:pt x="5023029" y="1826959"/>
-                  </a:lnTo>
-                  <a:lnTo>
-                    <a:pt x="5096789" y="1832973"/>
-                  </a:lnTo>
-                  <a:lnTo>
-                    <a:pt x="5170549" y="1838934"/>
-                  </a:lnTo>
-                  <a:lnTo>
-                    <a:pt x="5244309" y="1844843"/>
-                  </a:lnTo>
-                  <a:lnTo>
-                    <a:pt x="5318069" y="1850701"/>
-                  </a:lnTo>
-                  <a:lnTo>
-                    <a:pt x="5391829" y="1856507"/>
-                  </a:lnTo>
-                  <a:lnTo>
-                    <a:pt x="5465589" y="1862263"/>
-                  </a:lnTo>
-                  <a:lnTo>
-                    <a:pt x="5539349" y="1867968"/>
-                  </a:lnTo>
-                  <a:lnTo>
-                    <a:pt x="5613109" y="1873623"/>
-                  </a:lnTo>
-                  <a:lnTo>
-                    <a:pt x="5686869" y="1879229"/>
-                  </a:lnTo>
-                  <a:lnTo>
-                    <a:pt x="5760629" y="1884786"/>
-                  </a:lnTo>
-                  <a:lnTo>
-                    <a:pt x="5834389" y="1890295"/>
-                  </a:lnTo>
-                  <a:lnTo>
-                    <a:pt x="5908149" y="1895755"/>
-                  </a:lnTo>
-                  <a:lnTo>
-                    <a:pt x="5981909" y="1901167"/>
-                  </a:lnTo>
-                  <a:lnTo>
-                    <a:pt x="6055669" y="1906533"/>
-                  </a:lnTo>
-                  <a:lnTo>
-                    <a:pt x="6129429" y="1911851"/>
-                  </a:lnTo>
-                  <a:lnTo>
-                    <a:pt x="6203189" y="1917123"/>
-                  </a:lnTo>
-                  <a:lnTo>
-                    <a:pt x="6276949" y="1922348"/>
-                  </a:lnTo>
-                  <a:lnTo>
-                    <a:pt x="6350709" y="1927528"/>
-                  </a:lnTo>
-                  <a:lnTo>
-                    <a:pt x="6424469" y="1932663"/>
-                  </a:lnTo>
-                  <a:lnTo>
-                    <a:pt x="6498229" y="1937753"/>
-                  </a:lnTo>
-                  <a:lnTo>
-                    <a:pt x="6571989" y="1942798"/>
-                  </a:lnTo>
-                  <a:lnTo>
-                    <a:pt x="6645749" y="1947800"/>
-                  </a:lnTo>
-                  <a:lnTo>
-                    <a:pt x="6719509" y="1952757"/>
-                  </a:lnTo>
-                  <a:lnTo>
-                    <a:pt x="6793269" y="1957671"/>
-                  </a:lnTo>
-                  <a:lnTo>
-                    <a:pt x="6867029" y="1962543"/>
-                  </a:lnTo>
-                  <a:lnTo>
-                    <a:pt x="6940789" y="1967371"/>
-                  </a:lnTo>
-                  <a:lnTo>
-                    <a:pt x="7014550" y="1972158"/>
-                  </a:lnTo>
-                  <a:lnTo>
-                    <a:pt x="7088310" y="1976902"/>
-                  </a:lnTo>
-                  <a:lnTo>
-                    <a:pt x="7162070" y="1981606"/>
-                  </a:lnTo>
-                  <a:lnTo>
-                    <a:pt x="7235830" y="1986268"/>
-                  </a:lnTo>
-                  <a:lnTo>
-                    <a:pt x="7235830" y="2269066"/>
-                  </a:lnTo>
-                  <a:lnTo>
-                    <a:pt x="7162070" y="2263169"/>
-                  </a:lnTo>
-                  <a:lnTo>
-                    <a:pt x="7088310" y="2257131"/>
-                  </a:lnTo>
-                  <a:lnTo>
-                    <a:pt x="7014550" y="2250947"/>
-                  </a:lnTo>
-                  <a:lnTo>
-                    <a:pt x="6940789" y="2244616"/>
-                  </a:lnTo>
-                  <a:lnTo>
-                    <a:pt x="6867029" y="2238132"/>
-                  </a:lnTo>
-                  <a:lnTo>
-                    <a:pt x="6793269" y="2231493"/>
-                  </a:lnTo>
-                  <a:lnTo>
-                    <a:pt x="6719509" y="2224695"/>
-                  </a:lnTo>
-                  <a:lnTo>
-                    <a:pt x="6645749" y="2217734"/>
-                  </a:lnTo>
-                  <a:lnTo>
-                    <a:pt x="6571989" y="2210606"/>
-                  </a:lnTo>
-                  <a:lnTo>
-                    <a:pt x="6498229" y="2203306"/>
-                  </a:lnTo>
-                  <a:lnTo>
-                    <a:pt x="6424469" y="2195832"/>
-                  </a:lnTo>
-                  <a:lnTo>
-                    <a:pt x="6350709" y="2188179"/>
-                  </a:lnTo>
-                  <a:lnTo>
-                    <a:pt x="6276949" y="2180341"/>
-                  </a:lnTo>
-                  <a:lnTo>
-                    <a:pt x="6203189" y="2172316"/>
-                  </a:lnTo>
-                  <a:lnTo>
-                    <a:pt x="6129429" y="2164099"/>
-                  </a:lnTo>
-                  <a:lnTo>
-                    <a:pt x="6055669" y="2155684"/>
-                  </a:lnTo>
-                  <a:lnTo>
-                    <a:pt x="5981909" y="2147067"/>
-                  </a:lnTo>
-                  <a:lnTo>
-                    <a:pt x="5908149" y="2138244"/>
-                  </a:lnTo>
-                  <a:lnTo>
-                    <a:pt x="5834389" y="2129209"/>
-                  </a:lnTo>
-                  <a:lnTo>
-                    <a:pt x="5760629" y="2119958"/>
-                  </a:lnTo>
-                  <a:lnTo>
-                    <a:pt x="5686869" y="2110484"/>
-                  </a:lnTo>
-                  <a:lnTo>
-                    <a:pt x="5613109" y="2100783"/>
-                  </a:lnTo>
-                  <a:lnTo>
-                    <a:pt x="5539349" y="2090850"/>
-                  </a:lnTo>
-                  <a:lnTo>
-                    <a:pt x="5465589" y="2080678"/>
-                  </a:lnTo>
-                  <a:lnTo>
-                    <a:pt x="5391829" y="2070263"/>
-                  </a:lnTo>
-                  <a:lnTo>
-                    <a:pt x="5318069" y="2059597"/>
-                  </a:lnTo>
-                  <a:lnTo>
-                    <a:pt x="5244309" y="2048676"/>
-                  </a:lnTo>
-                  <a:lnTo>
-                    <a:pt x="5170549" y="2037493"/>
-                  </a:lnTo>
-                  <a:lnTo>
-                    <a:pt x="5096789" y="2026041"/>
-                  </a:lnTo>
-                  <a:lnTo>
-                    <a:pt x="5023029" y="2014315"/>
-                  </a:lnTo>
-                  <a:lnTo>
-                    <a:pt x="4949269" y="2002307"/>
-                  </a:lnTo>
-                  <a:lnTo>
-                    <a:pt x="4875509" y="1990012"/>
-                  </a:lnTo>
-                  <a:lnTo>
-                    <a:pt x="4801749" y="1977421"/>
-                  </a:lnTo>
-                  <a:lnTo>
-                    <a:pt x="4727989" y="1964529"/>
-                  </a:lnTo>
-                  <a:lnTo>
-                    <a:pt x="4654229" y="1951327"/>
-                  </a:lnTo>
-                  <a:lnTo>
-                    <a:pt x="4580469" y="1937809"/>
-                  </a:lnTo>
-                  <a:lnTo>
-                    <a:pt x="4506709" y="1923967"/>
-                  </a:lnTo>
-                  <a:lnTo>
-                    <a:pt x="4432949" y="1909792"/>
-                  </a:lnTo>
-                  <a:lnTo>
-                    <a:pt x="4359189" y="1895278"/>
-                  </a:lnTo>
-                  <a:lnTo>
-                    <a:pt x="4285429" y="1880415"/>
-                  </a:lnTo>
-                  <a:lnTo>
-                    <a:pt x="4211669" y="1865196"/>
-                  </a:lnTo>
-                  <a:lnTo>
-                    <a:pt x="4137909" y="1849611"/>
-                  </a:lnTo>
-                  <a:lnTo>
-                    <a:pt x="4064149" y="1833653"/>
-                  </a:lnTo>
-                  <a:lnTo>
-                    <a:pt x="3990388" y="1817313"/>
-                  </a:lnTo>
-                  <a:lnTo>
-                    <a:pt x="3916628" y="1800580"/>
-                  </a:lnTo>
-                  <a:lnTo>
-                    <a:pt x="3842868" y="1783446"/>
-                  </a:lnTo>
-                  <a:lnTo>
-                    <a:pt x="3769108" y="1765901"/>
-                  </a:lnTo>
-                  <a:lnTo>
-                    <a:pt x="3695348" y="1747935"/>
-                  </a:lnTo>
-                  <a:lnTo>
-                    <a:pt x="3621588" y="1729538"/>
-                  </a:lnTo>
-                  <a:lnTo>
-                    <a:pt x="3547828" y="1710700"/>
-                  </a:lnTo>
-                  <a:lnTo>
-                    <a:pt x="3474068" y="1691410"/>
-                  </a:lnTo>
-                  <a:lnTo>
-                    <a:pt x="3400308" y="1680369"/>
-                  </a:lnTo>
-                  <a:lnTo>
-                    <a:pt x="3326548" y="1673009"/>
-                  </a:lnTo>
-                  <a:lnTo>
-                    <a:pt x="3252788" y="1665585"/>
-                  </a:lnTo>
-                  <a:lnTo>
-                    <a:pt x="3179028" y="1658095"/>
-                  </a:lnTo>
-                  <a:lnTo>
-                    <a:pt x="3105268" y="1650539"/>
-                  </a:lnTo>
-                  <a:lnTo>
-                    <a:pt x="3031508" y="1642916"/>
-                  </a:lnTo>
-                  <a:lnTo>
-                    <a:pt x="2957748" y="1635226"/>
-                  </a:lnTo>
-                  <a:lnTo>
-                    <a:pt x="2883988" y="1627468"/>
-                  </a:lnTo>
-                  <a:lnTo>
-                    <a:pt x="2810228" y="1619642"/>
-                  </a:lnTo>
-                  <a:lnTo>
-                    <a:pt x="2736468" y="1611747"/>
-                  </a:lnTo>
-                  <a:lnTo>
-                    <a:pt x="2662708" y="1603782"/>
-                  </a:lnTo>
-                  <a:lnTo>
-                    <a:pt x="2588948" y="1595747"/>
-                  </a:lnTo>
-                  <a:lnTo>
-                    <a:pt x="2515188" y="1587641"/>
-                  </a:lnTo>
-                  <a:lnTo>
-                    <a:pt x="2441428" y="1579463"/>
-                  </a:lnTo>
-                  <a:lnTo>
-                    <a:pt x="2367668" y="1571214"/>
-                  </a:lnTo>
-                  <a:lnTo>
-                    <a:pt x="2293908" y="1562892"/>
-                  </a:lnTo>
-                  <a:lnTo>
-                    <a:pt x="2220148" y="1554496"/>
-                  </a:lnTo>
-                  <a:lnTo>
-                    <a:pt x="2146388" y="1546026"/>
-                  </a:lnTo>
-                  <a:lnTo>
-                    <a:pt x="2072628" y="1537482"/>
-                  </a:lnTo>
-                  <a:lnTo>
-                    <a:pt x="1998868" y="1528862"/>
-                  </a:lnTo>
-                  <a:lnTo>
-                    <a:pt x="1925108" y="1520166"/>
-                  </a:lnTo>
-                  <a:lnTo>
-                    <a:pt x="1851348" y="1511394"/>
-                  </a:lnTo>
-                  <a:lnTo>
-                    <a:pt x="1777588" y="1502544"/>
-                  </a:lnTo>
-                  <a:lnTo>
-                    <a:pt x="1703828" y="1493616"/>
-                  </a:lnTo>
-                  <a:lnTo>
-                    <a:pt x="1630068" y="1484610"/>
-                  </a:lnTo>
-                  <a:lnTo>
-                    <a:pt x="1556308" y="1475524"/>
-                  </a:lnTo>
-                  <a:lnTo>
-                    <a:pt x="1482548" y="1466357"/>
-                  </a:lnTo>
-                  <a:lnTo>
-                    <a:pt x="1408788" y="1457110"/>
-                  </a:lnTo>
-                  <a:lnTo>
-                    <a:pt x="1335028" y="1447782"/>
-                  </a:lnTo>
-                  <a:lnTo>
-                    <a:pt x="1261268" y="1438371"/>
-                  </a:lnTo>
-                  <a:lnTo>
-                    <a:pt x="1187508" y="1428877"/>
-                  </a:lnTo>
-                  <a:lnTo>
-                    <a:pt x="1113747" y="1419300"/>
-                  </a:lnTo>
-                  <a:lnTo>
-                    <a:pt x="1039987" y="1409638"/>
-                  </a:lnTo>
-                  <a:lnTo>
-                    <a:pt x="966227" y="1399891"/>
-                  </a:lnTo>
-                  <a:lnTo>
-                    <a:pt x="892467" y="1390057"/>
-                  </a:lnTo>
-                  <a:lnTo>
-                    <a:pt x="818707" y="1380138"/>
-                  </a:lnTo>
-                  <a:lnTo>
-                    <a:pt x="744947" y="1370130"/>
-                  </a:lnTo>
-                  <a:lnTo>
-                    <a:pt x="671187" y="1360035"/>
-                  </a:lnTo>
-                  <a:lnTo>
-                    <a:pt x="597427" y="1349850"/>
-                  </a:lnTo>
-                  <a:lnTo>
-                    <a:pt x="523667" y="1339576"/>
-                  </a:lnTo>
-                  <a:lnTo>
-                    <a:pt x="449907" y="1329210"/>
-                  </a:lnTo>
-                  <a:lnTo>
-                    <a:pt x="376147" y="1318754"/>
-                  </a:lnTo>
-                  <a:lnTo>
-                    <a:pt x="302387" y="1308205"/>
-                  </a:lnTo>
-                  <a:lnTo>
-                    <a:pt x="228627" y="1297564"/>
-                  </a:lnTo>
-                  <a:lnTo>
-                    <a:pt x="154867" y="1286828"/>
-                  </a:lnTo>
-                  <a:lnTo>
-                    <a:pt x="81107" y="1275998"/>
-                  </a:lnTo>
-                  <a:lnTo>
-                    <a:pt x="7347" y="1265072"/>
-                  </a:lnTo>
-                  <a:lnTo>
-                    <a:pt x="0" y="1263974"/>
+                    <a:pt x="71622" y="60179"/>
+                  </a:lnTo>
+                  <a:lnTo>
+                    <a:pt x="143245" y="118948"/>
+                  </a:lnTo>
+                  <a:lnTo>
+                    <a:pt x="214867" y="176341"/>
+                  </a:lnTo>
+                  <a:lnTo>
+                    <a:pt x="286490" y="232390"/>
+                  </a:lnTo>
+                  <a:lnTo>
+                    <a:pt x="358112" y="287125"/>
+                  </a:lnTo>
+                  <a:lnTo>
+                    <a:pt x="429735" y="340579"/>
+                  </a:lnTo>
+                  <a:lnTo>
+                    <a:pt x="501357" y="392780"/>
+                  </a:lnTo>
+                  <a:lnTo>
+                    <a:pt x="572980" y="443759"/>
+                  </a:lnTo>
+                  <a:lnTo>
+                    <a:pt x="644602" y="493543"/>
+                  </a:lnTo>
+                  <a:lnTo>
+                    <a:pt x="716225" y="542161"/>
+                  </a:lnTo>
+                  <a:lnTo>
+                    <a:pt x="787847" y="589641"/>
+                  </a:lnTo>
+                  <a:lnTo>
+                    <a:pt x="859470" y="636008"/>
+                  </a:lnTo>
+                  <a:lnTo>
+                    <a:pt x="931092" y="681289"/>
+                  </a:lnTo>
+                  <a:lnTo>
+                    <a:pt x="1002715" y="725510"/>
+                  </a:lnTo>
+                  <a:lnTo>
+                    <a:pt x="1074337" y="768694"/>
+                  </a:lnTo>
+                  <a:lnTo>
+                    <a:pt x="1145960" y="810867"/>
+                  </a:lnTo>
+                  <a:lnTo>
+                    <a:pt x="1217582" y="852053"/>
+                  </a:lnTo>
+                  <a:lnTo>
+                    <a:pt x="1289205" y="892273"/>
+                  </a:lnTo>
+                  <a:lnTo>
+                    <a:pt x="1360827" y="931551"/>
+                  </a:lnTo>
+                  <a:lnTo>
+                    <a:pt x="1432450" y="969910"/>
+                  </a:lnTo>
+                  <a:lnTo>
+                    <a:pt x="1504073" y="1007370"/>
+                  </a:lnTo>
+                  <a:lnTo>
+                    <a:pt x="1575695" y="1043952"/>
+                  </a:lnTo>
+                  <a:lnTo>
+                    <a:pt x="1647318" y="1079677"/>
+                  </a:lnTo>
+                  <a:lnTo>
+                    <a:pt x="1718940" y="1114566"/>
+                  </a:lnTo>
+                  <a:lnTo>
+                    <a:pt x="1790563" y="1148637"/>
+                  </a:lnTo>
+                  <a:lnTo>
+                    <a:pt x="1862185" y="1181910"/>
+                  </a:lnTo>
+                  <a:lnTo>
+                    <a:pt x="1933808" y="1214404"/>
+                  </a:lnTo>
+                  <a:lnTo>
+                    <a:pt x="2005430" y="1246137"/>
+                  </a:lnTo>
+                  <a:lnTo>
+                    <a:pt x="2077053" y="1277126"/>
+                  </a:lnTo>
+                  <a:lnTo>
+                    <a:pt x="2148675" y="1307390"/>
+                  </a:lnTo>
+                  <a:lnTo>
+                    <a:pt x="2220298" y="1336944"/>
+                  </a:lnTo>
+                  <a:lnTo>
+                    <a:pt x="2291920" y="1365807"/>
+                  </a:lnTo>
+                  <a:lnTo>
+                    <a:pt x="2363543" y="1393993"/>
+                  </a:lnTo>
+                  <a:lnTo>
+                    <a:pt x="2435165" y="1421519"/>
+                  </a:lnTo>
+                  <a:lnTo>
+                    <a:pt x="2506788" y="1448400"/>
+                  </a:lnTo>
+                  <a:lnTo>
+                    <a:pt x="2578410" y="1474651"/>
+                  </a:lnTo>
+                  <a:lnTo>
+                    <a:pt x="2650033" y="1500288"/>
+                  </a:lnTo>
+                  <a:lnTo>
+                    <a:pt x="2721655" y="1525324"/>
+                  </a:lnTo>
+                  <a:lnTo>
+                    <a:pt x="2793278" y="1549774"/>
+                  </a:lnTo>
+                  <a:lnTo>
+                    <a:pt x="2864901" y="1573651"/>
+                  </a:lnTo>
+                  <a:lnTo>
+                    <a:pt x="2936523" y="1596968"/>
+                  </a:lnTo>
+                  <a:lnTo>
+                    <a:pt x="3008146" y="1619740"/>
+                  </a:lnTo>
+                  <a:lnTo>
+                    <a:pt x="3079768" y="1641978"/>
+                  </a:lnTo>
+                  <a:lnTo>
+                    <a:pt x="3151391" y="1663695"/>
+                  </a:lnTo>
+                  <a:lnTo>
+                    <a:pt x="3223013" y="1684903"/>
+                  </a:lnTo>
+                  <a:lnTo>
+                    <a:pt x="3294636" y="1705615"/>
+                  </a:lnTo>
+                  <a:lnTo>
+                    <a:pt x="3366258" y="1725841"/>
+                  </a:lnTo>
+                  <a:lnTo>
+                    <a:pt x="3437881" y="1741849"/>
+                  </a:lnTo>
+                  <a:lnTo>
+                    <a:pt x="3509503" y="1749080"/>
+                  </a:lnTo>
+                  <a:lnTo>
+                    <a:pt x="3581126" y="1756249"/>
+                  </a:lnTo>
+                  <a:lnTo>
+                    <a:pt x="3652748" y="1763354"/>
+                  </a:lnTo>
+                  <a:lnTo>
+                    <a:pt x="3724371" y="1770398"/>
+                  </a:lnTo>
+                  <a:lnTo>
+                    <a:pt x="3795993" y="1777380"/>
+                  </a:lnTo>
+                  <a:lnTo>
+                    <a:pt x="3867616" y="1784301"/>
+                  </a:lnTo>
+                  <a:lnTo>
+                    <a:pt x="3939238" y="1791161"/>
+                  </a:lnTo>
+                  <a:lnTo>
+                    <a:pt x="4010861" y="1797962"/>
+                  </a:lnTo>
+                  <a:lnTo>
+                    <a:pt x="4082483" y="1804703"/>
+                  </a:lnTo>
+                  <a:lnTo>
+                    <a:pt x="4154106" y="1811385"/>
+                  </a:lnTo>
+                  <a:lnTo>
+                    <a:pt x="4225729" y="1818009"/>
+                  </a:lnTo>
+                  <a:lnTo>
+                    <a:pt x="4297351" y="1824574"/>
+                  </a:lnTo>
+                  <a:lnTo>
+                    <a:pt x="4368974" y="1831083"/>
+                  </a:lnTo>
+                  <a:lnTo>
+                    <a:pt x="4440596" y="1837534"/>
+                  </a:lnTo>
+                  <a:lnTo>
+                    <a:pt x="4512219" y="1843929"/>
+                  </a:lnTo>
+                  <a:lnTo>
+                    <a:pt x="4583841" y="1850269"/>
+                  </a:lnTo>
+                  <a:lnTo>
+                    <a:pt x="4655464" y="1856552"/>
+                  </a:lnTo>
+                  <a:lnTo>
+                    <a:pt x="4727086" y="1862781"/>
+                  </a:lnTo>
+                  <a:lnTo>
+                    <a:pt x="4798709" y="1868956"/>
+                  </a:lnTo>
+                  <a:lnTo>
+                    <a:pt x="4870331" y="1875076"/>
+                  </a:lnTo>
+                  <a:lnTo>
+                    <a:pt x="4941954" y="1881143"/>
+                  </a:lnTo>
+                  <a:lnTo>
+                    <a:pt x="5013576" y="1887157"/>
+                  </a:lnTo>
+                  <a:lnTo>
+                    <a:pt x="5085199" y="1893118"/>
+                  </a:lnTo>
+                  <a:lnTo>
+                    <a:pt x="5156821" y="1899028"/>
+                  </a:lnTo>
+                  <a:lnTo>
+                    <a:pt x="5228444" y="1904885"/>
+                  </a:lnTo>
+                  <a:lnTo>
+                    <a:pt x="5300066" y="1910691"/>
+                  </a:lnTo>
+                  <a:lnTo>
+                    <a:pt x="5371689" y="1916447"/>
+                  </a:lnTo>
+                  <a:lnTo>
+                    <a:pt x="5443311" y="1922152"/>
+                  </a:lnTo>
+                  <a:lnTo>
+                    <a:pt x="5514934" y="1927808"/>
+                  </a:lnTo>
+                  <a:lnTo>
+                    <a:pt x="5586557" y="1933414"/>
+                  </a:lnTo>
+                  <a:lnTo>
+                    <a:pt x="5658179" y="1938971"/>
+                  </a:lnTo>
+                  <a:lnTo>
+                    <a:pt x="5729802" y="1944479"/>
+                  </a:lnTo>
+                  <a:lnTo>
+                    <a:pt x="5801424" y="1949939"/>
+                  </a:lnTo>
+                  <a:lnTo>
+                    <a:pt x="5873047" y="1955352"/>
+                  </a:lnTo>
+                  <a:lnTo>
+                    <a:pt x="5944669" y="1960717"/>
+                  </a:lnTo>
+                  <a:lnTo>
+                    <a:pt x="6016292" y="1966035"/>
+                  </a:lnTo>
+                  <a:lnTo>
+                    <a:pt x="6087914" y="1971307"/>
+                  </a:lnTo>
+                  <a:lnTo>
+                    <a:pt x="6159537" y="1976533"/>
+                  </a:lnTo>
+                  <a:lnTo>
+                    <a:pt x="6231159" y="1981713"/>
+                  </a:lnTo>
+                  <a:lnTo>
+                    <a:pt x="6302782" y="1986848"/>
+                  </a:lnTo>
+                  <a:lnTo>
+                    <a:pt x="6374404" y="1991937"/>
+                  </a:lnTo>
+                  <a:lnTo>
+                    <a:pt x="6446027" y="1996983"/>
+                  </a:lnTo>
+                  <a:lnTo>
+                    <a:pt x="6517649" y="2001984"/>
+                  </a:lnTo>
+                  <a:lnTo>
+                    <a:pt x="6589272" y="2006942"/>
+                  </a:lnTo>
+                  <a:lnTo>
+                    <a:pt x="6660894" y="2011856"/>
+                  </a:lnTo>
+                  <a:lnTo>
+                    <a:pt x="6732517" y="2016727"/>
+                  </a:lnTo>
+                  <a:lnTo>
+                    <a:pt x="6804139" y="2021556"/>
+                  </a:lnTo>
+                  <a:lnTo>
+                    <a:pt x="6875762" y="2026342"/>
+                  </a:lnTo>
+                  <a:lnTo>
+                    <a:pt x="6947385" y="2031087"/>
+                  </a:lnTo>
+                  <a:lnTo>
+                    <a:pt x="7019007" y="2035790"/>
+                  </a:lnTo>
+                  <a:lnTo>
+                    <a:pt x="7090630" y="2040452"/>
+                  </a:lnTo>
+                  <a:lnTo>
+                    <a:pt x="7090630" y="2323250"/>
+                  </a:lnTo>
+                  <a:lnTo>
+                    <a:pt x="7019007" y="2317353"/>
+                  </a:lnTo>
+                  <a:lnTo>
+                    <a:pt x="6947385" y="2311315"/>
+                  </a:lnTo>
+                  <a:lnTo>
+                    <a:pt x="6875762" y="2305132"/>
+                  </a:lnTo>
+                  <a:lnTo>
+                    <a:pt x="6804139" y="2298800"/>
+                  </a:lnTo>
+                  <a:lnTo>
+                    <a:pt x="6732517" y="2292317"/>
+                  </a:lnTo>
+                  <a:lnTo>
+                    <a:pt x="6660894" y="2285678"/>
+                  </a:lnTo>
+                  <a:lnTo>
+                    <a:pt x="6589272" y="2278880"/>
+                  </a:lnTo>
+                  <a:lnTo>
+                    <a:pt x="6517649" y="2271918"/>
+                  </a:lnTo>
+                  <a:lnTo>
+                    <a:pt x="6446027" y="2264790"/>
+                  </a:lnTo>
+                  <a:lnTo>
+                    <a:pt x="6374404" y="2257491"/>
+                  </a:lnTo>
+                  <a:lnTo>
+                    <a:pt x="6302782" y="2250016"/>
+                  </a:lnTo>
+                  <a:lnTo>
+                    <a:pt x="6231159" y="2242363"/>
+                  </a:lnTo>
+                  <a:lnTo>
+                    <a:pt x="6159537" y="2234526"/>
+                  </a:lnTo>
+                  <a:lnTo>
+                    <a:pt x="6087914" y="2226501"/>
+                  </a:lnTo>
+                  <a:lnTo>
+                    <a:pt x="6016292" y="2218283"/>
+                  </a:lnTo>
+                  <a:lnTo>
+                    <a:pt x="5944669" y="2209868"/>
+                  </a:lnTo>
+                  <a:lnTo>
+                    <a:pt x="5873047" y="2201252"/>
+                  </a:lnTo>
+                  <a:lnTo>
+                    <a:pt x="5801424" y="2192428"/>
+                  </a:lnTo>
+                  <a:lnTo>
+                    <a:pt x="5729802" y="2183394"/>
+                  </a:lnTo>
+                  <a:lnTo>
+                    <a:pt x="5658179" y="2174142"/>
+                  </a:lnTo>
+                  <a:lnTo>
+                    <a:pt x="5586557" y="2164668"/>
+                  </a:lnTo>
+                  <a:lnTo>
+                    <a:pt x="5514934" y="2154968"/>
+                  </a:lnTo>
+                  <a:lnTo>
+                    <a:pt x="5443311" y="2145034"/>
+                  </a:lnTo>
+                  <a:lnTo>
+                    <a:pt x="5371689" y="2134863"/>
+                  </a:lnTo>
+                  <a:lnTo>
+                    <a:pt x="5300066" y="2124447"/>
+                  </a:lnTo>
+                  <a:lnTo>
+                    <a:pt x="5228444" y="2113781"/>
+                  </a:lnTo>
+                  <a:lnTo>
+                    <a:pt x="5156821" y="2102860"/>
+                  </a:lnTo>
+                  <a:lnTo>
+                    <a:pt x="5085199" y="2091677"/>
+                  </a:lnTo>
+                  <a:lnTo>
+                    <a:pt x="5013576" y="2080225"/>
+                  </a:lnTo>
+                  <a:lnTo>
+                    <a:pt x="4941954" y="2068499"/>
+                  </a:lnTo>
+                  <a:lnTo>
+                    <a:pt x="4870331" y="2056492"/>
+                  </a:lnTo>
+                  <a:lnTo>
+                    <a:pt x="4798709" y="2044196"/>
+                  </a:lnTo>
+                  <a:lnTo>
+                    <a:pt x="4727086" y="2031606"/>
+                  </a:lnTo>
+                  <a:lnTo>
+                    <a:pt x="4655464" y="2018713"/>
+                  </a:lnTo>
+                  <a:lnTo>
+                    <a:pt x="4583841" y="2005512"/>
+                  </a:lnTo>
+                  <a:lnTo>
+                    <a:pt x="4512219" y="1991994"/>
+                  </a:lnTo>
+                  <a:lnTo>
+                    <a:pt x="4440596" y="1978151"/>
+                  </a:lnTo>
+                  <a:lnTo>
+                    <a:pt x="4368974" y="1963977"/>
+                  </a:lnTo>
+                  <a:lnTo>
+                    <a:pt x="4297351" y="1949462"/>
+                  </a:lnTo>
+                  <a:lnTo>
+                    <a:pt x="4225729" y="1934599"/>
+                  </a:lnTo>
+                  <a:lnTo>
+                    <a:pt x="4154106" y="1919380"/>
+                  </a:lnTo>
+                  <a:lnTo>
+                    <a:pt x="4082483" y="1903796"/>
+                  </a:lnTo>
+                  <a:lnTo>
+                    <a:pt x="4010861" y="1887838"/>
+                  </a:lnTo>
+                  <a:lnTo>
+                    <a:pt x="3939238" y="1871497"/>
+                  </a:lnTo>
+                  <a:lnTo>
+                    <a:pt x="3867616" y="1854764"/>
+                  </a:lnTo>
+                  <a:lnTo>
+                    <a:pt x="3795993" y="1837630"/>
+                  </a:lnTo>
+                  <a:lnTo>
+                    <a:pt x="3724371" y="1820085"/>
+                  </a:lnTo>
+                  <a:lnTo>
+                    <a:pt x="3652748" y="1802119"/>
+                  </a:lnTo>
+                  <a:lnTo>
+                    <a:pt x="3581126" y="1783722"/>
+                  </a:lnTo>
+                  <a:lnTo>
+                    <a:pt x="3509503" y="1764884"/>
+                  </a:lnTo>
+                  <a:lnTo>
+                    <a:pt x="3437881" y="1745594"/>
+                  </a:lnTo>
+                  <a:lnTo>
+                    <a:pt x="3366258" y="1734553"/>
+                  </a:lnTo>
+                  <a:lnTo>
+                    <a:pt x="3294636" y="1727194"/>
+                  </a:lnTo>
+                  <a:lnTo>
+                    <a:pt x="3223013" y="1719769"/>
+                  </a:lnTo>
+                  <a:lnTo>
+                    <a:pt x="3151391" y="1712279"/>
+                  </a:lnTo>
+                  <a:lnTo>
+                    <a:pt x="3079768" y="1704723"/>
+                  </a:lnTo>
+                  <a:lnTo>
+                    <a:pt x="3008146" y="1697100"/>
+                  </a:lnTo>
+                  <a:lnTo>
+                    <a:pt x="2936523" y="1689410"/>
+                  </a:lnTo>
+                  <a:lnTo>
+                    <a:pt x="2864901" y="1681653"/>
+                  </a:lnTo>
+                  <a:lnTo>
+                    <a:pt x="2793278" y="1673826"/>
+                  </a:lnTo>
+                  <a:lnTo>
+                    <a:pt x="2721655" y="1665931"/>
+                  </a:lnTo>
+                  <a:lnTo>
+                    <a:pt x="2650033" y="1657966"/>
+                  </a:lnTo>
+                  <a:lnTo>
+                    <a:pt x="2578410" y="1649931"/>
+                  </a:lnTo>
+                  <a:lnTo>
+                    <a:pt x="2506788" y="1641825"/>
+                  </a:lnTo>
+                  <a:lnTo>
+                    <a:pt x="2435165" y="1633648"/>
+                  </a:lnTo>
+                  <a:lnTo>
+                    <a:pt x="2363543" y="1625398"/>
+                  </a:lnTo>
+                  <a:lnTo>
+                    <a:pt x="2291920" y="1617076"/>
+                  </a:lnTo>
+                  <a:lnTo>
+                    <a:pt x="2220298" y="1608680"/>
+                  </a:lnTo>
+                  <a:lnTo>
+                    <a:pt x="2148675" y="1600211"/>
+                  </a:lnTo>
+                  <a:lnTo>
+                    <a:pt x="2077053" y="1591666"/>
+                  </a:lnTo>
+                  <a:lnTo>
+                    <a:pt x="2005430" y="1583046"/>
+                  </a:lnTo>
+                  <a:lnTo>
+                    <a:pt x="1933808" y="1574351"/>
+                  </a:lnTo>
+                  <a:lnTo>
+                    <a:pt x="1862185" y="1565578"/>
+                  </a:lnTo>
+                  <a:lnTo>
+                    <a:pt x="1790563" y="1556728"/>
+                  </a:lnTo>
+                  <a:lnTo>
+                    <a:pt x="1718940" y="1547801"/>
+                  </a:lnTo>
+                  <a:lnTo>
+                    <a:pt x="1647318" y="1538794"/>
+                  </a:lnTo>
+                  <a:lnTo>
+                    <a:pt x="1575695" y="1529708"/>
+                  </a:lnTo>
+                  <a:lnTo>
+                    <a:pt x="1504073" y="1520542"/>
+                  </a:lnTo>
+                  <a:lnTo>
+                    <a:pt x="1432450" y="1511295"/>
+                  </a:lnTo>
+                  <a:lnTo>
+                    <a:pt x="1360827" y="1501966"/>
+                  </a:lnTo>
+                  <a:lnTo>
+                    <a:pt x="1289205" y="1492555"/>
+                  </a:lnTo>
+                  <a:lnTo>
+                    <a:pt x="1217582" y="1483062"/>
+                  </a:lnTo>
+                  <a:lnTo>
+                    <a:pt x="1145960" y="1473484"/>
+                  </a:lnTo>
+                  <a:lnTo>
+                    <a:pt x="1074337" y="1463822"/>
+                  </a:lnTo>
+                  <a:lnTo>
+                    <a:pt x="1002715" y="1454075"/>
+                  </a:lnTo>
+                  <a:lnTo>
+                    <a:pt x="931092" y="1444242"/>
+                  </a:lnTo>
+                  <a:lnTo>
+                    <a:pt x="859470" y="1434322"/>
+                  </a:lnTo>
+                  <a:lnTo>
+                    <a:pt x="787847" y="1424315"/>
+                  </a:lnTo>
+                  <a:lnTo>
+                    <a:pt x="716225" y="1414219"/>
+                  </a:lnTo>
+                  <a:lnTo>
+                    <a:pt x="644602" y="1404034"/>
+                  </a:lnTo>
+                  <a:lnTo>
+                    <a:pt x="572980" y="1393760"/>
+                  </a:lnTo>
+                  <a:lnTo>
+                    <a:pt x="501357" y="1383395"/>
+                  </a:lnTo>
+                  <a:lnTo>
+                    <a:pt x="429735" y="1372938"/>
+                  </a:lnTo>
+                  <a:lnTo>
+                    <a:pt x="358112" y="1362390"/>
+                  </a:lnTo>
+                  <a:lnTo>
+                    <a:pt x="286490" y="1351748"/>
+                  </a:lnTo>
+                  <a:lnTo>
+                    <a:pt x="214867" y="1341013"/>
+                  </a:lnTo>
+                  <a:lnTo>
+                    <a:pt x="143245" y="1330182"/>
+                  </a:lnTo>
+                  <a:lnTo>
+                    <a:pt x="71622" y="1319257"/>
+                  </a:lnTo>
+                  <a:lnTo>
+                    <a:pt x="0" y="1308235"/>
                   </a:lnTo>
                   <a:close/>
                 </a:path>
@@ -3627,318 +3584,643 @@
         </p:sp>
         <p:sp>
           <p:nvSpPr>
+            <p:cNvPr id="21" name="pl21"/>
+            <p:cNvSpPr/>
+            <p:nvPr/>
+          </p:nvSpPr>
+          <p:spPr>
+            <a:xfrm>
+              <a:off x="1172049" y="2988148"/>
+              <a:ext cx="7090630" cy="2040452"/>
+            </a:xfrm>
+            <a:custGeom>
+              <a:avLst/>
+              <a:pathLst>
+                <a:path w="7090630" h="2040452">
+                  <a:moveTo>
+                    <a:pt x="0" y="0"/>
+                  </a:moveTo>
+                  <a:lnTo>
+                    <a:pt x="71622" y="60179"/>
+                  </a:lnTo>
+                  <a:lnTo>
+                    <a:pt x="143245" y="118948"/>
+                  </a:lnTo>
+                  <a:lnTo>
+                    <a:pt x="214867" y="176341"/>
+                  </a:lnTo>
+                  <a:lnTo>
+                    <a:pt x="286490" y="232390"/>
+                  </a:lnTo>
+                  <a:lnTo>
+                    <a:pt x="358112" y="287125"/>
+                  </a:lnTo>
+                  <a:lnTo>
+                    <a:pt x="429735" y="340579"/>
+                  </a:lnTo>
+                  <a:lnTo>
+                    <a:pt x="501357" y="392780"/>
+                  </a:lnTo>
+                  <a:lnTo>
+                    <a:pt x="572980" y="443759"/>
+                  </a:lnTo>
+                  <a:lnTo>
+                    <a:pt x="644602" y="493543"/>
+                  </a:lnTo>
+                  <a:lnTo>
+                    <a:pt x="716225" y="542161"/>
+                  </a:lnTo>
+                  <a:lnTo>
+                    <a:pt x="787847" y="589641"/>
+                  </a:lnTo>
+                  <a:lnTo>
+                    <a:pt x="859470" y="636008"/>
+                  </a:lnTo>
+                  <a:lnTo>
+                    <a:pt x="931092" y="681289"/>
+                  </a:lnTo>
+                  <a:lnTo>
+                    <a:pt x="1002715" y="725510"/>
+                  </a:lnTo>
+                  <a:lnTo>
+                    <a:pt x="1074337" y="768694"/>
+                  </a:lnTo>
+                  <a:lnTo>
+                    <a:pt x="1145960" y="810867"/>
+                  </a:lnTo>
+                  <a:lnTo>
+                    <a:pt x="1217582" y="852053"/>
+                  </a:lnTo>
+                  <a:lnTo>
+                    <a:pt x="1289205" y="892273"/>
+                  </a:lnTo>
+                  <a:lnTo>
+                    <a:pt x="1360827" y="931551"/>
+                  </a:lnTo>
+                  <a:lnTo>
+                    <a:pt x="1432450" y="969910"/>
+                  </a:lnTo>
+                  <a:lnTo>
+                    <a:pt x="1504073" y="1007370"/>
+                  </a:lnTo>
+                  <a:lnTo>
+                    <a:pt x="1575695" y="1043952"/>
+                  </a:lnTo>
+                  <a:lnTo>
+                    <a:pt x="1647318" y="1079677"/>
+                  </a:lnTo>
+                  <a:lnTo>
+                    <a:pt x="1718940" y="1114566"/>
+                  </a:lnTo>
+                  <a:lnTo>
+                    <a:pt x="1790563" y="1148637"/>
+                  </a:lnTo>
+                  <a:lnTo>
+                    <a:pt x="1862185" y="1181910"/>
+                  </a:lnTo>
+                  <a:lnTo>
+                    <a:pt x="1933808" y="1214404"/>
+                  </a:lnTo>
+                  <a:lnTo>
+                    <a:pt x="2005430" y="1246137"/>
+                  </a:lnTo>
+                  <a:lnTo>
+                    <a:pt x="2077053" y="1277126"/>
+                  </a:lnTo>
+                  <a:lnTo>
+                    <a:pt x="2148675" y="1307390"/>
+                  </a:lnTo>
+                  <a:lnTo>
+                    <a:pt x="2220298" y="1336944"/>
+                  </a:lnTo>
+                  <a:lnTo>
+                    <a:pt x="2291920" y="1365807"/>
+                  </a:lnTo>
+                  <a:lnTo>
+                    <a:pt x="2363543" y="1393993"/>
+                  </a:lnTo>
+                  <a:lnTo>
+                    <a:pt x="2435165" y="1421519"/>
+                  </a:lnTo>
+                  <a:lnTo>
+                    <a:pt x="2506788" y="1448400"/>
+                  </a:lnTo>
+                  <a:lnTo>
+                    <a:pt x="2578410" y="1474651"/>
+                  </a:lnTo>
+                  <a:lnTo>
+                    <a:pt x="2650033" y="1500288"/>
+                  </a:lnTo>
+                  <a:lnTo>
+                    <a:pt x="2721655" y="1525324"/>
+                  </a:lnTo>
+                  <a:lnTo>
+                    <a:pt x="2793278" y="1549774"/>
+                  </a:lnTo>
+                  <a:lnTo>
+                    <a:pt x="2864901" y="1573651"/>
+                  </a:lnTo>
+                  <a:lnTo>
+                    <a:pt x="2936523" y="1596968"/>
+                  </a:lnTo>
+                  <a:lnTo>
+                    <a:pt x="3008146" y="1619740"/>
+                  </a:lnTo>
+                  <a:lnTo>
+                    <a:pt x="3079768" y="1641978"/>
+                  </a:lnTo>
+                  <a:lnTo>
+                    <a:pt x="3151391" y="1663695"/>
+                  </a:lnTo>
+                  <a:lnTo>
+                    <a:pt x="3223013" y="1684903"/>
+                  </a:lnTo>
+                  <a:lnTo>
+                    <a:pt x="3294636" y="1705615"/>
+                  </a:lnTo>
+                  <a:lnTo>
+                    <a:pt x="3366258" y="1725841"/>
+                  </a:lnTo>
+                  <a:lnTo>
+                    <a:pt x="3437881" y="1741849"/>
+                  </a:lnTo>
+                  <a:lnTo>
+                    <a:pt x="3509503" y="1749080"/>
+                  </a:lnTo>
+                  <a:lnTo>
+                    <a:pt x="3581126" y="1756249"/>
+                  </a:lnTo>
+                  <a:lnTo>
+                    <a:pt x="3652748" y="1763354"/>
+                  </a:lnTo>
+                  <a:lnTo>
+                    <a:pt x="3724371" y="1770398"/>
+                  </a:lnTo>
+                  <a:lnTo>
+                    <a:pt x="3795993" y="1777380"/>
+                  </a:lnTo>
+                  <a:lnTo>
+                    <a:pt x="3867616" y="1784301"/>
+                  </a:lnTo>
+                  <a:lnTo>
+                    <a:pt x="3939238" y="1791161"/>
+                  </a:lnTo>
+                  <a:lnTo>
+                    <a:pt x="4010861" y="1797962"/>
+                  </a:lnTo>
+                  <a:lnTo>
+                    <a:pt x="4082483" y="1804703"/>
+                  </a:lnTo>
+                  <a:lnTo>
+                    <a:pt x="4154106" y="1811385"/>
+                  </a:lnTo>
+                  <a:lnTo>
+                    <a:pt x="4225729" y="1818009"/>
+                  </a:lnTo>
+                  <a:lnTo>
+                    <a:pt x="4297351" y="1824574"/>
+                  </a:lnTo>
+                  <a:lnTo>
+                    <a:pt x="4368974" y="1831083"/>
+                  </a:lnTo>
+                  <a:lnTo>
+                    <a:pt x="4440596" y="1837534"/>
+                  </a:lnTo>
+                  <a:lnTo>
+                    <a:pt x="4512219" y="1843929"/>
+                  </a:lnTo>
+                  <a:lnTo>
+                    <a:pt x="4583841" y="1850269"/>
+                  </a:lnTo>
+                  <a:lnTo>
+                    <a:pt x="4655464" y="1856552"/>
+                  </a:lnTo>
+                  <a:lnTo>
+                    <a:pt x="4727086" y="1862781"/>
+                  </a:lnTo>
+                  <a:lnTo>
+                    <a:pt x="4798709" y="1868956"/>
+                  </a:lnTo>
+                  <a:lnTo>
+                    <a:pt x="4870331" y="1875076"/>
+                  </a:lnTo>
+                  <a:lnTo>
+                    <a:pt x="4941954" y="1881143"/>
+                  </a:lnTo>
+                  <a:lnTo>
+                    <a:pt x="5013576" y="1887157"/>
+                  </a:lnTo>
+                  <a:lnTo>
+                    <a:pt x="5085199" y="1893118"/>
+                  </a:lnTo>
+                  <a:lnTo>
+                    <a:pt x="5156821" y="1899028"/>
+                  </a:lnTo>
+                  <a:lnTo>
+                    <a:pt x="5228444" y="1904885"/>
+                  </a:lnTo>
+                  <a:lnTo>
+                    <a:pt x="5300066" y="1910691"/>
+                  </a:lnTo>
+                  <a:lnTo>
+                    <a:pt x="5371689" y="1916447"/>
+                  </a:lnTo>
+                  <a:lnTo>
+                    <a:pt x="5443311" y="1922152"/>
+                  </a:lnTo>
+                  <a:lnTo>
+                    <a:pt x="5514934" y="1927808"/>
+                  </a:lnTo>
+                  <a:lnTo>
+                    <a:pt x="5586557" y="1933414"/>
+                  </a:lnTo>
+                  <a:lnTo>
+                    <a:pt x="5658179" y="1938971"/>
+                  </a:lnTo>
+                  <a:lnTo>
+                    <a:pt x="5729802" y="1944479"/>
+                  </a:lnTo>
+                  <a:lnTo>
+                    <a:pt x="5801424" y="1949939"/>
+                  </a:lnTo>
+                  <a:lnTo>
+                    <a:pt x="5873047" y="1955352"/>
+                  </a:lnTo>
+                  <a:lnTo>
+                    <a:pt x="5944669" y="1960717"/>
+                  </a:lnTo>
+                  <a:lnTo>
+                    <a:pt x="6016292" y="1966035"/>
+                  </a:lnTo>
+                  <a:lnTo>
+                    <a:pt x="6087914" y="1971307"/>
+                  </a:lnTo>
+                  <a:lnTo>
+                    <a:pt x="6159537" y="1976533"/>
+                  </a:lnTo>
+                  <a:lnTo>
+                    <a:pt x="6231159" y="1981713"/>
+                  </a:lnTo>
+                  <a:lnTo>
+                    <a:pt x="6302782" y="1986848"/>
+                  </a:lnTo>
+                  <a:lnTo>
+                    <a:pt x="6374404" y="1991937"/>
+                  </a:lnTo>
+                  <a:lnTo>
+                    <a:pt x="6446027" y="1996983"/>
+                  </a:lnTo>
+                  <a:lnTo>
+                    <a:pt x="6517649" y="2001984"/>
+                  </a:lnTo>
+                  <a:lnTo>
+                    <a:pt x="6589272" y="2006942"/>
+                  </a:lnTo>
+                  <a:lnTo>
+                    <a:pt x="6660894" y="2011856"/>
+                  </a:lnTo>
+                  <a:lnTo>
+                    <a:pt x="6732517" y="2016727"/>
+                  </a:lnTo>
+                  <a:lnTo>
+                    <a:pt x="6804139" y="2021556"/>
+                  </a:lnTo>
+                  <a:lnTo>
+                    <a:pt x="6875762" y="2026342"/>
+                  </a:lnTo>
+                  <a:lnTo>
+                    <a:pt x="6947385" y="2031087"/>
+                  </a:lnTo>
+                  <a:lnTo>
+                    <a:pt x="7019007" y="2035790"/>
+                  </a:lnTo>
+                  <a:lnTo>
+                    <a:pt x="7090630" y="2040452"/>
+                  </a:lnTo>
+                </a:path>
+              </a:pathLst>
+            </a:custGeom>
+          </p:spPr>
+          <p:txBody>
+            <a:bodyPr/>
+            <a:lstStyle/>
+            <a:p/>
+          </p:txBody>
+        </p:sp>
+        <p:sp>
+          <p:nvSpPr>
             <p:cNvPr id="22" name="pl22"/>
             <p:cNvSpPr/>
             <p:nvPr/>
           </p:nvSpPr>
           <p:spPr>
             <a:xfrm>
-              <a:off x="817517" y="3042333"/>
-              <a:ext cx="7235830" cy="1986268"/>
+              <a:off x="1172049" y="4296383"/>
+              <a:ext cx="7090630" cy="1015015"/>
             </a:xfrm>
             <a:custGeom>
               <a:avLst/>
               <a:pathLst>
-                <a:path w="7235830" h="1986268">
+                <a:path w="7090630" h="1015015">
                   <a:moveTo>
+                    <a:pt x="7090630" y="1015015"/>
+                  </a:moveTo>
+                  <a:lnTo>
+                    <a:pt x="7019007" y="1009118"/>
+                  </a:lnTo>
+                  <a:lnTo>
+                    <a:pt x="6947385" y="1003080"/>
+                  </a:lnTo>
+                  <a:lnTo>
+                    <a:pt x="6875762" y="996897"/>
+                  </a:lnTo>
+                  <a:lnTo>
+                    <a:pt x="6804139" y="990565"/>
+                  </a:lnTo>
+                  <a:lnTo>
+                    <a:pt x="6732517" y="984082"/>
+                  </a:lnTo>
+                  <a:lnTo>
+                    <a:pt x="6660894" y="977443"/>
+                  </a:lnTo>
+                  <a:lnTo>
+                    <a:pt x="6589272" y="970644"/>
+                  </a:lnTo>
+                  <a:lnTo>
+                    <a:pt x="6517649" y="963683"/>
+                  </a:lnTo>
+                  <a:lnTo>
+                    <a:pt x="6446027" y="956555"/>
+                  </a:lnTo>
+                  <a:lnTo>
+                    <a:pt x="6374404" y="949256"/>
+                  </a:lnTo>
+                  <a:lnTo>
+                    <a:pt x="6302782" y="941781"/>
+                  </a:lnTo>
+                  <a:lnTo>
+                    <a:pt x="6231159" y="934128"/>
+                  </a:lnTo>
+                  <a:lnTo>
+                    <a:pt x="6159537" y="926291"/>
+                  </a:lnTo>
+                  <a:lnTo>
+                    <a:pt x="6087914" y="918266"/>
+                  </a:lnTo>
+                  <a:lnTo>
+                    <a:pt x="6016292" y="910048"/>
+                  </a:lnTo>
+                  <a:lnTo>
+                    <a:pt x="5944669" y="901633"/>
+                  </a:lnTo>
+                  <a:lnTo>
+                    <a:pt x="5873047" y="893017"/>
+                  </a:lnTo>
+                  <a:lnTo>
+                    <a:pt x="5801424" y="884193"/>
+                  </a:lnTo>
+                  <a:lnTo>
+                    <a:pt x="5729802" y="875159"/>
+                  </a:lnTo>
+                  <a:lnTo>
+                    <a:pt x="5658179" y="865907"/>
+                  </a:lnTo>
+                  <a:lnTo>
+                    <a:pt x="5586557" y="856433"/>
+                  </a:lnTo>
+                  <a:lnTo>
+                    <a:pt x="5514934" y="846733"/>
+                  </a:lnTo>
+                  <a:lnTo>
+                    <a:pt x="5443311" y="836799"/>
+                  </a:lnTo>
+                  <a:lnTo>
+                    <a:pt x="5371689" y="826628"/>
+                  </a:lnTo>
+                  <a:lnTo>
+                    <a:pt x="5300066" y="816212"/>
+                  </a:lnTo>
+                  <a:lnTo>
+                    <a:pt x="5228444" y="805546"/>
+                  </a:lnTo>
+                  <a:lnTo>
+                    <a:pt x="5156821" y="794625"/>
+                  </a:lnTo>
+                  <a:lnTo>
+                    <a:pt x="5085199" y="783442"/>
+                  </a:lnTo>
+                  <a:lnTo>
+                    <a:pt x="5013576" y="771990"/>
+                  </a:lnTo>
+                  <a:lnTo>
+                    <a:pt x="4941954" y="760264"/>
+                  </a:lnTo>
+                  <a:lnTo>
+                    <a:pt x="4870331" y="748257"/>
+                  </a:lnTo>
+                  <a:lnTo>
+                    <a:pt x="4798709" y="735961"/>
+                  </a:lnTo>
+                  <a:lnTo>
+                    <a:pt x="4727086" y="723371"/>
+                  </a:lnTo>
+                  <a:lnTo>
+                    <a:pt x="4655464" y="710478"/>
+                  </a:lnTo>
+                  <a:lnTo>
+                    <a:pt x="4583841" y="697277"/>
+                  </a:lnTo>
+                  <a:lnTo>
+                    <a:pt x="4512219" y="683759"/>
+                  </a:lnTo>
+                  <a:lnTo>
+                    <a:pt x="4440596" y="669916"/>
+                  </a:lnTo>
+                  <a:lnTo>
+                    <a:pt x="4368974" y="655741"/>
+                  </a:lnTo>
+                  <a:lnTo>
+                    <a:pt x="4297351" y="641227"/>
+                  </a:lnTo>
+                  <a:lnTo>
+                    <a:pt x="4225729" y="626364"/>
+                  </a:lnTo>
+                  <a:lnTo>
+                    <a:pt x="4154106" y="611145"/>
+                  </a:lnTo>
+                  <a:lnTo>
+                    <a:pt x="4082483" y="595561"/>
+                  </a:lnTo>
+                  <a:lnTo>
+                    <a:pt x="4010861" y="579603"/>
+                  </a:lnTo>
+                  <a:lnTo>
+                    <a:pt x="3939238" y="563262"/>
+                  </a:lnTo>
+                  <a:lnTo>
+                    <a:pt x="3867616" y="546529"/>
+                  </a:lnTo>
+                  <a:lnTo>
+                    <a:pt x="3795993" y="529395"/>
+                  </a:lnTo>
+                  <a:lnTo>
+                    <a:pt x="3724371" y="511850"/>
+                  </a:lnTo>
+                  <a:lnTo>
+                    <a:pt x="3652748" y="493884"/>
+                  </a:lnTo>
+                  <a:lnTo>
+                    <a:pt x="3581126" y="475487"/>
+                  </a:lnTo>
+                  <a:lnTo>
+                    <a:pt x="3509503" y="456649"/>
+                  </a:lnTo>
+                  <a:lnTo>
+                    <a:pt x="3437881" y="437359"/>
+                  </a:lnTo>
+                  <a:lnTo>
+                    <a:pt x="3366258" y="426318"/>
+                  </a:lnTo>
+                  <a:lnTo>
+                    <a:pt x="3294636" y="418959"/>
+                  </a:lnTo>
+                  <a:lnTo>
+                    <a:pt x="3223013" y="411534"/>
+                  </a:lnTo>
+                  <a:lnTo>
+                    <a:pt x="3151391" y="404044"/>
+                  </a:lnTo>
+                  <a:lnTo>
+                    <a:pt x="3079768" y="396488"/>
+                  </a:lnTo>
+                  <a:lnTo>
+                    <a:pt x="3008146" y="388865"/>
+                  </a:lnTo>
+                  <a:lnTo>
+                    <a:pt x="2936523" y="381175"/>
+                  </a:lnTo>
+                  <a:lnTo>
+                    <a:pt x="2864901" y="373418"/>
+                  </a:lnTo>
+                  <a:lnTo>
+                    <a:pt x="2793278" y="365591"/>
+                  </a:lnTo>
+                  <a:lnTo>
+                    <a:pt x="2721655" y="357696"/>
+                  </a:lnTo>
+                  <a:lnTo>
+                    <a:pt x="2650033" y="349731"/>
+                  </a:lnTo>
+                  <a:lnTo>
+                    <a:pt x="2578410" y="341696"/>
+                  </a:lnTo>
+                  <a:lnTo>
+                    <a:pt x="2506788" y="333590"/>
+                  </a:lnTo>
+                  <a:lnTo>
+                    <a:pt x="2435165" y="325413"/>
+                  </a:lnTo>
+                  <a:lnTo>
+                    <a:pt x="2363543" y="317163"/>
+                  </a:lnTo>
+                  <a:lnTo>
+                    <a:pt x="2291920" y="308841"/>
+                  </a:lnTo>
+                  <a:lnTo>
+                    <a:pt x="2220298" y="300445"/>
+                  </a:lnTo>
+                  <a:lnTo>
+                    <a:pt x="2148675" y="291976"/>
+                  </a:lnTo>
+                  <a:lnTo>
+                    <a:pt x="2077053" y="283431"/>
+                  </a:lnTo>
+                  <a:lnTo>
+                    <a:pt x="2005430" y="274811"/>
+                  </a:lnTo>
+                  <a:lnTo>
+                    <a:pt x="1933808" y="266116"/>
+                  </a:lnTo>
+                  <a:lnTo>
+                    <a:pt x="1862185" y="257343"/>
+                  </a:lnTo>
+                  <a:lnTo>
+                    <a:pt x="1790563" y="248493"/>
+                  </a:lnTo>
+                  <a:lnTo>
+                    <a:pt x="1718940" y="239566"/>
+                  </a:lnTo>
+                  <a:lnTo>
+                    <a:pt x="1647318" y="230559"/>
+                  </a:lnTo>
+                  <a:lnTo>
+                    <a:pt x="1575695" y="221473"/>
+                  </a:lnTo>
+                  <a:lnTo>
+                    <a:pt x="1504073" y="212307"/>
+                  </a:lnTo>
+                  <a:lnTo>
+                    <a:pt x="1432450" y="203060"/>
+                  </a:lnTo>
+                  <a:lnTo>
+                    <a:pt x="1360827" y="193731"/>
+                  </a:lnTo>
+                  <a:lnTo>
+                    <a:pt x="1289205" y="184320"/>
+                  </a:lnTo>
+                  <a:lnTo>
+                    <a:pt x="1217582" y="174827"/>
+                  </a:lnTo>
+                  <a:lnTo>
+                    <a:pt x="1145960" y="165249"/>
+                  </a:lnTo>
+                  <a:lnTo>
+                    <a:pt x="1074337" y="155587"/>
+                  </a:lnTo>
+                  <a:lnTo>
+                    <a:pt x="1002715" y="145840"/>
+                  </a:lnTo>
+                  <a:lnTo>
+                    <a:pt x="931092" y="136007"/>
+                  </a:lnTo>
+                  <a:lnTo>
+                    <a:pt x="859470" y="126087"/>
+                  </a:lnTo>
+                  <a:lnTo>
+                    <a:pt x="787847" y="116080"/>
+                  </a:lnTo>
+                  <a:lnTo>
+                    <a:pt x="716225" y="105984"/>
+                  </a:lnTo>
+                  <a:lnTo>
+                    <a:pt x="644602" y="95799"/>
+                  </a:lnTo>
+                  <a:lnTo>
+                    <a:pt x="572980" y="85525"/>
+                  </a:lnTo>
+                  <a:lnTo>
+                    <a:pt x="501357" y="75160"/>
+                  </a:lnTo>
+                  <a:lnTo>
+                    <a:pt x="429735" y="64703"/>
+                  </a:lnTo>
+                  <a:lnTo>
+                    <a:pt x="358112" y="54155"/>
+                  </a:lnTo>
+                  <a:lnTo>
+                    <a:pt x="286490" y="43513"/>
+                  </a:lnTo>
+                  <a:lnTo>
+                    <a:pt x="214867" y="32778"/>
+                  </a:lnTo>
+                  <a:lnTo>
+                    <a:pt x="143245" y="21947"/>
+                  </a:lnTo>
+                  <a:lnTo>
+                    <a:pt x="71622" y="11022"/>
+                  </a:lnTo>
+                  <a:lnTo>
                     <a:pt x="0" y="0"/>
-                  </a:moveTo>
-                  <a:lnTo>
-                    <a:pt x="7347" y="5994"/>
-                  </a:lnTo>
-                  <a:lnTo>
-                    <a:pt x="81107" y="64764"/>
-                  </a:lnTo>
-                  <a:lnTo>
-                    <a:pt x="154867" y="122157"/>
-                  </a:lnTo>
-                  <a:lnTo>
-                    <a:pt x="228627" y="178205"/>
-                  </a:lnTo>
-                  <a:lnTo>
-                    <a:pt x="302387" y="232941"/>
-                  </a:lnTo>
-                  <a:lnTo>
-                    <a:pt x="376147" y="286394"/>
-                  </a:lnTo>
-                  <a:lnTo>
-                    <a:pt x="449907" y="338596"/>
-                  </a:lnTo>
-                  <a:lnTo>
-                    <a:pt x="523667" y="389574"/>
-                  </a:lnTo>
-                  <a:lnTo>
-                    <a:pt x="597427" y="439359"/>
-                  </a:lnTo>
-                  <a:lnTo>
-                    <a:pt x="671187" y="487977"/>
-                  </a:lnTo>
-                  <a:lnTo>
-                    <a:pt x="744947" y="535456"/>
-                  </a:lnTo>
-                  <a:lnTo>
-                    <a:pt x="818707" y="581824"/>
-                  </a:lnTo>
-                  <a:lnTo>
-                    <a:pt x="892467" y="627105"/>
-                  </a:lnTo>
-                  <a:lnTo>
-                    <a:pt x="966227" y="671325"/>
-                  </a:lnTo>
-                  <a:lnTo>
-                    <a:pt x="1039987" y="714510"/>
-                  </a:lnTo>
-                  <a:lnTo>
-                    <a:pt x="1113747" y="756683"/>
-                  </a:lnTo>
-                  <a:lnTo>
-                    <a:pt x="1187508" y="797868"/>
-                  </a:lnTo>
-                  <a:lnTo>
-                    <a:pt x="1261268" y="838089"/>
-                  </a:lnTo>
-                  <a:lnTo>
-                    <a:pt x="1335028" y="877367"/>
-                  </a:lnTo>
-                  <a:lnTo>
-                    <a:pt x="1408788" y="915725"/>
-                  </a:lnTo>
-                  <a:lnTo>
-                    <a:pt x="1482548" y="953185"/>
-                  </a:lnTo>
-                  <a:lnTo>
-                    <a:pt x="1556308" y="989767"/>
-                  </a:lnTo>
-                  <a:lnTo>
-                    <a:pt x="1630068" y="1025493"/>
-                  </a:lnTo>
-                  <a:lnTo>
-                    <a:pt x="1703828" y="1060381"/>
-                  </a:lnTo>
-                  <a:lnTo>
-                    <a:pt x="1777588" y="1094453"/>
-                  </a:lnTo>
-                  <a:lnTo>
-                    <a:pt x="1851348" y="1127726"/>
-                  </a:lnTo>
-                  <a:lnTo>
-                    <a:pt x="1925108" y="1160220"/>
-                  </a:lnTo>
-                  <a:lnTo>
-                    <a:pt x="1998868" y="1191952"/>
-                  </a:lnTo>
-                  <a:lnTo>
-                    <a:pt x="2072628" y="1222942"/>
-                  </a:lnTo>
-                  <a:lnTo>
-                    <a:pt x="2146388" y="1253205"/>
-                  </a:lnTo>
-                  <a:lnTo>
-                    <a:pt x="2220148" y="1282760"/>
-                  </a:lnTo>
-                  <a:lnTo>
-                    <a:pt x="2293908" y="1311622"/>
-                  </a:lnTo>
-                  <a:lnTo>
-                    <a:pt x="2367668" y="1339808"/>
-                  </a:lnTo>
-                  <a:lnTo>
-                    <a:pt x="2441428" y="1367334"/>
-                  </a:lnTo>
-                  <a:lnTo>
-                    <a:pt x="2515188" y="1394216"/>
-                  </a:lnTo>
-                  <a:lnTo>
-                    <a:pt x="2588948" y="1420467"/>
-                  </a:lnTo>
-                  <a:lnTo>
-                    <a:pt x="2662708" y="1446104"/>
-                  </a:lnTo>
-                  <a:lnTo>
-                    <a:pt x="2736468" y="1471140"/>
-                  </a:lnTo>
-                  <a:lnTo>
-                    <a:pt x="2810228" y="1495589"/>
-                  </a:lnTo>
-                  <a:lnTo>
-                    <a:pt x="2883988" y="1519466"/>
-                  </a:lnTo>
-                  <a:lnTo>
-                    <a:pt x="2957748" y="1542784"/>
-                  </a:lnTo>
-                  <a:lnTo>
-                    <a:pt x="3031508" y="1565555"/>
-                  </a:lnTo>
-                  <a:lnTo>
-                    <a:pt x="3105268" y="1587793"/>
-                  </a:lnTo>
-                  <a:lnTo>
-                    <a:pt x="3179028" y="1609511"/>
-                  </a:lnTo>
-                  <a:lnTo>
-                    <a:pt x="3252788" y="1630719"/>
-                  </a:lnTo>
-                  <a:lnTo>
-                    <a:pt x="3326548" y="1651431"/>
-                  </a:lnTo>
-                  <a:lnTo>
-                    <a:pt x="3400308" y="1671657"/>
-                  </a:lnTo>
-                  <a:lnTo>
-                    <a:pt x="3474068" y="1687664"/>
-                  </a:lnTo>
-                  <a:lnTo>
-                    <a:pt x="3547828" y="1694896"/>
-                  </a:lnTo>
-                  <a:lnTo>
-                    <a:pt x="3621588" y="1702064"/>
-                  </a:lnTo>
-                  <a:lnTo>
-                    <a:pt x="3695348" y="1709170"/>
-                  </a:lnTo>
-                  <a:lnTo>
-                    <a:pt x="3769108" y="1716214"/>
-                  </a:lnTo>
-                  <a:lnTo>
-                    <a:pt x="3842868" y="1723196"/>
-                  </a:lnTo>
-                  <a:lnTo>
-                    <a:pt x="3916628" y="1730116"/>
-                  </a:lnTo>
-                  <a:lnTo>
-                    <a:pt x="3990388" y="1736977"/>
-                  </a:lnTo>
-                  <a:lnTo>
-                    <a:pt x="4064149" y="1743777"/>
-                  </a:lnTo>
-                  <a:lnTo>
-                    <a:pt x="4137909" y="1750518"/>
-                  </a:lnTo>
-                  <a:lnTo>
-                    <a:pt x="4211669" y="1757201"/>
-                  </a:lnTo>
-                  <a:lnTo>
-                    <a:pt x="4285429" y="1763824"/>
-                  </a:lnTo>
-                  <a:lnTo>
-                    <a:pt x="4359189" y="1770390"/>
-                  </a:lnTo>
-                  <a:lnTo>
-                    <a:pt x="4432949" y="1776898"/>
-                  </a:lnTo>
-                  <a:lnTo>
-                    <a:pt x="4506709" y="1783350"/>
-                  </a:lnTo>
-                  <a:lnTo>
-                    <a:pt x="4580469" y="1789745"/>
-                  </a:lnTo>
-                  <a:lnTo>
-                    <a:pt x="4654229" y="1796084"/>
-                  </a:lnTo>
-                  <a:lnTo>
-                    <a:pt x="4727989" y="1802368"/>
-                  </a:lnTo>
-                  <a:lnTo>
-                    <a:pt x="4801749" y="1808597"/>
-                  </a:lnTo>
-                  <a:lnTo>
-                    <a:pt x="4875509" y="1814771"/>
-                  </a:lnTo>
-                  <a:lnTo>
-                    <a:pt x="4949269" y="1820892"/>
-                  </a:lnTo>
-                  <a:lnTo>
-                    <a:pt x="5023029" y="1826959"/>
-                  </a:lnTo>
-                  <a:lnTo>
-                    <a:pt x="5096789" y="1832973"/>
-                  </a:lnTo>
-                  <a:lnTo>
-                    <a:pt x="5170549" y="1838934"/>
-                  </a:lnTo>
-                  <a:lnTo>
-                    <a:pt x="5244309" y="1844843"/>
-                  </a:lnTo>
-                  <a:lnTo>
-                    <a:pt x="5318069" y="1850701"/>
-                  </a:lnTo>
-                  <a:lnTo>
-                    <a:pt x="5391829" y="1856507"/>
-                  </a:lnTo>
-                  <a:lnTo>
-                    <a:pt x="5465589" y="1862263"/>
-                  </a:lnTo>
-                  <a:lnTo>
-                    <a:pt x="5539349" y="1867968"/>
-                  </a:lnTo>
-                  <a:lnTo>
-                    <a:pt x="5613109" y="1873623"/>
-                  </a:lnTo>
-                  <a:lnTo>
-                    <a:pt x="5686869" y="1879229"/>
-                  </a:lnTo>
-                  <a:lnTo>
-                    <a:pt x="5760629" y="1884786"/>
-                  </a:lnTo>
-                  <a:lnTo>
-                    <a:pt x="5834389" y="1890295"/>
-                  </a:lnTo>
-                  <a:lnTo>
-                    <a:pt x="5908149" y="1895755"/>
-                  </a:lnTo>
-                  <a:lnTo>
-                    <a:pt x="5981909" y="1901167"/>
-                  </a:lnTo>
-                  <a:lnTo>
-                    <a:pt x="6055669" y="1906533"/>
-                  </a:lnTo>
-                  <a:lnTo>
-                    <a:pt x="6129429" y="1911851"/>
-                  </a:lnTo>
-                  <a:lnTo>
-                    <a:pt x="6203189" y="1917123"/>
-                  </a:lnTo>
-                  <a:lnTo>
-                    <a:pt x="6276949" y="1922348"/>
-                  </a:lnTo>
-                  <a:lnTo>
-                    <a:pt x="6350709" y="1927528"/>
-                  </a:lnTo>
-                  <a:lnTo>
-                    <a:pt x="6424469" y="1932663"/>
-                  </a:lnTo>
-                  <a:lnTo>
-                    <a:pt x="6498229" y="1937753"/>
-                  </a:lnTo>
-                  <a:lnTo>
-                    <a:pt x="6571989" y="1942798"/>
-                  </a:lnTo>
-                  <a:lnTo>
-                    <a:pt x="6645749" y="1947800"/>
-                  </a:lnTo>
-                  <a:lnTo>
-                    <a:pt x="6719509" y="1952757"/>
-                  </a:lnTo>
-                  <a:lnTo>
-                    <a:pt x="6793269" y="1957671"/>
-                  </a:lnTo>
-                  <a:lnTo>
-                    <a:pt x="6867029" y="1962543"/>
-                  </a:lnTo>
-                  <a:lnTo>
-                    <a:pt x="6940789" y="1967371"/>
-                  </a:lnTo>
-                  <a:lnTo>
-                    <a:pt x="7014550" y="1972158"/>
-                  </a:lnTo>
-                  <a:lnTo>
-                    <a:pt x="7088310" y="1976902"/>
-                  </a:lnTo>
-                  <a:lnTo>
-                    <a:pt x="7162070" y="1981606"/>
-                  </a:lnTo>
-                  <a:lnTo>
-                    <a:pt x="7235830" y="1986268"/>
                   </a:lnTo>
                 </a:path>
               </a:pathLst>
@@ -3958,637 +4240,312 @@
           </p:nvSpPr>
           <p:spPr>
             <a:xfrm>
-              <a:off x="817517" y="4306307"/>
-              <a:ext cx="7235830" cy="1005091"/>
+              <a:off x="1172049" y="3757446"/>
+              <a:ext cx="7090630" cy="1439292"/>
             </a:xfrm>
             <a:custGeom>
               <a:avLst/>
               <a:pathLst>
-                <a:path w="7235830" h="1005091">
-                  <a:moveTo>
-                    <a:pt x="7235830" y="1005091"/>
-                  </a:moveTo>
-                  <a:lnTo>
-                    <a:pt x="7162070" y="999194"/>
-                  </a:lnTo>
-                  <a:lnTo>
-                    <a:pt x="7088310" y="993156"/>
-                  </a:lnTo>
-                  <a:lnTo>
-                    <a:pt x="7014550" y="986973"/>
-                  </a:lnTo>
-                  <a:lnTo>
-                    <a:pt x="6940789" y="980641"/>
-                  </a:lnTo>
-                  <a:lnTo>
-                    <a:pt x="6867029" y="974158"/>
-                  </a:lnTo>
-                  <a:lnTo>
-                    <a:pt x="6793269" y="967519"/>
-                  </a:lnTo>
-                  <a:lnTo>
-                    <a:pt x="6719509" y="960720"/>
-                  </a:lnTo>
-                  <a:lnTo>
-                    <a:pt x="6645749" y="953759"/>
-                  </a:lnTo>
-                  <a:lnTo>
-                    <a:pt x="6571989" y="946631"/>
-                  </a:lnTo>
-                  <a:lnTo>
-                    <a:pt x="6498229" y="939332"/>
-                  </a:lnTo>
-                  <a:lnTo>
-                    <a:pt x="6424469" y="931857"/>
-                  </a:lnTo>
-                  <a:lnTo>
-                    <a:pt x="6350709" y="924204"/>
-                  </a:lnTo>
-                  <a:lnTo>
-                    <a:pt x="6276949" y="916367"/>
-                  </a:lnTo>
-                  <a:lnTo>
-                    <a:pt x="6203189" y="908341"/>
-                  </a:lnTo>
-                  <a:lnTo>
-                    <a:pt x="6129429" y="900124"/>
-                  </a:lnTo>
-                  <a:lnTo>
-                    <a:pt x="6055669" y="891709"/>
-                  </a:lnTo>
-                  <a:lnTo>
-                    <a:pt x="5981909" y="883093"/>
-                  </a:lnTo>
-                  <a:lnTo>
-                    <a:pt x="5908149" y="874269"/>
-                  </a:lnTo>
-                  <a:lnTo>
-                    <a:pt x="5834389" y="865234"/>
-                  </a:lnTo>
-                  <a:lnTo>
-                    <a:pt x="5760629" y="855983"/>
-                  </a:lnTo>
-                  <a:lnTo>
-                    <a:pt x="5686869" y="846509"/>
-                  </a:lnTo>
-                  <a:lnTo>
-                    <a:pt x="5613109" y="836809"/>
-                  </a:lnTo>
-                  <a:lnTo>
-                    <a:pt x="5539349" y="826875"/>
-                  </a:lnTo>
-                  <a:lnTo>
-                    <a:pt x="5465589" y="816704"/>
-                  </a:lnTo>
-                  <a:lnTo>
-                    <a:pt x="5391829" y="806288"/>
-                  </a:lnTo>
-                  <a:lnTo>
-                    <a:pt x="5318069" y="795622"/>
-                  </a:lnTo>
-                  <a:lnTo>
-                    <a:pt x="5244309" y="784701"/>
-                  </a:lnTo>
-                  <a:lnTo>
-                    <a:pt x="5170549" y="773518"/>
-                  </a:lnTo>
-                  <a:lnTo>
-                    <a:pt x="5096789" y="762066"/>
-                  </a:lnTo>
-                  <a:lnTo>
-                    <a:pt x="5023029" y="750340"/>
-                  </a:lnTo>
-                  <a:lnTo>
-                    <a:pt x="4949269" y="738333"/>
-                  </a:lnTo>
-                  <a:lnTo>
-                    <a:pt x="4875509" y="726037"/>
-                  </a:lnTo>
-                  <a:lnTo>
-                    <a:pt x="4801749" y="713447"/>
-                  </a:lnTo>
-                  <a:lnTo>
-                    <a:pt x="4727989" y="700554"/>
-                  </a:lnTo>
-                  <a:lnTo>
-                    <a:pt x="4654229" y="687353"/>
-                  </a:lnTo>
-                  <a:lnTo>
-                    <a:pt x="4580469" y="673834"/>
-                  </a:lnTo>
-                  <a:lnTo>
-                    <a:pt x="4506709" y="659992"/>
-                  </a:lnTo>
-                  <a:lnTo>
-                    <a:pt x="4432949" y="645817"/>
-                  </a:lnTo>
-                  <a:lnTo>
-                    <a:pt x="4359189" y="631303"/>
-                  </a:lnTo>
-                  <a:lnTo>
-                    <a:pt x="4285429" y="616440"/>
-                  </a:lnTo>
-                  <a:lnTo>
-                    <a:pt x="4211669" y="601221"/>
-                  </a:lnTo>
-                  <a:lnTo>
-                    <a:pt x="4137909" y="585637"/>
-                  </a:lnTo>
-                  <a:lnTo>
-                    <a:pt x="4064149" y="569679"/>
-                  </a:lnTo>
-                  <a:lnTo>
-                    <a:pt x="3990388" y="553338"/>
-                  </a:lnTo>
-                  <a:lnTo>
-                    <a:pt x="3916628" y="536605"/>
-                  </a:lnTo>
-                  <a:lnTo>
-                    <a:pt x="3842868" y="519471"/>
-                  </a:lnTo>
-                  <a:lnTo>
-                    <a:pt x="3769108" y="501926"/>
-                  </a:lnTo>
-                  <a:lnTo>
-                    <a:pt x="3695348" y="483960"/>
-                  </a:lnTo>
-                  <a:lnTo>
-                    <a:pt x="3621588" y="465563"/>
-                  </a:lnTo>
-                  <a:lnTo>
-                    <a:pt x="3547828" y="446725"/>
-                  </a:lnTo>
-                  <a:lnTo>
-                    <a:pt x="3474068" y="427435"/>
-                  </a:lnTo>
-                  <a:lnTo>
-                    <a:pt x="3400308" y="416394"/>
-                  </a:lnTo>
-                  <a:lnTo>
-                    <a:pt x="3326548" y="409035"/>
-                  </a:lnTo>
-                  <a:lnTo>
-                    <a:pt x="3252788" y="401610"/>
-                  </a:lnTo>
-                  <a:lnTo>
-                    <a:pt x="3179028" y="394120"/>
-                  </a:lnTo>
-                  <a:lnTo>
-                    <a:pt x="3105268" y="386564"/>
-                  </a:lnTo>
-                  <a:lnTo>
-                    <a:pt x="3031508" y="378941"/>
-                  </a:lnTo>
-                  <a:lnTo>
-                    <a:pt x="2957748" y="371251"/>
-                  </a:lnTo>
-                  <a:lnTo>
-                    <a:pt x="2883988" y="363493"/>
-                  </a:lnTo>
-                  <a:lnTo>
-                    <a:pt x="2810228" y="355667"/>
-                  </a:lnTo>
-                  <a:lnTo>
-                    <a:pt x="2736468" y="347772"/>
-                  </a:lnTo>
-                  <a:lnTo>
-                    <a:pt x="2662708" y="339807"/>
-                  </a:lnTo>
-                  <a:lnTo>
-                    <a:pt x="2588948" y="331772"/>
-                  </a:lnTo>
-                  <a:lnTo>
-                    <a:pt x="2515188" y="323666"/>
-                  </a:lnTo>
-                  <a:lnTo>
-                    <a:pt x="2441428" y="315489"/>
-                  </a:lnTo>
-                  <a:lnTo>
-                    <a:pt x="2367668" y="307239"/>
-                  </a:lnTo>
-                  <a:lnTo>
-                    <a:pt x="2293908" y="298917"/>
-                  </a:lnTo>
-                  <a:lnTo>
-                    <a:pt x="2220148" y="290521"/>
-                  </a:lnTo>
-                  <a:lnTo>
-                    <a:pt x="2146388" y="282052"/>
-                  </a:lnTo>
-                  <a:lnTo>
-                    <a:pt x="2072628" y="273507"/>
-                  </a:lnTo>
-                  <a:lnTo>
-                    <a:pt x="1998868" y="264887"/>
-                  </a:lnTo>
-                  <a:lnTo>
-                    <a:pt x="1925108" y="256192"/>
-                  </a:lnTo>
-                  <a:lnTo>
-                    <a:pt x="1851348" y="247419"/>
-                  </a:lnTo>
-                  <a:lnTo>
-                    <a:pt x="1777588" y="238569"/>
-                  </a:lnTo>
-                  <a:lnTo>
-                    <a:pt x="1703828" y="229641"/>
-                  </a:lnTo>
-                  <a:lnTo>
-                    <a:pt x="1630068" y="220635"/>
-                  </a:lnTo>
-                  <a:lnTo>
-                    <a:pt x="1556308" y="211549"/>
-                  </a:lnTo>
-                  <a:lnTo>
-                    <a:pt x="1482548" y="202383"/>
-                  </a:lnTo>
-                  <a:lnTo>
-                    <a:pt x="1408788" y="193136"/>
-                  </a:lnTo>
-                  <a:lnTo>
-                    <a:pt x="1335028" y="183807"/>
-                  </a:lnTo>
-                  <a:lnTo>
-                    <a:pt x="1261268" y="174396"/>
-                  </a:lnTo>
-                  <a:lnTo>
-                    <a:pt x="1187508" y="164903"/>
-                  </a:lnTo>
-                  <a:lnTo>
-                    <a:pt x="1113747" y="155325"/>
-                  </a:lnTo>
-                  <a:lnTo>
-                    <a:pt x="1039987" y="145663"/>
-                  </a:lnTo>
-                  <a:lnTo>
-                    <a:pt x="966227" y="135916"/>
-                  </a:lnTo>
-                  <a:lnTo>
-                    <a:pt x="892467" y="126083"/>
-                  </a:lnTo>
-                  <a:lnTo>
-                    <a:pt x="818707" y="116163"/>
-                  </a:lnTo>
-                  <a:lnTo>
-                    <a:pt x="744947" y="106155"/>
-                  </a:lnTo>
-                  <a:lnTo>
-                    <a:pt x="671187" y="96060"/>
-                  </a:lnTo>
-                  <a:lnTo>
-                    <a:pt x="597427" y="85875"/>
-                  </a:lnTo>
-                  <a:lnTo>
-                    <a:pt x="523667" y="75601"/>
-                  </a:lnTo>
-                  <a:lnTo>
-                    <a:pt x="449907" y="65236"/>
-                  </a:lnTo>
-                  <a:lnTo>
-                    <a:pt x="376147" y="54779"/>
-                  </a:lnTo>
-                  <a:lnTo>
-                    <a:pt x="302387" y="44231"/>
-                  </a:lnTo>
-                  <a:lnTo>
-                    <a:pt x="228627" y="33589"/>
-                  </a:lnTo>
-                  <a:lnTo>
-                    <a:pt x="154867" y="22853"/>
-                  </a:lnTo>
-                  <a:lnTo>
-                    <a:pt x="81107" y="12023"/>
-                  </a:lnTo>
-                  <a:lnTo>
-                    <a:pt x="7347" y="1097"/>
-                  </a:lnTo>
-                  <a:lnTo>
-                    <a:pt x="0" y="0"/>
-                  </a:lnTo>
-                </a:path>
-              </a:pathLst>
-            </a:custGeom>
-          </p:spPr>
-          <p:txBody>
-            <a:bodyPr/>
-            <a:lstStyle/>
-            <a:p/>
-          </p:txBody>
-        </p:sp>
-        <p:sp>
-          <p:nvSpPr>
-            <p:cNvPr id="24" name="pl24"/>
-            <p:cNvSpPr/>
-            <p:nvPr/>
-          </p:nvSpPr>
-          <p:spPr>
-            <a:xfrm>
-              <a:off x="817517" y="3783553"/>
-              <a:ext cx="7235830" cy="1413185"/>
-            </a:xfrm>
-            <a:custGeom>
-              <a:avLst/>
-              <a:pathLst>
-                <a:path w="7235830" h="1413185">
+                <a:path w="7090630" h="1439292">
                   <a:moveTo>
                     <a:pt x="0" y="0"/>
                   </a:moveTo>
                   <a:lnTo>
-                    <a:pt x="7347" y="2888"/>
-                  </a:lnTo>
-                  <a:lnTo>
-                    <a:pt x="81107" y="31416"/>
-                  </a:lnTo>
-                  <a:lnTo>
-                    <a:pt x="154867" y="59485"/>
-                  </a:lnTo>
-                  <a:lnTo>
-                    <a:pt x="228627" y="87101"/>
-                  </a:lnTo>
-                  <a:lnTo>
-                    <a:pt x="302387" y="114273"/>
-                  </a:lnTo>
-                  <a:lnTo>
-                    <a:pt x="376147" y="141007"/>
-                  </a:lnTo>
-                  <a:lnTo>
-                    <a:pt x="449907" y="167310"/>
-                  </a:lnTo>
-                  <a:lnTo>
-                    <a:pt x="523667" y="193189"/>
-                  </a:lnTo>
-                  <a:lnTo>
-                    <a:pt x="597427" y="218652"/>
-                  </a:lnTo>
-                  <a:lnTo>
-                    <a:pt x="671187" y="243704"/>
-                  </a:lnTo>
-                  <a:lnTo>
-                    <a:pt x="744947" y="268353"/>
-                  </a:lnTo>
-                  <a:lnTo>
-                    <a:pt x="818707" y="292604"/>
-                  </a:lnTo>
-                  <a:lnTo>
-                    <a:pt x="892467" y="316465"/>
-                  </a:lnTo>
-                  <a:lnTo>
-                    <a:pt x="966227" y="339942"/>
-                  </a:lnTo>
-                  <a:lnTo>
-                    <a:pt x="1039987" y="363040"/>
-                  </a:lnTo>
-                  <a:lnTo>
-                    <a:pt x="1113747" y="385766"/>
-                  </a:lnTo>
-                  <a:lnTo>
-                    <a:pt x="1187508" y="408126"/>
-                  </a:lnTo>
-                  <a:lnTo>
-                    <a:pt x="1261268" y="430126"/>
-                  </a:lnTo>
-                  <a:lnTo>
-                    <a:pt x="1335028" y="451771"/>
-                  </a:lnTo>
-                  <a:lnTo>
-                    <a:pt x="1408788" y="473068"/>
-                  </a:lnTo>
-                  <a:lnTo>
-                    <a:pt x="1482548" y="494021"/>
-                  </a:lnTo>
-                  <a:lnTo>
-                    <a:pt x="1556308" y="514637"/>
-                  </a:lnTo>
-                  <a:lnTo>
-                    <a:pt x="1630068" y="534921"/>
-                  </a:lnTo>
-                  <a:lnTo>
-                    <a:pt x="1703828" y="554878"/>
-                  </a:lnTo>
-                  <a:lnTo>
-                    <a:pt x="1777588" y="574514"/>
-                  </a:lnTo>
-                  <a:lnTo>
-                    <a:pt x="1851348" y="593833"/>
-                  </a:lnTo>
-                  <a:lnTo>
-                    <a:pt x="1925108" y="612841"/>
-                  </a:lnTo>
-                  <a:lnTo>
-                    <a:pt x="1998868" y="631543"/>
-                  </a:lnTo>
-                  <a:lnTo>
-                    <a:pt x="2072628" y="649943"/>
-                  </a:lnTo>
-                  <a:lnTo>
-                    <a:pt x="2146388" y="668047"/>
-                  </a:lnTo>
-                  <a:lnTo>
-                    <a:pt x="2220148" y="685860"/>
-                  </a:lnTo>
-                  <a:lnTo>
-                    <a:pt x="2293908" y="703385"/>
-                  </a:lnTo>
-                  <a:lnTo>
-                    <a:pt x="2367668" y="720628"/>
-                  </a:lnTo>
-                  <a:lnTo>
-                    <a:pt x="2441428" y="737593"/>
-                  </a:lnTo>
-                  <a:lnTo>
-                    <a:pt x="2515188" y="754285"/>
-                  </a:lnTo>
-                  <a:lnTo>
-                    <a:pt x="2588948" y="770708"/>
-                  </a:lnTo>
-                  <a:lnTo>
-                    <a:pt x="2662708" y="786867"/>
-                  </a:lnTo>
-                  <a:lnTo>
-                    <a:pt x="2736468" y="802765"/>
-                  </a:lnTo>
-                  <a:lnTo>
-                    <a:pt x="2810228" y="818407"/>
-                  </a:lnTo>
-                  <a:lnTo>
-                    <a:pt x="2883988" y="833797"/>
-                  </a:lnTo>
-                  <a:lnTo>
-                    <a:pt x="2957748" y="848939"/>
-                  </a:lnTo>
-                  <a:lnTo>
-                    <a:pt x="3031508" y="863837"/>
-                  </a:lnTo>
-                  <a:lnTo>
-                    <a:pt x="3105268" y="878495"/>
-                  </a:lnTo>
-                  <a:lnTo>
-                    <a:pt x="3179028" y="892917"/>
-                  </a:lnTo>
-                  <a:lnTo>
-                    <a:pt x="3252788" y="907107"/>
-                  </a:lnTo>
-                  <a:lnTo>
-                    <a:pt x="3326548" y="921068"/>
-                  </a:lnTo>
-                  <a:lnTo>
-                    <a:pt x="3400308" y="934804"/>
-                  </a:lnTo>
-                  <a:lnTo>
-                    <a:pt x="3474068" y="948319"/>
-                  </a:lnTo>
-                  <a:lnTo>
-                    <a:pt x="3547828" y="961616"/>
-                  </a:lnTo>
-                  <a:lnTo>
-                    <a:pt x="3621588" y="974699"/>
-                  </a:lnTo>
-                  <a:lnTo>
-                    <a:pt x="3695348" y="987571"/>
-                  </a:lnTo>
-                  <a:lnTo>
-                    <a:pt x="3769108" y="1000236"/>
-                  </a:lnTo>
-                  <a:lnTo>
-                    <a:pt x="3842868" y="1012696"/>
-                  </a:lnTo>
-                  <a:lnTo>
-                    <a:pt x="3916628" y="1024956"/>
-                  </a:lnTo>
-                  <a:lnTo>
-                    <a:pt x="3990388" y="1037019"/>
-                  </a:lnTo>
-                  <a:lnTo>
-                    <a:pt x="4064149" y="1048887"/>
-                  </a:lnTo>
-                  <a:lnTo>
-                    <a:pt x="4137909" y="1060564"/>
-                  </a:lnTo>
-                  <a:lnTo>
-                    <a:pt x="4211669" y="1072053"/>
-                  </a:lnTo>
-                  <a:lnTo>
-                    <a:pt x="4285429" y="1083356"/>
-                  </a:lnTo>
-                  <a:lnTo>
-                    <a:pt x="4359189" y="1094478"/>
-                  </a:lnTo>
-                  <a:lnTo>
-                    <a:pt x="4432949" y="1105420"/>
-                  </a:lnTo>
-                  <a:lnTo>
-                    <a:pt x="4506709" y="1116186"/>
-                  </a:lnTo>
-                  <a:lnTo>
-                    <a:pt x="4580469" y="1126779"/>
-                  </a:lnTo>
-                  <a:lnTo>
-                    <a:pt x="4654229" y="1137201"/>
-                  </a:lnTo>
-                  <a:lnTo>
-                    <a:pt x="4727989" y="1147455"/>
-                  </a:lnTo>
-                  <a:lnTo>
-                    <a:pt x="4801749" y="1157544"/>
-                  </a:lnTo>
-                  <a:lnTo>
-                    <a:pt x="4875509" y="1167471"/>
-                  </a:lnTo>
-                  <a:lnTo>
-                    <a:pt x="4949269" y="1177237"/>
-                  </a:lnTo>
-                  <a:lnTo>
-                    <a:pt x="5023029" y="1186846"/>
-                  </a:lnTo>
-                  <a:lnTo>
-                    <a:pt x="5096789" y="1196301"/>
-                  </a:lnTo>
-                  <a:lnTo>
-                    <a:pt x="5170549" y="1205603"/>
-                  </a:lnTo>
-                  <a:lnTo>
-                    <a:pt x="5244309" y="1214755"/>
-                  </a:lnTo>
-                  <a:lnTo>
-                    <a:pt x="5318069" y="1223760"/>
-                  </a:lnTo>
-                  <a:lnTo>
-                    <a:pt x="5391829" y="1232619"/>
-                  </a:lnTo>
-                  <a:lnTo>
-                    <a:pt x="5465589" y="1241336"/>
-                  </a:lnTo>
-                  <a:lnTo>
-                    <a:pt x="5539349" y="1249913"/>
-                  </a:lnTo>
-                  <a:lnTo>
-                    <a:pt x="5613109" y="1258351"/>
-                  </a:lnTo>
-                  <a:lnTo>
-                    <a:pt x="5686869" y="1266653"/>
-                  </a:lnTo>
-                  <a:lnTo>
-                    <a:pt x="5760629" y="1274822"/>
-                  </a:lnTo>
-                  <a:lnTo>
-                    <a:pt x="5834389" y="1282859"/>
-                  </a:lnTo>
-                  <a:lnTo>
-                    <a:pt x="5908149" y="1290767"/>
-                  </a:lnTo>
-                  <a:lnTo>
-                    <a:pt x="5981909" y="1298547"/>
-                  </a:lnTo>
-                  <a:lnTo>
-                    <a:pt x="6055669" y="1306201"/>
-                  </a:lnTo>
-                  <a:lnTo>
-                    <a:pt x="6129429" y="1313733"/>
-                  </a:lnTo>
-                  <a:lnTo>
-                    <a:pt x="6203189" y="1321143"/>
-                  </a:lnTo>
-                  <a:lnTo>
-                    <a:pt x="6276949" y="1328434"/>
-                  </a:lnTo>
-                  <a:lnTo>
-                    <a:pt x="6350709" y="1335607"/>
-                  </a:lnTo>
-                  <a:lnTo>
-                    <a:pt x="6424469" y="1342665"/>
-                  </a:lnTo>
-                  <a:lnTo>
-                    <a:pt x="6498229" y="1349609"/>
-                  </a:lnTo>
-                  <a:lnTo>
-                    <a:pt x="6571989" y="1356441"/>
-                  </a:lnTo>
-                  <a:lnTo>
-                    <a:pt x="6645749" y="1363163"/>
-                  </a:lnTo>
-                  <a:lnTo>
-                    <a:pt x="6719509" y="1369777"/>
-                  </a:lnTo>
-                  <a:lnTo>
-                    <a:pt x="6793269" y="1376284"/>
-                  </a:lnTo>
-                  <a:lnTo>
-                    <a:pt x="6867029" y="1382687"/>
-                  </a:lnTo>
-                  <a:lnTo>
-                    <a:pt x="6940789" y="1388986"/>
-                  </a:lnTo>
-                  <a:lnTo>
-                    <a:pt x="7014550" y="1395184"/>
-                  </a:lnTo>
-                  <a:lnTo>
-                    <a:pt x="7088310" y="1401282"/>
-                  </a:lnTo>
-                  <a:lnTo>
-                    <a:pt x="7162070" y="1407282"/>
-                  </a:lnTo>
-                  <a:lnTo>
-                    <a:pt x="7235830" y="1413185"/>
+                    <a:pt x="71622" y="28995"/>
+                  </a:lnTo>
+                  <a:lnTo>
+                    <a:pt x="143245" y="57523"/>
+                  </a:lnTo>
+                  <a:lnTo>
+                    <a:pt x="214867" y="85592"/>
+                  </a:lnTo>
+                  <a:lnTo>
+                    <a:pt x="286490" y="113208"/>
+                  </a:lnTo>
+                  <a:lnTo>
+                    <a:pt x="358112" y="140380"/>
+                  </a:lnTo>
+                  <a:lnTo>
+                    <a:pt x="429735" y="167114"/>
+                  </a:lnTo>
+                  <a:lnTo>
+                    <a:pt x="501357" y="193417"/>
+                  </a:lnTo>
+                  <a:lnTo>
+                    <a:pt x="572980" y="219296"/>
+                  </a:lnTo>
+                  <a:lnTo>
+                    <a:pt x="644602" y="244759"/>
+                  </a:lnTo>
+                  <a:lnTo>
+                    <a:pt x="716225" y="269811"/>
+                  </a:lnTo>
+                  <a:lnTo>
+                    <a:pt x="787847" y="294460"/>
+                  </a:lnTo>
+                  <a:lnTo>
+                    <a:pt x="859470" y="318711"/>
+                  </a:lnTo>
+                  <a:lnTo>
+                    <a:pt x="931092" y="342572"/>
+                  </a:lnTo>
+                  <a:lnTo>
+                    <a:pt x="1002715" y="366049"/>
+                  </a:lnTo>
+                  <a:lnTo>
+                    <a:pt x="1074337" y="389147"/>
+                  </a:lnTo>
+                  <a:lnTo>
+                    <a:pt x="1145960" y="411873"/>
+                  </a:lnTo>
+                  <a:lnTo>
+                    <a:pt x="1217582" y="434233"/>
+                  </a:lnTo>
+                  <a:lnTo>
+                    <a:pt x="1289205" y="456233"/>
+                  </a:lnTo>
+                  <a:lnTo>
+                    <a:pt x="1360827" y="477878"/>
+                  </a:lnTo>
+                  <a:lnTo>
+                    <a:pt x="1432450" y="499175"/>
+                  </a:lnTo>
+                  <a:lnTo>
+                    <a:pt x="1504073" y="520128"/>
+                  </a:lnTo>
+                  <a:lnTo>
+                    <a:pt x="1575695" y="540744"/>
+                  </a:lnTo>
+                  <a:lnTo>
+                    <a:pt x="1647318" y="561028"/>
+                  </a:lnTo>
+                  <a:lnTo>
+                    <a:pt x="1718940" y="580985"/>
+                  </a:lnTo>
+                  <a:lnTo>
+                    <a:pt x="1790563" y="600621"/>
+                  </a:lnTo>
+                  <a:lnTo>
+                    <a:pt x="1862185" y="619940"/>
+                  </a:lnTo>
+                  <a:lnTo>
+                    <a:pt x="1933808" y="638948"/>
+                  </a:lnTo>
+                  <a:lnTo>
+                    <a:pt x="2005430" y="657650"/>
+                  </a:lnTo>
+                  <a:lnTo>
+                    <a:pt x="2077053" y="676050"/>
+                  </a:lnTo>
+                  <a:lnTo>
+                    <a:pt x="2148675" y="694154"/>
+                  </a:lnTo>
+                  <a:lnTo>
+                    <a:pt x="2220298" y="711967"/>
+                  </a:lnTo>
+                  <a:lnTo>
+                    <a:pt x="2291920" y="729492"/>
+                  </a:lnTo>
+                  <a:lnTo>
+                    <a:pt x="2363543" y="746735"/>
+                  </a:lnTo>
+                  <a:lnTo>
+                    <a:pt x="2435165" y="763700"/>
+                  </a:lnTo>
+                  <a:lnTo>
+                    <a:pt x="2506788" y="780392"/>
+                  </a:lnTo>
+                  <a:lnTo>
+                    <a:pt x="2578410" y="796815"/>
+                  </a:lnTo>
+                  <a:lnTo>
+                    <a:pt x="2650033" y="812974"/>
+                  </a:lnTo>
+                  <a:lnTo>
+                    <a:pt x="2721655" y="828872"/>
+                  </a:lnTo>
+                  <a:lnTo>
+                    <a:pt x="2793278" y="844514"/>
+                  </a:lnTo>
+                  <a:lnTo>
+                    <a:pt x="2864901" y="859904"/>
+                  </a:lnTo>
+                  <a:lnTo>
+                    <a:pt x="2936523" y="875046"/>
+                  </a:lnTo>
+                  <a:lnTo>
+                    <a:pt x="3008146" y="889944"/>
+                  </a:lnTo>
+                  <a:lnTo>
+                    <a:pt x="3079768" y="904602"/>
+                  </a:lnTo>
+                  <a:lnTo>
+                    <a:pt x="3151391" y="919024"/>
+                  </a:lnTo>
+                  <a:lnTo>
+                    <a:pt x="3223013" y="933214"/>
+                  </a:lnTo>
+                  <a:lnTo>
+                    <a:pt x="3294636" y="947175"/>
+                  </a:lnTo>
+                  <a:lnTo>
+                    <a:pt x="3366258" y="960911"/>
+                  </a:lnTo>
+                  <a:lnTo>
+                    <a:pt x="3437881" y="974426"/>
+                  </a:lnTo>
+                  <a:lnTo>
+                    <a:pt x="3509503" y="987723"/>
+                  </a:lnTo>
+                  <a:lnTo>
+                    <a:pt x="3581126" y="1000806"/>
+                  </a:lnTo>
+                  <a:lnTo>
+                    <a:pt x="3652748" y="1013678"/>
+                  </a:lnTo>
+                  <a:lnTo>
+                    <a:pt x="3724371" y="1026343"/>
+                  </a:lnTo>
+                  <a:lnTo>
+                    <a:pt x="3795993" y="1038803"/>
+                  </a:lnTo>
+                  <a:lnTo>
+                    <a:pt x="3867616" y="1051063"/>
+                  </a:lnTo>
+                  <a:lnTo>
+                    <a:pt x="3939238" y="1063126"/>
+                  </a:lnTo>
+                  <a:lnTo>
+                    <a:pt x="4010861" y="1074994"/>
+                  </a:lnTo>
+                  <a:lnTo>
+                    <a:pt x="4082483" y="1086671"/>
+                  </a:lnTo>
+                  <a:lnTo>
+                    <a:pt x="4154106" y="1098160"/>
+                  </a:lnTo>
+                  <a:lnTo>
+                    <a:pt x="4225729" y="1109463"/>
+                  </a:lnTo>
+                  <a:lnTo>
+                    <a:pt x="4297351" y="1120585"/>
+                  </a:lnTo>
+                  <a:lnTo>
+                    <a:pt x="4368974" y="1131527"/>
+                  </a:lnTo>
+                  <a:lnTo>
+                    <a:pt x="4440596" y="1142293"/>
+                  </a:lnTo>
+                  <a:lnTo>
+                    <a:pt x="4512219" y="1152886"/>
+                  </a:lnTo>
+                  <a:lnTo>
+                    <a:pt x="4583841" y="1163308"/>
+                  </a:lnTo>
+                  <a:lnTo>
+                    <a:pt x="4655464" y="1173562"/>
+                  </a:lnTo>
+                  <a:lnTo>
+                    <a:pt x="4727086" y="1183651"/>
+                  </a:lnTo>
+                  <a:lnTo>
+                    <a:pt x="4798709" y="1193578"/>
+                  </a:lnTo>
+                  <a:lnTo>
+                    <a:pt x="4870331" y="1203344"/>
+                  </a:lnTo>
+                  <a:lnTo>
+                    <a:pt x="4941954" y="1212953"/>
+                  </a:lnTo>
+                  <a:lnTo>
+                    <a:pt x="5013576" y="1222408"/>
+                  </a:lnTo>
+                  <a:lnTo>
+                    <a:pt x="5085199" y="1231710"/>
+                  </a:lnTo>
+                  <a:lnTo>
+                    <a:pt x="5156821" y="1240862"/>
+                  </a:lnTo>
+                  <a:lnTo>
+                    <a:pt x="5228444" y="1249867"/>
+                  </a:lnTo>
+                  <a:lnTo>
+                    <a:pt x="5300066" y="1258726"/>
+                  </a:lnTo>
+                  <a:lnTo>
+                    <a:pt x="5371689" y="1267443"/>
+                  </a:lnTo>
+                  <a:lnTo>
+                    <a:pt x="5443311" y="1276020"/>
+                  </a:lnTo>
+                  <a:lnTo>
+                    <a:pt x="5514934" y="1284458"/>
+                  </a:lnTo>
+                  <a:lnTo>
+                    <a:pt x="5586557" y="1292760"/>
+                  </a:lnTo>
+                  <a:lnTo>
+                    <a:pt x="5658179" y="1300929"/>
+                  </a:lnTo>
+                  <a:lnTo>
+                    <a:pt x="5729802" y="1308966"/>
+                  </a:lnTo>
+                  <a:lnTo>
+                    <a:pt x="5801424" y="1316874"/>
+                  </a:lnTo>
+                  <a:lnTo>
+                    <a:pt x="5873047" y="1324654"/>
+                  </a:lnTo>
+                  <a:lnTo>
+                    <a:pt x="5944669" y="1332309"/>
+                  </a:lnTo>
+                  <a:lnTo>
+                    <a:pt x="6016292" y="1339840"/>
+                  </a:lnTo>
+                  <a:lnTo>
+                    <a:pt x="6087914" y="1347250"/>
+                  </a:lnTo>
+                  <a:lnTo>
+                    <a:pt x="6159537" y="1354541"/>
+                  </a:lnTo>
+                  <a:lnTo>
+                    <a:pt x="6231159" y="1361714"/>
+                  </a:lnTo>
+                  <a:lnTo>
+                    <a:pt x="6302782" y="1368772"/>
+                  </a:lnTo>
+                  <a:lnTo>
+                    <a:pt x="6374404" y="1375716"/>
+                  </a:lnTo>
+                  <a:lnTo>
+                    <a:pt x="6446027" y="1382548"/>
+                  </a:lnTo>
+                  <a:lnTo>
+                    <a:pt x="6517649" y="1389270"/>
+                  </a:lnTo>
+                  <a:lnTo>
+                    <a:pt x="6589272" y="1395884"/>
+                  </a:lnTo>
+                  <a:lnTo>
+                    <a:pt x="6660894" y="1402391"/>
+                  </a:lnTo>
+                  <a:lnTo>
+                    <a:pt x="6732517" y="1408794"/>
+                  </a:lnTo>
+                  <a:lnTo>
+                    <a:pt x="6804139" y="1415093"/>
+                  </a:lnTo>
+                  <a:lnTo>
+                    <a:pt x="6875762" y="1421291"/>
+                  </a:lnTo>
+                  <a:lnTo>
+                    <a:pt x="6947385" y="1427389"/>
+                  </a:lnTo>
+                  <a:lnTo>
+                    <a:pt x="7019007" y="1433389"/>
+                  </a:lnTo>
+                  <a:lnTo>
+                    <a:pt x="7090630" y="1439292"/>
                   </a:lnTo>
                 </a:path>
               </a:pathLst>
@@ -4611,7 +4568,7 @@
         </p:sp>
         <p:sp>
           <p:nvSpPr>
-            <p:cNvPr id="25" name="pl25"/>
+            <p:cNvPr id="24" name="pl24"/>
             <p:cNvSpPr/>
             <p:nvPr/>
           </p:nvSpPr>
@@ -4654,13 +4611,13 @@
         </p:sp>
         <p:sp>
           <p:nvSpPr>
-            <p:cNvPr id="26" name="pl26"/>
+            <p:cNvPr id="25" name="pl25"/>
             <p:cNvSpPr/>
             <p:nvPr/>
           </p:nvSpPr>
           <p:spPr>
             <a:xfrm>
-              <a:off x="4269157" y="2073503"/>
+              <a:off x="4588151" y="2073503"/>
               <a:ext cx="0" cy="3649639"/>
             </a:xfrm>
             <a:custGeom>
@@ -4697,7 +4654,7 @@
         </p:sp>
         <p:sp>
           <p:nvSpPr>
-            <p:cNvPr id="27" name="tx27"/>
+            <p:cNvPr id="26" name="tx26"/>
             <p:cNvSpPr/>
             <p:nvPr/>
           </p:nvSpPr>
@@ -4743,7 +4700,7 @@
         </p:sp>
         <p:sp>
           <p:nvSpPr>
-            <p:cNvPr id="28" name="tx28"/>
+            <p:cNvPr id="27" name="tx27"/>
             <p:cNvSpPr/>
             <p:nvPr/>
           </p:nvSpPr>
@@ -4789,7 +4746,7 @@
         </p:sp>
         <p:sp>
           <p:nvSpPr>
-            <p:cNvPr id="29" name="tx29"/>
+            <p:cNvPr id="28" name="tx28"/>
             <p:cNvSpPr/>
             <p:nvPr/>
           </p:nvSpPr>
@@ -4835,7 +4792,7 @@
         </p:sp>
         <p:sp>
           <p:nvSpPr>
-            <p:cNvPr id="30" name="tx30"/>
+            <p:cNvPr id="29" name="tx29"/>
             <p:cNvSpPr/>
             <p:nvPr/>
           </p:nvSpPr>
@@ -4881,7 +4838,7 @@
         </p:sp>
         <p:sp>
           <p:nvSpPr>
-            <p:cNvPr id="31" name="tx31"/>
+            <p:cNvPr id="30" name="tx30"/>
             <p:cNvSpPr/>
             <p:nvPr/>
           </p:nvSpPr>
@@ -4927,14 +4884,14 @@
         </p:sp>
         <p:sp>
           <p:nvSpPr>
-            <p:cNvPr id="32" name="tx32"/>
+            <p:cNvPr id="31" name="tx31"/>
             <p:cNvSpPr/>
             <p:nvPr/>
           </p:nvSpPr>
           <p:spPr>
             <a:xfrm>
-              <a:off x="2423864" y="5785772"/>
-              <a:ext cx="155356" cy="80101"/>
+              <a:off x="2360651" y="5785772"/>
+              <a:ext cx="161574" cy="80101"/>
             </a:xfrm>
             <a:prstGeom prst="rect">
               <a:avLst/>
@@ -4966,21 +4923,21 @@
                   <a:latin typeface="Helvetica"/>
                   <a:cs typeface="Helvetica"/>
                 </a:rPr>
-                <a:t>0.8</a:t>
+                <a:t>-25</a:t>
               </a:r>
             </a:p>
           </p:txBody>
         </p:sp>
         <p:sp>
           <p:nvSpPr>
-            <p:cNvPr id="33" name="tx33"/>
+            <p:cNvPr id="32" name="tx32"/>
             <p:cNvSpPr/>
             <p:nvPr/>
           </p:nvSpPr>
           <p:spPr>
             <a:xfrm>
-              <a:off x="4196521" y="5785772"/>
-              <a:ext cx="155356" cy="80101"/>
+              <a:off x="4561958" y="5785772"/>
+              <a:ext cx="62179" cy="80101"/>
             </a:xfrm>
             <a:prstGeom prst="rect">
               <a:avLst/>
@@ -5012,21 +4969,21 @@
                   <a:latin typeface="Helvetica"/>
                   <a:cs typeface="Helvetica"/>
                 </a:rPr>
-                <a:t>1.0</a:t>
+                <a:t>0</a:t>
               </a:r>
             </a:p>
           </p:txBody>
         </p:sp>
         <p:sp>
           <p:nvSpPr>
-            <p:cNvPr id="34" name="tx34"/>
+            <p:cNvPr id="33" name="tx33"/>
             <p:cNvSpPr/>
             <p:nvPr/>
           </p:nvSpPr>
           <p:spPr>
             <a:xfrm>
-              <a:off x="5969179" y="5785772"/>
-              <a:ext cx="155356" cy="80101"/>
+              <a:off x="6682478" y="5785772"/>
+              <a:ext cx="124358" cy="80101"/>
             </a:xfrm>
             <a:prstGeom prst="rect">
               <a:avLst/>
@@ -5058,67 +5015,21 @@
                   <a:latin typeface="Helvetica"/>
                   <a:cs typeface="Helvetica"/>
                 </a:rPr>
-                <a:t>1.2</a:t>
+                <a:t>25</a:t>
               </a:r>
             </a:p>
           </p:txBody>
         </p:sp>
         <p:sp>
           <p:nvSpPr>
-            <p:cNvPr id="35" name="tx35"/>
+            <p:cNvPr id="34" name="tx34"/>
             <p:cNvSpPr/>
             <p:nvPr/>
           </p:nvSpPr>
           <p:spPr>
             <a:xfrm>
-              <a:off x="7741836" y="5785772"/>
-              <a:ext cx="155356" cy="80101"/>
-            </a:xfrm>
-            <a:prstGeom prst="rect">
-              <a:avLst/>
-            </a:prstGeom>
-            <a:noFill/>
-          </p:spPr>
-          <p:txBody>
-            <a:bodyPr lIns="0" rIns="0" tIns="0" bIns="0" anchorCtr="1" anchor="ctr" wrap="none"/>
-            <a:lstStyle/>
-            <a:p>
-              <a:pPr algn="l" marL="0" marR="0" indent="0">
-                <a:lnSpc>
-                  <a:spcPts val="880"/>
-                </a:lnSpc>
-                <a:spcBef>
-                  <a:spcPts val="0"/>
-                </a:spcBef>
-                <a:spcAft>
-                  <a:spcPts val="0"/>
-                </a:spcAft>
-              </a:pPr>
-              <a:r>
-                <a:rPr sz="880">
-                  <a:solidFill>
-                    <a:srgbClr val="4D4D4D">
-                      <a:alpha val="100000"/>
-                    </a:srgbClr>
-                  </a:solidFill>
-                  <a:latin typeface="Helvetica"/>
-                  <a:cs typeface="Helvetica"/>
-                </a:rPr>
-                <a:t>1.4</a:t>
-              </a:r>
-            </a:p>
-          </p:txBody>
-        </p:sp>
-        <p:sp>
-          <p:nvSpPr>
-            <p:cNvPr id="36" name="tx36"/>
-            <p:cNvSpPr/>
-            <p:nvPr/>
-          </p:nvSpPr>
-          <p:spPr>
-            <a:xfrm>
-              <a:off x="3879271" y="5925448"/>
-              <a:ext cx="1676186" cy="100218"/>
+              <a:off x="2928340" y="5925448"/>
+              <a:ext cx="3578047" cy="100218"/>
             </a:xfrm>
             <a:prstGeom prst="rect">
               <a:avLst/>
@@ -5150,14 +5061,14 @@
                   <a:latin typeface="Helvetica"/>
                   <a:cs typeface="Helvetica"/>
                 </a:rPr>
-                <a:t>CKD-EPI Cr-Cys / CG ratio</a:t>
+                <a:t>eGFR difference (%): 100 × (CKD-EPI Cr-Cys − CG) / CG</a:t>
               </a:r>
             </a:p>
           </p:txBody>
         </p:sp>
         <p:sp>
           <p:nvSpPr>
-            <p:cNvPr id="37" name="tx37"/>
+            <p:cNvPr id="35" name="tx35"/>
             <p:cNvSpPr/>
             <p:nvPr/>
           </p:nvSpPr>
@@ -5203,14 +5114,14 @@
         </p:sp>
         <p:sp>
           <p:nvSpPr>
-            <p:cNvPr id="38" name="tx38"/>
+            <p:cNvPr id="36" name="tx36"/>
             <p:cNvSpPr/>
             <p:nvPr/>
           </p:nvSpPr>
           <p:spPr>
             <a:xfrm>
               <a:off x="817517" y="1896563"/>
-              <a:ext cx="6899879" cy="82021"/>
+              <a:ext cx="7052127" cy="82021"/>
             </a:xfrm>
             <a:prstGeom prst="rect">
               <a:avLst/>
@@ -5242,14 +5153,14 @@
                   <a:latin typeface="Helvetica"/>
                   <a:cs typeface="Helvetica"/>
                 </a:rPr>
-                <a:t>subHR per 0.1 ratio decline: 1.22 (1.11-1.33), p_Bonf = &lt;0.001 (n = 6)  |  per IQR decline (Δ = 0.29): 1.77 (1.36-2.30)  |  IQR: [0.85, 1.15]</a:t>
+                <a:t>subHR per 10 % decline: 1.22 (1.11-1.33), p_Bonf = &lt;0.001 (n = 6)  |  per IQR decline (Δ = 29.3 %): 1.77 (1.36-2.30)  |  IQR: [-14.6, 14.7] %</a:t>
               </a:r>
             </a:p>
           </p:txBody>
         </p:sp>
         <p:sp>
           <p:nvSpPr>
-            <p:cNvPr id="39" name="tx39"/>
+            <p:cNvPr id="37" name="tx37"/>
             <p:cNvSpPr/>
             <p:nvPr/>
           </p:nvSpPr>

--- a/docs/pptx/whole/jx-linsubhr-ratio-anyhosp.pptx
+++ b/docs/pptx/whole/jx-linsubhr-ratio-anyhosp.pptx
@@ -2265,34 +2265,26 @@
         </p:sp>
         <p:sp>
           <p:nvSpPr>
-            <p:cNvPr id="4" name="pl4"/>
+            <p:cNvPr id="4" name="rc4"/>
             <p:cNvSpPr/>
             <p:nvPr/>
           </p:nvSpPr>
           <p:spPr>
             <a:xfrm>
-              <a:off x="817517" y="5142518"/>
-              <a:ext cx="7799693" cy="0"/>
+              <a:off x="457200" y="1600200"/>
+              <a:ext cx="8229600" cy="4525962"/>
             </a:xfrm>
-            <a:custGeom>
+            <a:prstGeom prst="rect">
               <a:avLst/>
-              <a:pathLst>
-                <a:path w="7799693" h="0">
-                  <a:moveTo>
-                    <a:pt x="0" y="0"/>
-                  </a:moveTo>
-                  <a:lnTo>
-                    <a:pt x="7799693" y="0"/>
-                  </a:lnTo>
-                  <a:lnTo>
-                    <a:pt x="7799693" y="0"/>
-                  </a:lnTo>
-                </a:path>
-              </a:pathLst>
-            </a:custGeom>
-            <a:ln w="6775" cap="flat">
+            </a:prstGeom>
+            <a:solidFill>
+              <a:srgbClr val="FFFFFF">
+                <a:alpha val="100000"/>
+              </a:srgbClr>
+            </a:solidFill>
+            <a:ln w="13550" cap="rnd">
               <a:solidFill>
-                <a:srgbClr val="EBEBEB">
+                <a:srgbClr val="FFFFFF">
                   <a:alpha val="100000"/>
                 </a:srgbClr>
               </a:solidFill>
@@ -2314,21 +2306,21 @@
           </p:nvSpPr>
           <p:spPr>
             <a:xfrm>
-              <a:off x="817517" y="4313054"/>
-              <a:ext cx="7799693" cy="0"/>
+              <a:off x="887106" y="3250627"/>
+              <a:ext cx="7660515" cy="0"/>
             </a:xfrm>
             <a:custGeom>
               <a:avLst/>
               <a:pathLst>
-                <a:path w="7799693" h="0">
+                <a:path w="7660515" h="0">
                   <a:moveTo>
                     <a:pt x="0" y="0"/>
                   </a:moveTo>
                   <a:lnTo>
-                    <a:pt x="7799693" y="0"/>
-                  </a:lnTo>
-                  <a:lnTo>
-                    <a:pt x="7799693" y="0"/>
+                    <a:pt x="7660515" y="0"/>
+                  </a:lnTo>
+                  <a:lnTo>
+                    <a:pt x="7660515" y="0"/>
                   </a:lnTo>
                 </a:path>
               </a:pathLst>
@@ -2357,21 +2349,21 @@
           </p:nvSpPr>
           <p:spPr>
             <a:xfrm>
-              <a:off x="817517" y="3483591"/>
-              <a:ext cx="7799693" cy="0"/>
+              <a:off x="887106" y="2951293"/>
+              <a:ext cx="7660515" cy="0"/>
             </a:xfrm>
             <a:custGeom>
               <a:avLst/>
               <a:pathLst>
-                <a:path w="7799693" h="0">
+                <a:path w="7660515" h="0">
                   <a:moveTo>
                     <a:pt x="0" y="0"/>
                   </a:moveTo>
                   <a:lnTo>
-                    <a:pt x="7799693" y="0"/>
-                  </a:lnTo>
-                  <a:lnTo>
-                    <a:pt x="7799693" y="0"/>
+                    <a:pt x="7660515" y="0"/>
+                  </a:lnTo>
+                  <a:lnTo>
+                    <a:pt x="7660515" y="0"/>
                   </a:lnTo>
                 </a:path>
               </a:pathLst>
@@ -2400,21 +2392,21 @@
           </p:nvSpPr>
           <p:spPr>
             <a:xfrm>
-              <a:off x="817517" y="2654127"/>
-              <a:ext cx="7799693" cy="0"/>
+              <a:off x="887106" y="2651959"/>
+              <a:ext cx="7660515" cy="0"/>
             </a:xfrm>
             <a:custGeom>
               <a:avLst/>
               <a:pathLst>
-                <a:path w="7799693" h="0">
+                <a:path w="7660515" h="0">
                   <a:moveTo>
                     <a:pt x="0" y="0"/>
                   </a:moveTo>
                   <a:lnTo>
-                    <a:pt x="7799693" y="0"/>
-                  </a:lnTo>
-                  <a:lnTo>
-                    <a:pt x="7799693" y="0"/>
+                    <a:pt x="7660515" y="0"/>
+                  </a:lnTo>
+                  <a:lnTo>
+                    <a:pt x="7660515" y="0"/>
                   </a:lnTo>
                 </a:path>
               </a:pathLst>
@@ -2443,21 +2435,21 @@
           </p:nvSpPr>
           <p:spPr>
             <a:xfrm>
-              <a:off x="1365633" y="2073503"/>
-              <a:ext cx="0" cy="3649639"/>
+              <a:off x="887106" y="2352625"/>
+              <a:ext cx="7660515" cy="0"/>
             </a:xfrm>
             <a:custGeom>
               <a:avLst/>
               <a:pathLst>
-                <a:path w="0" h="3649639">
+                <a:path w="7660515" h="0">
                   <a:moveTo>
-                    <a:pt x="0" y="3649639"/>
+                    <a:pt x="0" y="0"/>
                   </a:moveTo>
                   <a:lnTo>
-                    <a:pt x="0" y="0"/>
-                  </a:lnTo>
-                  <a:lnTo>
-                    <a:pt x="0" y="0"/>
+                    <a:pt x="7660515" y="0"/>
+                  </a:lnTo>
+                  <a:lnTo>
+                    <a:pt x="7660515" y="0"/>
                   </a:lnTo>
                 </a:path>
               </a:pathLst>
@@ -2486,15 +2478,15 @@
           </p:nvSpPr>
           <p:spPr>
             <a:xfrm>
-              <a:off x="3517243" y="2073503"/>
-              <a:ext cx="0" cy="3649639"/>
+              <a:off x="1425442" y="2143092"/>
+              <a:ext cx="0" cy="1317069"/>
             </a:xfrm>
             <a:custGeom>
               <a:avLst/>
               <a:pathLst>
-                <a:path w="0" h="3649639">
+                <a:path w="0" h="1317069">
                   <a:moveTo>
-                    <a:pt x="0" y="3649639"/>
+                    <a:pt x="0" y="1317069"/>
                   </a:moveTo>
                   <a:lnTo>
                     <a:pt x="0" y="0"/>
@@ -2529,15 +2521,15 @@
           </p:nvSpPr>
           <p:spPr>
             <a:xfrm>
-              <a:off x="5668852" y="2073503"/>
-              <a:ext cx="0" cy="3649639"/>
+              <a:off x="3538658" y="2143092"/>
+              <a:ext cx="0" cy="1317069"/>
             </a:xfrm>
             <a:custGeom>
               <a:avLst/>
               <a:pathLst>
-                <a:path w="0" h="3649639">
+                <a:path w="0" h="1317069">
                   <a:moveTo>
-                    <a:pt x="0" y="3649639"/>
+                    <a:pt x="0" y="1317069"/>
                   </a:moveTo>
                   <a:lnTo>
                     <a:pt x="0" y="0"/>
@@ -2572,15 +2564,15 @@
           </p:nvSpPr>
           <p:spPr>
             <a:xfrm>
-              <a:off x="7820461" y="2073503"/>
-              <a:ext cx="0" cy="3649639"/>
+              <a:off x="5651874" y="2143092"/>
+              <a:ext cx="0" cy="1317069"/>
             </a:xfrm>
             <a:custGeom>
               <a:avLst/>
               <a:pathLst>
-                <a:path w="0" h="3649639">
+                <a:path w="0" h="1317069">
                   <a:moveTo>
-                    <a:pt x="0" y="3649639"/>
+                    <a:pt x="0" y="1317069"/>
                   </a:moveTo>
                   <a:lnTo>
                     <a:pt x="0" y="0"/>
@@ -2615,26 +2607,26 @@
           </p:nvSpPr>
           <p:spPr>
             <a:xfrm>
-              <a:off x="817517" y="5557249"/>
-              <a:ext cx="7799693" cy="0"/>
+              <a:off x="7765090" y="2143092"/>
+              <a:ext cx="0" cy="1317069"/>
             </a:xfrm>
             <a:custGeom>
               <a:avLst/>
               <a:pathLst>
-                <a:path w="7799693" h="0">
+                <a:path w="0" h="1317069">
                   <a:moveTo>
+                    <a:pt x="0" y="1317069"/>
+                  </a:moveTo>
+                  <a:lnTo>
                     <a:pt x="0" y="0"/>
-                  </a:moveTo>
-                  <a:lnTo>
-                    <a:pt x="7799693" y="0"/>
-                  </a:lnTo>
-                  <a:lnTo>
-                    <a:pt x="7799693" y="0"/>
+                  </a:lnTo>
+                  <a:lnTo>
+                    <a:pt x="0" y="0"/>
                   </a:lnTo>
                 </a:path>
               </a:pathLst>
             </a:custGeom>
-            <a:ln w="13550" cap="flat">
+            <a:ln w="6775" cap="flat">
               <a:solidFill>
                 <a:srgbClr val="EBEBEB">
                   <a:alpha val="100000"/>
@@ -2658,21 +2650,21 @@
           </p:nvSpPr>
           <p:spPr>
             <a:xfrm>
-              <a:off x="817517" y="4727786"/>
-              <a:ext cx="7799693" cy="0"/>
+              <a:off x="887106" y="3400294"/>
+              <a:ext cx="7660515" cy="0"/>
             </a:xfrm>
             <a:custGeom>
               <a:avLst/>
               <a:pathLst>
-                <a:path w="7799693" h="0">
+                <a:path w="7660515" h="0">
                   <a:moveTo>
                     <a:pt x="0" y="0"/>
                   </a:moveTo>
                   <a:lnTo>
-                    <a:pt x="7799693" y="0"/>
-                  </a:lnTo>
-                  <a:lnTo>
-                    <a:pt x="7799693" y="0"/>
+                    <a:pt x="7660515" y="0"/>
+                  </a:lnTo>
+                  <a:lnTo>
+                    <a:pt x="7660515" y="0"/>
                   </a:lnTo>
                 </a:path>
               </a:pathLst>
@@ -2701,21 +2693,21 @@
           </p:nvSpPr>
           <p:spPr>
             <a:xfrm>
-              <a:off x="817517" y="3898322"/>
-              <a:ext cx="7799693" cy="0"/>
+              <a:off x="887106" y="3100960"/>
+              <a:ext cx="7660515" cy="0"/>
             </a:xfrm>
             <a:custGeom>
               <a:avLst/>
               <a:pathLst>
-                <a:path w="7799693" h="0">
+                <a:path w="7660515" h="0">
                   <a:moveTo>
                     <a:pt x="0" y="0"/>
                   </a:moveTo>
                   <a:lnTo>
-                    <a:pt x="7799693" y="0"/>
-                  </a:lnTo>
-                  <a:lnTo>
-                    <a:pt x="7799693" y="0"/>
+                    <a:pt x="7660515" y="0"/>
+                  </a:lnTo>
+                  <a:lnTo>
+                    <a:pt x="7660515" y="0"/>
                   </a:lnTo>
                 </a:path>
               </a:pathLst>
@@ -2744,21 +2736,21 @@
           </p:nvSpPr>
           <p:spPr>
             <a:xfrm>
-              <a:off x="817517" y="3068859"/>
-              <a:ext cx="7799693" cy="0"/>
+              <a:off x="887106" y="2801626"/>
+              <a:ext cx="7660515" cy="0"/>
             </a:xfrm>
             <a:custGeom>
               <a:avLst/>
               <a:pathLst>
-                <a:path w="7799693" h="0">
+                <a:path w="7660515" h="0">
                   <a:moveTo>
                     <a:pt x="0" y="0"/>
                   </a:moveTo>
                   <a:lnTo>
-                    <a:pt x="7799693" y="0"/>
-                  </a:lnTo>
-                  <a:lnTo>
-                    <a:pt x="7799693" y="0"/>
+                    <a:pt x="7660515" y="0"/>
+                  </a:lnTo>
+                  <a:lnTo>
+                    <a:pt x="7660515" y="0"/>
                   </a:lnTo>
                 </a:path>
               </a:pathLst>
@@ -2787,21 +2779,21 @@
           </p:nvSpPr>
           <p:spPr>
             <a:xfrm>
-              <a:off x="817517" y="2239395"/>
-              <a:ext cx="7799693" cy="0"/>
+              <a:off x="887106" y="2502292"/>
+              <a:ext cx="7660515" cy="0"/>
             </a:xfrm>
             <a:custGeom>
               <a:avLst/>
               <a:pathLst>
-                <a:path w="7799693" h="0">
+                <a:path w="7660515" h="0">
                   <a:moveTo>
                     <a:pt x="0" y="0"/>
                   </a:moveTo>
                   <a:lnTo>
-                    <a:pt x="7799693" y="0"/>
-                  </a:lnTo>
-                  <a:lnTo>
-                    <a:pt x="7799693" y="0"/>
+                    <a:pt x="7660515" y="0"/>
+                  </a:lnTo>
+                  <a:lnTo>
+                    <a:pt x="7660515" y="0"/>
                   </a:lnTo>
                 </a:path>
               </a:pathLst>
@@ -2830,21 +2822,21 @@
           </p:nvSpPr>
           <p:spPr>
             <a:xfrm>
-              <a:off x="2441438" y="2073503"/>
-              <a:ext cx="0" cy="3649639"/>
+              <a:off x="887106" y="2202958"/>
+              <a:ext cx="7660515" cy="0"/>
             </a:xfrm>
             <a:custGeom>
               <a:avLst/>
               <a:pathLst>
-                <a:path w="0" h="3649639">
+                <a:path w="7660515" h="0">
                   <a:moveTo>
-                    <a:pt x="0" y="3649639"/>
+                    <a:pt x="0" y="0"/>
                   </a:moveTo>
                   <a:lnTo>
-                    <a:pt x="0" y="0"/>
-                  </a:lnTo>
-                  <a:lnTo>
-                    <a:pt x="0" y="0"/>
+                    <a:pt x="7660515" y="0"/>
+                  </a:lnTo>
+                  <a:lnTo>
+                    <a:pt x="7660515" y="0"/>
                   </a:lnTo>
                 </a:path>
               </a:pathLst>
@@ -2873,15 +2865,15 @@
           </p:nvSpPr>
           <p:spPr>
             <a:xfrm>
-              <a:off x="4593047" y="2073503"/>
-              <a:ext cx="0" cy="3649639"/>
+              <a:off x="2482050" y="2143092"/>
+              <a:ext cx="0" cy="1317069"/>
             </a:xfrm>
             <a:custGeom>
               <a:avLst/>
               <a:pathLst>
-                <a:path w="0" h="3649639">
+                <a:path w="0" h="1317069">
                   <a:moveTo>
-                    <a:pt x="0" y="3649639"/>
+                    <a:pt x="0" y="1317069"/>
                   </a:moveTo>
                   <a:lnTo>
                     <a:pt x="0" y="0"/>
@@ -2916,15 +2908,15 @@
           </p:nvSpPr>
           <p:spPr>
             <a:xfrm>
-              <a:off x="6744657" y="2073503"/>
-              <a:ext cx="0" cy="3649639"/>
+              <a:off x="4595266" y="2143092"/>
+              <a:ext cx="0" cy="1317069"/>
             </a:xfrm>
             <a:custGeom>
               <a:avLst/>
               <a:pathLst>
-                <a:path w="0" h="3649639">
+                <a:path w="0" h="1317069">
                   <a:moveTo>
-                    <a:pt x="0" y="3649639"/>
+                    <a:pt x="0" y="1317069"/>
                   </a:moveTo>
                   <a:lnTo>
                     <a:pt x="0" y="0"/>
@@ -2953,618 +2945,661 @@
         </p:sp>
         <p:sp>
           <p:nvSpPr>
-            <p:cNvPr id="20" name="pg20"/>
+            <p:cNvPr id="20" name="pl20"/>
             <p:cNvSpPr/>
             <p:nvPr/>
           </p:nvSpPr>
           <p:spPr>
             <a:xfrm>
-              <a:off x="1172049" y="2988148"/>
-              <a:ext cx="7090630" cy="2323250"/>
+              <a:off x="6708482" y="2143092"/>
+              <a:ext cx="0" cy="1317069"/>
             </a:xfrm>
             <a:custGeom>
               <a:avLst/>
               <a:pathLst>
-                <a:path w="7090630" h="2323250">
+                <a:path w="0" h="1317069">
+                  <a:moveTo>
+                    <a:pt x="0" y="1317069"/>
+                  </a:moveTo>
+                  <a:lnTo>
+                    <a:pt x="0" y="0"/>
+                  </a:lnTo>
+                  <a:lnTo>
+                    <a:pt x="0" y="0"/>
+                  </a:lnTo>
+                </a:path>
+              </a:pathLst>
+            </a:custGeom>
+            <a:ln w="13550" cap="flat">
+              <a:solidFill>
+                <a:srgbClr val="EBEBEB">
+                  <a:alpha val="100000"/>
+                </a:srgbClr>
+              </a:solidFill>
+              <a:prstDash val="solid"/>
+              <a:round/>
+            </a:ln>
+          </p:spPr>
+          <p:txBody>
+            <a:bodyPr/>
+            <a:lstStyle/>
+            <a:p/>
+          </p:txBody>
+        </p:sp>
+        <p:sp>
+          <p:nvSpPr>
+            <p:cNvPr id="21" name="pg21"/>
+            <p:cNvSpPr/>
+            <p:nvPr/>
+          </p:nvSpPr>
+          <p:spPr>
+            <a:xfrm>
+              <a:off x="1235312" y="2473166"/>
+              <a:ext cx="6964104" cy="838406"/>
+            </a:xfrm>
+            <a:custGeom>
+              <a:avLst/>
+              <a:pathLst>
+                <a:path w="6964104" h="838406">
                   <a:moveTo>
                     <a:pt x="0" y="0"/>
                   </a:moveTo>
                   <a:lnTo>
-                    <a:pt x="71622" y="60179"/>
-                  </a:lnTo>
-                  <a:lnTo>
-                    <a:pt x="143245" y="118948"/>
-                  </a:lnTo>
-                  <a:lnTo>
-                    <a:pt x="214867" y="176341"/>
-                  </a:lnTo>
-                  <a:lnTo>
-                    <a:pt x="286490" y="232390"/>
-                  </a:lnTo>
-                  <a:lnTo>
-                    <a:pt x="358112" y="287125"/>
-                  </a:lnTo>
-                  <a:lnTo>
-                    <a:pt x="429735" y="340579"/>
-                  </a:lnTo>
-                  <a:lnTo>
-                    <a:pt x="501357" y="392780"/>
-                  </a:lnTo>
-                  <a:lnTo>
-                    <a:pt x="572980" y="443759"/>
-                  </a:lnTo>
-                  <a:lnTo>
-                    <a:pt x="644602" y="493543"/>
-                  </a:lnTo>
-                  <a:lnTo>
-                    <a:pt x="716225" y="542161"/>
-                  </a:lnTo>
-                  <a:lnTo>
-                    <a:pt x="787847" y="589641"/>
-                  </a:lnTo>
-                  <a:lnTo>
-                    <a:pt x="859470" y="636008"/>
-                  </a:lnTo>
-                  <a:lnTo>
-                    <a:pt x="931092" y="681289"/>
-                  </a:lnTo>
-                  <a:lnTo>
-                    <a:pt x="1002715" y="725510"/>
-                  </a:lnTo>
-                  <a:lnTo>
-                    <a:pt x="1074337" y="768694"/>
-                  </a:lnTo>
-                  <a:lnTo>
-                    <a:pt x="1145960" y="810867"/>
-                  </a:lnTo>
-                  <a:lnTo>
-                    <a:pt x="1217582" y="852053"/>
-                  </a:lnTo>
-                  <a:lnTo>
-                    <a:pt x="1289205" y="892273"/>
-                  </a:lnTo>
-                  <a:lnTo>
-                    <a:pt x="1360827" y="931551"/>
-                  </a:lnTo>
-                  <a:lnTo>
-                    <a:pt x="1432450" y="969910"/>
-                  </a:lnTo>
-                  <a:lnTo>
-                    <a:pt x="1504073" y="1007370"/>
-                  </a:lnTo>
-                  <a:lnTo>
-                    <a:pt x="1575695" y="1043952"/>
-                  </a:lnTo>
-                  <a:lnTo>
-                    <a:pt x="1647318" y="1079677"/>
-                  </a:lnTo>
-                  <a:lnTo>
-                    <a:pt x="1718940" y="1114566"/>
-                  </a:lnTo>
-                  <a:lnTo>
-                    <a:pt x="1790563" y="1148637"/>
-                  </a:lnTo>
-                  <a:lnTo>
-                    <a:pt x="1862185" y="1181910"/>
-                  </a:lnTo>
-                  <a:lnTo>
-                    <a:pt x="1933808" y="1214404"/>
-                  </a:lnTo>
-                  <a:lnTo>
-                    <a:pt x="2005430" y="1246137"/>
-                  </a:lnTo>
-                  <a:lnTo>
-                    <a:pt x="2077053" y="1277126"/>
-                  </a:lnTo>
-                  <a:lnTo>
-                    <a:pt x="2148675" y="1307390"/>
-                  </a:lnTo>
-                  <a:lnTo>
-                    <a:pt x="2220298" y="1336944"/>
-                  </a:lnTo>
-                  <a:lnTo>
-                    <a:pt x="2291920" y="1365807"/>
-                  </a:lnTo>
-                  <a:lnTo>
-                    <a:pt x="2363543" y="1393993"/>
-                  </a:lnTo>
-                  <a:lnTo>
-                    <a:pt x="2435165" y="1421519"/>
-                  </a:lnTo>
-                  <a:lnTo>
-                    <a:pt x="2506788" y="1448400"/>
-                  </a:lnTo>
-                  <a:lnTo>
-                    <a:pt x="2578410" y="1474651"/>
-                  </a:lnTo>
-                  <a:lnTo>
-                    <a:pt x="2650033" y="1500288"/>
-                  </a:lnTo>
-                  <a:lnTo>
-                    <a:pt x="2721655" y="1525324"/>
-                  </a:lnTo>
-                  <a:lnTo>
-                    <a:pt x="2793278" y="1549774"/>
-                  </a:lnTo>
-                  <a:lnTo>
-                    <a:pt x="2864901" y="1573651"/>
-                  </a:lnTo>
-                  <a:lnTo>
-                    <a:pt x="2936523" y="1596968"/>
-                  </a:lnTo>
-                  <a:lnTo>
-                    <a:pt x="3008146" y="1619740"/>
-                  </a:lnTo>
-                  <a:lnTo>
-                    <a:pt x="3079768" y="1641978"/>
-                  </a:lnTo>
-                  <a:lnTo>
-                    <a:pt x="3151391" y="1663695"/>
-                  </a:lnTo>
-                  <a:lnTo>
-                    <a:pt x="3223013" y="1684903"/>
-                  </a:lnTo>
-                  <a:lnTo>
-                    <a:pt x="3294636" y="1705615"/>
-                  </a:lnTo>
-                  <a:lnTo>
-                    <a:pt x="3366258" y="1725841"/>
-                  </a:lnTo>
-                  <a:lnTo>
-                    <a:pt x="3437881" y="1741849"/>
-                  </a:lnTo>
-                  <a:lnTo>
-                    <a:pt x="3509503" y="1749080"/>
-                  </a:lnTo>
-                  <a:lnTo>
-                    <a:pt x="3581126" y="1756249"/>
-                  </a:lnTo>
-                  <a:lnTo>
-                    <a:pt x="3652748" y="1763354"/>
-                  </a:lnTo>
-                  <a:lnTo>
-                    <a:pt x="3724371" y="1770398"/>
-                  </a:lnTo>
-                  <a:lnTo>
-                    <a:pt x="3795993" y="1777380"/>
-                  </a:lnTo>
-                  <a:lnTo>
-                    <a:pt x="3867616" y="1784301"/>
-                  </a:lnTo>
-                  <a:lnTo>
-                    <a:pt x="3939238" y="1791161"/>
-                  </a:lnTo>
-                  <a:lnTo>
-                    <a:pt x="4010861" y="1797962"/>
-                  </a:lnTo>
-                  <a:lnTo>
-                    <a:pt x="4082483" y="1804703"/>
-                  </a:lnTo>
-                  <a:lnTo>
-                    <a:pt x="4154106" y="1811385"/>
-                  </a:lnTo>
-                  <a:lnTo>
-                    <a:pt x="4225729" y="1818009"/>
-                  </a:lnTo>
-                  <a:lnTo>
-                    <a:pt x="4297351" y="1824574"/>
-                  </a:lnTo>
-                  <a:lnTo>
-                    <a:pt x="4368974" y="1831083"/>
-                  </a:lnTo>
-                  <a:lnTo>
-                    <a:pt x="4440596" y="1837534"/>
-                  </a:lnTo>
-                  <a:lnTo>
-                    <a:pt x="4512219" y="1843929"/>
-                  </a:lnTo>
-                  <a:lnTo>
-                    <a:pt x="4583841" y="1850269"/>
-                  </a:lnTo>
-                  <a:lnTo>
-                    <a:pt x="4655464" y="1856552"/>
-                  </a:lnTo>
-                  <a:lnTo>
-                    <a:pt x="4727086" y="1862781"/>
-                  </a:lnTo>
-                  <a:lnTo>
-                    <a:pt x="4798709" y="1868956"/>
-                  </a:lnTo>
-                  <a:lnTo>
-                    <a:pt x="4870331" y="1875076"/>
-                  </a:lnTo>
-                  <a:lnTo>
-                    <a:pt x="4941954" y="1881143"/>
-                  </a:lnTo>
-                  <a:lnTo>
-                    <a:pt x="5013576" y="1887157"/>
-                  </a:lnTo>
-                  <a:lnTo>
-                    <a:pt x="5085199" y="1893118"/>
-                  </a:lnTo>
-                  <a:lnTo>
-                    <a:pt x="5156821" y="1899028"/>
-                  </a:lnTo>
-                  <a:lnTo>
-                    <a:pt x="5228444" y="1904885"/>
-                  </a:lnTo>
-                  <a:lnTo>
-                    <a:pt x="5300066" y="1910691"/>
-                  </a:lnTo>
-                  <a:lnTo>
-                    <a:pt x="5371689" y="1916447"/>
-                  </a:lnTo>
-                  <a:lnTo>
-                    <a:pt x="5443311" y="1922152"/>
-                  </a:lnTo>
-                  <a:lnTo>
-                    <a:pt x="5514934" y="1927808"/>
-                  </a:lnTo>
-                  <a:lnTo>
-                    <a:pt x="5586557" y="1933414"/>
-                  </a:lnTo>
-                  <a:lnTo>
-                    <a:pt x="5658179" y="1938971"/>
-                  </a:lnTo>
-                  <a:lnTo>
-                    <a:pt x="5729802" y="1944479"/>
-                  </a:lnTo>
-                  <a:lnTo>
-                    <a:pt x="5801424" y="1949939"/>
-                  </a:lnTo>
-                  <a:lnTo>
-                    <a:pt x="5873047" y="1955352"/>
-                  </a:lnTo>
-                  <a:lnTo>
-                    <a:pt x="5944669" y="1960717"/>
-                  </a:lnTo>
-                  <a:lnTo>
-                    <a:pt x="6016292" y="1966035"/>
-                  </a:lnTo>
-                  <a:lnTo>
-                    <a:pt x="6087914" y="1971307"/>
-                  </a:lnTo>
-                  <a:lnTo>
-                    <a:pt x="6159537" y="1976533"/>
-                  </a:lnTo>
-                  <a:lnTo>
-                    <a:pt x="6231159" y="1981713"/>
-                  </a:lnTo>
-                  <a:lnTo>
-                    <a:pt x="6302782" y="1986848"/>
-                  </a:lnTo>
-                  <a:lnTo>
-                    <a:pt x="6374404" y="1991937"/>
-                  </a:lnTo>
-                  <a:lnTo>
-                    <a:pt x="6446027" y="1996983"/>
-                  </a:lnTo>
-                  <a:lnTo>
-                    <a:pt x="6517649" y="2001984"/>
-                  </a:lnTo>
-                  <a:lnTo>
-                    <a:pt x="6589272" y="2006942"/>
-                  </a:lnTo>
-                  <a:lnTo>
-                    <a:pt x="6660894" y="2011856"/>
-                  </a:lnTo>
-                  <a:lnTo>
-                    <a:pt x="6732517" y="2016727"/>
-                  </a:lnTo>
-                  <a:lnTo>
-                    <a:pt x="6804139" y="2021556"/>
-                  </a:lnTo>
-                  <a:lnTo>
-                    <a:pt x="6875762" y="2026342"/>
-                  </a:lnTo>
-                  <a:lnTo>
-                    <a:pt x="6947385" y="2031087"/>
-                  </a:lnTo>
-                  <a:lnTo>
-                    <a:pt x="7019007" y="2035790"/>
-                  </a:lnTo>
-                  <a:lnTo>
-                    <a:pt x="7090630" y="2040452"/>
-                  </a:lnTo>
-                  <a:lnTo>
-                    <a:pt x="7090630" y="2323250"/>
-                  </a:lnTo>
-                  <a:lnTo>
-                    <a:pt x="7019007" y="2317353"/>
-                  </a:lnTo>
-                  <a:lnTo>
-                    <a:pt x="6947385" y="2311315"/>
-                  </a:lnTo>
-                  <a:lnTo>
-                    <a:pt x="6875762" y="2305132"/>
-                  </a:lnTo>
-                  <a:lnTo>
-                    <a:pt x="6804139" y="2298800"/>
-                  </a:lnTo>
-                  <a:lnTo>
-                    <a:pt x="6732517" y="2292317"/>
-                  </a:lnTo>
-                  <a:lnTo>
-                    <a:pt x="6660894" y="2285678"/>
-                  </a:lnTo>
-                  <a:lnTo>
-                    <a:pt x="6589272" y="2278880"/>
-                  </a:lnTo>
-                  <a:lnTo>
-                    <a:pt x="6517649" y="2271918"/>
-                  </a:lnTo>
-                  <a:lnTo>
-                    <a:pt x="6446027" y="2264790"/>
-                  </a:lnTo>
-                  <a:lnTo>
-                    <a:pt x="6374404" y="2257491"/>
-                  </a:lnTo>
-                  <a:lnTo>
-                    <a:pt x="6302782" y="2250016"/>
-                  </a:lnTo>
-                  <a:lnTo>
-                    <a:pt x="6231159" y="2242363"/>
-                  </a:lnTo>
-                  <a:lnTo>
-                    <a:pt x="6159537" y="2234526"/>
-                  </a:lnTo>
-                  <a:lnTo>
-                    <a:pt x="6087914" y="2226501"/>
-                  </a:lnTo>
-                  <a:lnTo>
-                    <a:pt x="6016292" y="2218283"/>
-                  </a:lnTo>
-                  <a:lnTo>
-                    <a:pt x="5944669" y="2209868"/>
-                  </a:lnTo>
-                  <a:lnTo>
-                    <a:pt x="5873047" y="2201252"/>
-                  </a:lnTo>
-                  <a:lnTo>
-                    <a:pt x="5801424" y="2192428"/>
-                  </a:lnTo>
-                  <a:lnTo>
-                    <a:pt x="5729802" y="2183394"/>
-                  </a:lnTo>
-                  <a:lnTo>
-                    <a:pt x="5658179" y="2174142"/>
-                  </a:lnTo>
-                  <a:lnTo>
-                    <a:pt x="5586557" y="2164668"/>
-                  </a:lnTo>
-                  <a:lnTo>
-                    <a:pt x="5514934" y="2154968"/>
-                  </a:lnTo>
-                  <a:lnTo>
-                    <a:pt x="5443311" y="2145034"/>
-                  </a:lnTo>
-                  <a:lnTo>
-                    <a:pt x="5371689" y="2134863"/>
-                  </a:lnTo>
-                  <a:lnTo>
-                    <a:pt x="5300066" y="2124447"/>
-                  </a:lnTo>
-                  <a:lnTo>
-                    <a:pt x="5228444" y="2113781"/>
-                  </a:lnTo>
-                  <a:lnTo>
-                    <a:pt x="5156821" y="2102860"/>
-                  </a:lnTo>
-                  <a:lnTo>
-                    <a:pt x="5085199" y="2091677"/>
-                  </a:lnTo>
-                  <a:lnTo>
-                    <a:pt x="5013576" y="2080225"/>
-                  </a:lnTo>
-                  <a:lnTo>
-                    <a:pt x="4941954" y="2068499"/>
-                  </a:lnTo>
-                  <a:lnTo>
-                    <a:pt x="4870331" y="2056492"/>
-                  </a:lnTo>
-                  <a:lnTo>
-                    <a:pt x="4798709" y="2044196"/>
-                  </a:lnTo>
-                  <a:lnTo>
-                    <a:pt x="4727086" y="2031606"/>
-                  </a:lnTo>
-                  <a:lnTo>
-                    <a:pt x="4655464" y="2018713"/>
-                  </a:lnTo>
-                  <a:lnTo>
-                    <a:pt x="4583841" y="2005512"/>
-                  </a:lnTo>
-                  <a:lnTo>
-                    <a:pt x="4512219" y="1991994"/>
-                  </a:lnTo>
-                  <a:lnTo>
-                    <a:pt x="4440596" y="1978151"/>
-                  </a:lnTo>
-                  <a:lnTo>
-                    <a:pt x="4368974" y="1963977"/>
-                  </a:lnTo>
-                  <a:lnTo>
-                    <a:pt x="4297351" y="1949462"/>
-                  </a:lnTo>
-                  <a:lnTo>
-                    <a:pt x="4225729" y="1934599"/>
-                  </a:lnTo>
-                  <a:lnTo>
-                    <a:pt x="4154106" y="1919380"/>
-                  </a:lnTo>
-                  <a:lnTo>
-                    <a:pt x="4082483" y="1903796"/>
-                  </a:lnTo>
-                  <a:lnTo>
-                    <a:pt x="4010861" y="1887838"/>
-                  </a:lnTo>
-                  <a:lnTo>
-                    <a:pt x="3939238" y="1871497"/>
-                  </a:lnTo>
-                  <a:lnTo>
-                    <a:pt x="3867616" y="1854764"/>
-                  </a:lnTo>
-                  <a:lnTo>
-                    <a:pt x="3795993" y="1837630"/>
-                  </a:lnTo>
-                  <a:lnTo>
-                    <a:pt x="3724371" y="1820085"/>
-                  </a:lnTo>
-                  <a:lnTo>
-                    <a:pt x="3652748" y="1802119"/>
-                  </a:lnTo>
-                  <a:lnTo>
-                    <a:pt x="3581126" y="1783722"/>
-                  </a:lnTo>
-                  <a:lnTo>
-                    <a:pt x="3509503" y="1764884"/>
-                  </a:lnTo>
-                  <a:lnTo>
-                    <a:pt x="3437881" y="1745594"/>
-                  </a:lnTo>
-                  <a:lnTo>
-                    <a:pt x="3366258" y="1734553"/>
-                  </a:lnTo>
-                  <a:lnTo>
-                    <a:pt x="3294636" y="1727194"/>
-                  </a:lnTo>
-                  <a:lnTo>
-                    <a:pt x="3223013" y="1719769"/>
-                  </a:lnTo>
-                  <a:lnTo>
-                    <a:pt x="3151391" y="1712279"/>
-                  </a:lnTo>
-                  <a:lnTo>
-                    <a:pt x="3079768" y="1704723"/>
-                  </a:lnTo>
-                  <a:lnTo>
-                    <a:pt x="3008146" y="1697100"/>
-                  </a:lnTo>
-                  <a:lnTo>
-                    <a:pt x="2936523" y="1689410"/>
-                  </a:lnTo>
-                  <a:lnTo>
-                    <a:pt x="2864901" y="1681653"/>
-                  </a:lnTo>
-                  <a:lnTo>
-                    <a:pt x="2793278" y="1673826"/>
-                  </a:lnTo>
-                  <a:lnTo>
-                    <a:pt x="2721655" y="1665931"/>
-                  </a:lnTo>
-                  <a:lnTo>
-                    <a:pt x="2650033" y="1657966"/>
-                  </a:lnTo>
-                  <a:lnTo>
-                    <a:pt x="2578410" y="1649931"/>
-                  </a:lnTo>
-                  <a:lnTo>
-                    <a:pt x="2506788" y="1641825"/>
-                  </a:lnTo>
-                  <a:lnTo>
-                    <a:pt x="2435165" y="1633648"/>
-                  </a:lnTo>
-                  <a:lnTo>
-                    <a:pt x="2363543" y="1625398"/>
-                  </a:lnTo>
-                  <a:lnTo>
-                    <a:pt x="2291920" y="1617076"/>
-                  </a:lnTo>
-                  <a:lnTo>
-                    <a:pt x="2220298" y="1608680"/>
-                  </a:lnTo>
-                  <a:lnTo>
-                    <a:pt x="2148675" y="1600211"/>
-                  </a:lnTo>
-                  <a:lnTo>
-                    <a:pt x="2077053" y="1591666"/>
-                  </a:lnTo>
-                  <a:lnTo>
-                    <a:pt x="2005430" y="1583046"/>
-                  </a:lnTo>
-                  <a:lnTo>
-                    <a:pt x="1933808" y="1574351"/>
-                  </a:lnTo>
-                  <a:lnTo>
-                    <a:pt x="1862185" y="1565578"/>
-                  </a:lnTo>
-                  <a:lnTo>
-                    <a:pt x="1790563" y="1556728"/>
-                  </a:lnTo>
-                  <a:lnTo>
-                    <a:pt x="1718940" y="1547801"/>
-                  </a:lnTo>
-                  <a:lnTo>
-                    <a:pt x="1647318" y="1538794"/>
-                  </a:lnTo>
-                  <a:lnTo>
-                    <a:pt x="1575695" y="1529708"/>
-                  </a:lnTo>
-                  <a:lnTo>
-                    <a:pt x="1504073" y="1520542"/>
-                  </a:lnTo>
-                  <a:lnTo>
-                    <a:pt x="1432450" y="1511295"/>
-                  </a:lnTo>
-                  <a:lnTo>
-                    <a:pt x="1360827" y="1501966"/>
-                  </a:lnTo>
-                  <a:lnTo>
-                    <a:pt x="1289205" y="1492555"/>
-                  </a:lnTo>
-                  <a:lnTo>
-                    <a:pt x="1217582" y="1483062"/>
-                  </a:lnTo>
-                  <a:lnTo>
-                    <a:pt x="1145960" y="1473484"/>
-                  </a:lnTo>
-                  <a:lnTo>
-                    <a:pt x="1074337" y="1463822"/>
-                  </a:lnTo>
-                  <a:lnTo>
-                    <a:pt x="1002715" y="1454075"/>
-                  </a:lnTo>
-                  <a:lnTo>
-                    <a:pt x="931092" y="1444242"/>
-                  </a:lnTo>
-                  <a:lnTo>
-                    <a:pt x="859470" y="1434322"/>
-                  </a:lnTo>
-                  <a:lnTo>
-                    <a:pt x="787847" y="1424315"/>
-                  </a:lnTo>
-                  <a:lnTo>
-                    <a:pt x="716225" y="1414219"/>
-                  </a:lnTo>
-                  <a:lnTo>
-                    <a:pt x="644602" y="1404034"/>
-                  </a:lnTo>
-                  <a:lnTo>
-                    <a:pt x="572980" y="1393760"/>
-                  </a:lnTo>
-                  <a:lnTo>
-                    <a:pt x="501357" y="1383395"/>
-                  </a:lnTo>
-                  <a:lnTo>
-                    <a:pt x="429735" y="1372938"/>
-                  </a:lnTo>
-                  <a:lnTo>
-                    <a:pt x="358112" y="1362390"/>
-                  </a:lnTo>
-                  <a:lnTo>
-                    <a:pt x="286490" y="1351748"/>
-                  </a:lnTo>
-                  <a:lnTo>
-                    <a:pt x="214867" y="1341013"/>
-                  </a:lnTo>
-                  <a:lnTo>
-                    <a:pt x="143245" y="1330182"/>
-                  </a:lnTo>
-                  <a:lnTo>
-                    <a:pt x="71622" y="1319257"/>
-                  </a:lnTo>
-                  <a:lnTo>
-                    <a:pt x="0" y="1308235"/>
+                    <a:pt x="70344" y="21717"/>
+                  </a:lnTo>
+                  <a:lnTo>
+                    <a:pt x="140688" y="42925"/>
+                  </a:lnTo>
+                  <a:lnTo>
+                    <a:pt x="211033" y="63637"/>
+                  </a:lnTo>
+                  <a:lnTo>
+                    <a:pt x="281377" y="83864"/>
+                  </a:lnTo>
+                  <a:lnTo>
+                    <a:pt x="351722" y="103616"/>
+                  </a:lnTo>
+                  <a:lnTo>
+                    <a:pt x="422066" y="122906"/>
+                  </a:lnTo>
+                  <a:lnTo>
+                    <a:pt x="492411" y="141745"/>
+                  </a:lnTo>
+                  <a:lnTo>
+                    <a:pt x="562755" y="160142"/>
+                  </a:lnTo>
+                  <a:lnTo>
+                    <a:pt x="633100" y="178108"/>
+                  </a:lnTo>
+                  <a:lnTo>
+                    <a:pt x="703444" y="195653"/>
+                  </a:lnTo>
+                  <a:lnTo>
+                    <a:pt x="773789" y="212787"/>
+                  </a:lnTo>
+                  <a:lnTo>
+                    <a:pt x="844133" y="229520"/>
+                  </a:lnTo>
+                  <a:lnTo>
+                    <a:pt x="914478" y="245861"/>
+                  </a:lnTo>
+                  <a:lnTo>
+                    <a:pt x="984822" y="261819"/>
+                  </a:lnTo>
+                  <a:lnTo>
+                    <a:pt x="1055167" y="277403"/>
+                  </a:lnTo>
+                  <a:lnTo>
+                    <a:pt x="1125511" y="292623"/>
+                  </a:lnTo>
+                  <a:lnTo>
+                    <a:pt x="1195856" y="307485"/>
+                  </a:lnTo>
+                  <a:lnTo>
+                    <a:pt x="1266200" y="322000"/>
+                  </a:lnTo>
+                  <a:lnTo>
+                    <a:pt x="1336545" y="336175"/>
+                  </a:lnTo>
+                  <a:lnTo>
+                    <a:pt x="1406889" y="350017"/>
+                  </a:lnTo>
+                  <a:lnTo>
+                    <a:pt x="1477234" y="363536"/>
+                  </a:lnTo>
+                  <a:lnTo>
+                    <a:pt x="1547578" y="376737"/>
+                  </a:lnTo>
+                  <a:lnTo>
+                    <a:pt x="1617923" y="389630"/>
+                  </a:lnTo>
+                  <a:lnTo>
+                    <a:pt x="1688267" y="402220"/>
+                  </a:lnTo>
+                  <a:lnTo>
+                    <a:pt x="1758612" y="414516"/>
+                  </a:lnTo>
+                  <a:lnTo>
+                    <a:pt x="1828956" y="426523"/>
+                  </a:lnTo>
+                  <a:lnTo>
+                    <a:pt x="1899301" y="438250"/>
+                  </a:lnTo>
+                  <a:lnTo>
+                    <a:pt x="1969645" y="449701"/>
+                  </a:lnTo>
+                  <a:lnTo>
+                    <a:pt x="2039990" y="460884"/>
+                  </a:lnTo>
+                  <a:lnTo>
+                    <a:pt x="2110334" y="471806"/>
+                  </a:lnTo>
+                  <a:lnTo>
+                    <a:pt x="2180679" y="482471"/>
+                  </a:lnTo>
+                  <a:lnTo>
+                    <a:pt x="2251023" y="492887"/>
+                  </a:lnTo>
+                  <a:lnTo>
+                    <a:pt x="2321368" y="503059"/>
+                  </a:lnTo>
+                  <a:lnTo>
+                    <a:pt x="2391712" y="512992"/>
+                  </a:lnTo>
+                  <a:lnTo>
+                    <a:pt x="2462057" y="522693"/>
+                  </a:lnTo>
+                  <a:lnTo>
+                    <a:pt x="2532401" y="532167"/>
+                  </a:lnTo>
+                  <a:lnTo>
+                    <a:pt x="2602746" y="541418"/>
+                  </a:lnTo>
+                  <a:lnTo>
+                    <a:pt x="2673090" y="550453"/>
+                  </a:lnTo>
+                  <a:lnTo>
+                    <a:pt x="2743435" y="559277"/>
+                  </a:lnTo>
+                  <a:lnTo>
+                    <a:pt x="2813779" y="567893"/>
+                  </a:lnTo>
+                  <a:lnTo>
+                    <a:pt x="2884124" y="576308"/>
+                  </a:lnTo>
+                  <a:lnTo>
+                    <a:pt x="2954468" y="584526"/>
+                  </a:lnTo>
+                  <a:lnTo>
+                    <a:pt x="3024813" y="592551"/>
+                  </a:lnTo>
+                  <a:lnTo>
+                    <a:pt x="3095157" y="600388"/>
+                  </a:lnTo>
+                  <a:lnTo>
+                    <a:pt x="3165502" y="608042"/>
+                  </a:lnTo>
+                  <a:lnTo>
+                    <a:pt x="3235846" y="615516"/>
+                  </a:lnTo>
+                  <a:lnTo>
+                    <a:pt x="3306191" y="622815"/>
+                  </a:lnTo>
+                  <a:lnTo>
+                    <a:pt x="3376535" y="628592"/>
+                  </a:lnTo>
+                  <a:lnTo>
+                    <a:pt x="3446880" y="631202"/>
+                  </a:lnTo>
+                  <a:lnTo>
+                    <a:pt x="3517224" y="633789"/>
+                  </a:lnTo>
+                  <a:lnTo>
+                    <a:pt x="3587569" y="636353"/>
+                  </a:lnTo>
+                  <a:lnTo>
+                    <a:pt x="3657913" y="638895"/>
+                  </a:lnTo>
+                  <a:lnTo>
+                    <a:pt x="3728257" y="641414"/>
+                  </a:lnTo>
+                  <a:lnTo>
+                    <a:pt x="3798602" y="643912"/>
+                  </a:lnTo>
+                  <a:lnTo>
+                    <a:pt x="3868946" y="646388"/>
+                  </a:lnTo>
+                  <a:lnTo>
+                    <a:pt x="3939291" y="648842"/>
+                  </a:lnTo>
+                  <a:lnTo>
+                    <a:pt x="4009635" y="651274"/>
+                  </a:lnTo>
+                  <a:lnTo>
+                    <a:pt x="4079980" y="653686"/>
+                  </a:lnTo>
+                  <a:lnTo>
+                    <a:pt x="4150324" y="656076"/>
+                  </a:lnTo>
+                  <a:lnTo>
+                    <a:pt x="4220669" y="658446"/>
+                  </a:lnTo>
+                  <a:lnTo>
+                    <a:pt x="4291013" y="660794"/>
+                  </a:lnTo>
+                  <a:lnTo>
+                    <a:pt x="4361358" y="663123"/>
+                  </a:lnTo>
+                  <a:lnTo>
+                    <a:pt x="4431702" y="665430"/>
+                  </a:lnTo>
+                  <a:lnTo>
+                    <a:pt x="4502047" y="667718"/>
+                  </a:lnTo>
+                  <a:lnTo>
+                    <a:pt x="4572391" y="669986"/>
+                  </a:lnTo>
+                  <a:lnTo>
+                    <a:pt x="4642736" y="672234"/>
+                  </a:lnTo>
+                  <a:lnTo>
+                    <a:pt x="4713080" y="674462"/>
+                  </a:lnTo>
+                  <a:lnTo>
+                    <a:pt x="4783425" y="676671"/>
+                  </a:lnTo>
+                  <a:lnTo>
+                    <a:pt x="4853769" y="678860"/>
+                  </a:lnTo>
+                  <a:lnTo>
+                    <a:pt x="4924114" y="681030"/>
+                  </a:lnTo>
+                  <a:lnTo>
+                    <a:pt x="4994458" y="683182"/>
+                  </a:lnTo>
+                  <a:lnTo>
+                    <a:pt x="5064803" y="685314"/>
+                  </a:lnTo>
+                  <a:lnTo>
+                    <a:pt x="5135147" y="687428"/>
+                  </a:lnTo>
+                  <a:lnTo>
+                    <a:pt x="5205492" y="689523"/>
+                  </a:lnTo>
+                  <a:lnTo>
+                    <a:pt x="5275836" y="691600"/>
+                  </a:lnTo>
+                  <a:lnTo>
+                    <a:pt x="5346181" y="693659"/>
+                  </a:lnTo>
+                  <a:lnTo>
+                    <a:pt x="5416525" y="695700"/>
+                  </a:lnTo>
+                  <a:lnTo>
+                    <a:pt x="5486870" y="697723"/>
+                  </a:lnTo>
+                  <a:lnTo>
+                    <a:pt x="5557214" y="699729"/>
+                  </a:lnTo>
+                  <a:lnTo>
+                    <a:pt x="5627559" y="701716"/>
+                  </a:lnTo>
+                  <a:lnTo>
+                    <a:pt x="5697903" y="703687"/>
+                  </a:lnTo>
+                  <a:lnTo>
+                    <a:pt x="5768248" y="705640"/>
+                  </a:lnTo>
+                  <a:lnTo>
+                    <a:pt x="5838592" y="707576"/>
+                  </a:lnTo>
+                  <a:lnTo>
+                    <a:pt x="5908937" y="709496"/>
+                  </a:lnTo>
+                  <a:lnTo>
+                    <a:pt x="5979281" y="711398"/>
+                  </a:lnTo>
+                  <a:lnTo>
+                    <a:pt x="6049626" y="713284"/>
+                  </a:lnTo>
+                  <a:lnTo>
+                    <a:pt x="6119970" y="715153"/>
+                  </a:lnTo>
+                  <a:lnTo>
+                    <a:pt x="6190315" y="717006"/>
+                  </a:lnTo>
+                  <a:lnTo>
+                    <a:pt x="6260659" y="718843"/>
+                  </a:lnTo>
+                  <a:lnTo>
+                    <a:pt x="6331004" y="720664"/>
+                  </a:lnTo>
+                  <a:lnTo>
+                    <a:pt x="6401348" y="722469"/>
+                  </a:lnTo>
+                  <a:lnTo>
+                    <a:pt x="6471693" y="724258"/>
+                  </a:lnTo>
+                  <a:lnTo>
+                    <a:pt x="6542037" y="726031"/>
+                  </a:lnTo>
+                  <a:lnTo>
+                    <a:pt x="6612382" y="727789"/>
+                  </a:lnTo>
+                  <a:lnTo>
+                    <a:pt x="6682726" y="729532"/>
+                  </a:lnTo>
+                  <a:lnTo>
+                    <a:pt x="6753071" y="731259"/>
+                  </a:lnTo>
+                  <a:lnTo>
+                    <a:pt x="6823415" y="732971"/>
+                  </a:lnTo>
+                  <a:lnTo>
+                    <a:pt x="6893760" y="734668"/>
+                  </a:lnTo>
+                  <a:lnTo>
+                    <a:pt x="6964104" y="736351"/>
+                  </a:lnTo>
+                  <a:lnTo>
+                    <a:pt x="6964104" y="838406"/>
+                  </a:lnTo>
+                  <a:lnTo>
+                    <a:pt x="6893760" y="836278"/>
+                  </a:lnTo>
+                  <a:lnTo>
+                    <a:pt x="6823415" y="834099"/>
+                  </a:lnTo>
+                  <a:lnTo>
+                    <a:pt x="6753071" y="831867"/>
+                  </a:lnTo>
+                  <a:lnTo>
+                    <a:pt x="6682726" y="829583"/>
+                  </a:lnTo>
+                  <a:lnTo>
+                    <a:pt x="6612382" y="827243"/>
+                  </a:lnTo>
+                  <a:lnTo>
+                    <a:pt x="6542037" y="824847"/>
+                  </a:lnTo>
+                  <a:lnTo>
+                    <a:pt x="6471693" y="822394"/>
+                  </a:lnTo>
+                  <a:lnTo>
+                    <a:pt x="6401348" y="819882"/>
+                  </a:lnTo>
+                  <a:lnTo>
+                    <a:pt x="6331004" y="817309"/>
+                  </a:lnTo>
+                  <a:lnTo>
+                    <a:pt x="6260659" y="814675"/>
+                  </a:lnTo>
+                  <a:lnTo>
+                    <a:pt x="6190315" y="811978"/>
+                  </a:lnTo>
+                  <a:lnTo>
+                    <a:pt x="6119970" y="809216"/>
+                  </a:lnTo>
+                  <a:lnTo>
+                    <a:pt x="6049626" y="806387"/>
+                  </a:lnTo>
+                  <a:lnTo>
+                    <a:pt x="5979281" y="803491"/>
+                  </a:lnTo>
+                  <a:lnTo>
+                    <a:pt x="5908937" y="800526"/>
+                  </a:lnTo>
+                  <a:lnTo>
+                    <a:pt x="5838592" y="797489"/>
+                  </a:lnTo>
+                  <a:lnTo>
+                    <a:pt x="5768248" y="794380"/>
+                  </a:lnTo>
+                  <a:lnTo>
+                    <a:pt x="5697903" y="791196"/>
+                  </a:lnTo>
+                  <a:lnTo>
+                    <a:pt x="5627559" y="787935"/>
+                  </a:lnTo>
+                  <a:lnTo>
+                    <a:pt x="5557214" y="784596"/>
+                  </a:lnTo>
+                  <a:lnTo>
+                    <a:pt x="5486870" y="781178"/>
+                  </a:lnTo>
+                  <a:lnTo>
+                    <a:pt x="5416525" y="777677"/>
+                  </a:lnTo>
+                  <a:lnTo>
+                    <a:pt x="5346181" y="774092"/>
+                  </a:lnTo>
+                  <a:lnTo>
+                    <a:pt x="5275836" y="770421"/>
+                  </a:lnTo>
+                  <a:lnTo>
+                    <a:pt x="5205492" y="766663"/>
+                  </a:lnTo>
+                  <a:lnTo>
+                    <a:pt x="5135147" y="762814"/>
+                  </a:lnTo>
+                  <a:lnTo>
+                    <a:pt x="5064803" y="758872"/>
+                  </a:lnTo>
+                  <a:lnTo>
+                    <a:pt x="4994458" y="754837"/>
+                  </a:lnTo>
+                  <a:lnTo>
+                    <a:pt x="4924114" y="750704"/>
+                  </a:lnTo>
+                  <a:lnTo>
+                    <a:pt x="4853769" y="746472"/>
+                  </a:lnTo>
+                  <a:lnTo>
+                    <a:pt x="4783425" y="742139"/>
+                  </a:lnTo>
+                  <a:lnTo>
+                    <a:pt x="4713080" y="737702"/>
+                  </a:lnTo>
+                  <a:lnTo>
+                    <a:pt x="4642736" y="733158"/>
+                  </a:lnTo>
+                  <a:lnTo>
+                    <a:pt x="4572391" y="728506"/>
+                  </a:lnTo>
+                  <a:lnTo>
+                    <a:pt x="4502047" y="723742"/>
+                  </a:lnTo>
+                  <a:lnTo>
+                    <a:pt x="4431702" y="718863"/>
+                  </a:lnTo>
+                  <a:lnTo>
+                    <a:pt x="4361358" y="713868"/>
+                  </a:lnTo>
+                  <a:lnTo>
+                    <a:pt x="4291013" y="708753"/>
+                  </a:lnTo>
+                  <a:lnTo>
+                    <a:pt x="4220669" y="703515"/>
+                  </a:lnTo>
+                  <a:lnTo>
+                    <a:pt x="4150324" y="698151"/>
+                  </a:lnTo>
+                  <a:lnTo>
+                    <a:pt x="4079980" y="692659"/>
+                  </a:lnTo>
+                  <a:lnTo>
+                    <a:pt x="4009635" y="687035"/>
+                  </a:lnTo>
+                  <a:lnTo>
+                    <a:pt x="3939291" y="681276"/>
+                  </a:lnTo>
+                  <a:lnTo>
+                    <a:pt x="3868946" y="675379"/>
+                  </a:lnTo>
+                  <a:lnTo>
+                    <a:pt x="3798602" y="669340"/>
+                  </a:lnTo>
+                  <a:lnTo>
+                    <a:pt x="3728257" y="663157"/>
+                  </a:lnTo>
+                  <a:lnTo>
+                    <a:pt x="3657913" y="656826"/>
+                  </a:lnTo>
+                  <a:lnTo>
+                    <a:pt x="3587569" y="650342"/>
+                  </a:lnTo>
+                  <a:lnTo>
+                    <a:pt x="3517224" y="643703"/>
+                  </a:lnTo>
+                  <a:lnTo>
+                    <a:pt x="3446880" y="636905"/>
+                  </a:lnTo>
+                  <a:lnTo>
+                    <a:pt x="3376535" y="629944"/>
+                  </a:lnTo>
+                  <a:lnTo>
+                    <a:pt x="3306191" y="625959"/>
+                  </a:lnTo>
+                  <a:lnTo>
+                    <a:pt x="3235846" y="623303"/>
+                  </a:lnTo>
+                  <a:lnTo>
+                    <a:pt x="3165502" y="620624"/>
+                  </a:lnTo>
+                  <a:lnTo>
+                    <a:pt x="3095157" y="617921"/>
+                  </a:lnTo>
+                  <a:lnTo>
+                    <a:pt x="3024813" y="615194"/>
+                  </a:lnTo>
+                  <a:lnTo>
+                    <a:pt x="2954468" y="612443"/>
+                  </a:lnTo>
+                  <a:lnTo>
+                    <a:pt x="2884124" y="609668"/>
+                  </a:lnTo>
+                  <a:lnTo>
+                    <a:pt x="2813779" y="606869"/>
+                  </a:lnTo>
+                  <a:lnTo>
+                    <a:pt x="2743435" y="604044"/>
+                  </a:lnTo>
+                  <a:lnTo>
+                    <a:pt x="2673090" y="601195"/>
+                  </a:lnTo>
+                  <a:lnTo>
+                    <a:pt x="2602746" y="598321"/>
+                  </a:lnTo>
+                  <a:lnTo>
+                    <a:pt x="2532401" y="595421"/>
+                  </a:lnTo>
+                  <a:lnTo>
+                    <a:pt x="2462057" y="592496"/>
+                  </a:lnTo>
+                  <a:lnTo>
+                    <a:pt x="2391712" y="589545"/>
+                  </a:lnTo>
+                  <a:lnTo>
+                    <a:pt x="2321368" y="586568"/>
+                  </a:lnTo>
+                  <a:lnTo>
+                    <a:pt x="2251023" y="583564"/>
+                  </a:lnTo>
+                  <a:lnTo>
+                    <a:pt x="2180679" y="580535"/>
+                  </a:lnTo>
+                  <a:lnTo>
+                    <a:pt x="2110334" y="577478"/>
+                  </a:lnTo>
+                  <a:lnTo>
+                    <a:pt x="2039990" y="574395"/>
+                  </a:lnTo>
+                  <a:lnTo>
+                    <a:pt x="1969645" y="571284"/>
+                  </a:lnTo>
+                  <a:lnTo>
+                    <a:pt x="1899301" y="568146"/>
+                  </a:lnTo>
+                  <a:lnTo>
+                    <a:pt x="1828956" y="564980"/>
+                  </a:lnTo>
+                  <a:lnTo>
+                    <a:pt x="1758612" y="561786"/>
+                  </a:lnTo>
+                  <a:lnTo>
+                    <a:pt x="1688267" y="558564"/>
+                  </a:lnTo>
+                  <a:lnTo>
+                    <a:pt x="1617923" y="555314"/>
+                  </a:lnTo>
+                  <a:lnTo>
+                    <a:pt x="1547578" y="552035"/>
+                  </a:lnTo>
+                  <a:lnTo>
+                    <a:pt x="1477234" y="548727"/>
+                  </a:lnTo>
+                  <a:lnTo>
+                    <a:pt x="1406889" y="545390"/>
+                  </a:lnTo>
+                  <a:lnTo>
+                    <a:pt x="1336545" y="542024"/>
+                  </a:lnTo>
+                  <a:lnTo>
+                    <a:pt x="1266200" y="538628"/>
+                  </a:lnTo>
+                  <a:lnTo>
+                    <a:pt x="1195856" y="535202"/>
+                  </a:lnTo>
+                  <a:lnTo>
+                    <a:pt x="1125511" y="531745"/>
+                  </a:lnTo>
+                  <a:lnTo>
+                    <a:pt x="1055167" y="528259"/>
+                  </a:lnTo>
+                  <a:lnTo>
+                    <a:pt x="984822" y="524741"/>
+                  </a:lnTo>
+                  <a:lnTo>
+                    <a:pt x="914478" y="521193"/>
+                  </a:lnTo>
+                  <a:lnTo>
+                    <a:pt x="844133" y="517613"/>
+                  </a:lnTo>
+                  <a:lnTo>
+                    <a:pt x="773789" y="514001"/>
+                  </a:lnTo>
+                  <a:lnTo>
+                    <a:pt x="703444" y="510358"/>
+                  </a:lnTo>
+                  <a:lnTo>
+                    <a:pt x="633100" y="506683"/>
+                  </a:lnTo>
+                  <a:lnTo>
+                    <a:pt x="562755" y="502975"/>
+                  </a:lnTo>
+                  <a:lnTo>
+                    <a:pt x="492411" y="499234"/>
+                  </a:lnTo>
+                  <a:lnTo>
+                    <a:pt x="422066" y="495461"/>
+                  </a:lnTo>
+                  <a:lnTo>
+                    <a:pt x="351722" y="491654"/>
+                  </a:lnTo>
+                  <a:lnTo>
+                    <a:pt x="281377" y="487814"/>
+                  </a:lnTo>
+                  <a:lnTo>
+                    <a:pt x="211033" y="483940"/>
+                  </a:lnTo>
+                  <a:lnTo>
+                    <a:pt x="140688" y="480031"/>
+                  </a:lnTo>
+                  <a:lnTo>
+                    <a:pt x="70344" y="476088"/>
+                  </a:lnTo>
+                  <a:lnTo>
+                    <a:pt x="0" y="472111"/>
                   </a:lnTo>
                   <a:close/>
                 </a:path>
@@ -3584,643 +3619,318 @@
         </p:sp>
         <p:sp>
           <p:nvSpPr>
-            <p:cNvPr id="21" name="pl21"/>
-            <p:cNvSpPr/>
-            <p:nvPr/>
-          </p:nvSpPr>
-          <p:spPr>
-            <a:xfrm>
-              <a:off x="1172049" y="2988148"/>
-              <a:ext cx="7090630" cy="2040452"/>
-            </a:xfrm>
-            <a:custGeom>
-              <a:avLst/>
-              <a:pathLst>
-                <a:path w="7090630" h="2040452">
-                  <a:moveTo>
-                    <a:pt x="0" y="0"/>
-                  </a:moveTo>
-                  <a:lnTo>
-                    <a:pt x="71622" y="60179"/>
-                  </a:lnTo>
-                  <a:lnTo>
-                    <a:pt x="143245" y="118948"/>
-                  </a:lnTo>
-                  <a:lnTo>
-                    <a:pt x="214867" y="176341"/>
-                  </a:lnTo>
-                  <a:lnTo>
-                    <a:pt x="286490" y="232390"/>
-                  </a:lnTo>
-                  <a:lnTo>
-                    <a:pt x="358112" y="287125"/>
-                  </a:lnTo>
-                  <a:lnTo>
-                    <a:pt x="429735" y="340579"/>
-                  </a:lnTo>
-                  <a:lnTo>
-                    <a:pt x="501357" y="392780"/>
-                  </a:lnTo>
-                  <a:lnTo>
-                    <a:pt x="572980" y="443759"/>
-                  </a:lnTo>
-                  <a:lnTo>
-                    <a:pt x="644602" y="493543"/>
-                  </a:lnTo>
-                  <a:lnTo>
-                    <a:pt x="716225" y="542161"/>
-                  </a:lnTo>
-                  <a:lnTo>
-                    <a:pt x="787847" y="589641"/>
-                  </a:lnTo>
-                  <a:lnTo>
-                    <a:pt x="859470" y="636008"/>
-                  </a:lnTo>
-                  <a:lnTo>
-                    <a:pt x="931092" y="681289"/>
-                  </a:lnTo>
-                  <a:lnTo>
-                    <a:pt x="1002715" y="725510"/>
-                  </a:lnTo>
-                  <a:lnTo>
-                    <a:pt x="1074337" y="768694"/>
-                  </a:lnTo>
-                  <a:lnTo>
-                    <a:pt x="1145960" y="810867"/>
-                  </a:lnTo>
-                  <a:lnTo>
-                    <a:pt x="1217582" y="852053"/>
-                  </a:lnTo>
-                  <a:lnTo>
-                    <a:pt x="1289205" y="892273"/>
-                  </a:lnTo>
-                  <a:lnTo>
-                    <a:pt x="1360827" y="931551"/>
-                  </a:lnTo>
-                  <a:lnTo>
-                    <a:pt x="1432450" y="969910"/>
-                  </a:lnTo>
-                  <a:lnTo>
-                    <a:pt x="1504073" y="1007370"/>
-                  </a:lnTo>
-                  <a:lnTo>
-                    <a:pt x="1575695" y="1043952"/>
-                  </a:lnTo>
-                  <a:lnTo>
-                    <a:pt x="1647318" y="1079677"/>
-                  </a:lnTo>
-                  <a:lnTo>
-                    <a:pt x="1718940" y="1114566"/>
-                  </a:lnTo>
-                  <a:lnTo>
-                    <a:pt x="1790563" y="1148637"/>
-                  </a:lnTo>
-                  <a:lnTo>
-                    <a:pt x="1862185" y="1181910"/>
-                  </a:lnTo>
-                  <a:lnTo>
-                    <a:pt x="1933808" y="1214404"/>
-                  </a:lnTo>
-                  <a:lnTo>
-                    <a:pt x="2005430" y="1246137"/>
-                  </a:lnTo>
-                  <a:lnTo>
-                    <a:pt x="2077053" y="1277126"/>
-                  </a:lnTo>
-                  <a:lnTo>
-                    <a:pt x="2148675" y="1307390"/>
-                  </a:lnTo>
-                  <a:lnTo>
-                    <a:pt x="2220298" y="1336944"/>
-                  </a:lnTo>
-                  <a:lnTo>
-                    <a:pt x="2291920" y="1365807"/>
-                  </a:lnTo>
-                  <a:lnTo>
-                    <a:pt x="2363543" y="1393993"/>
-                  </a:lnTo>
-                  <a:lnTo>
-                    <a:pt x="2435165" y="1421519"/>
-                  </a:lnTo>
-                  <a:lnTo>
-                    <a:pt x="2506788" y="1448400"/>
-                  </a:lnTo>
-                  <a:lnTo>
-                    <a:pt x="2578410" y="1474651"/>
-                  </a:lnTo>
-                  <a:lnTo>
-                    <a:pt x="2650033" y="1500288"/>
-                  </a:lnTo>
-                  <a:lnTo>
-                    <a:pt x="2721655" y="1525324"/>
-                  </a:lnTo>
-                  <a:lnTo>
-                    <a:pt x="2793278" y="1549774"/>
-                  </a:lnTo>
-                  <a:lnTo>
-                    <a:pt x="2864901" y="1573651"/>
-                  </a:lnTo>
-                  <a:lnTo>
-                    <a:pt x="2936523" y="1596968"/>
-                  </a:lnTo>
-                  <a:lnTo>
-                    <a:pt x="3008146" y="1619740"/>
-                  </a:lnTo>
-                  <a:lnTo>
-                    <a:pt x="3079768" y="1641978"/>
-                  </a:lnTo>
-                  <a:lnTo>
-                    <a:pt x="3151391" y="1663695"/>
-                  </a:lnTo>
-                  <a:lnTo>
-                    <a:pt x="3223013" y="1684903"/>
-                  </a:lnTo>
-                  <a:lnTo>
-                    <a:pt x="3294636" y="1705615"/>
-                  </a:lnTo>
-                  <a:lnTo>
-                    <a:pt x="3366258" y="1725841"/>
-                  </a:lnTo>
-                  <a:lnTo>
-                    <a:pt x="3437881" y="1741849"/>
-                  </a:lnTo>
-                  <a:lnTo>
-                    <a:pt x="3509503" y="1749080"/>
-                  </a:lnTo>
-                  <a:lnTo>
-                    <a:pt x="3581126" y="1756249"/>
-                  </a:lnTo>
-                  <a:lnTo>
-                    <a:pt x="3652748" y="1763354"/>
-                  </a:lnTo>
-                  <a:lnTo>
-                    <a:pt x="3724371" y="1770398"/>
-                  </a:lnTo>
-                  <a:lnTo>
-                    <a:pt x="3795993" y="1777380"/>
-                  </a:lnTo>
-                  <a:lnTo>
-                    <a:pt x="3867616" y="1784301"/>
-                  </a:lnTo>
-                  <a:lnTo>
-                    <a:pt x="3939238" y="1791161"/>
-                  </a:lnTo>
-                  <a:lnTo>
-                    <a:pt x="4010861" y="1797962"/>
-                  </a:lnTo>
-                  <a:lnTo>
-                    <a:pt x="4082483" y="1804703"/>
-                  </a:lnTo>
-                  <a:lnTo>
-                    <a:pt x="4154106" y="1811385"/>
-                  </a:lnTo>
-                  <a:lnTo>
-                    <a:pt x="4225729" y="1818009"/>
-                  </a:lnTo>
-                  <a:lnTo>
-                    <a:pt x="4297351" y="1824574"/>
-                  </a:lnTo>
-                  <a:lnTo>
-                    <a:pt x="4368974" y="1831083"/>
-                  </a:lnTo>
-                  <a:lnTo>
-                    <a:pt x="4440596" y="1837534"/>
-                  </a:lnTo>
-                  <a:lnTo>
-                    <a:pt x="4512219" y="1843929"/>
-                  </a:lnTo>
-                  <a:lnTo>
-                    <a:pt x="4583841" y="1850269"/>
-                  </a:lnTo>
-                  <a:lnTo>
-                    <a:pt x="4655464" y="1856552"/>
-                  </a:lnTo>
-                  <a:lnTo>
-                    <a:pt x="4727086" y="1862781"/>
-                  </a:lnTo>
-                  <a:lnTo>
-                    <a:pt x="4798709" y="1868956"/>
-                  </a:lnTo>
-                  <a:lnTo>
-                    <a:pt x="4870331" y="1875076"/>
-                  </a:lnTo>
-                  <a:lnTo>
-                    <a:pt x="4941954" y="1881143"/>
-                  </a:lnTo>
-                  <a:lnTo>
-                    <a:pt x="5013576" y="1887157"/>
-                  </a:lnTo>
-                  <a:lnTo>
-                    <a:pt x="5085199" y="1893118"/>
-                  </a:lnTo>
-                  <a:lnTo>
-                    <a:pt x="5156821" y="1899028"/>
-                  </a:lnTo>
-                  <a:lnTo>
-                    <a:pt x="5228444" y="1904885"/>
-                  </a:lnTo>
-                  <a:lnTo>
-                    <a:pt x="5300066" y="1910691"/>
-                  </a:lnTo>
-                  <a:lnTo>
-                    <a:pt x="5371689" y="1916447"/>
-                  </a:lnTo>
-                  <a:lnTo>
-                    <a:pt x="5443311" y="1922152"/>
-                  </a:lnTo>
-                  <a:lnTo>
-                    <a:pt x="5514934" y="1927808"/>
-                  </a:lnTo>
-                  <a:lnTo>
-                    <a:pt x="5586557" y="1933414"/>
-                  </a:lnTo>
-                  <a:lnTo>
-                    <a:pt x="5658179" y="1938971"/>
-                  </a:lnTo>
-                  <a:lnTo>
-                    <a:pt x="5729802" y="1944479"/>
-                  </a:lnTo>
-                  <a:lnTo>
-                    <a:pt x="5801424" y="1949939"/>
-                  </a:lnTo>
-                  <a:lnTo>
-                    <a:pt x="5873047" y="1955352"/>
-                  </a:lnTo>
-                  <a:lnTo>
-                    <a:pt x="5944669" y="1960717"/>
-                  </a:lnTo>
-                  <a:lnTo>
-                    <a:pt x="6016292" y="1966035"/>
-                  </a:lnTo>
-                  <a:lnTo>
-                    <a:pt x="6087914" y="1971307"/>
-                  </a:lnTo>
-                  <a:lnTo>
-                    <a:pt x="6159537" y="1976533"/>
-                  </a:lnTo>
-                  <a:lnTo>
-                    <a:pt x="6231159" y="1981713"/>
-                  </a:lnTo>
-                  <a:lnTo>
-                    <a:pt x="6302782" y="1986848"/>
-                  </a:lnTo>
-                  <a:lnTo>
-                    <a:pt x="6374404" y="1991937"/>
-                  </a:lnTo>
-                  <a:lnTo>
-                    <a:pt x="6446027" y="1996983"/>
-                  </a:lnTo>
-                  <a:lnTo>
-                    <a:pt x="6517649" y="2001984"/>
-                  </a:lnTo>
-                  <a:lnTo>
-                    <a:pt x="6589272" y="2006942"/>
-                  </a:lnTo>
-                  <a:lnTo>
-                    <a:pt x="6660894" y="2011856"/>
-                  </a:lnTo>
-                  <a:lnTo>
-                    <a:pt x="6732517" y="2016727"/>
-                  </a:lnTo>
-                  <a:lnTo>
-                    <a:pt x="6804139" y="2021556"/>
-                  </a:lnTo>
-                  <a:lnTo>
-                    <a:pt x="6875762" y="2026342"/>
-                  </a:lnTo>
-                  <a:lnTo>
-                    <a:pt x="6947385" y="2031087"/>
-                  </a:lnTo>
-                  <a:lnTo>
-                    <a:pt x="7019007" y="2035790"/>
-                  </a:lnTo>
-                  <a:lnTo>
-                    <a:pt x="7090630" y="2040452"/>
-                  </a:lnTo>
-                </a:path>
-              </a:pathLst>
-            </a:custGeom>
-          </p:spPr>
-          <p:txBody>
-            <a:bodyPr/>
-            <a:lstStyle/>
-            <a:p/>
-          </p:txBody>
-        </p:sp>
-        <p:sp>
-          <p:nvSpPr>
             <p:cNvPr id="22" name="pl22"/>
             <p:cNvSpPr/>
             <p:nvPr/>
           </p:nvSpPr>
           <p:spPr>
             <a:xfrm>
-              <a:off x="1172049" y="4296383"/>
-              <a:ext cx="7090630" cy="1015015"/>
+              <a:off x="1235312" y="2473166"/>
+              <a:ext cx="6964104" cy="736351"/>
             </a:xfrm>
             <a:custGeom>
               <a:avLst/>
               <a:pathLst>
-                <a:path w="7090630" h="1015015">
+                <a:path w="6964104" h="736351">
                   <a:moveTo>
-                    <a:pt x="7090630" y="1015015"/>
+                    <a:pt x="0" y="0"/>
                   </a:moveTo>
                   <a:lnTo>
-                    <a:pt x="7019007" y="1009118"/>
-                  </a:lnTo>
-                  <a:lnTo>
-                    <a:pt x="6947385" y="1003080"/>
-                  </a:lnTo>
-                  <a:lnTo>
-                    <a:pt x="6875762" y="996897"/>
-                  </a:lnTo>
-                  <a:lnTo>
-                    <a:pt x="6804139" y="990565"/>
-                  </a:lnTo>
-                  <a:lnTo>
-                    <a:pt x="6732517" y="984082"/>
-                  </a:lnTo>
-                  <a:lnTo>
-                    <a:pt x="6660894" y="977443"/>
-                  </a:lnTo>
-                  <a:lnTo>
-                    <a:pt x="6589272" y="970644"/>
-                  </a:lnTo>
-                  <a:lnTo>
-                    <a:pt x="6517649" y="963683"/>
-                  </a:lnTo>
-                  <a:lnTo>
-                    <a:pt x="6446027" y="956555"/>
-                  </a:lnTo>
-                  <a:lnTo>
-                    <a:pt x="6374404" y="949256"/>
-                  </a:lnTo>
-                  <a:lnTo>
-                    <a:pt x="6302782" y="941781"/>
-                  </a:lnTo>
-                  <a:lnTo>
-                    <a:pt x="6231159" y="934128"/>
-                  </a:lnTo>
-                  <a:lnTo>
-                    <a:pt x="6159537" y="926291"/>
-                  </a:lnTo>
-                  <a:lnTo>
-                    <a:pt x="6087914" y="918266"/>
-                  </a:lnTo>
-                  <a:lnTo>
-                    <a:pt x="6016292" y="910048"/>
-                  </a:lnTo>
-                  <a:lnTo>
-                    <a:pt x="5944669" y="901633"/>
-                  </a:lnTo>
-                  <a:lnTo>
-                    <a:pt x="5873047" y="893017"/>
-                  </a:lnTo>
-                  <a:lnTo>
-                    <a:pt x="5801424" y="884193"/>
-                  </a:lnTo>
-                  <a:lnTo>
-                    <a:pt x="5729802" y="875159"/>
-                  </a:lnTo>
-                  <a:lnTo>
-                    <a:pt x="5658179" y="865907"/>
-                  </a:lnTo>
-                  <a:lnTo>
-                    <a:pt x="5586557" y="856433"/>
-                  </a:lnTo>
-                  <a:lnTo>
-                    <a:pt x="5514934" y="846733"/>
-                  </a:lnTo>
-                  <a:lnTo>
-                    <a:pt x="5443311" y="836799"/>
-                  </a:lnTo>
-                  <a:lnTo>
-                    <a:pt x="5371689" y="826628"/>
-                  </a:lnTo>
-                  <a:lnTo>
-                    <a:pt x="5300066" y="816212"/>
-                  </a:lnTo>
-                  <a:lnTo>
-                    <a:pt x="5228444" y="805546"/>
-                  </a:lnTo>
-                  <a:lnTo>
-                    <a:pt x="5156821" y="794625"/>
-                  </a:lnTo>
-                  <a:lnTo>
-                    <a:pt x="5085199" y="783442"/>
-                  </a:lnTo>
-                  <a:lnTo>
-                    <a:pt x="5013576" y="771990"/>
-                  </a:lnTo>
-                  <a:lnTo>
-                    <a:pt x="4941954" y="760264"/>
-                  </a:lnTo>
-                  <a:lnTo>
-                    <a:pt x="4870331" y="748257"/>
-                  </a:lnTo>
-                  <a:lnTo>
-                    <a:pt x="4798709" y="735961"/>
-                  </a:lnTo>
-                  <a:lnTo>
-                    <a:pt x="4727086" y="723371"/>
-                  </a:lnTo>
-                  <a:lnTo>
-                    <a:pt x="4655464" y="710478"/>
-                  </a:lnTo>
-                  <a:lnTo>
-                    <a:pt x="4583841" y="697277"/>
-                  </a:lnTo>
-                  <a:lnTo>
-                    <a:pt x="4512219" y="683759"/>
-                  </a:lnTo>
-                  <a:lnTo>
-                    <a:pt x="4440596" y="669916"/>
-                  </a:lnTo>
-                  <a:lnTo>
-                    <a:pt x="4368974" y="655741"/>
-                  </a:lnTo>
-                  <a:lnTo>
-                    <a:pt x="4297351" y="641227"/>
-                  </a:lnTo>
-                  <a:lnTo>
-                    <a:pt x="4225729" y="626364"/>
-                  </a:lnTo>
-                  <a:lnTo>
-                    <a:pt x="4154106" y="611145"/>
-                  </a:lnTo>
-                  <a:lnTo>
-                    <a:pt x="4082483" y="595561"/>
-                  </a:lnTo>
-                  <a:lnTo>
-                    <a:pt x="4010861" y="579603"/>
-                  </a:lnTo>
-                  <a:lnTo>
-                    <a:pt x="3939238" y="563262"/>
-                  </a:lnTo>
-                  <a:lnTo>
-                    <a:pt x="3867616" y="546529"/>
-                  </a:lnTo>
-                  <a:lnTo>
-                    <a:pt x="3795993" y="529395"/>
-                  </a:lnTo>
-                  <a:lnTo>
-                    <a:pt x="3724371" y="511850"/>
-                  </a:lnTo>
-                  <a:lnTo>
-                    <a:pt x="3652748" y="493884"/>
-                  </a:lnTo>
-                  <a:lnTo>
-                    <a:pt x="3581126" y="475487"/>
-                  </a:lnTo>
-                  <a:lnTo>
-                    <a:pt x="3509503" y="456649"/>
-                  </a:lnTo>
-                  <a:lnTo>
-                    <a:pt x="3437881" y="437359"/>
-                  </a:lnTo>
-                  <a:lnTo>
-                    <a:pt x="3366258" y="426318"/>
-                  </a:lnTo>
-                  <a:lnTo>
-                    <a:pt x="3294636" y="418959"/>
-                  </a:lnTo>
-                  <a:lnTo>
-                    <a:pt x="3223013" y="411534"/>
-                  </a:lnTo>
-                  <a:lnTo>
-                    <a:pt x="3151391" y="404044"/>
-                  </a:lnTo>
-                  <a:lnTo>
-                    <a:pt x="3079768" y="396488"/>
-                  </a:lnTo>
-                  <a:lnTo>
-                    <a:pt x="3008146" y="388865"/>
-                  </a:lnTo>
-                  <a:lnTo>
-                    <a:pt x="2936523" y="381175"/>
-                  </a:lnTo>
-                  <a:lnTo>
-                    <a:pt x="2864901" y="373418"/>
-                  </a:lnTo>
-                  <a:lnTo>
-                    <a:pt x="2793278" y="365591"/>
-                  </a:lnTo>
-                  <a:lnTo>
-                    <a:pt x="2721655" y="357696"/>
-                  </a:lnTo>
-                  <a:lnTo>
-                    <a:pt x="2650033" y="349731"/>
-                  </a:lnTo>
-                  <a:lnTo>
-                    <a:pt x="2578410" y="341696"/>
-                  </a:lnTo>
-                  <a:lnTo>
-                    <a:pt x="2506788" y="333590"/>
-                  </a:lnTo>
-                  <a:lnTo>
-                    <a:pt x="2435165" y="325413"/>
-                  </a:lnTo>
-                  <a:lnTo>
-                    <a:pt x="2363543" y="317163"/>
-                  </a:lnTo>
-                  <a:lnTo>
-                    <a:pt x="2291920" y="308841"/>
-                  </a:lnTo>
-                  <a:lnTo>
-                    <a:pt x="2220298" y="300445"/>
-                  </a:lnTo>
-                  <a:lnTo>
-                    <a:pt x="2148675" y="291976"/>
-                  </a:lnTo>
-                  <a:lnTo>
-                    <a:pt x="2077053" y="283431"/>
-                  </a:lnTo>
-                  <a:lnTo>
-                    <a:pt x="2005430" y="274811"/>
-                  </a:lnTo>
-                  <a:lnTo>
-                    <a:pt x="1933808" y="266116"/>
-                  </a:lnTo>
-                  <a:lnTo>
-                    <a:pt x="1862185" y="257343"/>
-                  </a:lnTo>
-                  <a:lnTo>
-                    <a:pt x="1790563" y="248493"/>
-                  </a:lnTo>
-                  <a:lnTo>
-                    <a:pt x="1718940" y="239566"/>
-                  </a:lnTo>
-                  <a:lnTo>
-                    <a:pt x="1647318" y="230559"/>
-                  </a:lnTo>
-                  <a:lnTo>
-                    <a:pt x="1575695" y="221473"/>
-                  </a:lnTo>
-                  <a:lnTo>
-                    <a:pt x="1504073" y="212307"/>
-                  </a:lnTo>
-                  <a:lnTo>
-                    <a:pt x="1432450" y="203060"/>
-                  </a:lnTo>
-                  <a:lnTo>
-                    <a:pt x="1360827" y="193731"/>
-                  </a:lnTo>
-                  <a:lnTo>
-                    <a:pt x="1289205" y="184320"/>
-                  </a:lnTo>
-                  <a:lnTo>
-                    <a:pt x="1217582" y="174827"/>
-                  </a:lnTo>
-                  <a:lnTo>
-                    <a:pt x="1145960" y="165249"/>
-                  </a:lnTo>
-                  <a:lnTo>
-                    <a:pt x="1074337" y="155587"/>
-                  </a:lnTo>
-                  <a:lnTo>
-                    <a:pt x="1002715" y="145840"/>
-                  </a:lnTo>
-                  <a:lnTo>
-                    <a:pt x="931092" y="136007"/>
-                  </a:lnTo>
-                  <a:lnTo>
-                    <a:pt x="859470" y="126087"/>
-                  </a:lnTo>
-                  <a:lnTo>
-                    <a:pt x="787847" y="116080"/>
-                  </a:lnTo>
-                  <a:lnTo>
-                    <a:pt x="716225" y="105984"/>
-                  </a:lnTo>
-                  <a:lnTo>
-                    <a:pt x="644602" y="95799"/>
-                  </a:lnTo>
-                  <a:lnTo>
-                    <a:pt x="572980" y="85525"/>
-                  </a:lnTo>
-                  <a:lnTo>
-                    <a:pt x="501357" y="75160"/>
-                  </a:lnTo>
-                  <a:lnTo>
-                    <a:pt x="429735" y="64703"/>
-                  </a:lnTo>
-                  <a:lnTo>
-                    <a:pt x="358112" y="54155"/>
-                  </a:lnTo>
-                  <a:lnTo>
-                    <a:pt x="286490" y="43513"/>
-                  </a:lnTo>
-                  <a:lnTo>
-                    <a:pt x="214867" y="32778"/>
-                  </a:lnTo>
-                  <a:lnTo>
-                    <a:pt x="143245" y="21947"/>
-                  </a:lnTo>
-                  <a:lnTo>
-                    <a:pt x="71622" y="11022"/>
-                  </a:lnTo>
-                  <a:lnTo>
-                    <a:pt x="0" y="0"/>
+                    <a:pt x="70344" y="21717"/>
+                  </a:lnTo>
+                  <a:lnTo>
+                    <a:pt x="140688" y="42925"/>
+                  </a:lnTo>
+                  <a:lnTo>
+                    <a:pt x="211033" y="63637"/>
+                  </a:lnTo>
+                  <a:lnTo>
+                    <a:pt x="281377" y="83864"/>
+                  </a:lnTo>
+                  <a:lnTo>
+                    <a:pt x="351722" y="103616"/>
+                  </a:lnTo>
+                  <a:lnTo>
+                    <a:pt x="422066" y="122906"/>
+                  </a:lnTo>
+                  <a:lnTo>
+                    <a:pt x="492411" y="141745"/>
+                  </a:lnTo>
+                  <a:lnTo>
+                    <a:pt x="562755" y="160142"/>
+                  </a:lnTo>
+                  <a:lnTo>
+                    <a:pt x="633100" y="178108"/>
+                  </a:lnTo>
+                  <a:lnTo>
+                    <a:pt x="703444" y="195653"/>
+                  </a:lnTo>
+                  <a:lnTo>
+                    <a:pt x="773789" y="212787"/>
+                  </a:lnTo>
+                  <a:lnTo>
+                    <a:pt x="844133" y="229520"/>
+                  </a:lnTo>
+                  <a:lnTo>
+                    <a:pt x="914478" y="245861"/>
+                  </a:lnTo>
+                  <a:lnTo>
+                    <a:pt x="984822" y="261819"/>
+                  </a:lnTo>
+                  <a:lnTo>
+                    <a:pt x="1055167" y="277403"/>
+                  </a:lnTo>
+                  <a:lnTo>
+                    <a:pt x="1125511" y="292623"/>
+                  </a:lnTo>
+                  <a:lnTo>
+                    <a:pt x="1195856" y="307485"/>
+                  </a:lnTo>
+                  <a:lnTo>
+                    <a:pt x="1266200" y="322000"/>
+                  </a:lnTo>
+                  <a:lnTo>
+                    <a:pt x="1336545" y="336175"/>
+                  </a:lnTo>
+                  <a:lnTo>
+                    <a:pt x="1406889" y="350017"/>
+                  </a:lnTo>
+                  <a:lnTo>
+                    <a:pt x="1477234" y="363536"/>
+                  </a:lnTo>
+                  <a:lnTo>
+                    <a:pt x="1547578" y="376737"/>
+                  </a:lnTo>
+                  <a:lnTo>
+                    <a:pt x="1617923" y="389630"/>
+                  </a:lnTo>
+                  <a:lnTo>
+                    <a:pt x="1688267" y="402220"/>
+                  </a:lnTo>
+                  <a:lnTo>
+                    <a:pt x="1758612" y="414516"/>
+                  </a:lnTo>
+                  <a:lnTo>
+                    <a:pt x="1828956" y="426523"/>
+                  </a:lnTo>
+                  <a:lnTo>
+                    <a:pt x="1899301" y="438250"/>
+                  </a:lnTo>
+                  <a:lnTo>
+                    <a:pt x="1969645" y="449701"/>
+                  </a:lnTo>
+                  <a:lnTo>
+                    <a:pt x="2039990" y="460884"/>
+                  </a:lnTo>
+                  <a:lnTo>
+                    <a:pt x="2110334" y="471806"/>
+                  </a:lnTo>
+                  <a:lnTo>
+                    <a:pt x="2180679" y="482471"/>
+                  </a:lnTo>
+                  <a:lnTo>
+                    <a:pt x="2251023" y="492887"/>
+                  </a:lnTo>
+                  <a:lnTo>
+                    <a:pt x="2321368" y="503059"/>
+                  </a:lnTo>
+                  <a:lnTo>
+                    <a:pt x="2391712" y="512992"/>
+                  </a:lnTo>
+                  <a:lnTo>
+                    <a:pt x="2462057" y="522693"/>
+                  </a:lnTo>
+                  <a:lnTo>
+                    <a:pt x="2532401" y="532167"/>
+                  </a:lnTo>
+                  <a:lnTo>
+                    <a:pt x="2602746" y="541418"/>
+                  </a:lnTo>
+                  <a:lnTo>
+                    <a:pt x="2673090" y="550453"/>
+                  </a:lnTo>
+                  <a:lnTo>
+                    <a:pt x="2743435" y="559277"/>
+                  </a:lnTo>
+                  <a:lnTo>
+                    <a:pt x="2813779" y="567893"/>
+                  </a:lnTo>
+                  <a:lnTo>
+                    <a:pt x="2884124" y="576308"/>
+                  </a:lnTo>
+                  <a:lnTo>
+                    <a:pt x="2954468" y="584526"/>
+                  </a:lnTo>
+                  <a:lnTo>
+                    <a:pt x="3024813" y="592551"/>
+                  </a:lnTo>
+                  <a:lnTo>
+                    <a:pt x="3095157" y="600388"/>
+                  </a:lnTo>
+                  <a:lnTo>
+                    <a:pt x="3165502" y="608042"/>
+                  </a:lnTo>
+                  <a:lnTo>
+                    <a:pt x="3235846" y="615516"/>
+                  </a:lnTo>
+                  <a:lnTo>
+                    <a:pt x="3306191" y="622815"/>
+                  </a:lnTo>
+                  <a:lnTo>
+                    <a:pt x="3376535" y="628592"/>
+                  </a:lnTo>
+                  <a:lnTo>
+                    <a:pt x="3446880" y="631202"/>
+                  </a:lnTo>
+                  <a:lnTo>
+                    <a:pt x="3517224" y="633789"/>
+                  </a:lnTo>
+                  <a:lnTo>
+                    <a:pt x="3587569" y="636353"/>
+                  </a:lnTo>
+                  <a:lnTo>
+                    <a:pt x="3657913" y="638895"/>
+                  </a:lnTo>
+                  <a:lnTo>
+                    <a:pt x="3728257" y="641414"/>
+                  </a:lnTo>
+                  <a:lnTo>
+                    <a:pt x="3798602" y="643912"/>
+                  </a:lnTo>
+                  <a:lnTo>
+                    <a:pt x="3868946" y="646388"/>
+                  </a:lnTo>
+                  <a:lnTo>
+                    <a:pt x="3939291" y="648842"/>
+                  </a:lnTo>
+                  <a:lnTo>
+                    <a:pt x="4009635" y="651274"/>
+                  </a:lnTo>
+                  <a:lnTo>
+                    <a:pt x="4079980" y="653686"/>
+                  </a:lnTo>
+                  <a:lnTo>
+                    <a:pt x="4150324" y="656076"/>
+                  </a:lnTo>
+                  <a:lnTo>
+                    <a:pt x="4220669" y="658446"/>
+                  </a:lnTo>
+                  <a:lnTo>
+                    <a:pt x="4291013" y="660794"/>
+                  </a:lnTo>
+                  <a:lnTo>
+                    <a:pt x="4361358" y="663123"/>
+                  </a:lnTo>
+                  <a:lnTo>
+                    <a:pt x="4431702" y="665430"/>
+                  </a:lnTo>
+                  <a:lnTo>
+                    <a:pt x="4502047" y="667718"/>
+                  </a:lnTo>
+                  <a:lnTo>
+                    <a:pt x="4572391" y="669986"/>
+                  </a:lnTo>
+                  <a:lnTo>
+                    <a:pt x="4642736" y="672234"/>
+                  </a:lnTo>
+                  <a:lnTo>
+                    <a:pt x="4713080" y="674462"/>
+                  </a:lnTo>
+                  <a:lnTo>
+                    <a:pt x="4783425" y="676671"/>
+                  </a:lnTo>
+                  <a:lnTo>
+                    <a:pt x="4853769" y="678860"/>
+                  </a:lnTo>
+                  <a:lnTo>
+                    <a:pt x="4924114" y="681030"/>
+                  </a:lnTo>
+                  <a:lnTo>
+                    <a:pt x="4994458" y="683182"/>
+                  </a:lnTo>
+                  <a:lnTo>
+                    <a:pt x="5064803" y="685314"/>
+                  </a:lnTo>
+                  <a:lnTo>
+                    <a:pt x="5135147" y="687428"/>
+                  </a:lnTo>
+                  <a:lnTo>
+                    <a:pt x="5205492" y="689523"/>
+                  </a:lnTo>
+                  <a:lnTo>
+                    <a:pt x="5275836" y="691600"/>
+                  </a:lnTo>
+                  <a:lnTo>
+                    <a:pt x="5346181" y="693659"/>
+                  </a:lnTo>
+                  <a:lnTo>
+                    <a:pt x="5416525" y="695700"/>
+                  </a:lnTo>
+                  <a:lnTo>
+                    <a:pt x="5486870" y="697723"/>
+                  </a:lnTo>
+                  <a:lnTo>
+                    <a:pt x="5557214" y="699729"/>
+                  </a:lnTo>
+                  <a:lnTo>
+                    <a:pt x="5627559" y="701716"/>
+                  </a:lnTo>
+                  <a:lnTo>
+                    <a:pt x="5697903" y="703687"/>
+                  </a:lnTo>
+                  <a:lnTo>
+                    <a:pt x="5768248" y="705640"/>
+                  </a:lnTo>
+                  <a:lnTo>
+                    <a:pt x="5838592" y="707576"/>
+                  </a:lnTo>
+                  <a:lnTo>
+                    <a:pt x="5908937" y="709496"/>
+                  </a:lnTo>
+                  <a:lnTo>
+                    <a:pt x="5979281" y="711398"/>
+                  </a:lnTo>
+                  <a:lnTo>
+                    <a:pt x="6049626" y="713284"/>
+                  </a:lnTo>
+                  <a:lnTo>
+                    <a:pt x="6119970" y="715153"/>
+                  </a:lnTo>
+                  <a:lnTo>
+                    <a:pt x="6190315" y="717006"/>
+                  </a:lnTo>
+                  <a:lnTo>
+                    <a:pt x="6260659" y="718843"/>
+                  </a:lnTo>
+                  <a:lnTo>
+                    <a:pt x="6331004" y="720664"/>
+                  </a:lnTo>
+                  <a:lnTo>
+                    <a:pt x="6401348" y="722469"/>
+                  </a:lnTo>
+                  <a:lnTo>
+                    <a:pt x="6471693" y="724258"/>
+                  </a:lnTo>
+                  <a:lnTo>
+                    <a:pt x="6542037" y="726031"/>
+                  </a:lnTo>
+                  <a:lnTo>
+                    <a:pt x="6612382" y="727789"/>
+                  </a:lnTo>
+                  <a:lnTo>
+                    <a:pt x="6682726" y="729532"/>
+                  </a:lnTo>
+                  <a:lnTo>
+                    <a:pt x="6753071" y="731259"/>
+                  </a:lnTo>
+                  <a:lnTo>
+                    <a:pt x="6823415" y="732971"/>
+                  </a:lnTo>
+                  <a:lnTo>
+                    <a:pt x="6893760" y="734668"/>
+                  </a:lnTo>
+                  <a:lnTo>
+                    <a:pt x="6964104" y="736351"/>
                   </a:lnTo>
                 </a:path>
               </a:pathLst>
@@ -4240,312 +3950,637 @@
           </p:nvSpPr>
           <p:spPr>
             <a:xfrm>
-              <a:off x="1172049" y="3757446"/>
-              <a:ext cx="7090630" cy="1439292"/>
+              <a:off x="1235312" y="2945277"/>
+              <a:ext cx="6964104" cy="366295"/>
             </a:xfrm>
             <a:custGeom>
               <a:avLst/>
               <a:pathLst>
-                <a:path w="7090630" h="1439292">
+                <a:path w="6964104" h="366295">
+                  <a:moveTo>
+                    <a:pt x="6964104" y="366295"/>
+                  </a:moveTo>
+                  <a:lnTo>
+                    <a:pt x="6893760" y="364167"/>
+                  </a:lnTo>
+                  <a:lnTo>
+                    <a:pt x="6823415" y="361988"/>
+                  </a:lnTo>
+                  <a:lnTo>
+                    <a:pt x="6753071" y="359756"/>
+                  </a:lnTo>
+                  <a:lnTo>
+                    <a:pt x="6682726" y="357471"/>
+                  </a:lnTo>
+                  <a:lnTo>
+                    <a:pt x="6612382" y="355132"/>
+                  </a:lnTo>
+                  <a:lnTo>
+                    <a:pt x="6542037" y="352736"/>
+                  </a:lnTo>
+                  <a:lnTo>
+                    <a:pt x="6471693" y="350282"/>
+                  </a:lnTo>
+                  <a:lnTo>
+                    <a:pt x="6401348" y="347770"/>
+                  </a:lnTo>
+                  <a:lnTo>
+                    <a:pt x="6331004" y="345198"/>
+                  </a:lnTo>
+                  <a:lnTo>
+                    <a:pt x="6260659" y="342564"/>
+                  </a:lnTo>
+                  <a:lnTo>
+                    <a:pt x="6190315" y="339866"/>
+                  </a:lnTo>
+                  <a:lnTo>
+                    <a:pt x="6119970" y="337104"/>
+                  </a:lnTo>
+                  <a:lnTo>
+                    <a:pt x="6049626" y="334276"/>
+                  </a:lnTo>
+                  <a:lnTo>
+                    <a:pt x="5979281" y="331380"/>
+                  </a:lnTo>
+                  <a:lnTo>
+                    <a:pt x="5908937" y="328415"/>
+                  </a:lnTo>
+                  <a:lnTo>
+                    <a:pt x="5838592" y="325378"/>
+                  </a:lnTo>
+                  <a:lnTo>
+                    <a:pt x="5768248" y="322268"/>
+                  </a:lnTo>
+                  <a:lnTo>
+                    <a:pt x="5697903" y="319084"/>
+                  </a:lnTo>
+                  <a:lnTo>
+                    <a:pt x="5627559" y="315824"/>
+                  </a:lnTo>
+                  <a:lnTo>
+                    <a:pt x="5557214" y="312485"/>
+                  </a:lnTo>
+                  <a:lnTo>
+                    <a:pt x="5486870" y="309066"/>
+                  </a:lnTo>
+                  <a:lnTo>
+                    <a:pt x="5416525" y="305566"/>
+                  </a:lnTo>
+                  <a:lnTo>
+                    <a:pt x="5346181" y="301981"/>
+                  </a:lnTo>
+                  <a:lnTo>
+                    <a:pt x="5275836" y="298310"/>
+                  </a:lnTo>
+                  <a:lnTo>
+                    <a:pt x="5205492" y="294551"/>
+                  </a:lnTo>
+                  <a:lnTo>
+                    <a:pt x="5135147" y="290702"/>
+                  </a:lnTo>
+                  <a:lnTo>
+                    <a:pt x="5064803" y="286761"/>
+                  </a:lnTo>
+                  <a:lnTo>
+                    <a:pt x="4994458" y="282725"/>
+                  </a:lnTo>
+                  <a:lnTo>
+                    <a:pt x="4924114" y="278593"/>
+                  </a:lnTo>
+                  <a:lnTo>
+                    <a:pt x="4853769" y="274361"/>
+                  </a:lnTo>
+                  <a:lnTo>
+                    <a:pt x="4783425" y="270028"/>
+                  </a:lnTo>
+                  <a:lnTo>
+                    <a:pt x="4713080" y="265591"/>
+                  </a:lnTo>
+                  <a:lnTo>
+                    <a:pt x="4642736" y="261047"/>
+                  </a:lnTo>
+                  <a:lnTo>
+                    <a:pt x="4572391" y="256395"/>
+                  </a:lnTo>
+                  <a:lnTo>
+                    <a:pt x="4502047" y="251630"/>
+                  </a:lnTo>
+                  <a:lnTo>
+                    <a:pt x="4431702" y="246752"/>
+                  </a:lnTo>
+                  <a:lnTo>
+                    <a:pt x="4361358" y="241757"/>
+                  </a:lnTo>
+                  <a:lnTo>
+                    <a:pt x="4291013" y="236641"/>
+                  </a:lnTo>
+                  <a:lnTo>
+                    <a:pt x="4220669" y="231403"/>
+                  </a:lnTo>
+                  <a:lnTo>
+                    <a:pt x="4150324" y="226040"/>
+                  </a:lnTo>
+                  <a:lnTo>
+                    <a:pt x="4079980" y="220548"/>
+                  </a:lnTo>
+                  <a:lnTo>
+                    <a:pt x="4009635" y="214924"/>
+                  </a:lnTo>
+                  <a:lnTo>
+                    <a:pt x="3939291" y="209165"/>
+                  </a:lnTo>
+                  <a:lnTo>
+                    <a:pt x="3868946" y="203268"/>
+                  </a:lnTo>
+                  <a:lnTo>
+                    <a:pt x="3798602" y="197229"/>
+                  </a:lnTo>
+                  <a:lnTo>
+                    <a:pt x="3728257" y="191046"/>
+                  </a:lnTo>
+                  <a:lnTo>
+                    <a:pt x="3657913" y="184714"/>
+                  </a:lnTo>
+                  <a:lnTo>
+                    <a:pt x="3587569" y="178231"/>
+                  </a:lnTo>
+                  <a:lnTo>
+                    <a:pt x="3517224" y="171592"/>
+                  </a:lnTo>
+                  <a:lnTo>
+                    <a:pt x="3446880" y="164794"/>
+                  </a:lnTo>
+                  <a:lnTo>
+                    <a:pt x="3376535" y="157832"/>
+                  </a:lnTo>
+                  <a:lnTo>
+                    <a:pt x="3306191" y="153848"/>
+                  </a:lnTo>
+                  <a:lnTo>
+                    <a:pt x="3235846" y="151192"/>
+                  </a:lnTo>
+                  <a:lnTo>
+                    <a:pt x="3165502" y="148513"/>
+                  </a:lnTo>
+                  <a:lnTo>
+                    <a:pt x="3095157" y="145810"/>
+                  </a:lnTo>
+                  <a:lnTo>
+                    <a:pt x="3024813" y="143083"/>
+                  </a:lnTo>
+                  <a:lnTo>
+                    <a:pt x="2954468" y="140332"/>
+                  </a:lnTo>
+                  <a:lnTo>
+                    <a:pt x="2884124" y="137557"/>
+                  </a:lnTo>
+                  <a:lnTo>
+                    <a:pt x="2813779" y="134757"/>
+                  </a:lnTo>
+                  <a:lnTo>
+                    <a:pt x="2743435" y="131933"/>
+                  </a:lnTo>
+                  <a:lnTo>
+                    <a:pt x="2673090" y="129084"/>
+                  </a:lnTo>
+                  <a:lnTo>
+                    <a:pt x="2602746" y="126209"/>
+                  </a:lnTo>
+                  <a:lnTo>
+                    <a:pt x="2532401" y="123310"/>
+                  </a:lnTo>
+                  <a:lnTo>
+                    <a:pt x="2462057" y="120385"/>
+                  </a:lnTo>
+                  <a:lnTo>
+                    <a:pt x="2391712" y="117434"/>
+                  </a:lnTo>
+                  <a:lnTo>
+                    <a:pt x="2321368" y="114456"/>
+                  </a:lnTo>
+                  <a:lnTo>
+                    <a:pt x="2251023" y="111453"/>
+                  </a:lnTo>
+                  <a:lnTo>
+                    <a:pt x="2180679" y="108423"/>
+                  </a:lnTo>
+                  <a:lnTo>
+                    <a:pt x="2110334" y="105367"/>
+                  </a:lnTo>
+                  <a:lnTo>
+                    <a:pt x="2039990" y="102283"/>
+                  </a:lnTo>
+                  <a:lnTo>
+                    <a:pt x="1969645" y="99173"/>
+                  </a:lnTo>
+                  <a:lnTo>
+                    <a:pt x="1899301" y="96035"/>
+                  </a:lnTo>
+                  <a:lnTo>
+                    <a:pt x="1828956" y="92869"/>
+                  </a:lnTo>
+                  <a:lnTo>
+                    <a:pt x="1758612" y="89675"/>
+                  </a:lnTo>
+                  <a:lnTo>
+                    <a:pt x="1688267" y="86453"/>
+                  </a:lnTo>
+                  <a:lnTo>
+                    <a:pt x="1617923" y="83203"/>
+                  </a:lnTo>
+                  <a:lnTo>
+                    <a:pt x="1547578" y="79924"/>
+                  </a:lnTo>
+                  <a:lnTo>
+                    <a:pt x="1477234" y="76616"/>
+                  </a:lnTo>
+                  <a:lnTo>
+                    <a:pt x="1406889" y="73279"/>
+                  </a:lnTo>
+                  <a:lnTo>
+                    <a:pt x="1336545" y="69913"/>
+                  </a:lnTo>
+                  <a:lnTo>
+                    <a:pt x="1266200" y="66517"/>
+                  </a:lnTo>
+                  <a:lnTo>
+                    <a:pt x="1195856" y="63090"/>
+                  </a:lnTo>
+                  <a:lnTo>
+                    <a:pt x="1125511" y="59634"/>
+                  </a:lnTo>
+                  <a:lnTo>
+                    <a:pt x="1055167" y="56147"/>
+                  </a:lnTo>
+                  <a:lnTo>
+                    <a:pt x="984822" y="52630"/>
+                  </a:lnTo>
+                  <a:lnTo>
+                    <a:pt x="914478" y="49081"/>
+                  </a:lnTo>
+                  <a:lnTo>
+                    <a:pt x="844133" y="45501"/>
+                  </a:lnTo>
+                  <a:lnTo>
+                    <a:pt x="773789" y="41890"/>
+                  </a:lnTo>
+                  <a:lnTo>
+                    <a:pt x="703444" y="38247"/>
+                  </a:lnTo>
+                  <a:lnTo>
+                    <a:pt x="633100" y="34571"/>
+                  </a:lnTo>
+                  <a:lnTo>
+                    <a:pt x="562755" y="30864"/>
+                  </a:lnTo>
+                  <a:lnTo>
+                    <a:pt x="492411" y="27123"/>
+                  </a:lnTo>
+                  <a:lnTo>
+                    <a:pt x="422066" y="23350"/>
+                  </a:lnTo>
+                  <a:lnTo>
+                    <a:pt x="351722" y="19543"/>
+                  </a:lnTo>
+                  <a:lnTo>
+                    <a:pt x="281377" y="15703"/>
+                  </a:lnTo>
+                  <a:lnTo>
+                    <a:pt x="211033" y="11828"/>
+                  </a:lnTo>
+                  <a:lnTo>
+                    <a:pt x="140688" y="7920"/>
+                  </a:lnTo>
+                  <a:lnTo>
+                    <a:pt x="70344" y="3977"/>
+                  </a:lnTo>
+                  <a:lnTo>
+                    <a:pt x="0" y="0"/>
+                  </a:lnTo>
+                </a:path>
+              </a:pathLst>
+            </a:custGeom>
+          </p:spPr>
+          <p:txBody>
+            <a:bodyPr/>
+            <a:lstStyle/>
+            <a:p/>
+          </p:txBody>
+        </p:sp>
+        <p:sp>
+          <p:nvSpPr>
+            <p:cNvPr id="24" name="pl24"/>
+            <p:cNvSpPr/>
+            <p:nvPr/>
+          </p:nvSpPr>
+          <p:spPr>
+            <a:xfrm>
+              <a:off x="1235312" y="2750787"/>
+              <a:ext cx="6964104" cy="519406"/>
+            </a:xfrm>
+            <a:custGeom>
+              <a:avLst/>
+              <a:pathLst>
+                <a:path w="6964104" h="519406">
                   <a:moveTo>
                     <a:pt x="0" y="0"/>
                   </a:moveTo>
                   <a:lnTo>
-                    <a:pt x="71622" y="28995"/>
-                  </a:lnTo>
-                  <a:lnTo>
-                    <a:pt x="143245" y="57523"/>
-                  </a:lnTo>
-                  <a:lnTo>
-                    <a:pt x="214867" y="85592"/>
-                  </a:lnTo>
-                  <a:lnTo>
-                    <a:pt x="286490" y="113208"/>
-                  </a:lnTo>
-                  <a:lnTo>
-                    <a:pt x="358112" y="140380"/>
-                  </a:lnTo>
-                  <a:lnTo>
-                    <a:pt x="429735" y="167114"/>
-                  </a:lnTo>
-                  <a:lnTo>
-                    <a:pt x="501357" y="193417"/>
-                  </a:lnTo>
-                  <a:lnTo>
-                    <a:pt x="572980" y="219296"/>
-                  </a:lnTo>
-                  <a:lnTo>
-                    <a:pt x="644602" y="244759"/>
-                  </a:lnTo>
-                  <a:lnTo>
-                    <a:pt x="716225" y="269811"/>
-                  </a:lnTo>
-                  <a:lnTo>
-                    <a:pt x="787847" y="294460"/>
-                  </a:lnTo>
-                  <a:lnTo>
-                    <a:pt x="859470" y="318711"/>
-                  </a:lnTo>
-                  <a:lnTo>
-                    <a:pt x="931092" y="342572"/>
-                  </a:lnTo>
-                  <a:lnTo>
-                    <a:pt x="1002715" y="366049"/>
-                  </a:lnTo>
-                  <a:lnTo>
-                    <a:pt x="1074337" y="389147"/>
-                  </a:lnTo>
-                  <a:lnTo>
-                    <a:pt x="1145960" y="411873"/>
-                  </a:lnTo>
-                  <a:lnTo>
-                    <a:pt x="1217582" y="434233"/>
-                  </a:lnTo>
-                  <a:lnTo>
-                    <a:pt x="1289205" y="456233"/>
-                  </a:lnTo>
-                  <a:lnTo>
-                    <a:pt x="1360827" y="477878"/>
-                  </a:lnTo>
-                  <a:lnTo>
-                    <a:pt x="1432450" y="499175"/>
-                  </a:lnTo>
-                  <a:lnTo>
-                    <a:pt x="1504073" y="520128"/>
-                  </a:lnTo>
-                  <a:lnTo>
-                    <a:pt x="1575695" y="540744"/>
-                  </a:lnTo>
-                  <a:lnTo>
-                    <a:pt x="1647318" y="561028"/>
-                  </a:lnTo>
-                  <a:lnTo>
-                    <a:pt x="1718940" y="580985"/>
-                  </a:lnTo>
-                  <a:lnTo>
-                    <a:pt x="1790563" y="600621"/>
-                  </a:lnTo>
-                  <a:lnTo>
-                    <a:pt x="1862185" y="619940"/>
-                  </a:lnTo>
-                  <a:lnTo>
-                    <a:pt x="1933808" y="638948"/>
-                  </a:lnTo>
-                  <a:lnTo>
-                    <a:pt x="2005430" y="657650"/>
-                  </a:lnTo>
-                  <a:lnTo>
-                    <a:pt x="2077053" y="676050"/>
-                  </a:lnTo>
-                  <a:lnTo>
-                    <a:pt x="2148675" y="694154"/>
-                  </a:lnTo>
-                  <a:lnTo>
-                    <a:pt x="2220298" y="711967"/>
-                  </a:lnTo>
-                  <a:lnTo>
-                    <a:pt x="2291920" y="729492"/>
-                  </a:lnTo>
-                  <a:lnTo>
-                    <a:pt x="2363543" y="746735"/>
-                  </a:lnTo>
-                  <a:lnTo>
-                    <a:pt x="2435165" y="763700"/>
-                  </a:lnTo>
-                  <a:lnTo>
-                    <a:pt x="2506788" y="780392"/>
-                  </a:lnTo>
-                  <a:lnTo>
-                    <a:pt x="2578410" y="796815"/>
-                  </a:lnTo>
-                  <a:lnTo>
-                    <a:pt x="2650033" y="812974"/>
-                  </a:lnTo>
-                  <a:lnTo>
-                    <a:pt x="2721655" y="828872"/>
-                  </a:lnTo>
-                  <a:lnTo>
-                    <a:pt x="2793278" y="844514"/>
-                  </a:lnTo>
-                  <a:lnTo>
-                    <a:pt x="2864901" y="859904"/>
-                  </a:lnTo>
-                  <a:lnTo>
-                    <a:pt x="2936523" y="875046"/>
-                  </a:lnTo>
-                  <a:lnTo>
-                    <a:pt x="3008146" y="889944"/>
-                  </a:lnTo>
-                  <a:lnTo>
-                    <a:pt x="3079768" y="904602"/>
-                  </a:lnTo>
-                  <a:lnTo>
-                    <a:pt x="3151391" y="919024"/>
-                  </a:lnTo>
-                  <a:lnTo>
-                    <a:pt x="3223013" y="933214"/>
-                  </a:lnTo>
-                  <a:lnTo>
-                    <a:pt x="3294636" y="947175"/>
-                  </a:lnTo>
-                  <a:lnTo>
-                    <a:pt x="3366258" y="960911"/>
-                  </a:lnTo>
-                  <a:lnTo>
-                    <a:pt x="3437881" y="974426"/>
-                  </a:lnTo>
-                  <a:lnTo>
-                    <a:pt x="3509503" y="987723"/>
-                  </a:lnTo>
-                  <a:lnTo>
-                    <a:pt x="3581126" y="1000806"/>
-                  </a:lnTo>
-                  <a:lnTo>
-                    <a:pt x="3652748" y="1013678"/>
-                  </a:lnTo>
-                  <a:lnTo>
-                    <a:pt x="3724371" y="1026343"/>
-                  </a:lnTo>
-                  <a:lnTo>
-                    <a:pt x="3795993" y="1038803"/>
-                  </a:lnTo>
-                  <a:lnTo>
-                    <a:pt x="3867616" y="1051063"/>
-                  </a:lnTo>
-                  <a:lnTo>
-                    <a:pt x="3939238" y="1063126"/>
-                  </a:lnTo>
-                  <a:lnTo>
-                    <a:pt x="4010861" y="1074994"/>
-                  </a:lnTo>
-                  <a:lnTo>
-                    <a:pt x="4082483" y="1086671"/>
-                  </a:lnTo>
-                  <a:lnTo>
-                    <a:pt x="4154106" y="1098160"/>
-                  </a:lnTo>
-                  <a:lnTo>
-                    <a:pt x="4225729" y="1109463"/>
-                  </a:lnTo>
-                  <a:lnTo>
-                    <a:pt x="4297351" y="1120585"/>
-                  </a:lnTo>
-                  <a:lnTo>
-                    <a:pt x="4368974" y="1131527"/>
-                  </a:lnTo>
-                  <a:lnTo>
-                    <a:pt x="4440596" y="1142293"/>
-                  </a:lnTo>
-                  <a:lnTo>
-                    <a:pt x="4512219" y="1152886"/>
-                  </a:lnTo>
-                  <a:lnTo>
-                    <a:pt x="4583841" y="1163308"/>
-                  </a:lnTo>
-                  <a:lnTo>
-                    <a:pt x="4655464" y="1173562"/>
-                  </a:lnTo>
-                  <a:lnTo>
-                    <a:pt x="4727086" y="1183651"/>
-                  </a:lnTo>
-                  <a:lnTo>
-                    <a:pt x="4798709" y="1193578"/>
-                  </a:lnTo>
-                  <a:lnTo>
-                    <a:pt x="4870331" y="1203344"/>
-                  </a:lnTo>
-                  <a:lnTo>
-                    <a:pt x="4941954" y="1212953"/>
-                  </a:lnTo>
-                  <a:lnTo>
-                    <a:pt x="5013576" y="1222408"/>
-                  </a:lnTo>
-                  <a:lnTo>
-                    <a:pt x="5085199" y="1231710"/>
-                  </a:lnTo>
-                  <a:lnTo>
-                    <a:pt x="5156821" y="1240862"/>
-                  </a:lnTo>
-                  <a:lnTo>
-                    <a:pt x="5228444" y="1249867"/>
-                  </a:lnTo>
-                  <a:lnTo>
-                    <a:pt x="5300066" y="1258726"/>
-                  </a:lnTo>
-                  <a:lnTo>
-                    <a:pt x="5371689" y="1267443"/>
-                  </a:lnTo>
-                  <a:lnTo>
-                    <a:pt x="5443311" y="1276020"/>
-                  </a:lnTo>
-                  <a:lnTo>
-                    <a:pt x="5514934" y="1284458"/>
-                  </a:lnTo>
-                  <a:lnTo>
-                    <a:pt x="5586557" y="1292760"/>
-                  </a:lnTo>
-                  <a:lnTo>
-                    <a:pt x="5658179" y="1300929"/>
-                  </a:lnTo>
-                  <a:lnTo>
-                    <a:pt x="5729802" y="1308966"/>
-                  </a:lnTo>
-                  <a:lnTo>
-                    <a:pt x="5801424" y="1316874"/>
-                  </a:lnTo>
-                  <a:lnTo>
-                    <a:pt x="5873047" y="1324654"/>
-                  </a:lnTo>
-                  <a:lnTo>
-                    <a:pt x="5944669" y="1332309"/>
-                  </a:lnTo>
-                  <a:lnTo>
-                    <a:pt x="6016292" y="1339840"/>
-                  </a:lnTo>
-                  <a:lnTo>
-                    <a:pt x="6087914" y="1347250"/>
-                  </a:lnTo>
-                  <a:lnTo>
-                    <a:pt x="6159537" y="1354541"/>
-                  </a:lnTo>
-                  <a:lnTo>
-                    <a:pt x="6231159" y="1361714"/>
-                  </a:lnTo>
-                  <a:lnTo>
-                    <a:pt x="6302782" y="1368772"/>
-                  </a:lnTo>
-                  <a:lnTo>
-                    <a:pt x="6374404" y="1375716"/>
-                  </a:lnTo>
-                  <a:lnTo>
-                    <a:pt x="6446027" y="1382548"/>
-                  </a:lnTo>
-                  <a:lnTo>
-                    <a:pt x="6517649" y="1389270"/>
-                  </a:lnTo>
-                  <a:lnTo>
-                    <a:pt x="6589272" y="1395884"/>
-                  </a:lnTo>
-                  <a:lnTo>
-                    <a:pt x="6660894" y="1402391"/>
-                  </a:lnTo>
-                  <a:lnTo>
-                    <a:pt x="6732517" y="1408794"/>
-                  </a:lnTo>
-                  <a:lnTo>
-                    <a:pt x="6804139" y="1415093"/>
-                  </a:lnTo>
-                  <a:lnTo>
-                    <a:pt x="6875762" y="1421291"/>
-                  </a:lnTo>
-                  <a:lnTo>
-                    <a:pt x="6947385" y="1427389"/>
-                  </a:lnTo>
-                  <a:lnTo>
-                    <a:pt x="7019007" y="1433389"/>
-                  </a:lnTo>
-                  <a:lnTo>
-                    <a:pt x="7090630" y="1439292"/>
+                    <a:pt x="70344" y="10463"/>
+                  </a:lnTo>
+                  <a:lnTo>
+                    <a:pt x="140688" y="20758"/>
+                  </a:lnTo>
+                  <a:lnTo>
+                    <a:pt x="211033" y="30888"/>
+                  </a:lnTo>
+                  <a:lnTo>
+                    <a:pt x="281377" y="40854"/>
+                  </a:lnTo>
+                  <a:lnTo>
+                    <a:pt x="351722" y="50660"/>
+                  </a:lnTo>
+                  <a:lnTo>
+                    <a:pt x="422066" y="60307"/>
+                  </a:lnTo>
+                  <a:lnTo>
+                    <a:pt x="492411" y="69799"/>
+                  </a:lnTo>
+                  <a:lnTo>
+                    <a:pt x="562755" y="79139"/>
+                  </a:lnTo>
+                  <a:lnTo>
+                    <a:pt x="633100" y="88327"/>
+                  </a:lnTo>
+                  <a:lnTo>
+                    <a:pt x="703444" y="97368"/>
+                  </a:lnTo>
+                  <a:lnTo>
+                    <a:pt x="773789" y="106263"/>
+                  </a:lnTo>
+                  <a:lnTo>
+                    <a:pt x="844133" y="115015"/>
+                  </a:lnTo>
+                  <a:lnTo>
+                    <a:pt x="914478" y="123626"/>
+                  </a:lnTo>
+                  <a:lnTo>
+                    <a:pt x="984822" y="132098"/>
+                  </a:lnTo>
+                  <a:lnTo>
+                    <a:pt x="1055167" y="140434"/>
+                  </a:lnTo>
+                  <a:lnTo>
+                    <a:pt x="1125511" y="148635"/>
+                  </a:lnTo>
+                  <a:lnTo>
+                    <a:pt x="1195856" y="156704"/>
+                  </a:lnTo>
+                  <a:lnTo>
+                    <a:pt x="1266200" y="164643"/>
+                  </a:lnTo>
+                  <a:lnTo>
+                    <a:pt x="1336545" y="172455"/>
+                  </a:lnTo>
+                  <a:lnTo>
+                    <a:pt x="1406889" y="180140"/>
+                  </a:lnTo>
+                  <a:lnTo>
+                    <a:pt x="1477234" y="187702"/>
+                  </a:lnTo>
+                  <a:lnTo>
+                    <a:pt x="1547578" y="195142"/>
+                  </a:lnTo>
+                  <a:lnTo>
+                    <a:pt x="1617923" y="202462"/>
+                  </a:lnTo>
+                  <a:lnTo>
+                    <a:pt x="1688267" y="209664"/>
+                  </a:lnTo>
+                  <a:lnTo>
+                    <a:pt x="1758612" y="216750"/>
+                  </a:lnTo>
+                  <a:lnTo>
+                    <a:pt x="1828956" y="223721"/>
+                  </a:lnTo>
+                  <a:lnTo>
+                    <a:pt x="1899301" y="230581"/>
+                  </a:lnTo>
+                  <a:lnTo>
+                    <a:pt x="1969645" y="237330"/>
+                  </a:lnTo>
+                  <a:lnTo>
+                    <a:pt x="2039990" y="243970"/>
+                  </a:lnTo>
+                  <a:lnTo>
+                    <a:pt x="2110334" y="250504"/>
+                  </a:lnTo>
+                  <a:lnTo>
+                    <a:pt x="2180679" y="256932"/>
+                  </a:lnTo>
+                  <a:lnTo>
+                    <a:pt x="2251023" y="263256"/>
+                  </a:lnTo>
+                  <a:lnTo>
+                    <a:pt x="2321368" y="269479"/>
+                  </a:lnTo>
+                  <a:lnTo>
+                    <a:pt x="2391712" y="275601"/>
+                  </a:lnTo>
+                  <a:lnTo>
+                    <a:pt x="2462057" y="281625"/>
+                  </a:lnTo>
+                  <a:lnTo>
+                    <a:pt x="2532401" y="287552"/>
+                  </a:lnTo>
+                  <a:lnTo>
+                    <a:pt x="2602746" y="293383"/>
+                  </a:lnTo>
+                  <a:lnTo>
+                    <a:pt x="2673090" y="299120"/>
+                  </a:lnTo>
+                  <a:lnTo>
+                    <a:pt x="2743435" y="304765"/>
+                  </a:lnTo>
+                  <a:lnTo>
+                    <a:pt x="2813779" y="310319"/>
+                  </a:lnTo>
+                  <a:lnTo>
+                    <a:pt x="2884124" y="315783"/>
+                  </a:lnTo>
+                  <a:lnTo>
+                    <a:pt x="2954468" y="321160"/>
+                  </a:lnTo>
+                  <a:lnTo>
+                    <a:pt x="3024813" y="326449"/>
+                  </a:lnTo>
+                  <a:lnTo>
+                    <a:pt x="3095157" y="331654"/>
+                  </a:lnTo>
+                  <a:lnTo>
+                    <a:pt x="3165502" y="336775"/>
+                  </a:lnTo>
+                  <a:lnTo>
+                    <a:pt x="3235846" y="341813"/>
+                  </a:lnTo>
+                  <a:lnTo>
+                    <a:pt x="3306191" y="346770"/>
+                  </a:lnTo>
+                  <a:lnTo>
+                    <a:pt x="3376535" y="351647"/>
+                  </a:lnTo>
+                  <a:lnTo>
+                    <a:pt x="3446880" y="356446"/>
+                  </a:lnTo>
+                  <a:lnTo>
+                    <a:pt x="3517224" y="361167"/>
+                  </a:lnTo>
+                  <a:lnTo>
+                    <a:pt x="3587569" y="365812"/>
+                  </a:lnTo>
+                  <a:lnTo>
+                    <a:pt x="3657913" y="370383"/>
+                  </a:lnTo>
+                  <a:lnTo>
+                    <a:pt x="3728257" y="374879"/>
+                  </a:lnTo>
+                  <a:lnTo>
+                    <a:pt x="3798602" y="379304"/>
+                  </a:lnTo>
+                  <a:lnTo>
+                    <a:pt x="3868946" y="383657"/>
+                  </a:lnTo>
+                  <a:lnTo>
+                    <a:pt x="3939291" y="387940"/>
+                  </a:lnTo>
+                  <a:lnTo>
+                    <a:pt x="4009635" y="392154"/>
+                  </a:lnTo>
+                  <a:lnTo>
+                    <a:pt x="4079980" y="396300"/>
+                  </a:lnTo>
+                  <a:lnTo>
+                    <a:pt x="4150324" y="400379"/>
+                  </a:lnTo>
+                  <a:lnTo>
+                    <a:pt x="4220669" y="404392"/>
+                  </a:lnTo>
+                  <a:lnTo>
+                    <a:pt x="4291013" y="408341"/>
+                  </a:lnTo>
+                  <a:lnTo>
+                    <a:pt x="4361358" y="412227"/>
+                  </a:lnTo>
+                  <a:lnTo>
+                    <a:pt x="4431702" y="416049"/>
+                  </a:lnTo>
+                  <a:lnTo>
+                    <a:pt x="4502047" y="419810"/>
+                  </a:lnTo>
+                  <a:lnTo>
+                    <a:pt x="4572391" y="423511"/>
+                  </a:lnTo>
+                  <a:lnTo>
+                    <a:pt x="4642736" y="427152"/>
+                  </a:lnTo>
+                  <a:lnTo>
+                    <a:pt x="4713080" y="430734"/>
+                  </a:lnTo>
+                  <a:lnTo>
+                    <a:pt x="4783425" y="434258"/>
+                  </a:lnTo>
+                  <a:lnTo>
+                    <a:pt x="4853769" y="437726"/>
+                  </a:lnTo>
+                  <a:lnTo>
+                    <a:pt x="4924114" y="441138"/>
+                  </a:lnTo>
+                  <a:lnTo>
+                    <a:pt x="4994458" y="444495"/>
+                  </a:lnTo>
+                  <a:lnTo>
+                    <a:pt x="5064803" y="447798"/>
+                  </a:lnTo>
+                  <a:lnTo>
+                    <a:pt x="5135147" y="451047"/>
+                  </a:lnTo>
+                  <a:lnTo>
+                    <a:pt x="5205492" y="454244"/>
+                  </a:lnTo>
+                  <a:lnTo>
+                    <a:pt x="5275836" y="457390"/>
+                  </a:lnTo>
+                  <a:lnTo>
+                    <a:pt x="5346181" y="460485"/>
+                  </a:lnTo>
+                  <a:lnTo>
+                    <a:pt x="5416525" y="463530"/>
+                  </a:lnTo>
+                  <a:lnTo>
+                    <a:pt x="5486870" y="466526"/>
+                  </a:lnTo>
+                  <a:lnTo>
+                    <a:pt x="5557214" y="469474"/>
+                  </a:lnTo>
+                  <a:lnTo>
+                    <a:pt x="5627559" y="472375"/>
+                  </a:lnTo>
+                  <a:lnTo>
+                    <a:pt x="5697903" y="475228"/>
+                  </a:lnTo>
+                  <a:lnTo>
+                    <a:pt x="5768248" y="478036"/>
+                  </a:lnTo>
+                  <a:lnTo>
+                    <a:pt x="5838592" y="480798"/>
+                  </a:lnTo>
+                  <a:lnTo>
+                    <a:pt x="5908937" y="483516"/>
+                  </a:lnTo>
+                  <a:lnTo>
+                    <a:pt x="5979281" y="486191"/>
+                  </a:lnTo>
+                  <a:lnTo>
+                    <a:pt x="6049626" y="488822"/>
+                  </a:lnTo>
+                  <a:lnTo>
+                    <a:pt x="6119970" y="491410"/>
+                  </a:lnTo>
+                  <a:lnTo>
+                    <a:pt x="6190315" y="493957"/>
+                  </a:lnTo>
+                  <a:lnTo>
+                    <a:pt x="6260659" y="496463"/>
+                  </a:lnTo>
+                  <a:lnTo>
+                    <a:pt x="6331004" y="498929"/>
+                  </a:lnTo>
+                  <a:lnTo>
+                    <a:pt x="6401348" y="501355"/>
+                  </a:lnTo>
+                  <a:lnTo>
+                    <a:pt x="6471693" y="503741"/>
+                  </a:lnTo>
+                  <a:lnTo>
+                    <a:pt x="6542037" y="506090"/>
+                  </a:lnTo>
+                  <a:lnTo>
+                    <a:pt x="6612382" y="508400"/>
+                  </a:lnTo>
+                  <a:lnTo>
+                    <a:pt x="6682726" y="510674"/>
+                  </a:lnTo>
+                  <a:lnTo>
+                    <a:pt x="6753071" y="512910"/>
+                  </a:lnTo>
+                  <a:lnTo>
+                    <a:pt x="6823415" y="515111"/>
+                  </a:lnTo>
+                  <a:lnTo>
+                    <a:pt x="6893760" y="517276"/>
+                  </a:lnTo>
+                  <a:lnTo>
+                    <a:pt x="6964104" y="519406"/>
                   </a:lnTo>
                 </a:path>
               </a:pathLst>
@@ -4568,27 +4603,27 @@
         </p:sp>
         <p:sp>
           <p:nvSpPr>
-            <p:cNvPr id="24" name="pl24"/>
+            <p:cNvPr id="25" name="pl25"/>
             <p:cNvSpPr/>
             <p:nvPr/>
           </p:nvSpPr>
           <p:spPr>
             <a:xfrm>
-              <a:off x="817517" y="4727786"/>
-              <a:ext cx="7799693" cy="0"/>
+              <a:off x="887106" y="3100960"/>
+              <a:ext cx="7660515" cy="0"/>
             </a:xfrm>
             <a:custGeom>
               <a:avLst/>
               <a:pathLst>
-                <a:path w="7799693" h="0">
+                <a:path w="7660515" h="0">
                   <a:moveTo>
                     <a:pt x="0" y="0"/>
                   </a:moveTo>
                   <a:lnTo>
-                    <a:pt x="7799693" y="0"/>
-                  </a:lnTo>
-                  <a:lnTo>
-                    <a:pt x="7799693" y="0"/>
+                    <a:pt x="7660515" y="0"/>
+                  </a:lnTo>
+                  <a:lnTo>
+                    <a:pt x="7660515" y="0"/>
                   </a:lnTo>
                 </a:path>
               </a:pathLst>
@@ -4611,21 +4646,21 @@
         </p:sp>
         <p:sp>
           <p:nvSpPr>
-            <p:cNvPr id="25" name="pl25"/>
+            <p:cNvPr id="26" name="pl26"/>
             <p:cNvSpPr/>
             <p:nvPr/>
           </p:nvSpPr>
           <p:spPr>
             <a:xfrm>
-              <a:off x="4588151" y="2073503"/>
-              <a:ext cx="0" cy="3649639"/>
+              <a:off x="4590457" y="2143092"/>
+              <a:ext cx="0" cy="1317069"/>
             </a:xfrm>
             <a:custGeom>
               <a:avLst/>
               <a:pathLst>
-                <a:path w="0" h="3649639">
+                <a:path w="0" h="1317069">
                   <a:moveTo>
-                    <a:pt x="0" y="3649639"/>
+                    <a:pt x="0" y="1317069"/>
                   </a:moveTo>
                   <a:lnTo>
                     <a:pt x="0" y="0"/>
@@ -4654,13 +4689,13 @@
         </p:sp>
         <p:sp>
           <p:nvSpPr>
-            <p:cNvPr id="26" name="tx26"/>
+            <p:cNvPr id="27" name="tx27"/>
             <p:cNvSpPr/>
             <p:nvPr/>
           </p:nvSpPr>
           <p:spPr>
             <a:xfrm>
-              <a:off x="692708" y="5517199"/>
+              <a:off x="762297" y="3360243"/>
               <a:ext cx="62179" cy="80101"/>
             </a:xfrm>
             <a:prstGeom prst="rect">
@@ -4700,13 +4735,13 @@
         </p:sp>
         <p:sp>
           <p:nvSpPr>
-            <p:cNvPr id="27" name="tx27"/>
+            <p:cNvPr id="28" name="tx28"/>
             <p:cNvSpPr/>
             <p:nvPr/>
           </p:nvSpPr>
           <p:spPr>
             <a:xfrm>
-              <a:off x="692708" y="4687735"/>
+              <a:off x="762297" y="3060909"/>
               <a:ext cx="62179" cy="80101"/>
             </a:xfrm>
             <a:prstGeom prst="rect">
@@ -4746,13 +4781,13 @@
         </p:sp>
         <p:sp>
           <p:nvSpPr>
-            <p:cNvPr id="28" name="tx28"/>
+            <p:cNvPr id="29" name="tx29"/>
             <p:cNvSpPr/>
             <p:nvPr/>
           </p:nvSpPr>
           <p:spPr>
             <a:xfrm>
-              <a:off x="692708" y="3858272"/>
+              <a:off x="762297" y="2761575"/>
               <a:ext cx="62179" cy="80101"/>
             </a:xfrm>
             <a:prstGeom prst="rect">
@@ -4792,13 +4827,13 @@
         </p:sp>
         <p:sp>
           <p:nvSpPr>
-            <p:cNvPr id="29" name="tx29"/>
+            <p:cNvPr id="30" name="tx30"/>
             <p:cNvSpPr/>
             <p:nvPr/>
           </p:nvSpPr>
           <p:spPr>
             <a:xfrm>
-              <a:off x="692708" y="3028808"/>
+              <a:off x="762297" y="2462242"/>
               <a:ext cx="62179" cy="80101"/>
             </a:xfrm>
             <a:prstGeom prst="rect">
@@ -4838,13 +4873,13 @@
         </p:sp>
         <p:sp>
           <p:nvSpPr>
-            <p:cNvPr id="30" name="tx30"/>
+            <p:cNvPr id="31" name="tx31"/>
             <p:cNvSpPr/>
             <p:nvPr/>
           </p:nvSpPr>
           <p:spPr>
             <a:xfrm>
-              <a:off x="692708" y="2199345"/>
+              <a:off x="762297" y="2162908"/>
               <a:ext cx="62179" cy="80101"/>
             </a:xfrm>
             <a:prstGeom prst="rect">
@@ -4884,13 +4919,13 @@
         </p:sp>
         <p:sp>
           <p:nvSpPr>
-            <p:cNvPr id="31" name="tx31"/>
+            <p:cNvPr id="32" name="tx32"/>
             <p:cNvSpPr/>
             <p:nvPr/>
           </p:nvSpPr>
           <p:spPr>
             <a:xfrm>
-              <a:off x="2360651" y="5785772"/>
+              <a:off x="2401262" y="3522791"/>
               <a:ext cx="161574" cy="80101"/>
             </a:xfrm>
             <a:prstGeom prst="rect">
@@ -4930,13 +4965,13 @@
         </p:sp>
         <p:sp>
           <p:nvSpPr>
-            <p:cNvPr id="32" name="tx32"/>
+            <p:cNvPr id="33" name="tx33"/>
             <p:cNvSpPr/>
             <p:nvPr/>
           </p:nvSpPr>
           <p:spPr>
             <a:xfrm>
-              <a:off x="4561958" y="5785772"/>
+              <a:off x="4564176" y="3522791"/>
               <a:ext cx="62179" cy="80101"/>
             </a:xfrm>
             <a:prstGeom prst="rect">
@@ -4976,13 +5011,13 @@
         </p:sp>
         <p:sp>
           <p:nvSpPr>
-            <p:cNvPr id="33" name="tx33"/>
+            <p:cNvPr id="34" name="tx34"/>
             <p:cNvSpPr/>
             <p:nvPr/>
           </p:nvSpPr>
           <p:spPr>
             <a:xfrm>
-              <a:off x="6682478" y="5785772"/>
+              <a:off x="6646302" y="3522791"/>
               <a:ext cx="124358" cy="80101"/>
             </a:xfrm>
             <a:prstGeom prst="rect">
@@ -5022,13 +5057,13 @@
         </p:sp>
         <p:sp>
           <p:nvSpPr>
-            <p:cNvPr id="34" name="tx34"/>
+            <p:cNvPr id="35" name="tx35"/>
             <p:cNvSpPr/>
             <p:nvPr/>
           </p:nvSpPr>
           <p:spPr>
             <a:xfrm>
-              <a:off x="2928340" y="5925448"/>
+              <a:off x="2928340" y="3662467"/>
               <a:ext cx="3578047" cy="100218"/>
             </a:xfrm>
             <a:prstGeom prst="rect">
@@ -5068,13 +5103,13 @@
         </p:sp>
         <p:sp>
           <p:nvSpPr>
-            <p:cNvPr id="35" name="tx35"/>
+            <p:cNvPr id="36" name="tx36"/>
             <p:cNvSpPr/>
             <p:nvPr/>
           </p:nvSpPr>
           <p:spPr>
             <a:xfrm rot="-5400000">
-              <a:off x="68446" y="3848213"/>
+              <a:off x="138035" y="2751517"/>
               <a:ext cx="1016904" cy="100218"/>
             </a:xfrm>
             <a:prstGeom prst="rect">
@@ -5114,13 +5149,13 @@
         </p:sp>
         <p:sp>
           <p:nvSpPr>
-            <p:cNvPr id="36" name="tx36"/>
+            <p:cNvPr id="37" name="tx37"/>
             <p:cNvSpPr/>
             <p:nvPr/>
           </p:nvSpPr>
           <p:spPr>
             <a:xfrm>
-              <a:off x="817517" y="1896563"/>
+              <a:off x="887106" y="1966152"/>
               <a:ext cx="7052127" cy="82021"/>
             </a:xfrm>
             <a:prstGeom prst="rect">
@@ -5160,13 +5195,3703 @@
         </p:sp>
         <p:sp>
           <p:nvSpPr>
-            <p:cNvPr id="37" name="tx37"/>
+            <p:cNvPr id="38" name="tx38"/>
             <p:cNvSpPr/>
             <p:nvPr/>
           </p:nvSpPr>
           <p:spPr>
             <a:xfrm>
-              <a:off x="817517" y="1669789"/>
+              <a:off x="887106" y="1739378"/>
+              <a:ext cx="1666676" cy="120152"/>
+            </a:xfrm>
+            <a:prstGeom prst="rect">
+              <a:avLst/>
+            </a:prstGeom>
+            <a:noFill/>
+          </p:spPr>
+          <p:txBody>
+            <a:bodyPr lIns="0" rIns="0" tIns="0" bIns="0" anchorCtr="1" anchor="ctr" wrap="none"/>
+            <a:lstStyle/>
+            <a:p>
+              <a:pPr algn="l" marL="0" marR="0" indent="0">
+                <a:lnSpc>
+                  <a:spcPts val="1320"/>
+                </a:lnSpc>
+                <a:spcBef>
+                  <a:spcPts val="0"/>
+                </a:spcBef>
+                <a:spcAft>
+                  <a:spcPts val="0"/>
+                </a:spcAft>
+              </a:pPr>
+              <a:r>
+                <a:rPr sz="1320">
+                  <a:solidFill>
+                    <a:srgbClr val="000000">
+                      <a:alpha val="100000"/>
+                    </a:srgbClr>
+                  </a:solidFill>
+                  <a:latin typeface="Helvetica"/>
+                  <a:cs typeface="Helvetica"/>
+                </a:rPr>
+                <a:t>Overall Hospitalization</a:t>
+              </a:r>
+            </a:p>
+          </p:txBody>
+        </p:sp>
+        <p:sp>
+          <p:nvSpPr>
+            <p:cNvPr id="39" name="pl39"/>
+            <p:cNvSpPr/>
+            <p:nvPr/>
+          </p:nvSpPr>
+          <p:spPr>
+            <a:xfrm>
+              <a:off x="887106" y="5444019"/>
+              <a:ext cx="7660515" cy="0"/>
+            </a:xfrm>
+            <a:custGeom>
+              <a:avLst/>
+              <a:pathLst>
+                <a:path w="7660515" h="0">
+                  <a:moveTo>
+                    <a:pt x="0" y="0"/>
+                  </a:moveTo>
+                  <a:lnTo>
+                    <a:pt x="7660515" y="0"/>
+                  </a:lnTo>
+                  <a:lnTo>
+                    <a:pt x="7660515" y="0"/>
+                  </a:lnTo>
+                </a:path>
+              </a:pathLst>
+            </a:custGeom>
+            <a:ln w="6775" cap="flat">
+              <a:solidFill>
+                <a:srgbClr val="EBEBEB">
+                  <a:alpha val="100000"/>
+                </a:srgbClr>
+              </a:solidFill>
+              <a:prstDash val="solid"/>
+              <a:round/>
+            </a:ln>
+          </p:spPr>
+          <p:txBody>
+            <a:bodyPr/>
+            <a:lstStyle/>
+            <a:p/>
+          </p:txBody>
+        </p:sp>
+        <p:sp>
+          <p:nvSpPr>
+            <p:cNvPr id="40" name="pl40"/>
+            <p:cNvSpPr/>
+            <p:nvPr/>
+          </p:nvSpPr>
+          <p:spPr>
+            <a:xfrm>
+              <a:off x="887106" y="5144686"/>
+              <a:ext cx="7660515" cy="0"/>
+            </a:xfrm>
+            <a:custGeom>
+              <a:avLst/>
+              <a:pathLst>
+                <a:path w="7660515" h="0">
+                  <a:moveTo>
+                    <a:pt x="0" y="0"/>
+                  </a:moveTo>
+                  <a:lnTo>
+                    <a:pt x="7660515" y="0"/>
+                  </a:lnTo>
+                  <a:lnTo>
+                    <a:pt x="7660515" y="0"/>
+                  </a:lnTo>
+                </a:path>
+              </a:pathLst>
+            </a:custGeom>
+            <a:ln w="6775" cap="flat">
+              <a:solidFill>
+                <a:srgbClr val="EBEBEB">
+                  <a:alpha val="100000"/>
+                </a:srgbClr>
+              </a:solidFill>
+              <a:prstDash val="solid"/>
+              <a:round/>
+            </a:ln>
+          </p:spPr>
+          <p:txBody>
+            <a:bodyPr/>
+            <a:lstStyle/>
+            <a:p/>
+          </p:txBody>
+        </p:sp>
+        <p:sp>
+          <p:nvSpPr>
+            <p:cNvPr id="41" name="pl41"/>
+            <p:cNvSpPr/>
+            <p:nvPr/>
+          </p:nvSpPr>
+          <p:spPr>
+            <a:xfrm>
+              <a:off x="887106" y="4845352"/>
+              <a:ext cx="7660515" cy="0"/>
+            </a:xfrm>
+            <a:custGeom>
+              <a:avLst/>
+              <a:pathLst>
+                <a:path w="7660515" h="0">
+                  <a:moveTo>
+                    <a:pt x="0" y="0"/>
+                  </a:moveTo>
+                  <a:lnTo>
+                    <a:pt x="7660515" y="0"/>
+                  </a:lnTo>
+                  <a:lnTo>
+                    <a:pt x="7660515" y="0"/>
+                  </a:lnTo>
+                </a:path>
+              </a:pathLst>
+            </a:custGeom>
+            <a:ln w="6775" cap="flat">
+              <a:solidFill>
+                <a:srgbClr val="EBEBEB">
+                  <a:alpha val="100000"/>
+                </a:srgbClr>
+              </a:solidFill>
+              <a:prstDash val="solid"/>
+              <a:round/>
+            </a:ln>
+          </p:spPr>
+          <p:txBody>
+            <a:bodyPr/>
+            <a:lstStyle/>
+            <a:p/>
+          </p:txBody>
+        </p:sp>
+        <p:sp>
+          <p:nvSpPr>
+            <p:cNvPr id="42" name="pl42"/>
+            <p:cNvSpPr/>
+            <p:nvPr/>
+          </p:nvSpPr>
+          <p:spPr>
+            <a:xfrm>
+              <a:off x="887106" y="4546018"/>
+              <a:ext cx="7660515" cy="0"/>
+            </a:xfrm>
+            <a:custGeom>
+              <a:avLst/>
+              <a:pathLst>
+                <a:path w="7660515" h="0">
+                  <a:moveTo>
+                    <a:pt x="0" y="0"/>
+                  </a:moveTo>
+                  <a:lnTo>
+                    <a:pt x="7660515" y="0"/>
+                  </a:lnTo>
+                  <a:lnTo>
+                    <a:pt x="7660515" y="0"/>
+                  </a:lnTo>
+                </a:path>
+              </a:pathLst>
+            </a:custGeom>
+            <a:ln w="6775" cap="flat">
+              <a:solidFill>
+                <a:srgbClr val="EBEBEB">
+                  <a:alpha val="100000"/>
+                </a:srgbClr>
+              </a:solidFill>
+              <a:prstDash val="solid"/>
+              <a:round/>
+            </a:ln>
+          </p:spPr>
+          <p:txBody>
+            <a:bodyPr/>
+            <a:lstStyle/>
+            <a:p/>
+          </p:txBody>
+        </p:sp>
+        <p:sp>
+          <p:nvSpPr>
+            <p:cNvPr id="43" name="pl43"/>
+            <p:cNvSpPr/>
+            <p:nvPr/>
+          </p:nvSpPr>
+          <p:spPr>
+            <a:xfrm>
+              <a:off x="1636763" y="4336484"/>
+              <a:ext cx="0" cy="1317069"/>
+            </a:xfrm>
+            <a:custGeom>
+              <a:avLst/>
+              <a:pathLst>
+                <a:path w="0" h="1317069">
+                  <a:moveTo>
+                    <a:pt x="0" y="1317069"/>
+                  </a:moveTo>
+                  <a:lnTo>
+                    <a:pt x="0" y="0"/>
+                  </a:lnTo>
+                  <a:lnTo>
+                    <a:pt x="0" y="0"/>
+                  </a:lnTo>
+                </a:path>
+              </a:pathLst>
+            </a:custGeom>
+            <a:ln w="6775" cap="flat">
+              <a:solidFill>
+                <a:srgbClr val="EBEBEB">
+                  <a:alpha val="100000"/>
+                </a:srgbClr>
+              </a:solidFill>
+              <a:prstDash val="solid"/>
+              <a:round/>
+            </a:ln>
+          </p:spPr>
+          <p:txBody>
+            <a:bodyPr/>
+            <a:lstStyle/>
+            <a:p/>
+          </p:txBody>
+        </p:sp>
+        <p:sp>
+          <p:nvSpPr>
+            <p:cNvPr id="44" name="pl44"/>
+            <p:cNvSpPr/>
+            <p:nvPr/>
+          </p:nvSpPr>
+          <p:spPr>
+            <a:xfrm>
+              <a:off x="2482050" y="4336484"/>
+              <a:ext cx="0" cy="1317069"/>
+            </a:xfrm>
+            <a:custGeom>
+              <a:avLst/>
+              <a:pathLst>
+                <a:path w="0" h="1317069">
+                  <a:moveTo>
+                    <a:pt x="0" y="1317069"/>
+                  </a:moveTo>
+                  <a:lnTo>
+                    <a:pt x="0" y="0"/>
+                  </a:lnTo>
+                  <a:lnTo>
+                    <a:pt x="0" y="0"/>
+                  </a:lnTo>
+                </a:path>
+              </a:pathLst>
+            </a:custGeom>
+            <a:ln w="6775" cap="flat">
+              <a:solidFill>
+                <a:srgbClr val="EBEBEB">
+                  <a:alpha val="100000"/>
+                </a:srgbClr>
+              </a:solidFill>
+              <a:prstDash val="solid"/>
+              <a:round/>
+            </a:ln>
+          </p:spPr>
+          <p:txBody>
+            <a:bodyPr/>
+            <a:lstStyle/>
+            <a:p/>
+          </p:txBody>
+        </p:sp>
+        <p:sp>
+          <p:nvSpPr>
+            <p:cNvPr id="45" name="pl45"/>
+            <p:cNvSpPr/>
+            <p:nvPr/>
+          </p:nvSpPr>
+          <p:spPr>
+            <a:xfrm>
+              <a:off x="3327336" y="4336484"/>
+              <a:ext cx="0" cy="1317069"/>
+            </a:xfrm>
+            <a:custGeom>
+              <a:avLst/>
+              <a:pathLst>
+                <a:path w="0" h="1317069">
+                  <a:moveTo>
+                    <a:pt x="0" y="1317069"/>
+                  </a:moveTo>
+                  <a:lnTo>
+                    <a:pt x="0" y="0"/>
+                  </a:lnTo>
+                  <a:lnTo>
+                    <a:pt x="0" y="0"/>
+                  </a:lnTo>
+                </a:path>
+              </a:pathLst>
+            </a:custGeom>
+            <a:ln w="6775" cap="flat">
+              <a:solidFill>
+                <a:srgbClr val="EBEBEB">
+                  <a:alpha val="100000"/>
+                </a:srgbClr>
+              </a:solidFill>
+              <a:prstDash val="solid"/>
+              <a:round/>
+            </a:ln>
+          </p:spPr>
+          <p:txBody>
+            <a:bodyPr/>
+            <a:lstStyle/>
+            <a:p/>
+          </p:txBody>
+        </p:sp>
+        <p:sp>
+          <p:nvSpPr>
+            <p:cNvPr id="46" name="pl46"/>
+            <p:cNvSpPr/>
+            <p:nvPr/>
+          </p:nvSpPr>
+          <p:spPr>
+            <a:xfrm>
+              <a:off x="4172622" y="4336484"/>
+              <a:ext cx="0" cy="1317069"/>
+            </a:xfrm>
+            <a:custGeom>
+              <a:avLst/>
+              <a:pathLst>
+                <a:path w="0" h="1317069">
+                  <a:moveTo>
+                    <a:pt x="0" y="1317069"/>
+                  </a:moveTo>
+                  <a:lnTo>
+                    <a:pt x="0" y="0"/>
+                  </a:lnTo>
+                  <a:lnTo>
+                    <a:pt x="0" y="0"/>
+                  </a:lnTo>
+                </a:path>
+              </a:pathLst>
+            </a:custGeom>
+            <a:ln w="6775" cap="flat">
+              <a:solidFill>
+                <a:srgbClr val="EBEBEB">
+                  <a:alpha val="100000"/>
+                </a:srgbClr>
+              </a:solidFill>
+              <a:prstDash val="solid"/>
+              <a:round/>
+            </a:ln>
+          </p:spPr>
+          <p:txBody>
+            <a:bodyPr/>
+            <a:lstStyle/>
+            <a:p/>
+          </p:txBody>
+        </p:sp>
+        <p:sp>
+          <p:nvSpPr>
+            <p:cNvPr id="47" name="pl47"/>
+            <p:cNvSpPr/>
+            <p:nvPr/>
+          </p:nvSpPr>
+          <p:spPr>
+            <a:xfrm>
+              <a:off x="5017909" y="4336484"/>
+              <a:ext cx="0" cy="1317069"/>
+            </a:xfrm>
+            <a:custGeom>
+              <a:avLst/>
+              <a:pathLst>
+                <a:path w="0" h="1317069">
+                  <a:moveTo>
+                    <a:pt x="0" y="1317069"/>
+                  </a:moveTo>
+                  <a:lnTo>
+                    <a:pt x="0" y="0"/>
+                  </a:lnTo>
+                  <a:lnTo>
+                    <a:pt x="0" y="0"/>
+                  </a:lnTo>
+                </a:path>
+              </a:pathLst>
+            </a:custGeom>
+            <a:ln w="6775" cap="flat">
+              <a:solidFill>
+                <a:srgbClr val="EBEBEB">
+                  <a:alpha val="100000"/>
+                </a:srgbClr>
+              </a:solidFill>
+              <a:prstDash val="solid"/>
+              <a:round/>
+            </a:ln>
+          </p:spPr>
+          <p:txBody>
+            <a:bodyPr/>
+            <a:lstStyle/>
+            <a:p/>
+          </p:txBody>
+        </p:sp>
+        <p:sp>
+          <p:nvSpPr>
+            <p:cNvPr id="48" name="pl48"/>
+            <p:cNvSpPr/>
+            <p:nvPr/>
+          </p:nvSpPr>
+          <p:spPr>
+            <a:xfrm>
+              <a:off x="5863195" y="4336484"/>
+              <a:ext cx="0" cy="1317069"/>
+            </a:xfrm>
+            <a:custGeom>
+              <a:avLst/>
+              <a:pathLst>
+                <a:path w="0" h="1317069">
+                  <a:moveTo>
+                    <a:pt x="0" y="1317069"/>
+                  </a:moveTo>
+                  <a:lnTo>
+                    <a:pt x="0" y="0"/>
+                  </a:lnTo>
+                  <a:lnTo>
+                    <a:pt x="0" y="0"/>
+                  </a:lnTo>
+                </a:path>
+              </a:pathLst>
+            </a:custGeom>
+            <a:ln w="6775" cap="flat">
+              <a:solidFill>
+                <a:srgbClr val="EBEBEB">
+                  <a:alpha val="100000"/>
+                </a:srgbClr>
+              </a:solidFill>
+              <a:prstDash val="solid"/>
+              <a:round/>
+            </a:ln>
+          </p:spPr>
+          <p:txBody>
+            <a:bodyPr/>
+            <a:lstStyle/>
+            <a:p/>
+          </p:txBody>
+        </p:sp>
+        <p:sp>
+          <p:nvSpPr>
+            <p:cNvPr id="49" name="pl49"/>
+            <p:cNvSpPr/>
+            <p:nvPr/>
+          </p:nvSpPr>
+          <p:spPr>
+            <a:xfrm>
+              <a:off x="6708482" y="4336484"/>
+              <a:ext cx="0" cy="1317069"/>
+            </a:xfrm>
+            <a:custGeom>
+              <a:avLst/>
+              <a:pathLst>
+                <a:path w="0" h="1317069">
+                  <a:moveTo>
+                    <a:pt x="0" y="1317069"/>
+                  </a:moveTo>
+                  <a:lnTo>
+                    <a:pt x="0" y="0"/>
+                  </a:lnTo>
+                  <a:lnTo>
+                    <a:pt x="0" y="0"/>
+                  </a:lnTo>
+                </a:path>
+              </a:pathLst>
+            </a:custGeom>
+            <a:ln w="6775" cap="flat">
+              <a:solidFill>
+                <a:srgbClr val="EBEBEB">
+                  <a:alpha val="100000"/>
+                </a:srgbClr>
+              </a:solidFill>
+              <a:prstDash val="solid"/>
+              <a:round/>
+            </a:ln>
+          </p:spPr>
+          <p:txBody>
+            <a:bodyPr/>
+            <a:lstStyle/>
+            <a:p/>
+          </p:txBody>
+        </p:sp>
+        <p:sp>
+          <p:nvSpPr>
+            <p:cNvPr id="50" name="pl50"/>
+            <p:cNvSpPr/>
+            <p:nvPr/>
+          </p:nvSpPr>
+          <p:spPr>
+            <a:xfrm>
+              <a:off x="7553768" y="4336484"/>
+              <a:ext cx="0" cy="1317069"/>
+            </a:xfrm>
+            <a:custGeom>
+              <a:avLst/>
+              <a:pathLst>
+                <a:path w="0" h="1317069">
+                  <a:moveTo>
+                    <a:pt x="0" y="1317069"/>
+                  </a:moveTo>
+                  <a:lnTo>
+                    <a:pt x="0" y="0"/>
+                  </a:lnTo>
+                  <a:lnTo>
+                    <a:pt x="0" y="0"/>
+                  </a:lnTo>
+                </a:path>
+              </a:pathLst>
+            </a:custGeom>
+            <a:ln w="6775" cap="flat">
+              <a:solidFill>
+                <a:srgbClr val="EBEBEB">
+                  <a:alpha val="100000"/>
+                </a:srgbClr>
+              </a:solidFill>
+              <a:prstDash val="solid"/>
+              <a:round/>
+            </a:ln>
+          </p:spPr>
+          <p:txBody>
+            <a:bodyPr/>
+            <a:lstStyle/>
+            <a:p/>
+          </p:txBody>
+        </p:sp>
+        <p:sp>
+          <p:nvSpPr>
+            <p:cNvPr id="51" name="pl51"/>
+            <p:cNvSpPr/>
+            <p:nvPr/>
+          </p:nvSpPr>
+          <p:spPr>
+            <a:xfrm>
+              <a:off x="8399054" y="4336484"/>
+              <a:ext cx="0" cy="1317069"/>
+            </a:xfrm>
+            <a:custGeom>
+              <a:avLst/>
+              <a:pathLst>
+                <a:path w="0" h="1317069">
+                  <a:moveTo>
+                    <a:pt x="0" y="1317069"/>
+                  </a:moveTo>
+                  <a:lnTo>
+                    <a:pt x="0" y="0"/>
+                  </a:lnTo>
+                  <a:lnTo>
+                    <a:pt x="0" y="0"/>
+                  </a:lnTo>
+                </a:path>
+              </a:pathLst>
+            </a:custGeom>
+            <a:ln w="6775" cap="flat">
+              <a:solidFill>
+                <a:srgbClr val="EBEBEB">
+                  <a:alpha val="100000"/>
+                </a:srgbClr>
+              </a:solidFill>
+              <a:prstDash val="solid"/>
+              <a:round/>
+            </a:ln>
+          </p:spPr>
+          <p:txBody>
+            <a:bodyPr/>
+            <a:lstStyle/>
+            <a:p/>
+          </p:txBody>
+        </p:sp>
+        <p:sp>
+          <p:nvSpPr>
+            <p:cNvPr id="52" name="pl52"/>
+            <p:cNvSpPr/>
+            <p:nvPr/>
+          </p:nvSpPr>
+          <p:spPr>
+            <a:xfrm>
+              <a:off x="887106" y="5593686"/>
+              <a:ext cx="7660515" cy="0"/>
+            </a:xfrm>
+            <a:custGeom>
+              <a:avLst/>
+              <a:pathLst>
+                <a:path w="7660515" h="0">
+                  <a:moveTo>
+                    <a:pt x="0" y="0"/>
+                  </a:moveTo>
+                  <a:lnTo>
+                    <a:pt x="7660515" y="0"/>
+                  </a:lnTo>
+                  <a:lnTo>
+                    <a:pt x="7660515" y="0"/>
+                  </a:lnTo>
+                </a:path>
+              </a:pathLst>
+            </a:custGeom>
+            <a:ln w="13550" cap="flat">
+              <a:solidFill>
+                <a:srgbClr val="EBEBEB">
+                  <a:alpha val="100000"/>
+                </a:srgbClr>
+              </a:solidFill>
+              <a:prstDash val="solid"/>
+              <a:round/>
+            </a:ln>
+          </p:spPr>
+          <p:txBody>
+            <a:bodyPr/>
+            <a:lstStyle/>
+            <a:p/>
+          </p:txBody>
+        </p:sp>
+        <p:sp>
+          <p:nvSpPr>
+            <p:cNvPr id="53" name="pl53"/>
+            <p:cNvSpPr/>
+            <p:nvPr/>
+          </p:nvSpPr>
+          <p:spPr>
+            <a:xfrm>
+              <a:off x="887106" y="5294352"/>
+              <a:ext cx="7660515" cy="0"/>
+            </a:xfrm>
+            <a:custGeom>
+              <a:avLst/>
+              <a:pathLst>
+                <a:path w="7660515" h="0">
+                  <a:moveTo>
+                    <a:pt x="0" y="0"/>
+                  </a:moveTo>
+                  <a:lnTo>
+                    <a:pt x="7660515" y="0"/>
+                  </a:lnTo>
+                  <a:lnTo>
+                    <a:pt x="7660515" y="0"/>
+                  </a:lnTo>
+                </a:path>
+              </a:pathLst>
+            </a:custGeom>
+            <a:ln w="13550" cap="flat">
+              <a:solidFill>
+                <a:srgbClr val="EBEBEB">
+                  <a:alpha val="100000"/>
+                </a:srgbClr>
+              </a:solidFill>
+              <a:prstDash val="solid"/>
+              <a:round/>
+            </a:ln>
+          </p:spPr>
+          <p:txBody>
+            <a:bodyPr/>
+            <a:lstStyle/>
+            <a:p/>
+          </p:txBody>
+        </p:sp>
+        <p:sp>
+          <p:nvSpPr>
+            <p:cNvPr id="54" name="pl54"/>
+            <p:cNvSpPr/>
+            <p:nvPr/>
+          </p:nvSpPr>
+          <p:spPr>
+            <a:xfrm>
+              <a:off x="887106" y="4995019"/>
+              <a:ext cx="7660515" cy="0"/>
+            </a:xfrm>
+            <a:custGeom>
+              <a:avLst/>
+              <a:pathLst>
+                <a:path w="7660515" h="0">
+                  <a:moveTo>
+                    <a:pt x="0" y="0"/>
+                  </a:moveTo>
+                  <a:lnTo>
+                    <a:pt x="7660515" y="0"/>
+                  </a:lnTo>
+                  <a:lnTo>
+                    <a:pt x="7660515" y="0"/>
+                  </a:lnTo>
+                </a:path>
+              </a:pathLst>
+            </a:custGeom>
+            <a:ln w="13550" cap="flat">
+              <a:solidFill>
+                <a:srgbClr val="EBEBEB">
+                  <a:alpha val="100000"/>
+                </a:srgbClr>
+              </a:solidFill>
+              <a:prstDash val="solid"/>
+              <a:round/>
+            </a:ln>
+          </p:spPr>
+          <p:txBody>
+            <a:bodyPr/>
+            <a:lstStyle/>
+            <a:p/>
+          </p:txBody>
+        </p:sp>
+        <p:sp>
+          <p:nvSpPr>
+            <p:cNvPr id="55" name="pl55"/>
+            <p:cNvSpPr/>
+            <p:nvPr/>
+          </p:nvSpPr>
+          <p:spPr>
+            <a:xfrm>
+              <a:off x="887106" y="4695685"/>
+              <a:ext cx="7660515" cy="0"/>
+            </a:xfrm>
+            <a:custGeom>
+              <a:avLst/>
+              <a:pathLst>
+                <a:path w="7660515" h="0">
+                  <a:moveTo>
+                    <a:pt x="0" y="0"/>
+                  </a:moveTo>
+                  <a:lnTo>
+                    <a:pt x="7660515" y="0"/>
+                  </a:lnTo>
+                  <a:lnTo>
+                    <a:pt x="7660515" y="0"/>
+                  </a:lnTo>
+                </a:path>
+              </a:pathLst>
+            </a:custGeom>
+            <a:ln w="13550" cap="flat">
+              <a:solidFill>
+                <a:srgbClr val="EBEBEB">
+                  <a:alpha val="100000"/>
+                </a:srgbClr>
+              </a:solidFill>
+              <a:prstDash val="solid"/>
+              <a:round/>
+            </a:ln>
+          </p:spPr>
+          <p:txBody>
+            <a:bodyPr/>
+            <a:lstStyle/>
+            <a:p/>
+          </p:txBody>
+        </p:sp>
+        <p:sp>
+          <p:nvSpPr>
+            <p:cNvPr id="56" name="pl56"/>
+            <p:cNvSpPr/>
+            <p:nvPr/>
+          </p:nvSpPr>
+          <p:spPr>
+            <a:xfrm>
+              <a:off x="887106" y="4396351"/>
+              <a:ext cx="7660515" cy="0"/>
+            </a:xfrm>
+            <a:custGeom>
+              <a:avLst/>
+              <a:pathLst>
+                <a:path w="7660515" h="0">
+                  <a:moveTo>
+                    <a:pt x="0" y="0"/>
+                  </a:moveTo>
+                  <a:lnTo>
+                    <a:pt x="7660515" y="0"/>
+                  </a:lnTo>
+                  <a:lnTo>
+                    <a:pt x="7660515" y="0"/>
+                  </a:lnTo>
+                </a:path>
+              </a:pathLst>
+            </a:custGeom>
+            <a:ln w="13550" cap="flat">
+              <a:solidFill>
+                <a:srgbClr val="EBEBEB">
+                  <a:alpha val="100000"/>
+                </a:srgbClr>
+              </a:solidFill>
+              <a:prstDash val="solid"/>
+              <a:round/>
+            </a:ln>
+          </p:spPr>
+          <p:txBody>
+            <a:bodyPr/>
+            <a:lstStyle/>
+            <a:p/>
+          </p:txBody>
+        </p:sp>
+        <p:sp>
+          <p:nvSpPr>
+            <p:cNvPr id="57" name="pl57"/>
+            <p:cNvSpPr/>
+            <p:nvPr/>
+          </p:nvSpPr>
+          <p:spPr>
+            <a:xfrm>
+              <a:off x="1214120" y="4336484"/>
+              <a:ext cx="0" cy="1317069"/>
+            </a:xfrm>
+            <a:custGeom>
+              <a:avLst/>
+              <a:pathLst>
+                <a:path w="0" h="1317069">
+                  <a:moveTo>
+                    <a:pt x="0" y="1317069"/>
+                  </a:moveTo>
+                  <a:lnTo>
+                    <a:pt x="0" y="0"/>
+                  </a:lnTo>
+                  <a:lnTo>
+                    <a:pt x="0" y="0"/>
+                  </a:lnTo>
+                </a:path>
+              </a:pathLst>
+            </a:custGeom>
+            <a:ln w="13550" cap="flat">
+              <a:solidFill>
+                <a:srgbClr val="EBEBEB">
+                  <a:alpha val="100000"/>
+                </a:srgbClr>
+              </a:solidFill>
+              <a:prstDash val="solid"/>
+              <a:round/>
+            </a:ln>
+          </p:spPr>
+          <p:txBody>
+            <a:bodyPr/>
+            <a:lstStyle/>
+            <a:p/>
+          </p:txBody>
+        </p:sp>
+        <p:sp>
+          <p:nvSpPr>
+            <p:cNvPr id="58" name="pl58"/>
+            <p:cNvSpPr/>
+            <p:nvPr/>
+          </p:nvSpPr>
+          <p:spPr>
+            <a:xfrm>
+              <a:off x="2059406" y="4336484"/>
+              <a:ext cx="0" cy="1317069"/>
+            </a:xfrm>
+            <a:custGeom>
+              <a:avLst/>
+              <a:pathLst>
+                <a:path w="0" h="1317069">
+                  <a:moveTo>
+                    <a:pt x="0" y="1317069"/>
+                  </a:moveTo>
+                  <a:lnTo>
+                    <a:pt x="0" y="0"/>
+                  </a:lnTo>
+                  <a:lnTo>
+                    <a:pt x="0" y="0"/>
+                  </a:lnTo>
+                </a:path>
+              </a:pathLst>
+            </a:custGeom>
+            <a:ln w="13550" cap="flat">
+              <a:solidFill>
+                <a:srgbClr val="EBEBEB">
+                  <a:alpha val="100000"/>
+                </a:srgbClr>
+              </a:solidFill>
+              <a:prstDash val="solid"/>
+              <a:round/>
+            </a:ln>
+          </p:spPr>
+          <p:txBody>
+            <a:bodyPr/>
+            <a:lstStyle/>
+            <a:p/>
+          </p:txBody>
+        </p:sp>
+        <p:sp>
+          <p:nvSpPr>
+            <p:cNvPr id="59" name="pl59"/>
+            <p:cNvSpPr/>
+            <p:nvPr/>
+          </p:nvSpPr>
+          <p:spPr>
+            <a:xfrm>
+              <a:off x="2904693" y="4336484"/>
+              <a:ext cx="0" cy="1317069"/>
+            </a:xfrm>
+            <a:custGeom>
+              <a:avLst/>
+              <a:pathLst>
+                <a:path w="0" h="1317069">
+                  <a:moveTo>
+                    <a:pt x="0" y="1317069"/>
+                  </a:moveTo>
+                  <a:lnTo>
+                    <a:pt x="0" y="0"/>
+                  </a:lnTo>
+                  <a:lnTo>
+                    <a:pt x="0" y="0"/>
+                  </a:lnTo>
+                </a:path>
+              </a:pathLst>
+            </a:custGeom>
+            <a:ln w="13550" cap="flat">
+              <a:solidFill>
+                <a:srgbClr val="EBEBEB">
+                  <a:alpha val="100000"/>
+                </a:srgbClr>
+              </a:solidFill>
+              <a:prstDash val="solid"/>
+              <a:round/>
+            </a:ln>
+          </p:spPr>
+          <p:txBody>
+            <a:bodyPr/>
+            <a:lstStyle/>
+            <a:p/>
+          </p:txBody>
+        </p:sp>
+        <p:sp>
+          <p:nvSpPr>
+            <p:cNvPr id="60" name="pl60"/>
+            <p:cNvSpPr/>
+            <p:nvPr/>
+          </p:nvSpPr>
+          <p:spPr>
+            <a:xfrm>
+              <a:off x="3749979" y="4336484"/>
+              <a:ext cx="0" cy="1317069"/>
+            </a:xfrm>
+            <a:custGeom>
+              <a:avLst/>
+              <a:pathLst>
+                <a:path w="0" h="1317069">
+                  <a:moveTo>
+                    <a:pt x="0" y="1317069"/>
+                  </a:moveTo>
+                  <a:lnTo>
+                    <a:pt x="0" y="0"/>
+                  </a:lnTo>
+                  <a:lnTo>
+                    <a:pt x="0" y="0"/>
+                  </a:lnTo>
+                </a:path>
+              </a:pathLst>
+            </a:custGeom>
+            <a:ln w="13550" cap="flat">
+              <a:solidFill>
+                <a:srgbClr val="EBEBEB">
+                  <a:alpha val="100000"/>
+                </a:srgbClr>
+              </a:solidFill>
+              <a:prstDash val="solid"/>
+              <a:round/>
+            </a:ln>
+          </p:spPr>
+          <p:txBody>
+            <a:bodyPr/>
+            <a:lstStyle/>
+            <a:p/>
+          </p:txBody>
+        </p:sp>
+        <p:sp>
+          <p:nvSpPr>
+            <p:cNvPr id="61" name="pl61"/>
+            <p:cNvSpPr/>
+            <p:nvPr/>
+          </p:nvSpPr>
+          <p:spPr>
+            <a:xfrm>
+              <a:off x="4595266" y="4336484"/>
+              <a:ext cx="0" cy="1317069"/>
+            </a:xfrm>
+            <a:custGeom>
+              <a:avLst/>
+              <a:pathLst>
+                <a:path w="0" h="1317069">
+                  <a:moveTo>
+                    <a:pt x="0" y="1317069"/>
+                  </a:moveTo>
+                  <a:lnTo>
+                    <a:pt x="0" y="0"/>
+                  </a:lnTo>
+                  <a:lnTo>
+                    <a:pt x="0" y="0"/>
+                  </a:lnTo>
+                </a:path>
+              </a:pathLst>
+            </a:custGeom>
+            <a:ln w="13550" cap="flat">
+              <a:solidFill>
+                <a:srgbClr val="EBEBEB">
+                  <a:alpha val="100000"/>
+                </a:srgbClr>
+              </a:solidFill>
+              <a:prstDash val="solid"/>
+              <a:round/>
+            </a:ln>
+          </p:spPr>
+          <p:txBody>
+            <a:bodyPr/>
+            <a:lstStyle/>
+            <a:p/>
+          </p:txBody>
+        </p:sp>
+        <p:sp>
+          <p:nvSpPr>
+            <p:cNvPr id="62" name="pl62"/>
+            <p:cNvSpPr/>
+            <p:nvPr/>
+          </p:nvSpPr>
+          <p:spPr>
+            <a:xfrm>
+              <a:off x="5440552" y="4336484"/>
+              <a:ext cx="0" cy="1317069"/>
+            </a:xfrm>
+            <a:custGeom>
+              <a:avLst/>
+              <a:pathLst>
+                <a:path w="0" h="1317069">
+                  <a:moveTo>
+                    <a:pt x="0" y="1317069"/>
+                  </a:moveTo>
+                  <a:lnTo>
+                    <a:pt x="0" y="0"/>
+                  </a:lnTo>
+                  <a:lnTo>
+                    <a:pt x="0" y="0"/>
+                  </a:lnTo>
+                </a:path>
+              </a:pathLst>
+            </a:custGeom>
+            <a:ln w="13550" cap="flat">
+              <a:solidFill>
+                <a:srgbClr val="EBEBEB">
+                  <a:alpha val="100000"/>
+                </a:srgbClr>
+              </a:solidFill>
+              <a:prstDash val="solid"/>
+              <a:round/>
+            </a:ln>
+          </p:spPr>
+          <p:txBody>
+            <a:bodyPr/>
+            <a:lstStyle/>
+            <a:p/>
+          </p:txBody>
+        </p:sp>
+        <p:sp>
+          <p:nvSpPr>
+            <p:cNvPr id="63" name="pl63"/>
+            <p:cNvSpPr/>
+            <p:nvPr/>
+          </p:nvSpPr>
+          <p:spPr>
+            <a:xfrm>
+              <a:off x="6285838" y="4336484"/>
+              <a:ext cx="0" cy="1317069"/>
+            </a:xfrm>
+            <a:custGeom>
+              <a:avLst/>
+              <a:pathLst>
+                <a:path w="0" h="1317069">
+                  <a:moveTo>
+                    <a:pt x="0" y="1317069"/>
+                  </a:moveTo>
+                  <a:lnTo>
+                    <a:pt x="0" y="0"/>
+                  </a:lnTo>
+                  <a:lnTo>
+                    <a:pt x="0" y="0"/>
+                  </a:lnTo>
+                </a:path>
+              </a:pathLst>
+            </a:custGeom>
+            <a:ln w="13550" cap="flat">
+              <a:solidFill>
+                <a:srgbClr val="EBEBEB">
+                  <a:alpha val="100000"/>
+                </a:srgbClr>
+              </a:solidFill>
+              <a:prstDash val="solid"/>
+              <a:round/>
+            </a:ln>
+          </p:spPr>
+          <p:txBody>
+            <a:bodyPr/>
+            <a:lstStyle/>
+            <a:p/>
+          </p:txBody>
+        </p:sp>
+        <p:sp>
+          <p:nvSpPr>
+            <p:cNvPr id="64" name="pl64"/>
+            <p:cNvSpPr/>
+            <p:nvPr/>
+          </p:nvSpPr>
+          <p:spPr>
+            <a:xfrm>
+              <a:off x="7131125" y="4336484"/>
+              <a:ext cx="0" cy="1317069"/>
+            </a:xfrm>
+            <a:custGeom>
+              <a:avLst/>
+              <a:pathLst>
+                <a:path w="0" h="1317069">
+                  <a:moveTo>
+                    <a:pt x="0" y="1317069"/>
+                  </a:moveTo>
+                  <a:lnTo>
+                    <a:pt x="0" y="0"/>
+                  </a:lnTo>
+                  <a:lnTo>
+                    <a:pt x="0" y="0"/>
+                  </a:lnTo>
+                </a:path>
+              </a:pathLst>
+            </a:custGeom>
+            <a:ln w="13550" cap="flat">
+              <a:solidFill>
+                <a:srgbClr val="EBEBEB">
+                  <a:alpha val="100000"/>
+                </a:srgbClr>
+              </a:solidFill>
+              <a:prstDash val="solid"/>
+              <a:round/>
+            </a:ln>
+          </p:spPr>
+          <p:txBody>
+            <a:bodyPr/>
+            <a:lstStyle/>
+            <a:p/>
+          </p:txBody>
+        </p:sp>
+        <p:sp>
+          <p:nvSpPr>
+            <p:cNvPr id="65" name="pl65"/>
+            <p:cNvSpPr/>
+            <p:nvPr/>
+          </p:nvSpPr>
+          <p:spPr>
+            <a:xfrm>
+              <a:off x="7976411" y="4336484"/>
+              <a:ext cx="0" cy="1317069"/>
+            </a:xfrm>
+            <a:custGeom>
+              <a:avLst/>
+              <a:pathLst>
+                <a:path w="0" h="1317069">
+                  <a:moveTo>
+                    <a:pt x="0" y="1317069"/>
+                  </a:moveTo>
+                  <a:lnTo>
+                    <a:pt x="0" y="0"/>
+                  </a:lnTo>
+                  <a:lnTo>
+                    <a:pt x="0" y="0"/>
+                  </a:lnTo>
+                </a:path>
+              </a:pathLst>
+            </a:custGeom>
+            <a:ln w="13550" cap="flat">
+              <a:solidFill>
+                <a:srgbClr val="EBEBEB">
+                  <a:alpha val="100000"/>
+                </a:srgbClr>
+              </a:solidFill>
+              <a:prstDash val="solid"/>
+              <a:round/>
+            </a:ln>
+          </p:spPr>
+          <p:txBody>
+            <a:bodyPr/>
+            <a:lstStyle/>
+            <a:p/>
+          </p:txBody>
+        </p:sp>
+        <p:sp>
+          <p:nvSpPr>
+            <p:cNvPr id="66" name="pg66"/>
+            <p:cNvSpPr/>
+            <p:nvPr/>
+          </p:nvSpPr>
+          <p:spPr>
+            <a:xfrm>
+              <a:off x="1235312" y="4666558"/>
+              <a:ext cx="6964104" cy="838406"/>
+            </a:xfrm>
+            <a:custGeom>
+              <a:avLst/>
+              <a:pathLst>
+                <a:path w="6964104" h="838406">
+                  <a:moveTo>
+                    <a:pt x="0" y="0"/>
+                  </a:moveTo>
+                  <a:lnTo>
+                    <a:pt x="70344" y="21717"/>
+                  </a:lnTo>
+                  <a:lnTo>
+                    <a:pt x="140688" y="42925"/>
+                  </a:lnTo>
+                  <a:lnTo>
+                    <a:pt x="211033" y="63637"/>
+                  </a:lnTo>
+                  <a:lnTo>
+                    <a:pt x="281377" y="83864"/>
+                  </a:lnTo>
+                  <a:lnTo>
+                    <a:pt x="351722" y="103616"/>
+                  </a:lnTo>
+                  <a:lnTo>
+                    <a:pt x="422066" y="122906"/>
+                  </a:lnTo>
+                  <a:lnTo>
+                    <a:pt x="492411" y="141745"/>
+                  </a:lnTo>
+                  <a:lnTo>
+                    <a:pt x="562755" y="160142"/>
+                  </a:lnTo>
+                  <a:lnTo>
+                    <a:pt x="633100" y="178108"/>
+                  </a:lnTo>
+                  <a:lnTo>
+                    <a:pt x="703444" y="195653"/>
+                  </a:lnTo>
+                  <a:lnTo>
+                    <a:pt x="773789" y="212787"/>
+                  </a:lnTo>
+                  <a:lnTo>
+                    <a:pt x="844133" y="229520"/>
+                  </a:lnTo>
+                  <a:lnTo>
+                    <a:pt x="914478" y="245861"/>
+                  </a:lnTo>
+                  <a:lnTo>
+                    <a:pt x="984822" y="261819"/>
+                  </a:lnTo>
+                  <a:lnTo>
+                    <a:pt x="1055167" y="277403"/>
+                  </a:lnTo>
+                  <a:lnTo>
+                    <a:pt x="1125511" y="292623"/>
+                  </a:lnTo>
+                  <a:lnTo>
+                    <a:pt x="1195856" y="307485"/>
+                  </a:lnTo>
+                  <a:lnTo>
+                    <a:pt x="1266200" y="322000"/>
+                  </a:lnTo>
+                  <a:lnTo>
+                    <a:pt x="1336545" y="336175"/>
+                  </a:lnTo>
+                  <a:lnTo>
+                    <a:pt x="1406889" y="350017"/>
+                  </a:lnTo>
+                  <a:lnTo>
+                    <a:pt x="1477234" y="363536"/>
+                  </a:lnTo>
+                  <a:lnTo>
+                    <a:pt x="1547578" y="376737"/>
+                  </a:lnTo>
+                  <a:lnTo>
+                    <a:pt x="1617923" y="389630"/>
+                  </a:lnTo>
+                  <a:lnTo>
+                    <a:pt x="1688267" y="402220"/>
+                  </a:lnTo>
+                  <a:lnTo>
+                    <a:pt x="1758612" y="414516"/>
+                  </a:lnTo>
+                  <a:lnTo>
+                    <a:pt x="1828956" y="426523"/>
+                  </a:lnTo>
+                  <a:lnTo>
+                    <a:pt x="1899301" y="438250"/>
+                  </a:lnTo>
+                  <a:lnTo>
+                    <a:pt x="1969645" y="449701"/>
+                  </a:lnTo>
+                  <a:lnTo>
+                    <a:pt x="2039990" y="460884"/>
+                  </a:lnTo>
+                  <a:lnTo>
+                    <a:pt x="2110334" y="471806"/>
+                  </a:lnTo>
+                  <a:lnTo>
+                    <a:pt x="2180679" y="482471"/>
+                  </a:lnTo>
+                  <a:lnTo>
+                    <a:pt x="2251023" y="492887"/>
+                  </a:lnTo>
+                  <a:lnTo>
+                    <a:pt x="2321368" y="503059"/>
+                  </a:lnTo>
+                  <a:lnTo>
+                    <a:pt x="2391712" y="512992"/>
+                  </a:lnTo>
+                  <a:lnTo>
+                    <a:pt x="2462057" y="522693"/>
+                  </a:lnTo>
+                  <a:lnTo>
+                    <a:pt x="2532401" y="532167"/>
+                  </a:lnTo>
+                  <a:lnTo>
+                    <a:pt x="2602746" y="541418"/>
+                  </a:lnTo>
+                  <a:lnTo>
+                    <a:pt x="2673090" y="550453"/>
+                  </a:lnTo>
+                  <a:lnTo>
+                    <a:pt x="2743435" y="559277"/>
+                  </a:lnTo>
+                  <a:lnTo>
+                    <a:pt x="2813779" y="567893"/>
+                  </a:lnTo>
+                  <a:lnTo>
+                    <a:pt x="2884124" y="576308"/>
+                  </a:lnTo>
+                  <a:lnTo>
+                    <a:pt x="2954468" y="584526"/>
+                  </a:lnTo>
+                  <a:lnTo>
+                    <a:pt x="3024813" y="592551"/>
+                  </a:lnTo>
+                  <a:lnTo>
+                    <a:pt x="3095157" y="600388"/>
+                  </a:lnTo>
+                  <a:lnTo>
+                    <a:pt x="3165502" y="608042"/>
+                  </a:lnTo>
+                  <a:lnTo>
+                    <a:pt x="3235846" y="615516"/>
+                  </a:lnTo>
+                  <a:lnTo>
+                    <a:pt x="3306191" y="622815"/>
+                  </a:lnTo>
+                  <a:lnTo>
+                    <a:pt x="3376535" y="628592"/>
+                  </a:lnTo>
+                  <a:lnTo>
+                    <a:pt x="3446880" y="631202"/>
+                  </a:lnTo>
+                  <a:lnTo>
+                    <a:pt x="3517224" y="633789"/>
+                  </a:lnTo>
+                  <a:lnTo>
+                    <a:pt x="3587569" y="636353"/>
+                  </a:lnTo>
+                  <a:lnTo>
+                    <a:pt x="3657913" y="638895"/>
+                  </a:lnTo>
+                  <a:lnTo>
+                    <a:pt x="3728257" y="641414"/>
+                  </a:lnTo>
+                  <a:lnTo>
+                    <a:pt x="3798602" y="643912"/>
+                  </a:lnTo>
+                  <a:lnTo>
+                    <a:pt x="3868946" y="646388"/>
+                  </a:lnTo>
+                  <a:lnTo>
+                    <a:pt x="3939291" y="648842"/>
+                  </a:lnTo>
+                  <a:lnTo>
+                    <a:pt x="4009635" y="651274"/>
+                  </a:lnTo>
+                  <a:lnTo>
+                    <a:pt x="4079980" y="653686"/>
+                  </a:lnTo>
+                  <a:lnTo>
+                    <a:pt x="4150324" y="656076"/>
+                  </a:lnTo>
+                  <a:lnTo>
+                    <a:pt x="4220669" y="658446"/>
+                  </a:lnTo>
+                  <a:lnTo>
+                    <a:pt x="4291013" y="660794"/>
+                  </a:lnTo>
+                  <a:lnTo>
+                    <a:pt x="4361358" y="663123"/>
+                  </a:lnTo>
+                  <a:lnTo>
+                    <a:pt x="4431702" y="665430"/>
+                  </a:lnTo>
+                  <a:lnTo>
+                    <a:pt x="4502047" y="667718"/>
+                  </a:lnTo>
+                  <a:lnTo>
+                    <a:pt x="4572391" y="669986"/>
+                  </a:lnTo>
+                  <a:lnTo>
+                    <a:pt x="4642736" y="672234"/>
+                  </a:lnTo>
+                  <a:lnTo>
+                    <a:pt x="4713080" y="674462"/>
+                  </a:lnTo>
+                  <a:lnTo>
+                    <a:pt x="4783425" y="676671"/>
+                  </a:lnTo>
+                  <a:lnTo>
+                    <a:pt x="4853769" y="678860"/>
+                  </a:lnTo>
+                  <a:lnTo>
+                    <a:pt x="4924114" y="681030"/>
+                  </a:lnTo>
+                  <a:lnTo>
+                    <a:pt x="4994458" y="683182"/>
+                  </a:lnTo>
+                  <a:lnTo>
+                    <a:pt x="5064803" y="685314"/>
+                  </a:lnTo>
+                  <a:lnTo>
+                    <a:pt x="5135147" y="687428"/>
+                  </a:lnTo>
+                  <a:lnTo>
+                    <a:pt x="5205492" y="689523"/>
+                  </a:lnTo>
+                  <a:lnTo>
+                    <a:pt x="5275836" y="691600"/>
+                  </a:lnTo>
+                  <a:lnTo>
+                    <a:pt x="5346181" y="693659"/>
+                  </a:lnTo>
+                  <a:lnTo>
+                    <a:pt x="5416525" y="695700"/>
+                  </a:lnTo>
+                  <a:lnTo>
+                    <a:pt x="5486870" y="697723"/>
+                  </a:lnTo>
+                  <a:lnTo>
+                    <a:pt x="5557214" y="699729"/>
+                  </a:lnTo>
+                  <a:lnTo>
+                    <a:pt x="5627559" y="701716"/>
+                  </a:lnTo>
+                  <a:lnTo>
+                    <a:pt x="5697903" y="703687"/>
+                  </a:lnTo>
+                  <a:lnTo>
+                    <a:pt x="5768248" y="705640"/>
+                  </a:lnTo>
+                  <a:lnTo>
+                    <a:pt x="5838592" y="707576"/>
+                  </a:lnTo>
+                  <a:lnTo>
+                    <a:pt x="5908937" y="709496"/>
+                  </a:lnTo>
+                  <a:lnTo>
+                    <a:pt x="5979281" y="711398"/>
+                  </a:lnTo>
+                  <a:lnTo>
+                    <a:pt x="6049626" y="713284"/>
+                  </a:lnTo>
+                  <a:lnTo>
+                    <a:pt x="6119970" y="715153"/>
+                  </a:lnTo>
+                  <a:lnTo>
+                    <a:pt x="6190315" y="717006"/>
+                  </a:lnTo>
+                  <a:lnTo>
+                    <a:pt x="6260659" y="718843"/>
+                  </a:lnTo>
+                  <a:lnTo>
+                    <a:pt x="6331004" y="720664"/>
+                  </a:lnTo>
+                  <a:lnTo>
+                    <a:pt x="6401348" y="722469"/>
+                  </a:lnTo>
+                  <a:lnTo>
+                    <a:pt x="6471693" y="724258"/>
+                  </a:lnTo>
+                  <a:lnTo>
+                    <a:pt x="6542037" y="726031"/>
+                  </a:lnTo>
+                  <a:lnTo>
+                    <a:pt x="6612382" y="727789"/>
+                  </a:lnTo>
+                  <a:lnTo>
+                    <a:pt x="6682726" y="729532"/>
+                  </a:lnTo>
+                  <a:lnTo>
+                    <a:pt x="6753071" y="731259"/>
+                  </a:lnTo>
+                  <a:lnTo>
+                    <a:pt x="6823415" y="732971"/>
+                  </a:lnTo>
+                  <a:lnTo>
+                    <a:pt x="6893760" y="734668"/>
+                  </a:lnTo>
+                  <a:lnTo>
+                    <a:pt x="6964104" y="736351"/>
+                  </a:lnTo>
+                  <a:lnTo>
+                    <a:pt x="6964104" y="838406"/>
+                  </a:lnTo>
+                  <a:lnTo>
+                    <a:pt x="6893760" y="836278"/>
+                  </a:lnTo>
+                  <a:lnTo>
+                    <a:pt x="6823415" y="834099"/>
+                  </a:lnTo>
+                  <a:lnTo>
+                    <a:pt x="6753071" y="831867"/>
+                  </a:lnTo>
+                  <a:lnTo>
+                    <a:pt x="6682726" y="829583"/>
+                  </a:lnTo>
+                  <a:lnTo>
+                    <a:pt x="6612382" y="827243"/>
+                  </a:lnTo>
+                  <a:lnTo>
+                    <a:pt x="6542037" y="824847"/>
+                  </a:lnTo>
+                  <a:lnTo>
+                    <a:pt x="6471693" y="822394"/>
+                  </a:lnTo>
+                  <a:lnTo>
+                    <a:pt x="6401348" y="819882"/>
+                  </a:lnTo>
+                  <a:lnTo>
+                    <a:pt x="6331004" y="817309"/>
+                  </a:lnTo>
+                  <a:lnTo>
+                    <a:pt x="6260659" y="814675"/>
+                  </a:lnTo>
+                  <a:lnTo>
+                    <a:pt x="6190315" y="811978"/>
+                  </a:lnTo>
+                  <a:lnTo>
+                    <a:pt x="6119970" y="809216"/>
+                  </a:lnTo>
+                  <a:lnTo>
+                    <a:pt x="6049626" y="806387"/>
+                  </a:lnTo>
+                  <a:lnTo>
+                    <a:pt x="5979281" y="803491"/>
+                  </a:lnTo>
+                  <a:lnTo>
+                    <a:pt x="5908937" y="800526"/>
+                  </a:lnTo>
+                  <a:lnTo>
+                    <a:pt x="5838592" y="797489"/>
+                  </a:lnTo>
+                  <a:lnTo>
+                    <a:pt x="5768248" y="794380"/>
+                  </a:lnTo>
+                  <a:lnTo>
+                    <a:pt x="5697903" y="791196"/>
+                  </a:lnTo>
+                  <a:lnTo>
+                    <a:pt x="5627559" y="787935"/>
+                  </a:lnTo>
+                  <a:lnTo>
+                    <a:pt x="5557214" y="784596"/>
+                  </a:lnTo>
+                  <a:lnTo>
+                    <a:pt x="5486870" y="781178"/>
+                  </a:lnTo>
+                  <a:lnTo>
+                    <a:pt x="5416525" y="777677"/>
+                  </a:lnTo>
+                  <a:lnTo>
+                    <a:pt x="5346181" y="774092"/>
+                  </a:lnTo>
+                  <a:lnTo>
+                    <a:pt x="5275836" y="770421"/>
+                  </a:lnTo>
+                  <a:lnTo>
+                    <a:pt x="5205492" y="766663"/>
+                  </a:lnTo>
+                  <a:lnTo>
+                    <a:pt x="5135147" y="762814"/>
+                  </a:lnTo>
+                  <a:lnTo>
+                    <a:pt x="5064803" y="758872"/>
+                  </a:lnTo>
+                  <a:lnTo>
+                    <a:pt x="4994458" y="754837"/>
+                  </a:lnTo>
+                  <a:lnTo>
+                    <a:pt x="4924114" y="750704"/>
+                  </a:lnTo>
+                  <a:lnTo>
+                    <a:pt x="4853769" y="746472"/>
+                  </a:lnTo>
+                  <a:lnTo>
+                    <a:pt x="4783425" y="742139"/>
+                  </a:lnTo>
+                  <a:lnTo>
+                    <a:pt x="4713080" y="737702"/>
+                  </a:lnTo>
+                  <a:lnTo>
+                    <a:pt x="4642736" y="733158"/>
+                  </a:lnTo>
+                  <a:lnTo>
+                    <a:pt x="4572391" y="728506"/>
+                  </a:lnTo>
+                  <a:lnTo>
+                    <a:pt x="4502047" y="723742"/>
+                  </a:lnTo>
+                  <a:lnTo>
+                    <a:pt x="4431702" y="718863"/>
+                  </a:lnTo>
+                  <a:lnTo>
+                    <a:pt x="4361358" y="713868"/>
+                  </a:lnTo>
+                  <a:lnTo>
+                    <a:pt x="4291013" y="708753"/>
+                  </a:lnTo>
+                  <a:lnTo>
+                    <a:pt x="4220669" y="703515"/>
+                  </a:lnTo>
+                  <a:lnTo>
+                    <a:pt x="4150324" y="698151"/>
+                  </a:lnTo>
+                  <a:lnTo>
+                    <a:pt x="4079980" y="692659"/>
+                  </a:lnTo>
+                  <a:lnTo>
+                    <a:pt x="4009635" y="687035"/>
+                  </a:lnTo>
+                  <a:lnTo>
+                    <a:pt x="3939291" y="681276"/>
+                  </a:lnTo>
+                  <a:lnTo>
+                    <a:pt x="3868946" y="675379"/>
+                  </a:lnTo>
+                  <a:lnTo>
+                    <a:pt x="3798602" y="669340"/>
+                  </a:lnTo>
+                  <a:lnTo>
+                    <a:pt x="3728257" y="663157"/>
+                  </a:lnTo>
+                  <a:lnTo>
+                    <a:pt x="3657913" y="656826"/>
+                  </a:lnTo>
+                  <a:lnTo>
+                    <a:pt x="3587569" y="650342"/>
+                  </a:lnTo>
+                  <a:lnTo>
+                    <a:pt x="3517224" y="643703"/>
+                  </a:lnTo>
+                  <a:lnTo>
+                    <a:pt x="3446880" y="636905"/>
+                  </a:lnTo>
+                  <a:lnTo>
+                    <a:pt x="3376535" y="629944"/>
+                  </a:lnTo>
+                  <a:lnTo>
+                    <a:pt x="3306191" y="625959"/>
+                  </a:lnTo>
+                  <a:lnTo>
+                    <a:pt x="3235846" y="623303"/>
+                  </a:lnTo>
+                  <a:lnTo>
+                    <a:pt x="3165502" y="620624"/>
+                  </a:lnTo>
+                  <a:lnTo>
+                    <a:pt x="3095157" y="617921"/>
+                  </a:lnTo>
+                  <a:lnTo>
+                    <a:pt x="3024813" y="615194"/>
+                  </a:lnTo>
+                  <a:lnTo>
+                    <a:pt x="2954468" y="612443"/>
+                  </a:lnTo>
+                  <a:lnTo>
+                    <a:pt x="2884124" y="609668"/>
+                  </a:lnTo>
+                  <a:lnTo>
+                    <a:pt x="2813779" y="606869"/>
+                  </a:lnTo>
+                  <a:lnTo>
+                    <a:pt x="2743435" y="604044"/>
+                  </a:lnTo>
+                  <a:lnTo>
+                    <a:pt x="2673090" y="601195"/>
+                  </a:lnTo>
+                  <a:lnTo>
+                    <a:pt x="2602746" y="598321"/>
+                  </a:lnTo>
+                  <a:lnTo>
+                    <a:pt x="2532401" y="595421"/>
+                  </a:lnTo>
+                  <a:lnTo>
+                    <a:pt x="2462057" y="592496"/>
+                  </a:lnTo>
+                  <a:lnTo>
+                    <a:pt x="2391712" y="589545"/>
+                  </a:lnTo>
+                  <a:lnTo>
+                    <a:pt x="2321368" y="586568"/>
+                  </a:lnTo>
+                  <a:lnTo>
+                    <a:pt x="2251023" y="583564"/>
+                  </a:lnTo>
+                  <a:lnTo>
+                    <a:pt x="2180679" y="580535"/>
+                  </a:lnTo>
+                  <a:lnTo>
+                    <a:pt x="2110334" y="577478"/>
+                  </a:lnTo>
+                  <a:lnTo>
+                    <a:pt x="2039990" y="574395"/>
+                  </a:lnTo>
+                  <a:lnTo>
+                    <a:pt x="1969645" y="571284"/>
+                  </a:lnTo>
+                  <a:lnTo>
+                    <a:pt x="1899301" y="568146"/>
+                  </a:lnTo>
+                  <a:lnTo>
+                    <a:pt x="1828956" y="564980"/>
+                  </a:lnTo>
+                  <a:lnTo>
+                    <a:pt x="1758612" y="561786"/>
+                  </a:lnTo>
+                  <a:lnTo>
+                    <a:pt x="1688267" y="558564"/>
+                  </a:lnTo>
+                  <a:lnTo>
+                    <a:pt x="1617923" y="555314"/>
+                  </a:lnTo>
+                  <a:lnTo>
+                    <a:pt x="1547578" y="552035"/>
+                  </a:lnTo>
+                  <a:lnTo>
+                    <a:pt x="1477234" y="548727"/>
+                  </a:lnTo>
+                  <a:lnTo>
+                    <a:pt x="1406889" y="545390"/>
+                  </a:lnTo>
+                  <a:lnTo>
+                    <a:pt x="1336545" y="542024"/>
+                  </a:lnTo>
+                  <a:lnTo>
+                    <a:pt x="1266200" y="538628"/>
+                  </a:lnTo>
+                  <a:lnTo>
+                    <a:pt x="1195856" y="535202"/>
+                  </a:lnTo>
+                  <a:lnTo>
+                    <a:pt x="1125511" y="531745"/>
+                  </a:lnTo>
+                  <a:lnTo>
+                    <a:pt x="1055167" y="528259"/>
+                  </a:lnTo>
+                  <a:lnTo>
+                    <a:pt x="984822" y="524741"/>
+                  </a:lnTo>
+                  <a:lnTo>
+                    <a:pt x="914478" y="521193"/>
+                  </a:lnTo>
+                  <a:lnTo>
+                    <a:pt x="844133" y="517613"/>
+                  </a:lnTo>
+                  <a:lnTo>
+                    <a:pt x="773789" y="514001"/>
+                  </a:lnTo>
+                  <a:lnTo>
+                    <a:pt x="703444" y="510358"/>
+                  </a:lnTo>
+                  <a:lnTo>
+                    <a:pt x="633100" y="506683"/>
+                  </a:lnTo>
+                  <a:lnTo>
+                    <a:pt x="562755" y="502975"/>
+                  </a:lnTo>
+                  <a:lnTo>
+                    <a:pt x="492411" y="499234"/>
+                  </a:lnTo>
+                  <a:lnTo>
+                    <a:pt x="422066" y="495461"/>
+                  </a:lnTo>
+                  <a:lnTo>
+                    <a:pt x="351722" y="491654"/>
+                  </a:lnTo>
+                  <a:lnTo>
+                    <a:pt x="281377" y="487814"/>
+                  </a:lnTo>
+                  <a:lnTo>
+                    <a:pt x="211033" y="483940"/>
+                  </a:lnTo>
+                  <a:lnTo>
+                    <a:pt x="140688" y="480031"/>
+                  </a:lnTo>
+                  <a:lnTo>
+                    <a:pt x="70344" y="476088"/>
+                  </a:lnTo>
+                  <a:lnTo>
+                    <a:pt x="0" y="472111"/>
+                  </a:lnTo>
+                  <a:close/>
+                </a:path>
+              </a:pathLst>
+            </a:custGeom>
+            <a:solidFill>
+              <a:srgbClr val="FF8C00">
+                <a:alpha val="20000"/>
+              </a:srgbClr>
+            </a:solidFill>
+          </p:spPr>
+          <p:txBody>
+            <a:bodyPr/>
+            <a:lstStyle/>
+            <a:p/>
+          </p:txBody>
+        </p:sp>
+        <p:sp>
+          <p:nvSpPr>
+            <p:cNvPr id="67" name="pl67"/>
+            <p:cNvSpPr/>
+            <p:nvPr/>
+          </p:nvSpPr>
+          <p:spPr>
+            <a:xfrm>
+              <a:off x="1235312" y="4666558"/>
+              <a:ext cx="6964104" cy="736351"/>
+            </a:xfrm>
+            <a:custGeom>
+              <a:avLst/>
+              <a:pathLst>
+                <a:path w="6964104" h="736351">
+                  <a:moveTo>
+                    <a:pt x="0" y="0"/>
+                  </a:moveTo>
+                  <a:lnTo>
+                    <a:pt x="70344" y="21717"/>
+                  </a:lnTo>
+                  <a:lnTo>
+                    <a:pt x="140688" y="42925"/>
+                  </a:lnTo>
+                  <a:lnTo>
+                    <a:pt x="211033" y="63637"/>
+                  </a:lnTo>
+                  <a:lnTo>
+                    <a:pt x="281377" y="83864"/>
+                  </a:lnTo>
+                  <a:lnTo>
+                    <a:pt x="351722" y="103616"/>
+                  </a:lnTo>
+                  <a:lnTo>
+                    <a:pt x="422066" y="122906"/>
+                  </a:lnTo>
+                  <a:lnTo>
+                    <a:pt x="492411" y="141745"/>
+                  </a:lnTo>
+                  <a:lnTo>
+                    <a:pt x="562755" y="160142"/>
+                  </a:lnTo>
+                  <a:lnTo>
+                    <a:pt x="633100" y="178108"/>
+                  </a:lnTo>
+                  <a:lnTo>
+                    <a:pt x="703444" y="195653"/>
+                  </a:lnTo>
+                  <a:lnTo>
+                    <a:pt x="773789" y="212787"/>
+                  </a:lnTo>
+                  <a:lnTo>
+                    <a:pt x="844133" y="229520"/>
+                  </a:lnTo>
+                  <a:lnTo>
+                    <a:pt x="914478" y="245861"/>
+                  </a:lnTo>
+                  <a:lnTo>
+                    <a:pt x="984822" y="261819"/>
+                  </a:lnTo>
+                  <a:lnTo>
+                    <a:pt x="1055167" y="277403"/>
+                  </a:lnTo>
+                  <a:lnTo>
+                    <a:pt x="1125511" y="292623"/>
+                  </a:lnTo>
+                  <a:lnTo>
+                    <a:pt x="1195856" y="307485"/>
+                  </a:lnTo>
+                  <a:lnTo>
+                    <a:pt x="1266200" y="322000"/>
+                  </a:lnTo>
+                  <a:lnTo>
+                    <a:pt x="1336545" y="336175"/>
+                  </a:lnTo>
+                  <a:lnTo>
+                    <a:pt x="1406889" y="350017"/>
+                  </a:lnTo>
+                  <a:lnTo>
+                    <a:pt x="1477234" y="363536"/>
+                  </a:lnTo>
+                  <a:lnTo>
+                    <a:pt x="1547578" y="376737"/>
+                  </a:lnTo>
+                  <a:lnTo>
+                    <a:pt x="1617923" y="389630"/>
+                  </a:lnTo>
+                  <a:lnTo>
+                    <a:pt x="1688267" y="402220"/>
+                  </a:lnTo>
+                  <a:lnTo>
+                    <a:pt x="1758612" y="414516"/>
+                  </a:lnTo>
+                  <a:lnTo>
+                    <a:pt x="1828956" y="426523"/>
+                  </a:lnTo>
+                  <a:lnTo>
+                    <a:pt x="1899301" y="438250"/>
+                  </a:lnTo>
+                  <a:lnTo>
+                    <a:pt x="1969645" y="449701"/>
+                  </a:lnTo>
+                  <a:lnTo>
+                    <a:pt x="2039990" y="460884"/>
+                  </a:lnTo>
+                  <a:lnTo>
+                    <a:pt x="2110334" y="471806"/>
+                  </a:lnTo>
+                  <a:lnTo>
+                    <a:pt x="2180679" y="482471"/>
+                  </a:lnTo>
+                  <a:lnTo>
+                    <a:pt x="2251023" y="492887"/>
+                  </a:lnTo>
+                  <a:lnTo>
+                    <a:pt x="2321368" y="503059"/>
+                  </a:lnTo>
+                  <a:lnTo>
+                    <a:pt x="2391712" y="512992"/>
+                  </a:lnTo>
+                  <a:lnTo>
+                    <a:pt x="2462057" y="522693"/>
+                  </a:lnTo>
+                  <a:lnTo>
+                    <a:pt x="2532401" y="532167"/>
+                  </a:lnTo>
+                  <a:lnTo>
+                    <a:pt x="2602746" y="541418"/>
+                  </a:lnTo>
+                  <a:lnTo>
+                    <a:pt x="2673090" y="550453"/>
+                  </a:lnTo>
+                  <a:lnTo>
+                    <a:pt x="2743435" y="559277"/>
+                  </a:lnTo>
+                  <a:lnTo>
+                    <a:pt x="2813779" y="567893"/>
+                  </a:lnTo>
+                  <a:lnTo>
+                    <a:pt x="2884124" y="576308"/>
+                  </a:lnTo>
+                  <a:lnTo>
+                    <a:pt x="2954468" y="584526"/>
+                  </a:lnTo>
+                  <a:lnTo>
+                    <a:pt x="3024813" y="592551"/>
+                  </a:lnTo>
+                  <a:lnTo>
+                    <a:pt x="3095157" y="600388"/>
+                  </a:lnTo>
+                  <a:lnTo>
+                    <a:pt x="3165502" y="608042"/>
+                  </a:lnTo>
+                  <a:lnTo>
+                    <a:pt x="3235846" y="615516"/>
+                  </a:lnTo>
+                  <a:lnTo>
+                    <a:pt x="3306191" y="622815"/>
+                  </a:lnTo>
+                  <a:lnTo>
+                    <a:pt x="3376535" y="628592"/>
+                  </a:lnTo>
+                  <a:lnTo>
+                    <a:pt x="3446880" y="631202"/>
+                  </a:lnTo>
+                  <a:lnTo>
+                    <a:pt x="3517224" y="633789"/>
+                  </a:lnTo>
+                  <a:lnTo>
+                    <a:pt x="3587569" y="636353"/>
+                  </a:lnTo>
+                  <a:lnTo>
+                    <a:pt x="3657913" y="638895"/>
+                  </a:lnTo>
+                  <a:lnTo>
+                    <a:pt x="3728257" y="641414"/>
+                  </a:lnTo>
+                  <a:lnTo>
+                    <a:pt x="3798602" y="643912"/>
+                  </a:lnTo>
+                  <a:lnTo>
+                    <a:pt x="3868946" y="646388"/>
+                  </a:lnTo>
+                  <a:lnTo>
+                    <a:pt x="3939291" y="648842"/>
+                  </a:lnTo>
+                  <a:lnTo>
+                    <a:pt x="4009635" y="651274"/>
+                  </a:lnTo>
+                  <a:lnTo>
+                    <a:pt x="4079980" y="653686"/>
+                  </a:lnTo>
+                  <a:lnTo>
+                    <a:pt x="4150324" y="656076"/>
+                  </a:lnTo>
+                  <a:lnTo>
+                    <a:pt x="4220669" y="658446"/>
+                  </a:lnTo>
+                  <a:lnTo>
+                    <a:pt x="4291013" y="660794"/>
+                  </a:lnTo>
+                  <a:lnTo>
+                    <a:pt x="4361358" y="663123"/>
+                  </a:lnTo>
+                  <a:lnTo>
+                    <a:pt x="4431702" y="665430"/>
+                  </a:lnTo>
+                  <a:lnTo>
+                    <a:pt x="4502047" y="667718"/>
+                  </a:lnTo>
+                  <a:lnTo>
+                    <a:pt x="4572391" y="669986"/>
+                  </a:lnTo>
+                  <a:lnTo>
+                    <a:pt x="4642736" y="672234"/>
+                  </a:lnTo>
+                  <a:lnTo>
+                    <a:pt x="4713080" y="674462"/>
+                  </a:lnTo>
+                  <a:lnTo>
+                    <a:pt x="4783425" y="676671"/>
+                  </a:lnTo>
+                  <a:lnTo>
+                    <a:pt x="4853769" y="678860"/>
+                  </a:lnTo>
+                  <a:lnTo>
+                    <a:pt x="4924114" y="681030"/>
+                  </a:lnTo>
+                  <a:lnTo>
+                    <a:pt x="4994458" y="683182"/>
+                  </a:lnTo>
+                  <a:lnTo>
+                    <a:pt x="5064803" y="685314"/>
+                  </a:lnTo>
+                  <a:lnTo>
+                    <a:pt x="5135147" y="687428"/>
+                  </a:lnTo>
+                  <a:lnTo>
+                    <a:pt x="5205492" y="689523"/>
+                  </a:lnTo>
+                  <a:lnTo>
+                    <a:pt x="5275836" y="691600"/>
+                  </a:lnTo>
+                  <a:lnTo>
+                    <a:pt x="5346181" y="693659"/>
+                  </a:lnTo>
+                  <a:lnTo>
+                    <a:pt x="5416525" y="695700"/>
+                  </a:lnTo>
+                  <a:lnTo>
+                    <a:pt x="5486870" y="697723"/>
+                  </a:lnTo>
+                  <a:lnTo>
+                    <a:pt x="5557214" y="699729"/>
+                  </a:lnTo>
+                  <a:lnTo>
+                    <a:pt x="5627559" y="701716"/>
+                  </a:lnTo>
+                  <a:lnTo>
+                    <a:pt x="5697903" y="703687"/>
+                  </a:lnTo>
+                  <a:lnTo>
+                    <a:pt x="5768248" y="705640"/>
+                  </a:lnTo>
+                  <a:lnTo>
+                    <a:pt x="5838592" y="707576"/>
+                  </a:lnTo>
+                  <a:lnTo>
+                    <a:pt x="5908937" y="709496"/>
+                  </a:lnTo>
+                  <a:lnTo>
+                    <a:pt x="5979281" y="711398"/>
+                  </a:lnTo>
+                  <a:lnTo>
+                    <a:pt x="6049626" y="713284"/>
+                  </a:lnTo>
+                  <a:lnTo>
+                    <a:pt x="6119970" y="715153"/>
+                  </a:lnTo>
+                  <a:lnTo>
+                    <a:pt x="6190315" y="717006"/>
+                  </a:lnTo>
+                  <a:lnTo>
+                    <a:pt x="6260659" y="718843"/>
+                  </a:lnTo>
+                  <a:lnTo>
+                    <a:pt x="6331004" y="720664"/>
+                  </a:lnTo>
+                  <a:lnTo>
+                    <a:pt x="6401348" y="722469"/>
+                  </a:lnTo>
+                  <a:lnTo>
+                    <a:pt x="6471693" y="724258"/>
+                  </a:lnTo>
+                  <a:lnTo>
+                    <a:pt x="6542037" y="726031"/>
+                  </a:lnTo>
+                  <a:lnTo>
+                    <a:pt x="6612382" y="727789"/>
+                  </a:lnTo>
+                  <a:lnTo>
+                    <a:pt x="6682726" y="729532"/>
+                  </a:lnTo>
+                  <a:lnTo>
+                    <a:pt x="6753071" y="731259"/>
+                  </a:lnTo>
+                  <a:lnTo>
+                    <a:pt x="6823415" y="732971"/>
+                  </a:lnTo>
+                  <a:lnTo>
+                    <a:pt x="6893760" y="734668"/>
+                  </a:lnTo>
+                  <a:lnTo>
+                    <a:pt x="6964104" y="736351"/>
+                  </a:lnTo>
+                </a:path>
+              </a:pathLst>
+            </a:custGeom>
+          </p:spPr>
+          <p:txBody>
+            <a:bodyPr/>
+            <a:lstStyle/>
+            <a:p/>
+          </p:txBody>
+        </p:sp>
+        <p:sp>
+          <p:nvSpPr>
+            <p:cNvPr id="68" name="pl68"/>
+            <p:cNvSpPr/>
+            <p:nvPr/>
+          </p:nvSpPr>
+          <p:spPr>
+            <a:xfrm>
+              <a:off x="1235312" y="5138669"/>
+              <a:ext cx="6964104" cy="366295"/>
+            </a:xfrm>
+            <a:custGeom>
+              <a:avLst/>
+              <a:pathLst>
+                <a:path w="6964104" h="366295">
+                  <a:moveTo>
+                    <a:pt x="6964104" y="366295"/>
+                  </a:moveTo>
+                  <a:lnTo>
+                    <a:pt x="6893760" y="364167"/>
+                  </a:lnTo>
+                  <a:lnTo>
+                    <a:pt x="6823415" y="361988"/>
+                  </a:lnTo>
+                  <a:lnTo>
+                    <a:pt x="6753071" y="359756"/>
+                  </a:lnTo>
+                  <a:lnTo>
+                    <a:pt x="6682726" y="357471"/>
+                  </a:lnTo>
+                  <a:lnTo>
+                    <a:pt x="6612382" y="355132"/>
+                  </a:lnTo>
+                  <a:lnTo>
+                    <a:pt x="6542037" y="352736"/>
+                  </a:lnTo>
+                  <a:lnTo>
+                    <a:pt x="6471693" y="350282"/>
+                  </a:lnTo>
+                  <a:lnTo>
+                    <a:pt x="6401348" y="347770"/>
+                  </a:lnTo>
+                  <a:lnTo>
+                    <a:pt x="6331004" y="345198"/>
+                  </a:lnTo>
+                  <a:lnTo>
+                    <a:pt x="6260659" y="342564"/>
+                  </a:lnTo>
+                  <a:lnTo>
+                    <a:pt x="6190315" y="339866"/>
+                  </a:lnTo>
+                  <a:lnTo>
+                    <a:pt x="6119970" y="337104"/>
+                  </a:lnTo>
+                  <a:lnTo>
+                    <a:pt x="6049626" y="334276"/>
+                  </a:lnTo>
+                  <a:lnTo>
+                    <a:pt x="5979281" y="331380"/>
+                  </a:lnTo>
+                  <a:lnTo>
+                    <a:pt x="5908937" y="328415"/>
+                  </a:lnTo>
+                  <a:lnTo>
+                    <a:pt x="5838592" y="325378"/>
+                  </a:lnTo>
+                  <a:lnTo>
+                    <a:pt x="5768248" y="322268"/>
+                  </a:lnTo>
+                  <a:lnTo>
+                    <a:pt x="5697903" y="319084"/>
+                  </a:lnTo>
+                  <a:lnTo>
+                    <a:pt x="5627559" y="315824"/>
+                  </a:lnTo>
+                  <a:lnTo>
+                    <a:pt x="5557214" y="312485"/>
+                  </a:lnTo>
+                  <a:lnTo>
+                    <a:pt x="5486870" y="309066"/>
+                  </a:lnTo>
+                  <a:lnTo>
+                    <a:pt x="5416525" y="305566"/>
+                  </a:lnTo>
+                  <a:lnTo>
+                    <a:pt x="5346181" y="301981"/>
+                  </a:lnTo>
+                  <a:lnTo>
+                    <a:pt x="5275836" y="298310"/>
+                  </a:lnTo>
+                  <a:lnTo>
+                    <a:pt x="5205492" y="294551"/>
+                  </a:lnTo>
+                  <a:lnTo>
+                    <a:pt x="5135147" y="290702"/>
+                  </a:lnTo>
+                  <a:lnTo>
+                    <a:pt x="5064803" y="286761"/>
+                  </a:lnTo>
+                  <a:lnTo>
+                    <a:pt x="4994458" y="282725"/>
+                  </a:lnTo>
+                  <a:lnTo>
+                    <a:pt x="4924114" y="278593"/>
+                  </a:lnTo>
+                  <a:lnTo>
+                    <a:pt x="4853769" y="274361"/>
+                  </a:lnTo>
+                  <a:lnTo>
+                    <a:pt x="4783425" y="270028"/>
+                  </a:lnTo>
+                  <a:lnTo>
+                    <a:pt x="4713080" y="265591"/>
+                  </a:lnTo>
+                  <a:lnTo>
+                    <a:pt x="4642736" y="261047"/>
+                  </a:lnTo>
+                  <a:lnTo>
+                    <a:pt x="4572391" y="256395"/>
+                  </a:lnTo>
+                  <a:lnTo>
+                    <a:pt x="4502047" y="251630"/>
+                  </a:lnTo>
+                  <a:lnTo>
+                    <a:pt x="4431702" y="246752"/>
+                  </a:lnTo>
+                  <a:lnTo>
+                    <a:pt x="4361358" y="241757"/>
+                  </a:lnTo>
+                  <a:lnTo>
+                    <a:pt x="4291013" y="236641"/>
+                  </a:lnTo>
+                  <a:lnTo>
+                    <a:pt x="4220669" y="231403"/>
+                  </a:lnTo>
+                  <a:lnTo>
+                    <a:pt x="4150324" y="226040"/>
+                  </a:lnTo>
+                  <a:lnTo>
+                    <a:pt x="4079980" y="220548"/>
+                  </a:lnTo>
+                  <a:lnTo>
+                    <a:pt x="4009635" y="214924"/>
+                  </a:lnTo>
+                  <a:lnTo>
+                    <a:pt x="3939291" y="209165"/>
+                  </a:lnTo>
+                  <a:lnTo>
+                    <a:pt x="3868946" y="203268"/>
+                  </a:lnTo>
+                  <a:lnTo>
+                    <a:pt x="3798602" y="197229"/>
+                  </a:lnTo>
+                  <a:lnTo>
+                    <a:pt x="3728257" y="191046"/>
+                  </a:lnTo>
+                  <a:lnTo>
+                    <a:pt x="3657913" y="184714"/>
+                  </a:lnTo>
+                  <a:lnTo>
+                    <a:pt x="3587569" y="178231"/>
+                  </a:lnTo>
+                  <a:lnTo>
+                    <a:pt x="3517224" y="171592"/>
+                  </a:lnTo>
+                  <a:lnTo>
+                    <a:pt x="3446880" y="164794"/>
+                  </a:lnTo>
+                  <a:lnTo>
+                    <a:pt x="3376535" y="157832"/>
+                  </a:lnTo>
+                  <a:lnTo>
+                    <a:pt x="3306191" y="153848"/>
+                  </a:lnTo>
+                  <a:lnTo>
+                    <a:pt x="3235846" y="151192"/>
+                  </a:lnTo>
+                  <a:lnTo>
+                    <a:pt x="3165502" y="148513"/>
+                  </a:lnTo>
+                  <a:lnTo>
+                    <a:pt x="3095157" y="145810"/>
+                  </a:lnTo>
+                  <a:lnTo>
+                    <a:pt x="3024813" y="143083"/>
+                  </a:lnTo>
+                  <a:lnTo>
+                    <a:pt x="2954468" y="140332"/>
+                  </a:lnTo>
+                  <a:lnTo>
+                    <a:pt x="2884124" y="137557"/>
+                  </a:lnTo>
+                  <a:lnTo>
+                    <a:pt x="2813779" y="134757"/>
+                  </a:lnTo>
+                  <a:lnTo>
+                    <a:pt x="2743435" y="131933"/>
+                  </a:lnTo>
+                  <a:lnTo>
+                    <a:pt x="2673090" y="129084"/>
+                  </a:lnTo>
+                  <a:lnTo>
+                    <a:pt x="2602746" y="126209"/>
+                  </a:lnTo>
+                  <a:lnTo>
+                    <a:pt x="2532401" y="123310"/>
+                  </a:lnTo>
+                  <a:lnTo>
+                    <a:pt x="2462057" y="120385"/>
+                  </a:lnTo>
+                  <a:lnTo>
+                    <a:pt x="2391712" y="117434"/>
+                  </a:lnTo>
+                  <a:lnTo>
+                    <a:pt x="2321368" y="114456"/>
+                  </a:lnTo>
+                  <a:lnTo>
+                    <a:pt x="2251023" y="111453"/>
+                  </a:lnTo>
+                  <a:lnTo>
+                    <a:pt x="2180679" y="108423"/>
+                  </a:lnTo>
+                  <a:lnTo>
+                    <a:pt x="2110334" y="105367"/>
+                  </a:lnTo>
+                  <a:lnTo>
+                    <a:pt x="2039990" y="102283"/>
+                  </a:lnTo>
+                  <a:lnTo>
+                    <a:pt x="1969645" y="99173"/>
+                  </a:lnTo>
+                  <a:lnTo>
+                    <a:pt x="1899301" y="96035"/>
+                  </a:lnTo>
+                  <a:lnTo>
+                    <a:pt x="1828956" y="92869"/>
+                  </a:lnTo>
+                  <a:lnTo>
+                    <a:pt x="1758612" y="89675"/>
+                  </a:lnTo>
+                  <a:lnTo>
+                    <a:pt x="1688267" y="86453"/>
+                  </a:lnTo>
+                  <a:lnTo>
+                    <a:pt x="1617923" y="83203"/>
+                  </a:lnTo>
+                  <a:lnTo>
+                    <a:pt x="1547578" y="79924"/>
+                  </a:lnTo>
+                  <a:lnTo>
+                    <a:pt x="1477234" y="76616"/>
+                  </a:lnTo>
+                  <a:lnTo>
+                    <a:pt x="1406889" y="73279"/>
+                  </a:lnTo>
+                  <a:lnTo>
+                    <a:pt x="1336545" y="69913"/>
+                  </a:lnTo>
+                  <a:lnTo>
+                    <a:pt x="1266200" y="66517"/>
+                  </a:lnTo>
+                  <a:lnTo>
+                    <a:pt x="1195856" y="63090"/>
+                  </a:lnTo>
+                  <a:lnTo>
+                    <a:pt x="1125511" y="59634"/>
+                  </a:lnTo>
+                  <a:lnTo>
+                    <a:pt x="1055167" y="56147"/>
+                  </a:lnTo>
+                  <a:lnTo>
+                    <a:pt x="984822" y="52630"/>
+                  </a:lnTo>
+                  <a:lnTo>
+                    <a:pt x="914478" y="49081"/>
+                  </a:lnTo>
+                  <a:lnTo>
+                    <a:pt x="844133" y="45501"/>
+                  </a:lnTo>
+                  <a:lnTo>
+                    <a:pt x="773789" y="41890"/>
+                  </a:lnTo>
+                  <a:lnTo>
+                    <a:pt x="703444" y="38247"/>
+                  </a:lnTo>
+                  <a:lnTo>
+                    <a:pt x="633100" y="34571"/>
+                  </a:lnTo>
+                  <a:lnTo>
+                    <a:pt x="562755" y="30864"/>
+                  </a:lnTo>
+                  <a:lnTo>
+                    <a:pt x="492411" y="27123"/>
+                  </a:lnTo>
+                  <a:lnTo>
+                    <a:pt x="422066" y="23350"/>
+                  </a:lnTo>
+                  <a:lnTo>
+                    <a:pt x="351722" y="19543"/>
+                  </a:lnTo>
+                  <a:lnTo>
+                    <a:pt x="281377" y="15703"/>
+                  </a:lnTo>
+                  <a:lnTo>
+                    <a:pt x="211033" y="11828"/>
+                  </a:lnTo>
+                  <a:lnTo>
+                    <a:pt x="140688" y="7920"/>
+                  </a:lnTo>
+                  <a:lnTo>
+                    <a:pt x="70344" y="3977"/>
+                  </a:lnTo>
+                  <a:lnTo>
+                    <a:pt x="0" y="0"/>
+                  </a:lnTo>
+                </a:path>
+              </a:pathLst>
+            </a:custGeom>
+          </p:spPr>
+          <p:txBody>
+            <a:bodyPr/>
+            <a:lstStyle/>
+            <a:p/>
+          </p:txBody>
+        </p:sp>
+        <p:sp>
+          <p:nvSpPr>
+            <p:cNvPr id="69" name="pl69"/>
+            <p:cNvSpPr/>
+            <p:nvPr/>
+          </p:nvSpPr>
+          <p:spPr>
+            <a:xfrm>
+              <a:off x="1235312" y="4944180"/>
+              <a:ext cx="6964104" cy="519406"/>
+            </a:xfrm>
+            <a:custGeom>
+              <a:avLst/>
+              <a:pathLst>
+                <a:path w="6964104" h="519406">
+                  <a:moveTo>
+                    <a:pt x="0" y="0"/>
+                  </a:moveTo>
+                  <a:lnTo>
+                    <a:pt x="70344" y="10463"/>
+                  </a:lnTo>
+                  <a:lnTo>
+                    <a:pt x="140688" y="20758"/>
+                  </a:lnTo>
+                  <a:lnTo>
+                    <a:pt x="211033" y="30888"/>
+                  </a:lnTo>
+                  <a:lnTo>
+                    <a:pt x="281377" y="40854"/>
+                  </a:lnTo>
+                  <a:lnTo>
+                    <a:pt x="351722" y="50660"/>
+                  </a:lnTo>
+                  <a:lnTo>
+                    <a:pt x="422066" y="60307"/>
+                  </a:lnTo>
+                  <a:lnTo>
+                    <a:pt x="492411" y="69799"/>
+                  </a:lnTo>
+                  <a:lnTo>
+                    <a:pt x="562755" y="79139"/>
+                  </a:lnTo>
+                  <a:lnTo>
+                    <a:pt x="633100" y="88327"/>
+                  </a:lnTo>
+                  <a:lnTo>
+                    <a:pt x="703444" y="97368"/>
+                  </a:lnTo>
+                  <a:lnTo>
+                    <a:pt x="773789" y="106263"/>
+                  </a:lnTo>
+                  <a:lnTo>
+                    <a:pt x="844133" y="115015"/>
+                  </a:lnTo>
+                  <a:lnTo>
+                    <a:pt x="914478" y="123626"/>
+                  </a:lnTo>
+                  <a:lnTo>
+                    <a:pt x="984822" y="132098"/>
+                  </a:lnTo>
+                  <a:lnTo>
+                    <a:pt x="1055167" y="140434"/>
+                  </a:lnTo>
+                  <a:lnTo>
+                    <a:pt x="1125511" y="148635"/>
+                  </a:lnTo>
+                  <a:lnTo>
+                    <a:pt x="1195856" y="156704"/>
+                  </a:lnTo>
+                  <a:lnTo>
+                    <a:pt x="1266200" y="164643"/>
+                  </a:lnTo>
+                  <a:lnTo>
+                    <a:pt x="1336545" y="172455"/>
+                  </a:lnTo>
+                  <a:lnTo>
+                    <a:pt x="1406889" y="180140"/>
+                  </a:lnTo>
+                  <a:lnTo>
+                    <a:pt x="1477234" y="187702"/>
+                  </a:lnTo>
+                  <a:lnTo>
+                    <a:pt x="1547578" y="195142"/>
+                  </a:lnTo>
+                  <a:lnTo>
+                    <a:pt x="1617923" y="202462"/>
+                  </a:lnTo>
+                  <a:lnTo>
+                    <a:pt x="1688267" y="209664"/>
+                  </a:lnTo>
+                  <a:lnTo>
+                    <a:pt x="1758612" y="216750"/>
+                  </a:lnTo>
+                  <a:lnTo>
+                    <a:pt x="1828956" y="223721"/>
+                  </a:lnTo>
+                  <a:lnTo>
+                    <a:pt x="1899301" y="230581"/>
+                  </a:lnTo>
+                  <a:lnTo>
+                    <a:pt x="1969645" y="237330"/>
+                  </a:lnTo>
+                  <a:lnTo>
+                    <a:pt x="2039990" y="243970"/>
+                  </a:lnTo>
+                  <a:lnTo>
+                    <a:pt x="2110334" y="250504"/>
+                  </a:lnTo>
+                  <a:lnTo>
+                    <a:pt x="2180679" y="256932"/>
+                  </a:lnTo>
+                  <a:lnTo>
+                    <a:pt x="2251023" y="263256"/>
+                  </a:lnTo>
+                  <a:lnTo>
+                    <a:pt x="2321368" y="269479"/>
+                  </a:lnTo>
+                  <a:lnTo>
+                    <a:pt x="2391712" y="275601"/>
+                  </a:lnTo>
+                  <a:lnTo>
+                    <a:pt x="2462057" y="281625"/>
+                  </a:lnTo>
+                  <a:lnTo>
+                    <a:pt x="2532401" y="287552"/>
+                  </a:lnTo>
+                  <a:lnTo>
+                    <a:pt x="2602746" y="293383"/>
+                  </a:lnTo>
+                  <a:lnTo>
+                    <a:pt x="2673090" y="299120"/>
+                  </a:lnTo>
+                  <a:lnTo>
+                    <a:pt x="2743435" y="304765"/>
+                  </a:lnTo>
+                  <a:lnTo>
+                    <a:pt x="2813779" y="310319"/>
+                  </a:lnTo>
+                  <a:lnTo>
+                    <a:pt x="2884124" y="315783"/>
+                  </a:lnTo>
+                  <a:lnTo>
+                    <a:pt x="2954468" y="321160"/>
+                  </a:lnTo>
+                  <a:lnTo>
+                    <a:pt x="3024813" y="326449"/>
+                  </a:lnTo>
+                  <a:lnTo>
+                    <a:pt x="3095157" y="331654"/>
+                  </a:lnTo>
+                  <a:lnTo>
+                    <a:pt x="3165502" y="336775"/>
+                  </a:lnTo>
+                  <a:lnTo>
+                    <a:pt x="3235846" y="341813"/>
+                  </a:lnTo>
+                  <a:lnTo>
+                    <a:pt x="3306191" y="346770"/>
+                  </a:lnTo>
+                  <a:lnTo>
+                    <a:pt x="3376535" y="351647"/>
+                  </a:lnTo>
+                  <a:lnTo>
+                    <a:pt x="3446880" y="356446"/>
+                  </a:lnTo>
+                  <a:lnTo>
+                    <a:pt x="3517224" y="361167"/>
+                  </a:lnTo>
+                  <a:lnTo>
+                    <a:pt x="3587569" y="365812"/>
+                  </a:lnTo>
+                  <a:lnTo>
+                    <a:pt x="3657913" y="370383"/>
+                  </a:lnTo>
+                  <a:lnTo>
+                    <a:pt x="3728257" y="374879"/>
+                  </a:lnTo>
+                  <a:lnTo>
+                    <a:pt x="3798602" y="379304"/>
+                  </a:lnTo>
+                  <a:lnTo>
+                    <a:pt x="3868946" y="383657"/>
+                  </a:lnTo>
+                  <a:lnTo>
+                    <a:pt x="3939291" y="387940"/>
+                  </a:lnTo>
+                  <a:lnTo>
+                    <a:pt x="4009635" y="392154"/>
+                  </a:lnTo>
+                  <a:lnTo>
+                    <a:pt x="4079980" y="396300"/>
+                  </a:lnTo>
+                  <a:lnTo>
+                    <a:pt x="4150324" y="400379"/>
+                  </a:lnTo>
+                  <a:lnTo>
+                    <a:pt x="4220669" y="404392"/>
+                  </a:lnTo>
+                  <a:lnTo>
+                    <a:pt x="4291013" y="408341"/>
+                  </a:lnTo>
+                  <a:lnTo>
+                    <a:pt x="4361358" y="412227"/>
+                  </a:lnTo>
+                  <a:lnTo>
+                    <a:pt x="4431702" y="416049"/>
+                  </a:lnTo>
+                  <a:lnTo>
+                    <a:pt x="4502047" y="419810"/>
+                  </a:lnTo>
+                  <a:lnTo>
+                    <a:pt x="4572391" y="423511"/>
+                  </a:lnTo>
+                  <a:lnTo>
+                    <a:pt x="4642736" y="427152"/>
+                  </a:lnTo>
+                  <a:lnTo>
+                    <a:pt x="4713080" y="430734"/>
+                  </a:lnTo>
+                  <a:lnTo>
+                    <a:pt x="4783425" y="434258"/>
+                  </a:lnTo>
+                  <a:lnTo>
+                    <a:pt x="4853769" y="437726"/>
+                  </a:lnTo>
+                  <a:lnTo>
+                    <a:pt x="4924114" y="441138"/>
+                  </a:lnTo>
+                  <a:lnTo>
+                    <a:pt x="4994458" y="444495"/>
+                  </a:lnTo>
+                  <a:lnTo>
+                    <a:pt x="5064803" y="447798"/>
+                  </a:lnTo>
+                  <a:lnTo>
+                    <a:pt x="5135147" y="451047"/>
+                  </a:lnTo>
+                  <a:lnTo>
+                    <a:pt x="5205492" y="454244"/>
+                  </a:lnTo>
+                  <a:lnTo>
+                    <a:pt x="5275836" y="457390"/>
+                  </a:lnTo>
+                  <a:lnTo>
+                    <a:pt x="5346181" y="460485"/>
+                  </a:lnTo>
+                  <a:lnTo>
+                    <a:pt x="5416525" y="463530"/>
+                  </a:lnTo>
+                  <a:lnTo>
+                    <a:pt x="5486870" y="466526"/>
+                  </a:lnTo>
+                  <a:lnTo>
+                    <a:pt x="5557214" y="469474"/>
+                  </a:lnTo>
+                  <a:lnTo>
+                    <a:pt x="5627559" y="472375"/>
+                  </a:lnTo>
+                  <a:lnTo>
+                    <a:pt x="5697903" y="475228"/>
+                  </a:lnTo>
+                  <a:lnTo>
+                    <a:pt x="5768248" y="478036"/>
+                  </a:lnTo>
+                  <a:lnTo>
+                    <a:pt x="5838592" y="480798"/>
+                  </a:lnTo>
+                  <a:lnTo>
+                    <a:pt x="5908937" y="483516"/>
+                  </a:lnTo>
+                  <a:lnTo>
+                    <a:pt x="5979281" y="486191"/>
+                  </a:lnTo>
+                  <a:lnTo>
+                    <a:pt x="6049626" y="488822"/>
+                  </a:lnTo>
+                  <a:lnTo>
+                    <a:pt x="6119970" y="491410"/>
+                  </a:lnTo>
+                  <a:lnTo>
+                    <a:pt x="6190315" y="493957"/>
+                  </a:lnTo>
+                  <a:lnTo>
+                    <a:pt x="6260659" y="496463"/>
+                  </a:lnTo>
+                  <a:lnTo>
+                    <a:pt x="6331004" y="498929"/>
+                  </a:lnTo>
+                  <a:lnTo>
+                    <a:pt x="6401348" y="501355"/>
+                  </a:lnTo>
+                  <a:lnTo>
+                    <a:pt x="6471693" y="503741"/>
+                  </a:lnTo>
+                  <a:lnTo>
+                    <a:pt x="6542037" y="506090"/>
+                  </a:lnTo>
+                  <a:lnTo>
+                    <a:pt x="6612382" y="508400"/>
+                  </a:lnTo>
+                  <a:lnTo>
+                    <a:pt x="6682726" y="510674"/>
+                  </a:lnTo>
+                  <a:lnTo>
+                    <a:pt x="6753071" y="512910"/>
+                  </a:lnTo>
+                  <a:lnTo>
+                    <a:pt x="6823415" y="515111"/>
+                  </a:lnTo>
+                  <a:lnTo>
+                    <a:pt x="6893760" y="517276"/>
+                  </a:lnTo>
+                  <a:lnTo>
+                    <a:pt x="6964104" y="519406"/>
+                  </a:lnTo>
+                </a:path>
+              </a:pathLst>
+            </a:custGeom>
+            <a:ln w="27101" cap="flat">
+              <a:solidFill>
+                <a:srgbClr val="FF8C00">
+                  <a:alpha val="100000"/>
+                </a:srgbClr>
+              </a:solidFill>
+              <a:prstDash val="solid"/>
+              <a:round/>
+            </a:ln>
+          </p:spPr>
+          <p:txBody>
+            <a:bodyPr/>
+            <a:lstStyle/>
+            <a:p/>
+          </p:txBody>
+        </p:sp>
+        <p:sp>
+          <p:nvSpPr>
+            <p:cNvPr id="70" name="pl70"/>
+            <p:cNvSpPr/>
+            <p:nvPr/>
+          </p:nvSpPr>
+          <p:spPr>
+            <a:xfrm>
+              <a:off x="887106" y="5294352"/>
+              <a:ext cx="7660515" cy="0"/>
+            </a:xfrm>
+            <a:custGeom>
+              <a:avLst/>
+              <a:pathLst>
+                <a:path w="7660515" h="0">
+                  <a:moveTo>
+                    <a:pt x="0" y="0"/>
+                  </a:moveTo>
+                  <a:lnTo>
+                    <a:pt x="7660515" y="0"/>
+                  </a:lnTo>
+                  <a:lnTo>
+                    <a:pt x="7660515" y="0"/>
+                  </a:lnTo>
+                </a:path>
+              </a:pathLst>
+            </a:custGeom>
+            <a:ln w="13550" cap="flat">
+              <a:solidFill>
+                <a:srgbClr val="7F7F7F">
+                  <a:alpha val="100000"/>
+                </a:srgbClr>
+              </a:solidFill>
+              <a:prstDash val="dash"/>
+              <a:round/>
+            </a:ln>
+          </p:spPr>
+          <p:txBody>
+            <a:bodyPr/>
+            <a:lstStyle/>
+            <a:p/>
+          </p:txBody>
+        </p:sp>
+        <p:sp>
+          <p:nvSpPr>
+            <p:cNvPr id="71" name="pl71"/>
+            <p:cNvSpPr/>
+            <p:nvPr/>
+          </p:nvSpPr>
+          <p:spPr>
+            <a:xfrm>
+              <a:off x="4590457" y="4336484"/>
+              <a:ext cx="0" cy="1317069"/>
+            </a:xfrm>
+            <a:custGeom>
+              <a:avLst/>
+              <a:pathLst>
+                <a:path w="0" h="1317069">
+                  <a:moveTo>
+                    <a:pt x="0" y="1317069"/>
+                  </a:moveTo>
+                  <a:lnTo>
+                    <a:pt x="0" y="0"/>
+                  </a:lnTo>
+                  <a:lnTo>
+                    <a:pt x="0" y="0"/>
+                  </a:lnTo>
+                </a:path>
+              </a:pathLst>
+            </a:custGeom>
+            <a:ln w="13550" cap="flat">
+              <a:solidFill>
+                <a:srgbClr val="666666">
+                  <a:alpha val="100000"/>
+                </a:srgbClr>
+              </a:solidFill>
+              <a:prstDash val="dot"/>
+              <a:round/>
+            </a:ln>
+          </p:spPr>
+          <p:txBody>
+            <a:bodyPr/>
+            <a:lstStyle/>
+            <a:p/>
+          </p:txBody>
+        </p:sp>
+        <p:sp>
+          <p:nvSpPr>
+            <p:cNvPr id="72" name="tx72"/>
+            <p:cNvSpPr/>
+            <p:nvPr/>
+          </p:nvSpPr>
+          <p:spPr>
+            <a:xfrm>
+              <a:off x="762297" y="5553636"/>
+              <a:ext cx="62179" cy="80101"/>
+            </a:xfrm>
+            <a:prstGeom prst="rect">
+              <a:avLst/>
+            </a:prstGeom>
+            <a:noFill/>
+          </p:spPr>
+          <p:txBody>
+            <a:bodyPr lIns="0" rIns="0" tIns="0" bIns="0" anchorCtr="1" anchor="ctr" wrap="none"/>
+            <a:lstStyle/>
+            <a:p>
+              <a:pPr algn="l" marL="0" marR="0" indent="0">
+                <a:lnSpc>
+                  <a:spcPts val="880"/>
+                </a:lnSpc>
+                <a:spcBef>
+                  <a:spcPts val="0"/>
+                </a:spcBef>
+                <a:spcAft>
+                  <a:spcPts val="0"/>
+                </a:spcAft>
+              </a:pPr>
+              <a:r>
+                <a:rPr sz="880">
+                  <a:solidFill>
+                    <a:srgbClr val="4D4D4D">
+                      <a:alpha val="100000"/>
+                    </a:srgbClr>
+                  </a:solidFill>
+                  <a:latin typeface="Helvetica"/>
+                  <a:cs typeface="Helvetica"/>
+                </a:rPr>
+                <a:t>0</a:t>
+              </a:r>
+            </a:p>
+          </p:txBody>
+        </p:sp>
+        <p:sp>
+          <p:nvSpPr>
+            <p:cNvPr id="73" name="tx73"/>
+            <p:cNvSpPr/>
+            <p:nvPr/>
+          </p:nvSpPr>
+          <p:spPr>
+            <a:xfrm>
+              <a:off x="762297" y="5254302"/>
+              <a:ext cx="62179" cy="80101"/>
+            </a:xfrm>
+            <a:prstGeom prst="rect">
+              <a:avLst/>
+            </a:prstGeom>
+            <a:noFill/>
+          </p:spPr>
+          <p:txBody>
+            <a:bodyPr lIns="0" rIns="0" tIns="0" bIns="0" anchorCtr="1" anchor="ctr" wrap="none"/>
+            <a:lstStyle/>
+            <a:p>
+              <a:pPr algn="l" marL="0" marR="0" indent="0">
+                <a:lnSpc>
+                  <a:spcPts val="880"/>
+                </a:lnSpc>
+                <a:spcBef>
+                  <a:spcPts val="0"/>
+                </a:spcBef>
+                <a:spcAft>
+                  <a:spcPts val="0"/>
+                </a:spcAft>
+              </a:pPr>
+              <a:r>
+                <a:rPr sz="880">
+                  <a:solidFill>
+                    <a:srgbClr val="4D4D4D">
+                      <a:alpha val="100000"/>
+                    </a:srgbClr>
+                  </a:solidFill>
+                  <a:latin typeface="Helvetica"/>
+                  <a:cs typeface="Helvetica"/>
+                </a:rPr>
+                <a:t>1</a:t>
+              </a:r>
+            </a:p>
+          </p:txBody>
+        </p:sp>
+        <p:sp>
+          <p:nvSpPr>
+            <p:cNvPr id="74" name="tx74"/>
+            <p:cNvSpPr/>
+            <p:nvPr/>
+          </p:nvSpPr>
+          <p:spPr>
+            <a:xfrm>
+              <a:off x="762297" y="4954968"/>
+              <a:ext cx="62179" cy="80101"/>
+            </a:xfrm>
+            <a:prstGeom prst="rect">
+              <a:avLst/>
+            </a:prstGeom>
+            <a:noFill/>
+          </p:spPr>
+          <p:txBody>
+            <a:bodyPr lIns="0" rIns="0" tIns="0" bIns="0" anchorCtr="1" anchor="ctr" wrap="none"/>
+            <a:lstStyle/>
+            <a:p>
+              <a:pPr algn="l" marL="0" marR="0" indent="0">
+                <a:lnSpc>
+                  <a:spcPts val="880"/>
+                </a:lnSpc>
+                <a:spcBef>
+                  <a:spcPts val="0"/>
+                </a:spcBef>
+                <a:spcAft>
+                  <a:spcPts val="0"/>
+                </a:spcAft>
+              </a:pPr>
+              <a:r>
+                <a:rPr sz="880">
+                  <a:solidFill>
+                    <a:srgbClr val="4D4D4D">
+                      <a:alpha val="100000"/>
+                    </a:srgbClr>
+                  </a:solidFill>
+                  <a:latin typeface="Helvetica"/>
+                  <a:cs typeface="Helvetica"/>
+                </a:rPr>
+                <a:t>2</a:t>
+              </a:r>
+            </a:p>
+          </p:txBody>
+        </p:sp>
+        <p:sp>
+          <p:nvSpPr>
+            <p:cNvPr id="75" name="tx75"/>
+            <p:cNvSpPr/>
+            <p:nvPr/>
+          </p:nvSpPr>
+          <p:spPr>
+            <a:xfrm>
+              <a:off x="762297" y="4655634"/>
+              <a:ext cx="62179" cy="80101"/>
+            </a:xfrm>
+            <a:prstGeom prst="rect">
+              <a:avLst/>
+            </a:prstGeom>
+            <a:noFill/>
+          </p:spPr>
+          <p:txBody>
+            <a:bodyPr lIns="0" rIns="0" tIns="0" bIns="0" anchorCtr="1" anchor="ctr" wrap="none"/>
+            <a:lstStyle/>
+            <a:p>
+              <a:pPr algn="l" marL="0" marR="0" indent="0">
+                <a:lnSpc>
+                  <a:spcPts val="880"/>
+                </a:lnSpc>
+                <a:spcBef>
+                  <a:spcPts val="0"/>
+                </a:spcBef>
+                <a:spcAft>
+                  <a:spcPts val="0"/>
+                </a:spcAft>
+              </a:pPr>
+              <a:r>
+                <a:rPr sz="880">
+                  <a:solidFill>
+                    <a:srgbClr val="4D4D4D">
+                      <a:alpha val="100000"/>
+                    </a:srgbClr>
+                  </a:solidFill>
+                  <a:latin typeface="Helvetica"/>
+                  <a:cs typeface="Helvetica"/>
+                </a:rPr>
+                <a:t>3</a:t>
+              </a:r>
+            </a:p>
+          </p:txBody>
+        </p:sp>
+        <p:sp>
+          <p:nvSpPr>
+            <p:cNvPr id="76" name="tx76"/>
+            <p:cNvSpPr/>
+            <p:nvPr/>
+          </p:nvSpPr>
+          <p:spPr>
+            <a:xfrm>
+              <a:off x="762297" y="4356300"/>
+              <a:ext cx="62179" cy="80101"/>
+            </a:xfrm>
+            <a:prstGeom prst="rect">
+              <a:avLst/>
+            </a:prstGeom>
+            <a:noFill/>
+          </p:spPr>
+          <p:txBody>
+            <a:bodyPr lIns="0" rIns="0" tIns="0" bIns="0" anchorCtr="1" anchor="ctr" wrap="none"/>
+            <a:lstStyle/>
+            <a:p>
+              <a:pPr algn="l" marL="0" marR="0" indent="0">
+                <a:lnSpc>
+                  <a:spcPts val="880"/>
+                </a:lnSpc>
+                <a:spcBef>
+                  <a:spcPts val="0"/>
+                </a:spcBef>
+                <a:spcAft>
+                  <a:spcPts val="0"/>
+                </a:spcAft>
+              </a:pPr>
+              <a:r>
+                <a:rPr sz="880">
+                  <a:solidFill>
+                    <a:srgbClr val="4D4D4D">
+                      <a:alpha val="100000"/>
+                    </a:srgbClr>
+                  </a:solidFill>
+                  <a:latin typeface="Helvetica"/>
+                  <a:cs typeface="Helvetica"/>
+                </a:rPr>
+                <a:t>4</a:t>
+              </a:r>
+            </a:p>
+          </p:txBody>
+        </p:sp>
+        <p:sp>
+          <p:nvSpPr>
+            <p:cNvPr id="77" name="tx77"/>
+            <p:cNvSpPr/>
+            <p:nvPr/>
+          </p:nvSpPr>
+          <p:spPr>
+            <a:xfrm>
+              <a:off x="1133333" y="5716183"/>
+              <a:ext cx="161574" cy="80101"/>
+            </a:xfrm>
+            <a:prstGeom prst="rect">
+              <a:avLst/>
+            </a:prstGeom>
+            <a:noFill/>
+          </p:spPr>
+          <p:txBody>
+            <a:bodyPr lIns="0" rIns="0" tIns="0" bIns="0" anchorCtr="1" anchor="ctr" wrap="none"/>
+            <a:lstStyle/>
+            <a:p>
+              <a:pPr algn="l" marL="0" marR="0" indent="0">
+                <a:lnSpc>
+                  <a:spcPts val="880"/>
+                </a:lnSpc>
+                <a:spcBef>
+                  <a:spcPts val="0"/>
+                </a:spcBef>
+                <a:spcAft>
+                  <a:spcPts val="0"/>
+                </a:spcAft>
+              </a:pPr>
+              <a:r>
+                <a:rPr sz="880">
+                  <a:solidFill>
+                    <a:srgbClr val="4D4D4D">
+                      <a:alpha val="100000"/>
+                    </a:srgbClr>
+                  </a:solidFill>
+                  <a:latin typeface="Helvetica"/>
+                  <a:cs typeface="Helvetica"/>
+                </a:rPr>
+                <a:t>-40</a:t>
+              </a:r>
+            </a:p>
+          </p:txBody>
+        </p:sp>
+        <p:sp>
+          <p:nvSpPr>
+            <p:cNvPr id="78" name="tx78"/>
+            <p:cNvSpPr/>
+            <p:nvPr/>
+          </p:nvSpPr>
+          <p:spPr>
+            <a:xfrm>
+              <a:off x="1978619" y="5716183"/>
+              <a:ext cx="161574" cy="80101"/>
+            </a:xfrm>
+            <a:prstGeom prst="rect">
+              <a:avLst/>
+            </a:prstGeom>
+            <a:noFill/>
+          </p:spPr>
+          <p:txBody>
+            <a:bodyPr lIns="0" rIns="0" tIns="0" bIns="0" anchorCtr="1" anchor="ctr" wrap="none"/>
+            <a:lstStyle/>
+            <a:p>
+              <a:pPr algn="l" marL="0" marR="0" indent="0">
+                <a:lnSpc>
+                  <a:spcPts val="880"/>
+                </a:lnSpc>
+                <a:spcBef>
+                  <a:spcPts val="0"/>
+                </a:spcBef>
+                <a:spcAft>
+                  <a:spcPts val="0"/>
+                </a:spcAft>
+              </a:pPr>
+              <a:r>
+                <a:rPr sz="880">
+                  <a:solidFill>
+                    <a:srgbClr val="4D4D4D">
+                      <a:alpha val="100000"/>
+                    </a:srgbClr>
+                  </a:solidFill>
+                  <a:latin typeface="Helvetica"/>
+                  <a:cs typeface="Helvetica"/>
+                </a:rPr>
+                <a:t>-30</a:t>
+              </a:r>
+            </a:p>
+          </p:txBody>
+        </p:sp>
+        <p:sp>
+          <p:nvSpPr>
+            <p:cNvPr id="79" name="tx79"/>
+            <p:cNvSpPr/>
+            <p:nvPr/>
+          </p:nvSpPr>
+          <p:spPr>
+            <a:xfrm>
+              <a:off x="2823906" y="5716183"/>
+              <a:ext cx="161574" cy="80101"/>
+            </a:xfrm>
+            <a:prstGeom prst="rect">
+              <a:avLst/>
+            </a:prstGeom>
+            <a:noFill/>
+          </p:spPr>
+          <p:txBody>
+            <a:bodyPr lIns="0" rIns="0" tIns="0" bIns="0" anchorCtr="1" anchor="ctr" wrap="none"/>
+            <a:lstStyle/>
+            <a:p>
+              <a:pPr algn="l" marL="0" marR="0" indent="0">
+                <a:lnSpc>
+                  <a:spcPts val="880"/>
+                </a:lnSpc>
+                <a:spcBef>
+                  <a:spcPts val="0"/>
+                </a:spcBef>
+                <a:spcAft>
+                  <a:spcPts val="0"/>
+                </a:spcAft>
+              </a:pPr>
+              <a:r>
+                <a:rPr sz="880">
+                  <a:solidFill>
+                    <a:srgbClr val="4D4D4D">
+                      <a:alpha val="100000"/>
+                    </a:srgbClr>
+                  </a:solidFill>
+                  <a:latin typeface="Helvetica"/>
+                  <a:cs typeface="Helvetica"/>
+                </a:rPr>
+                <a:t>-20</a:t>
+              </a:r>
+            </a:p>
+          </p:txBody>
+        </p:sp>
+        <p:sp>
+          <p:nvSpPr>
+            <p:cNvPr id="80" name="tx80"/>
+            <p:cNvSpPr/>
+            <p:nvPr/>
+          </p:nvSpPr>
+          <p:spPr>
+            <a:xfrm>
+              <a:off x="3669192" y="5716183"/>
+              <a:ext cx="161574" cy="80101"/>
+            </a:xfrm>
+            <a:prstGeom prst="rect">
+              <a:avLst/>
+            </a:prstGeom>
+            <a:noFill/>
+          </p:spPr>
+          <p:txBody>
+            <a:bodyPr lIns="0" rIns="0" tIns="0" bIns="0" anchorCtr="1" anchor="ctr" wrap="none"/>
+            <a:lstStyle/>
+            <a:p>
+              <a:pPr algn="l" marL="0" marR="0" indent="0">
+                <a:lnSpc>
+                  <a:spcPts val="880"/>
+                </a:lnSpc>
+                <a:spcBef>
+                  <a:spcPts val="0"/>
+                </a:spcBef>
+                <a:spcAft>
+                  <a:spcPts val="0"/>
+                </a:spcAft>
+              </a:pPr>
+              <a:r>
+                <a:rPr sz="880">
+                  <a:solidFill>
+                    <a:srgbClr val="4D4D4D">
+                      <a:alpha val="100000"/>
+                    </a:srgbClr>
+                  </a:solidFill>
+                  <a:latin typeface="Helvetica"/>
+                  <a:cs typeface="Helvetica"/>
+                </a:rPr>
+                <a:t>-10</a:t>
+              </a:r>
+            </a:p>
+          </p:txBody>
+        </p:sp>
+        <p:sp>
+          <p:nvSpPr>
+            <p:cNvPr id="81" name="tx81"/>
+            <p:cNvSpPr/>
+            <p:nvPr/>
+          </p:nvSpPr>
+          <p:spPr>
+            <a:xfrm>
+              <a:off x="4564176" y="5716183"/>
+              <a:ext cx="62179" cy="80101"/>
+            </a:xfrm>
+            <a:prstGeom prst="rect">
+              <a:avLst/>
+            </a:prstGeom>
+            <a:noFill/>
+          </p:spPr>
+          <p:txBody>
+            <a:bodyPr lIns="0" rIns="0" tIns="0" bIns="0" anchorCtr="1" anchor="ctr" wrap="none"/>
+            <a:lstStyle/>
+            <a:p>
+              <a:pPr algn="l" marL="0" marR="0" indent="0">
+                <a:lnSpc>
+                  <a:spcPts val="880"/>
+                </a:lnSpc>
+                <a:spcBef>
+                  <a:spcPts val="0"/>
+                </a:spcBef>
+                <a:spcAft>
+                  <a:spcPts val="0"/>
+                </a:spcAft>
+              </a:pPr>
+              <a:r>
+                <a:rPr sz="880">
+                  <a:solidFill>
+                    <a:srgbClr val="4D4D4D">
+                      <a:alpha val="100000"/>
+                    </a:srgbClr>
+                  </a:solidFill>
+                  <a:latin typeface="Helvetica"/>
+                  <a:cs typeface="Helvetica"/>
+                </a:rPr>
+                <a:t>0</a:t>
+              </a:r>
+            </a:p>
+          </p:txBody>
+        </p:sp>
+        <p:sp>
+          <p:nvSpPr>
+            <p:cNvPr id="82" name="tx82"/>
+            <p:cNvSpPr/>
+            <p:nvPr/>
+          </p:nvSpPr>
+          <p:spPr>
+            <a:xfrm>
+              <a:off x="5378373" y="5716183"/>
+              <a:ext cx="124358" cy="80101"/>
+            </a:xfrm>
+            <a:prstGeom prst="rect">
+              <a:avLst/>
+            </a:prstGeom>
+            <a:noFill/>
+          </p:spPr>
+          <p:txBody>
+            <a:bodyPr lIns="0" rIns="0" tIns="0" bIns="0" anchorCtr="1" anchor="ctr" wrap="none"/>
+            <a:lstStyle/>
+            <a:p>
+              <a:pPr algn="l" marL="0" marR="0" indent="0">
+                <a:lnSpc>
+                  <a:spcPts val="880"/>
+                </a:lnSpc>
+                <a:spcBef>
+                  <a:spcPts val="0"/>
+                </a:spcBef>
+                <a:spcAft>
+                  <a:spcPts val="0"/>
+                </a:spcAft>
+              </a:pPr>
+              <a:r>
+                <a:rPr sz="880">
+                  <a:solidFill>
+                    <a:srgbClr val="4D4D4D">
+                      <a:alpha val="100000"/>
+                    </a:srgbClr>
+                  </a:solidFill>
+                  <a:latin typeface="Helvetica"/>
+                  <a:cs typeface="Helvetica"/>
+                </a:rPr>
+                <a:t>10</a:t>
+              </a:r>
+            </a:p>
+          </p:txBody>
+        </p:sp>
+        <p:sp>
+          <p:nvSpPr>
+            <p:cNvPr id="83" name="tx83"/>
+            <p:cNvSpPr/>
+            <p:nvPr/>
+          </p:nvSpPr>
+          <p:spPr>
+            <a:xfrm>
+              <a:off x="6223659" y="5716183"/>
+              <a:ext cx="124358" cy="80101"/>
+            </a:xfrm>
+            <a:prstGeom prst="rect">
+              <a:avLst/>
+            </a:prstGeom>
+            <a:noFill/>
+          </p:spPr>
+          <p:txBody>
+            <a:bodyPr lIns="0" rIns="0" tIns="0" bIns="0" anchorCtr="1" anchor="ctr" wrap="none"/>
+            <a:lstStyle/>
+            <a:p>
+              <a:pPr algn="l" marL="0" marR="0" indent="0">
+                <a:lnSpc>
+                  <a:spcPts val="880"/>
+                </a:lnSpc>
+                <a:spcBef>
+                  <a:spcPts val="0"/>
+                </a:spcBef>
+                <a:spcAft>
+                  <a:spcPts val="0"/>
+                </a:spcAft>
+              </a:pPr>
+              <a:r>
+                <a:rPr sz="880">
+                  <a:solidFill>
+                    <a:srgbClr val="4D4D4D">
+                      <a:alpha val="100000"/>
+                    </a:srgbClr>
+                  </a:solidFill>
+                  <a:latin typeface="Helvetica"/>
+                  <a:cs typeface="Helvetica"/>
+                </a:rPr>
+                <a:t>20</a:t>
+              </a:r>
+            </a:p>
+          </p:txBody>
+        </p:sp>
+        <p:sp>
+          <p:nvSpPr>
+            <p:cNvPr id="84" name="tx84"/>
+            <p:cNvSpPr/>
+            <p:nvPr/>
+          </p:nvSpPr>
+          <p:spPr>
+            <a:xfrm>
+              <a:off x="7068946" y="5716183"/>
+              <a:ext cx="124358" cy="80101"/>
+            </a:xfrm>
+            <a:prstGeom prst="rect">
+              <a:avLst/>
+            </a:prstGeom>
+            <a:noFill/>
+          </p:spPr>
+          <p:txBody>
+            <a:bodyPr lIns="0" rIns="0" tIns="0" bIns="0" anchorCtr="1" anchor="ctr" wrap="none"/>
+            <a:lstStyle/>
+            <a:p>
+              <a:pPr algn="l" marL="0" marR="0" indent="0">
+                <a:lnSpc>
+                  <a:spcPts val="880"/>
+                </a:lnSpc>
+                <a:spcBef>
+                  <a:spcPts val="0"/>
+                </a:spcBef>
+                <a:spcAft>
+                  <a:spcPts val="0"/>
+                </a:spcAft>
+              </a:pPr>
+              <a:r>
+                <a:rPr sz="880">
+                  <a:solidFill>
+                    <a:srgbClr val="4D4D4D">
+                      <a:alpha val="100000"/>
+                    </a:srgbClr>
+                  </a:solidFill>
+                  <a:latin typeface="Helvetica"/>
+                  <a:cs typeface="Helvetica"/>
+                </a:rPr>
+                <a:t>30</a:t>
+              </a:r>
+            </a:p>
+          </p:txBody>
+        </p:sp>
+        <p:sp>
+          <p:nvSpPr>
+            <p:cNvPr id="85" name="tx85"/>
+            <p:cNvSpPr/>
+            <p:nvPr/>
+          </p:nvSpPr>
+          <p:spPr>
+            <a:xfrm>
+              <a:off x="7914232" y="5716183"/>
+              <a:ext cx="124358" cy="80101"/>
+            </a:xfrm>
+            <a:prstGeom prst="rect">
+              <a:avLst/>
+            </a:prstGeom>
+            <a:noFill/>
+          </p:spPr>
+          <p:txBody>
+            <a:bodyPr lIns="0" rIns="0" tIns="0" bIns="0" anchorCtr="1" anchor="ctr" wrap="none"/>
+            <a:lstStyle/>
+            <a:p>
+              <a:pPr algn="l" marL="0" marR="0" indent="0">
+                <a:lnSpc>
+                  <a:spcPts val="880"/>
+                </a:lnSpc>
+                <a:spcBef>
+                  <a:spcPts val="0"/>
+                </a:spcBef>
+                <a:spcAft>
+                  <a:spcPts val="0"/>
+                </a:spcAft>
+              </a:pPr>
+              <a:r>
+                <a:rPr sz="880">
+                  <a:solidFill>
+                    <a:srgbClr val="4D4D4D">
+                      <a:alpha val="100000"/>
+                    </a:srgbClr>
+                  </a:solidFill>
+                  <a:latin typeface="Helvetica"/>
+                  <a:cs typeface="Helvetica"/>
+                </a:rPr>
+                <a:t>40</a:t>
+              </a:r>
+            </a:p>
+          </p:txBody>
+        </p:sp>
+        <p:sp>
+          <p:nvSpPr>
+            <p:cNvPr id="86" name="tx86"/>
+            <p:cNvSpPr/>
+            <p:nvPr/>
+          </p:nvSpPr>
+          <p:spPr>
+            <a:xfrm>
+              <a:off x="2928340" y="5855859"/>
+              <a:ext cx="3578047" cy="100218"/>
+            </a:xfrm>
+            <a:prstGeom prst="rect">
+              <a:avLst/>
+            </a:prstGeom>
+            <a:noFill/>
+          </p:spPr>
+          <p:txBody>
+            <a:bodyPr lIns="0" rIns="0" tIns="0" bIns="0" anchorCtr="1" anchor="ctr" wrap="none"/>
+            <a:lstStyle/>
+            <a:p>
+              <a:pPr algn="l" marL="0" marR="0" indent="0">
+                <a:lnSpc>
+                  <a:spcPts val="1100"/>
+                </a:lnSpc>
+                <a:spcBef>
+                  <a:spcPts val="0"/>
+                </a:spcBef>
+                <a:spcAft>
+                  <a:spcPts val="0"/>
+                </a:spcAft>
+              </a:pPr>
+              <a:r>
+                <a:rPr sz="1100">
+                  <a:solidFill>
+                    <a:srgbClr val="000000">
+                      <a:alpha val="100000"/>
+                    </a:srgbClr>
+                  </a:solidFill>
+                  <a:latin typeface="Helvetica"/>
+                  <a:cs typeface="Helvetica"/>
+                </a:rPr>
+                <a:t>eGFR difference (%): 100 × (CKD-EPI Cr-Cys − CG) / CG</a:t>
+              </a:r>
+            </a:p>
+          </p:txBody>
+        </p:sp>
+        <p:sp>
+          <p:nvSpPr>
+            <p:cNvPr id="87" name="tx87"/>
+            <p:cNvSpPr/>
+            <p:nvPr/>
+          </p:nvSpPr>
+          <p:spPr>
+            <a:xfrm rot="-5400000">
+              <a:off x="138035" y="4944909"/>
+              <a:ext cx="1016904" cy="100218"/>
+            </a:xfrm>
+            <a:prstGeom prst="rect">
+              <a:avLst/>
+            </a:prstGeom>
+            <a:noFill/>
+          </p:spPr>
+          <p:txBody>
+            <a:bodyPr lIns="0" rIns="0" tIns="0" bIns="0" anchorCtr="1" anchor="ctr" wrap="none"/>
+            <a:lstStyle/>
+            <a:p>
+              <a:pPr algn="l" marL="0" marR="0" indent="0">
+                <a:lnSpc>
+                  <a:spcPts val="1100"/>
+                </a:lnSpc>
+                <a:spcBef>
+                  <a:spcPts val="0"/>
+                </a:spcBef>
+                <a:spcAft>
+                  <a:spcPts val="0"/>
+                </a:spcAft>
+              </a:pPr>
+              <a:r>
+                <a:rPr sz="1100">
+                  <a:solidFill>
+                    <a:srgbClr val="000000">
+                      <a:alpha val="100000"/>
+                    </a:srgbClr>
+                  </a:solidFill>
+                  <a:latin typeface="Helvetica"/>
+                  <a:cs typeface="Helvetica"/>
+                </a:rPr>
+                <a:t>subHR (95% CI)</a:t>
+              </a:r>
+            </a:p>
+          </p:txBody>
+        </p:sp>
+        <p:sp>
+          <p:nvSpPr>
+            <p:cNvPr id="88" name="tx88"/>
+            <p:cNvSpPr/>
+            <p:nvPr/>
+          </p:nvSpPr>
+          <p:spPr>
+            <a:xfrm>
+              <a:off x="887106" y="4159544"/>
+              <a:ext cx="7052127" cy="82021"/>
+            </a:xfrm>
+            <a:prstGeom prst="rect">
+              <a:avLst/>
+            </a:prstGeom>
+            <a:noFill/>
+          </p:spPr>
+          <p:txBody>
+            <a:bodyPr lIns="0" rIns="0" tIns="0" bIns="0" anchorCtr="1" anchor="ctr" wrap="none"/>
+            <a:lstStyle/>
+            <a:p>
+              <a:pPr algn="l" marL="0" marR="0" indent="0">
+                <a:lnSpc>
+                  <a:spcPts val="900"/>
+                </a:lnSpc>
+                <a:spcBef>
+                  <a:spcPts val="0"/>
+                </a:spcBef>
+                <a:spcAft>
+                  <a:spcPts val="0"/>
+                </a:spcAft>
+              </a:pPr>
+              <a:r>
+                <a:rPr sz="900">
+                  <a:solidFill>
+                    <a:srgbClr val="404040">
+                      <a:alpha val="100000"/>
+                    </a:srgbClr>
+                  </a:solidFill>
+                  <a:latin typeface="Helvetica"/>
+                  <a:cs typeface="Helvetica"/>
+                </a:rPr>
+                <a:t>subHR per 10 % decline: 1.22 (1.11-1.33), p_Bonf = &lt;0.001 (n = 6)  |  per IQR decline (Δ = 29.3 %): 1.77 (1.36-2.30)  |  IQR: [-14.6, 14.7] %</a:t>
+              </a:r>
+            </a:p>
+          </p:txBody>
+        </p:sp>
+        <p:sp>
+          <p:nvSpPr>
+            <p:cNvPr id="89" name="tx89"/>
+            <p:cNvSpPr/>
+            <p:nvPr/>
+          </p:nvSpPr>
+          <p:spPr>
+            <a:xfrm>
+              <a:off x="887106" y="3932770"/>
               <a:ext cx="1666676" cy="120152"/>
             </a:xfrm>
             <a:prstGeom prst="rect">
